--- a/downloads/presentations/modules/lesson-08-evaluation-of-generative-ai-outputs.pptx
+++ b/downloads/presentations/modules/lesson-08-evaluation-of-generative-ai-outputs.pptx
@@ -25,9 +25,11 @@
     <p:sldId id="273" r:id="rId19"/>
     <p:sldId id="274" r:id="rId20"/>
     <p:sldId id="275" r:id="rId21"/>
+    <p:sldId id="276" r:id="rId22"/>
+    <p:sldId id="277" r:id="rId23"/>
   </p:sldIdLst>
   <p:notesMasterIdLst>
-    <p:notesMasterId r:id="rId22"/>
+    <p:notesMasterId r:id="rId24"/>
   </p:notesMasterIdLst>
   <p:sldSz cx="12192000" cy="6858000"/>
   <p:notesSz cx="6858000" cy="12192000"/>
@@ -610,10 +612,10 @@
           <a:p>
             <a:r>
               <a:rPr lang="en-US" dirty="0"/>
-              <a:t>Risks, Failure Modes, and Guardrails
-Fluent but false outputs. A polished output may contain unsupported claims. Guardrails include source checking, citations, and reviewer signoff.
-Omitted caveats. AI may simplify uncertainty away. Guardrails include completeness review and required caveat checks.
-Inappropriate tone or accessibility. Outputs may be stigmatizing or inaccessible. Guardrails include plain language, equity, language access, and accessibility review.</a:t>
+              <a:t>Technical Deep Dive
+Generative AI evaluation should begin with intended use. A brainstormed outline, internal draft, public advisory, case summary, policy synthesis, or operational recommendation requires different levels of review. The more sensitive, public-facing, or consequential the use, the stronger the review should be.
+Factuality review requires comparison to source material. Reviewers should check names, dates, numbers, conditions, legal requirements, recommendations, and causal statements. They should also verify that the output does not add unsupported claims or remove important caveats. For RAG systems, reviewers should inspect whether citations actually support the claims they accompany.
+Completeness review asks whether the output includes the information needed for the task. A summary can be accurate but incomplete if it omits a critical exposure, eligibility criterion, limitation, or escalation instruction. Public health review should consider whether omitted information could change interpretation or action.</a:t>
             </a:r>
             <a:endParaRPr lang="en-US" dirty="0"/>
           </a:p>
@@ -701,8 +703,9 @@
           <a:p>
             <a:r>
               <a:rPr lang="en-US" dirty="0"/>
-              <a:t>Risks, Failure Modes, and Guardrails
-Privacy exposure. Prompts or outputs may include sensitive data. Guardrails include approved tools, data-use tiers, redaction, access controls, and records guidance.</a:t>
+              <a:t>Technical Deep Dive
+Equity and accessibility review should be included when outputs affect staff, partners, or the public. Reviewers should assess reading level, language access, disability accessibility, cultural context, stigma, blame, and whether the output addresses affected communities respectfully. Translation or multilingual adaptation should include review by qualified humans when used for public-facing or consequential communication.
+Documentation should be proportionate to risk. Low-risk drafting may require only human review before use. Higher-risk workflows may require saved prompts, source references, reviewer initials, revision history, approval records, and incident escalation procedures.</a:t>
             </a:r>
             <a:endParaRPr lang="en-US" dirty="0"/>
           </a:p>
@@ -790,9 +793,10 @@
           <a:p>
             <a:r>
               <a:rPr lang="en-US" dirty="0"/>
-              <a:t>Application to AI-Supported Workflows
-Generative AI output evaluation applies to drafting, summarization, classification, translation, code generation, and decision-support explanation. It is also relevant to RAG and agentic workflows because generated text may summarize retrieved sources or explain automated actions. Evaluation should be built into workflow design, not added after deployment.
-The strongest approach is to create rubrics for specific output types. A case summary rubric will differ from a public message rubric, and a policy synthesis rubric will differ from a code review rubric. Each rubric should define what reviewers must check, who approves final use, and how errors are documented.</a:t>
+              <a:t>Risks, Failure Modes, and Guardrails
+Fluent but false outputs. A polished output may contain unsupported claims. Guardrails include source checking, citations, and reviewer signoff.
+Omitted caveats. AI may simplify uncertainty away. Guardrails include completeness review and required caveat checks.
+Inappropriate tone or accessibility. Outputs may be stigmatizing or inaccessible. Guardrails include plain language, equity, language access, and accessibility review.</a:t>
             </a:r>
             <a:endParaRPr lang="en-US" dirty="0"/>
           </a:p>
@@ -880,10 +884,8 @@
           <a:p>
             <a:r>
               <a:rPr lang="en-US" dirty="0"/>
-              <a:t>Reflection Questions
-What type of generative AI output is being evaluated?
-What source material should be used to verify the output?
-What errors or omissions would be most harmful?</a:t>
+              <a:t>Risks, Failure Modes, and Guardrails
+Privacy exposure. Prompts or outputs may include sensitive data. Guardrails include approved tools, data-use tiers, redaction, access controls, and records guidance.</a:t>
             </a:r>
             <a:endParaRPr lang="en-US" dirty="0"/>
           </a:p>
@@ -971,9 +973,9 @@
           <a:p>
             <a:r>
               <a:rPr lang="en-US" dirty="0"/>
-              <a:t>Reflection Questions
-What review criteria are needed for equity, accessibility, language, and tone?
-What documentation is required before the output can be used?</a:t>
+              <a:t>Application to AI-Supported Workflows
+Generative AI output evaluation applies to drafting, summarization, classification, translation, code generation, and decision-support explanation. It is also relevant to RAG and agentic workflows because generated text may summarize retrieved sources or explain automated actions. Evaluation should be built into workflow design, not added after deployment.
+The strongest approach is to create rubrics for specific output types. A case summary rubric will differ from a public message rubric, and a policy synthesis rubric will differ from a code review rubric. Each rubric should define what reviewers must check, who approves final use, and how errors are documented.</a:t>
             </a:r>
             <a:endParaRPr lang="en-US" dirty="0"/>
           </a:p>
@@ -1061,9 +1063,10 @@
           <a:p>
             <a:r>
               <a:rPr lang="en-US" dirty="0"/>
-              <a:t>Practical Exercise
-Create a generative AI output evaluation rubric for one public health use case. Include intended use, source verification, factuality, completeness, unsupported claims, omissions, bias, tone, accessibility, privacy, approval requirements, and escalation criteria.
-Then apply the rubric to a sample AI-generated output and document whether the output should be accepted, edited, rejected, or escalated.</a:t>
+              <a:t>Reflection Questions
+What type of generative AI output is being evaluated?
+What source material should be used to verify the output?
+What errors or omissions would be most harmful?</a:t>
             </a:r>
             <a:endParaRPr lang="en-US" dirty="0"/>
           </a:p>
@@ -1151,10 +1154,9 @@
           <a:p>
             <a:r>
               <a:rPr lang="en-US" dirty="0"/>
-              <a:t>Expected Artifact or Evidence
-Generative AI output evaluation rubric
-Completed sample review
-Source verification notes</a:t>
+              <a:t>Reflection Questions
+What review criteria are needed for equity, accessibility, language, and tone?
+What documentation is required before the output can be used?</a:t>
             </a:r>
             <a:endParaRPr lang="en-US" dirty="0"/>
           </a:p>
@@ -1242,8 +1244,9 @@
           <a:p>
             <a:r>
               <a:rPr lang="en-US" dirty="0"/>
-              <a:t>Expected Artifact or Evidence
-Approval or escalation documentation</a:t>
+              <a:t>Practical Exercise
+Create a generative AI output evaluation rubric for one public health use case. Include intended use, source verification, factuality, completeness, unsupported claims, omissions, bias, tone, accessibility, privacy, approval requirements, and escalation criteria.
+Then apply the rubric to a sample AI-generated output and document whether the output should be accepted, edited, rejected, or escalated.</a:t>
             </a:r>
             <a:endParaRPr lang="en-US" dirty="0"/>
           </a:p>
@@ -1331,11 +1334,10 @@
           <a:p>
             <a:r>
               <a:rPr lang="en-US" dirty="0"/>
-              <a:t>Expected Assignment
+              <a:t>Expected Artifact or Evidence
 Generative AI output evaluation rubric
 Completed sample review
-Source verification notes
-Approval or escalation documentation</a:t>
+Source verification notes</a:t>
             </a:r>
             <a:endParaRPr lang="en-US" dirty="0"/>
           </a:p>
@@ -1423,12 +1425,8 @@
           <a:p>
             <a:r>
               <a:rPr lang="en-US" dirty="0"/>
-              <a:t>Knowledge Check
-1. Why is fluency not enough to trust a generative AI output?
-2. What does grounding mean?
-3. Which issue can be as harmful as an incorrect statement?
-4. What should a rubric define?
-5. Which output usually requires stronger review?</a:t>
+              <a:t>Expected Artifact or Evidence
+Approval or escalation documentation</a:t>
             </a:r>
             <a:endParaRPr lang="en-US" dirty="0"/>
           </a:p>
@@ -1608,11 +1606,11 @@
           <a:p>
             <a:r>
               <a:rPr lang="en-US" dirty="0"/>
-              <a:t>References and Resources
-NIST AI RMF Generative AI Profile: https://www.nist.gov/publications/artificial-intelligence-risk-management-framework-generative-artificial-intelligence
-NIST Artificial Intelligence Risk Management Framework: https://www.nist.gov/itl/ai-risk-management-framework
-OWASP Top 10 for Large Language Model Applications: https://owasp.org/www-project-top-10-for-large-language-model-applications/
-WHO Guidance on Large Multi-Modal Models: https://www.who.int/publications/i/item/9789240084759</a:t>
+              <a:t>Expected Assignment
+Generative AI output evaluation rubric
+Completed sample review
+Source verification notes
+Approval or escalation documentation</a:t>
             </a:r>
             <a:endParaRPr lang="en-US" dirty="0"/>
           </a:p>
@@ -1636,6 +1634,191 @@
             <a:fld id="{F7021451-1387-4CA6-816F-3879F97B5CBC}" type="slidenum">
               <a:rPr lang="en-US"/>
               <a:t>20</a:t>
+            </a:fld>
+            <a:endParaRPr lang="en-US"/>
+          </a:p>
+        </p:txBody>
+      </p:sp>
+    </p:spTree>
+    <p:extLst>
+      <p:ext uri="{BB962C8B-B14F-4D97-AF65-F5344CB8AC3E}">
+        <p14:creationId xmlns:p14="http://schemas.microsoft.com/office/powerpoint/2010/main" val="1024086991"/>
+      </p:ext>
+    </p:extLst>
+  </p:cSld>
+  <p:clrMapOvr>
+    <a:masterClrMapping/>
+  </p:clrMapOvr>
+</p:notes>
+</file>
+
+<file path=ppt/notesSlides/notesSlide21.xml><?xml version="1.0" encoding="utf-8"?>
+<p:notes xmlns:a="http://schemas.openxmlformats.org/drawingml/2006/main" xmlns:r="http://schemas.openxmlformats.org/officeDocument/2006/relationships" xmlns:p="http://schemas.openxmlformats.org/presentationml/2006/main">
+  <p:cSld>
+    <p:spTree>
+      <p:nvGrpSpPr>
+        <p:cNvPr id="1" name=""/>
+        <p:cNvGrpSpPr/>
+        <p:nvPr/>
+      </p:nvGrpSpPr>
+      <p:grpSpPr>
+        <a:xfrm>
+          <a:off x="0" y="0"/>
+          <a:ext cx="0" cy="0"/>
+          <a:chOff x="0" y="0"/>
+          <a:chExt cx="0" cy="0"/>
+        </a:xfrm>
+      </p:grpSpPr>
+      <p:sp>
+        <p:nvSpPr>
+          <p:cNvPr id="2" name="Slide Image Placeholder 1"/>
+          <p:cNvSpPr>
+            <a:spLocks noGrp="1" noRot="1" noChangeAspect="1"/>
+          </p:cNvSpPr>
+          <p:nvPr>
+            <p:ph type="sldImg"/>
+          </p:nvPr>
+        </p:nvSpPr>
+        <p:spPr/>
+      </p:sp>
+      <p:sp>
+        <p:nvSpPr>
+          <p:cNvPr id="3" name="Notes Placeholder 2"/>
+          <p:cNvSpPr>
+            <a:spLocks noGrp="1"/>
+          </p:cNvSpPr>
+          <p:nvPr>
+            <p:ph type="body" idx="1"/>
+          </p:nvPr>
+        </p:nvSpPr>
+        <p:spPr/>
+        <p:txBody>
+          <a:bodyPr/>
+          <a:lstStyle/>
+          <a:p>
+            <a:r>
+              <a:rPr lang="en-US" dirty="0"/>
+              <a:t>Knowledge Check
+1. Why is fluency not enough to trust a generative AI output?
+2. What does grounding mean?
+3. Which issue can be as harmful as an incorrect statement?
+4. What should a rubric define?
+5. Which output usually requires stronger review?</a:t>
+            </a:r>
+            <a:endParaRPr lang="en-US" dirty="0"/>
+          </a:p>
+        </p:txBody>
+      </p:sp>
+      <p:sp>
+        <p:nvSpPr>
+          <p:cNvPr id="4" name="Slide Number Placeholder 3"/>
+          <p:cNvSpPr>
+            <a:spLocks noGrp="1"/>
+          </p:cNvSpPr>
+          <p:nvPr>
+            <p:ph type="sldNum" sz="quarter" idx="10"/>
+          </p:nvPr>
+        </p:nvSpPr>
+        <p:spPr/>
+        <p:txBody>
+          <a:bodyPr/>
+          <a:lstStyle/>
+          <a:p>
+            <a:fld id="{F7021451-1387-4CA6-816F-3879F97B5CBC}" type="slidenum">
+              <a:rPr lang="en-US"/>
+              <a:t>21</a:t>
+            </a:fld>
+            <a:endParaRPr lang="en-US"/>
+          </a:p>
+        </p:txBody>
+      </p:sp>
+    </p:spTree>
+    <p:extLst>
+      <p:ext uri="{BB962C8B-B14F-4D97-AF65-F5344CB8AC3E}">
+        <p14:creationId xmlns:p14="http://schemas.microsoft.com/office/powerpoint/2010/main" val="1024086991"/>
+      </p:ext>
+    </p:extLst>
+  </p:cSld>
+  <p:clrMapOvr>
+    <a:masterClrMapping/>
+  </p:clrMapOvr>
+</p:notes>
+</file>
+
+<file path=ppt/notesSlides/notesSlide22.xml><?xml version="1.0" encoding="utf-8"?>
+<p:notes xmlns:a="http://schemas.openxmlformats.org/drawingml/2006/main" xmlns:r="http://schemas.openxmlformats.org/officeDocument/2006/relationships" xmlns:p="http://schemas.openxmlformats.org/presentationml/2006/main">
+  <p:cSld>
+    <p:spTree>
+      <p:nvGrpSpPr>
+        <p:cNvPr id="1" name=""/>
+        <p:cNvGrpSpPr/>
+        <p:nvPr/>
+      </p:nvGrpSpPr>
+      <p:grpSpPr>
+        <a:xfrm>
+          <a:off x="0" y="0"/>
+          <a:ext cx="0" cy="0"/>
+          <a:chOff x="0" y="0"/>
+          <a:chExt cx="0" cy="0"/>
+        </a:xfrm>
+      </p:grpSpPr>
+      <p:sp>
+        <p:nvSpPr>
+          <p:cNvPr id="2" name="Slide Image Placeholder 1"/>
+          <p:cNvSpPr>
+            <a:spLocks noGrp="1" noRot="1" noChangeAspect="1"/>
+          </p:cNvSpPr>
+          <p:nvPr>
+            <p:ph type="sldImg"/>
+          </p:nvPr>
+        </p:nvSpPr>
+        <p:spPr/>
+      </p:sp>
+      <p:sp>
+        <p:nvSpPr>
+          <p:cNvPr id="3" name="Notes Placeholder 2"/>
+          <p:cNvSpPr>
+            <a:spLocks noGrp="1"/>
+          </p:cNvSpPr>
+          <p:nvPr>
+            <p:ph type="body" idx="1"/>
+          </p:nvPr>
+        </p:nvSpPr>
+        <p:spPr/>
+        <p:txBody>
+          <a:bodyPr/>
+          <a:lstStyle/>
+          <a:p>
+            <a:r>
+              <a:rPr lang="en-US" dirty="0"/>
+              <a:t>References and Resources
+NIST AI RMF Generative AI Profile: https://www.nist.gov/publications/artificial-intelligence-risk-management-framework-generative-artificial-intelligence
+NIST Artificial Intelligence Risk Management Framework: https://www.nist.gov/itl/ai-risk-management-framework
+OWASP Top 10 for Large Language Model Applications: https://owasp.org/www-project-top-10-for-large-language-model-applications/
+WHO Guidance on Large Multi-Modal Models: https://www.who.int/publications/i/item/9789240084759</a:t>
+            </a:r>
+            <a:endParaRPr lang="en-US" dirty="0"/>
+          </a:p>
+        </p:txBody>
+      </p:sp>
+      <p:sp>
+        <p:nvSpPr>
+          <p:cNvPr id="4" name="Slide Number Placeholder 3"/>
+          <p:cNvSpPr>
+            <a:spLocks noGrp="1"/>
+          </p:cNvSpPr>
+          <p:nvPr>
+            <p:ph type="sldNum" sz="quarter" idx="10"/>
+          </p:nvPr>
+        </p:nvSpPr>
+        <p:spPr/>
+        <p:txBody>
+          <a:bodyPr/>
+          <a:lstStyle/>
+          <a:p>
+            <a:fld id="{F7021451-1387-4CA6-816F-3879F97B5CBC}" type="slidenum">
+              <a:rPr lang="en-US"/>
+              <a:t>22</a:t>
             </a:fld>
             <a:endParaRPr lang="en-US"/>
           </a:p>
@@ -1700,12 +1883,11 @@
           <a:p>
             <a:r>
               <a:rPr lang="en-US" dirty="0"/>
-              <a:t>Learning Objectives
-Explain why generative AI outputs require structured review before public health use.
-Distinguish factuality, source grounding, completeness, relevance, tone, and accessibility.
-Identify hallucinations, omissions, unsupported claims, and misleading certainty.
-Design review criteria for different output types, including summaries, drafts, classifications, and recommendations.
-Apply stronger review requirements for sensitive, public-facing, or consequential outputs.</a:t>
+              <a:t>Related Playbook Plays
+Play 4: Engage Stakeholders - This lesson informs Play 4 by helping learners connect the lesson topic to engage stakeholders work in the AI Playbook sequence.
+Play 7: Prioritize Use Cases - This lesson informs Play 7 by helping learners connect the lesson topic to prioritize use cases work in the AI Playbook sequence.
+Play 1: Vision &amp; Guardrails - This lesson informs Play 1 by helping learners connect the lesson topic to vision &amp; guardrails work in the AI Playbook sequence.
+Play 13: Monitor and Evaluate AI Systems - This lesson informs Play 13 by helping learners connect the lesson topic to monitor and evaluate ai systems work in the AI Playbook.</a:t>
             </a:r>
             <a:endParaRPr lang="en-US" dirty="0"/>
           </a:p>
@@ -1793,8 +1975,13 @@
           <a:p>
             <a:r>
               <a:rPr lang="en-US" dirty="0"/>
-              <a:t>Learning Objectives
-Produce a generative AI output evaluation rubric.</a:t>
+              <a:t>Related Toolkit Resources
+Tool 1: AI Vision &amp; Principles Workshop (Workshop) - Use this tool to complete or strengthen the practical exercise for the module using fictional, de-identified, or generalized.
+Tool 3: Equity Impact Assessment Checklist (Checklist) - Use this tool to complete or strengthen the practical exercise for the module using fictional, de-identified, or generalized.
+Tool 20: Community Engagement Planning (Planning) - Use Community Engagement Planning to translate this lesson into a documented public health AI planning, governance,.
+Tool 21: Stakeholder Mapping &amp; RACI (Template) - Use Stakeholder Mapping &amp; RACI to translate this lesson into a documented public health AI planning, governance, implementation,.
+Tool 22: Missing Voices Analysis (Checklist) - Use this tool to complete or strengthen the practical exercise for the module using fictional, de-identified, or generalized.
+Tool 47: Equity &amp; Disparity Impact Monitoring (Dashboard) - Use this tool to complete or strengthen the practical exercise for the module using fictional, de-identified, or generalized.</a:t>
             </a:r>
             <a:endParaRPr lang="en-US" dirty="0"/>
           </a:p>
@@ -1882,10 +2069,12 @@
           <a:p>
             <a:r>
               <a:rPr lang="en-US" dirty="0"/>
-              <a:t>Module Overview
-Generative AI can draft, summarize, translate, classify, explain, and synthesize information, but its outputs require careful evaluation. In public health, generated content may affect case review, public communication, policy interpretation, community trust, staff training, or leadership decisions. Fluent writing does not guarantee accuracy, completeness, appropriateness, or safety.
-This module teaches learners how to evaluate generative AI outputs using structured review criteria. The module emphasizes factuality, source grounding, omissions, unsupported claims, bias, privacy, tone, accessibility, language quality, and fitness for intended use. Learners will distinguish low-risk drafting support from outputs that require stronger review because they could affect public health action.
-By the end of the module, learners should be able to create and apply an evaluation rubric for generative AI outputs in a public health workflow.</a:t>
+              <a:t>Learning Objectives
+Explain why generative AI outputs require structured review before public health use.
+Distinguish factuality, source grounding, completeness, relevance, tone, and accessibility.
+Identify hallucinations, omissions, unsupported claims, and misleading certainty.
+Design review criteria for different output types, including summaries, drafts, classifications, and recommendations.
+Apply stronger review requirements for sensitive, public-facing, or consequential outputs.</a:t>
             </a:r>
             <a:endParaRPr lang="en-US" dirty="0"/>
           </a:p>
@@ -1973,10 +2162,8 @@
           <a:p>
             <a:r>
               <a:rPr lang="en-US" dirty="0"/>
-              <a:t>Why This Topic Matters for Public Health AI
-Generative AI matters for public health because it can reduce burden in text-heavy workflows. Staff may use it to summarize guidance, draft meeting notes, simplify technical language, translate or adapt messages, organize case information, or synthesize stakeholder feedback. These uses can be valuable when they save time and improve clarity.
-The same capabilities create risk. Generative AI can invent facts, omit caveats, misstate guidance, flatten uncertainty, or produce language that sounds more definitive than the evidence supports. It may introduce bias, inappropriate tone, or inaccessible wording. When sensitive data are involved, prompting and output handling can also create privacy and records concerns.
-Public health agencies need structured evaluation because informal review is inconsistent. A reviewer may notice grammar errors but miss unsupported claims. Another may trust a polished summary without checking source documents. A rubric helps reviewers evaluate outputs against the purpose, source material, audience, and safeguards required for the use case.</a:t>
+              <a:t>Learning Objectives
+Produce a generative AI output evaluation rubric.</a:t>
             </a:r>
             <a:endParaRPr lang="en-US" dirty="0"/>
           </a:p>
@@ -2064,9 +2251,10 @@
           <a:p>
             <a:r>
               <a:rPr lang="en-US" dirty="0"/>
-              <a:t>Public Health Example
-A communications team may use generative AI to draft a plain-language public message about a local respiratory illness increase. The draft may be clear and readable, but reviewers must check whether the numbers are correct, whether the recommendations match current guidance, whether uncertainty is represented accurately, and whether the message is accessible in multiple languages.
-An epidemiology team may use generative AI to summarize case investigation notes for internal review. The summary must be checked against source notes because a missed exposure, incorrect date, or invented symptom could affect follow-up. The team should document whether the summary was accepted, edited, or rejected.</a:t>
+              <a:t>Module Overview
+Generative AI can draft, summarize, translate, classify, explain, and synthesize information, but its outputs require careful evaluation. In public health, generated content may affect case review, public communication, policy interpretation, community trust, staff training, or leadership decisions. Fluent writing does not guarantee accuracy, completeness, appropriateness, or safety.
+This module teaches learners how to evaluate generative AI outputs using structured review criteria. The module emphasizes factuality, source grounding, omissions, unsupported claims, bias, privacy, tone, accessibility, language quality, and fitness for intended use. Learners will distinguish low-risk drafting support from outputs that require stronger review because they could affect public health action.
+By the end of the module, learners should be able to create and apply an evaluation rubric for generative AI outputs in a public health workflow.</a:t>
             </a:r>
             <a:endParaRPr lang="en-US" dirty="0"/>
           </a:p>
@@ -2154,10 +2342,10 @@
           <a:p>
             <a:r>
               <a:rPr lang="en-US" dirty="0"/>
-              <a:t>Technical Deep Dive
-Generative AI evaluation should begin with intended use. A brainstormed outline, internal draft, public advisory, case summary, policy synthesis, or operational recommendation requires different levels of review. The more sensitive, public-facing, or consequential the use, the stronger the review should be.
-Factuality review requires comparison to source material. Reviewers should check names, dates, numbers, conditions, legal requirements, recommendations, and causal statements. They should also verify that the output does not add unsupported claims or remove important caveats. For RAG systems, reviewers should inspect whether citations actually support the claims they accompany.
-Completeness review asks whether the output includes the information needed for the task. A summary can be accurate but incomplete if it omits a critical exposure, eligibility criterion, limitation, or escalation instruction. Public health review should consider whether omitted information could change interpretation or action.</a:t>
+              <a:t>Why This Topic Matters for Public Health AI
+Generative AI matters for public health because it can reduce burden in text-heavy workflows. Staff may use it to summarize guidance, draft meeting notes, simplify technical language, translate or adapt messages, organize case information, or synthesize stakeholder feedback. These uses can be valuable when they save time and improve clarity.
+The same capabilities create risk. Generative AI can invent facts, omit caveats, misstate guidance, flatten uncertainty, or produce language that sounds more definitive than the evidence supports. It may introduce bias, inappropriate tone, or inaccessible wording. When sensitive data are involved, prompting and output handling can also create privacy and records concerns.
+Public health agencies need structured evaluation because informal review is inconsistent. A reviewer may notice grammar errors but miss unsupported claims. Another may trust a polished summary without checking source documents. A rubric helps reviewers evaluate outputs against the purpose, source material, audience, and safeguards required for the use case.</a:t>
             </a:r>
             <a:endParaRPr lang="en-US" dirty="0"/>
           </a:p>
@@ -2245,9 +2433,9 @@
           <a:p>
             <a:r>
               <a:rPr lang="en-US" dirty="0"/>
-              <a:t>Technical Deep Dive
-Equity and accessibility review should be included when outputs affect staff, partners, or the public. Reviewers should assess reading level, language access, disability accessibility, cultural context, stigma, blame, and whether the output addresses affected communities respectfully. Translation or multilingual adaptation should include review by qualified humans when used for public-facing or consequential communication.
-Documentation should be proportionate to risk. Low-risk drafting may require only human review before use. Higher-risk workflows may require saved prompts, source references, reviewer initials, revision history, approval records, and incident escalation procedures.</a:t>
+              <a:t>Public Health Example
+A communications team may use generative AI to draft a plain-language public message about a local respiratory illness increase. The draft may be clear and readable, but reviewers must check whether the numbers are correct, whether the recommendations match current guidance, whether uncertainty is represented accurately, and whether the message is accessible in multiple languages.
+An epidemiology team may use generative AI to summarize case investigation notes for internal review. The summary must be checked against source notes because a missed exposure, incorrect date, or invented symptom could affect follow-up. The team should document whether the summary was accepted, edited, or rejected.</a:t>
             </a:r>
             <a:endParaRPr lang="en-US" dirty="0"/>
           </a:p>
@@ -2870,7 +3058,32 @@
       </p:sp>
       <p:sp>
         <p:nvSpPr>
-          <p:cNvPr id="3" name="Text 1"/>
+          <p:cNvPr id="3" name="Shape 1"/>
+          <p:cNvSpPr/>
+          <p:nvPr/>
+        </p:nvSpPr>
+        <p:spPr>
+          <a:xfrm>
+            <a:off x="0" y="164592"/>
+            <a:ext cx="146304" cy="6693408"/>
+          </a:xfrm>
+          <a:prstGeom prst="rect">
+            <a:avLst/>
+          </a:prstGeom>
+          <a:solidFill>
+            <a:srgbClr val="2F8A28"/>
+          </a:solidFill>
+          <a:ln w="12700">
+            <a:solidFill>
+              <a:srgbClr val="2F8A28"/>
+            </a:solidFill>
+            <a:prstDash val="solid"/>
+          </a:ln>
+        </p:spPr>
+      </p:sp>
+      <p:sp>
+        <p:nvSpPr>
+          <p:cNvPr id="4" name="Text 2"/>
           <p:cNvSpPr/>
           <p:nvPr/>
         </p:nvSpPr>
@@ -2909,7 +3122,7 @@
       </p:sp>
       <p:sp>
         <p:nvSpPr>
-          <p:cNvPr id="4" name="Text 2"/>
+          <p:cNvPr id="5" name="Text 3"/>
           <p:cNvSpPr/>
           <p:nvPr/>
         </p:nvSpPr>
@@ -2948,7 +3161,7 @@
       </p:sp>
       <p:sp>
         <p:nvSpPr>
-          <p:cNvPr id="5" name="Text 3"/>
+          <p:cNvPr id="6" name="Text 4"/>
           <p:cNvSpPr/>
           <p:nvPr/>
         </p:nvSpPr>
@@ -2987,13 +3200,77 @@
       </p:sp>
       <p:sp>
         <p:nvSpPr>
-          <p:cNvPr id="6" name="Text 4"/>
+          <p:cNvPr id="7" name="Shape 5"/>
           <p:cNvSpPr/>
           <p:nvPr/>
         </p:nvSpPr>
         <p:spPr>
           <a:xfrm>
             <a:off x="640080" y="658368"/>
+            <a:ext cx="420624" cy="420624"/>
+          </a:xfrm>
+          <a:prstGeom prst="ellipse">
+            <a:avLst/>
+          </a:prstGeom>
+          <a:solidFill>
+            <a:srgbClr val="0068B7"/>
+          </a:solidFill>
+          <a:ln w="12700">
+            <a:solidFill>
+              <a:srgbClr val="0068B7"/>
+            </a:solidFill>
+            <a:prstDash val="solid"/>
+          </a:ln>
+        </p:spPr>
+      </p:sp>
+      <p:sp>
+        <p:nvSpPr>
+          <p:cNvPr id="8" name="Text 6"/>
+          <p:cNvSpPr/>
+          <p:nvPr/>
+        </p:nvSpPr>
+        <p:spPr>
+          <a:xfrm>
+            <a:off x="640080" y="731520"/>
+            <a:ext cx="420624" cy="164592"/>
+          </a:xfrm>
+          <a:prstGeom prst="rect">
+            <a:avLst/>
+          </a:prstGeom>
+          <a:noFill/>
+          <a:ln/>
+        </p:spPr>
+        <p:txBody>
+          <a:bodyPr wrap="square" lIns="0" tIns="0" rIns="0" bIns="0" rtlCol="0" anchor="ctr"/>
+          <a:lstStyle/>
+          <a:p>
+            <a:pPr algn="ctr" indent="0" marL="0">
+              <a:buNone/>
+            </a:pPr>
+            <a:r>
+              <a:rPr lang="en-US" sz="1100" b="1" dirty="0">
+                <a:solidFill>
+                  <a:srgbClr val="FFFFFF"/>
+                </a:solidFill>
+                <a:latin typeface="Aptos" pitchFamily="34" charset="0"/>
+                <a:ea typeface="Aptos" pitchFamily="34" charset="-122"/>
+                <a:cs typeface="Aptos" pitchFamily="34" charset="-120"/>
+              </a:rPr>
+              <a:t>5</a:t>
+            </a:r>
+            <a:endParaRPr lang="en-US" sz="1100" dirty="0"/>
+          </a:p>
+        </p:txBody>
+      </p:sp>
+      <p:sp>
+        <p:nvSpPr>
+          <p:cNvPr id="9" name="Text 7"/>
+          <p:cNvSpPr/>
+          <p:nvPr/>
+        </p:nvSpPr>
+        <p:spPr>
+          <a:xfrm>
+            <a:off x="640080" y="621792"/>
             <a:ext cx="10881360" cy="566928"/>
           </a:xfrm>
           <a:prstGeom prst="rect">
@@ -3020,7 +3297,7 @@
                 <a:ea typeface="Aptos Display" pitchFamily="34" charset="-122"/>
                 <a:cs typeface="Aptos Display" pitchFamily="34" charset="-120"/>
               </a:rPr>
-              <a:t>Risks, Failure Modes, and Guardrails</a:t>
+              <a:t>Technical Deep Dive</a:t>
             </a:r>
             <a:endParaRPr lang="en-US" sz="2700" dirty="0"/>
           </a:p>
@@ -3028,32 +3305,178 @@
       </p:sp>
       <p:sp>
         <p:nvSpPr>
-          <p:cNvPr id="7" name="Text 5"/>
-          <p:cNvSpPr/>
-          <p:nvPr/>
-        </p:nvSpPr>
-        <p:spPr>
-          <a:xfrm>
-            <a:off x="822960" y="1325880"/>
-            <a:ext cx="10378440" cy="4800600"/>
-          </a:xfrm>
-          <a:prstGeom prst="rect">
-            <a:avLst/>
-          </a:prstGeom>
-          <a:noFill/>
-          <a:ln/>
-        </p:spPr>
-        <p:txBody>
-          <a:bodyPr wrap="square" lIns="1016" tIns="1016" rIns="1016" bIns="1016" rtlCol="0" anchor="t">
+          <p:cNvPr id="10" name="Text 8"/>
+          <p:cNvSpPr/>
+          <p:nvPr/>
+        </p:nvSpPr>
+        <p:spPr>
+          <a:xfrm>
+            <a:off x="868680" y="1417320"/>
+            <a:ext cx="6675120" cy="4434840"/>
+          </a:xfrm>
+          <a:prstGeom prst="rect">
+            <a:avLst/>
+          </a:prstGeom>
+          <a:noFill/>
+          <a:ln/>
+        </p:spPr>
+        <p:txBody>
+          <a:bodyPr wrap="square" lIns="635" tIns="635" rIns="635" bIns="635" rtlCol="0" anchor="t">
             <a:normAutofit/>
           </a:bodyPr>
           <a:lstStyle/>
           <a:p>
+            <a:r>
+              <a:rPr lang="en-US" sz="1700" dirty="0">
+                <a:solidFill>
+                  <a:srgbClr val="17364A"/>
+                </a:solidFill>
+                <a:latin typeface="Aptos" pitchFamily="34" charset="0"/>
+                <a:ea typeface="Aptos" pitchFamily="34" charset="-122"/>
+                <a:cs typeface="Aptos" pitchFamily="34" charset="-120"/>
+              </a:rPr>
+              <a:t>Generative AI evaluation should begin with intended use.</a:t>
+            </a:r>
+            <a:endParaRPr lang="en-US" sz="1700" dirty="0"/>
+          </a:p>
+          <a:p>
+            <a:r>
+              <a:rPr lang="en-US" sz="1700" dirty="0">
+                <a:solidFill>
+                  <a:srgbClr val="17364A"/>
+                </a:solidFill>
+                <a:latin typeface="Aptos" pitchFamily="34" charset="0"/>
+                <a:ea typeface="Aptos" pitchFamily="34" charset="-122"/>
+                <a:cs typeface="Aptos" pitchFamily="34" charset="-120"/>
+              </a:rPr>
+              <a:t>A brainstormed outline, internal draft, public advisory, case summary, policy synthesis, or operational recommendation.</a:t>
+            </a:r>
+            <a:endParaRPr lang="en-US" sz="1700" dirty="0"/>
+          </a:p>
+          <a:p>
+            <a:r>
+              <a:rPr lang="en-US" sz="1700" dirty="0">
+                <a:solidFill>
+                  <a:srgbClr val="17364A"/>
+                </a:solidFill>
+                <a:latin typeface="Aptos" pitchFamily="34" charset="0"/>
+                <a:ea typeface="Aptos" pitchFamily="34" charset="-122"/>
+                <a:cs typeface="Aptos" pitchFamily="34" charset="-120"/>
+              </a:rPr>
+              <a:t>The more sensitive, public-facing, or consequential the use, the stronger the review should be.</a:t>
+            </a:r>
+            <a:endParaRPr lang="en-US" sz="1700" dirty="0"/>
+          </a:p>
+          <a:p>
+            <a:r>
+              <a:rPr lang="en-US" sz="1700" dirty="0">
+                <a:solidFill>
+                  <a:srgbClr val="17364A"/>
+                </a:solidFill>
+                <a:latin typeface="Aptos" pitchFamily="34" charset="0"/>
+                <a:ea typeface="Aptos" pitchFamily="34" charset="-122"/>
+                <a:cs typeface="Aptos" pitchFamily="34" charset="-120"/>
+              </a:rPr>
+              <a:t>Factuality review requires comparison to source material.</a:t>
+            </a:r>
+            <a:endParaRPr lang="en-US" sz="1700" dirty="0"/>
+          </a:p>
+        </p:txBody>
+      </p:sp>
+      <p:sp>
+        <p:nvSpPr>
+          <p:cNvPr id="11" name="Shape 9"/>
+          <p:cNvSpPr/>
+          <p:nvPr/>
+        </p:nvSpPr>
+        <p:spPr>
+          <a:xfrm>
+            <a:off x="7909560" y="1417320"/>
+            <a:ext cx="3154680" cy="1828800"/>
+          </a:xfrm>
+          <a:prstGeom prst="roundRect">
+            <a:avLst>
+              <a:gd name="adj" fmla="val 6000"/>
+            </a:avLst>
+          </a:prstGeom>
+          <a:solidFill>
+            <a:srgbClr val="EEF8ED"/>
+          </a:solidFill>
+          <a:ln w="12700">
+            <a:solidFill>
+              <a:srgbClr val="B9D7E6"/>
+            </a:solidFill>
+            <a:prstDash val="solid"/>
+          </a:ln>
+        </p:spPr>
+      </p:sp>
+      <p:sp>
+        <p:nvSpPr>
+          <p:cNvPr id="12" name="Text 10"/>
+          <p:cNvSpPr/>
+          <p:nvPr/>
+        </p:nvSpPr>
+        <p:spPr>
+          <a:xfrm>
+            <a:off x="8074152" y="1563624"/>
+            <a:ext cx="2825496" cy="201168"/>
+          </a:xfrm>
+          <a:prstGeom prst="rect">
+            <a:avLst/>
+          </a:prstGeom>
+          <a:noFill/>
+          <a:ln/>
+        </p:spPr>
+        <p:txBody>
+          <a:bodyPr wrap="square" lIns="0" tIns="0" rIns="0" bIns="0" rtlCol="0" anchor="ctr"/>
+          <a:lstStyle/>
+          <a:p>
             <a:pPr indent="0" marL="0">
               <a:buNone/>
             </a:pPr>
             <a:r>
-              <a:rPr lang="en-US" sz="1420" dirty="0">
+              <a:rPr lang="en-US" sz="950" b="1" dirty="0">
+                <a:solidFill>
+                  <a:srgbClr val="0068B7"/>
+                </a:solidFill>
+                <a:latin typeface="Aptos" pitchFamily="34" charset="0"/>
+                <a:ea typeface="Aptos" pitchFamily="34" charset="-122"/>
+                <a:cs typeface="Aptos" pitchFamily="34" charset="-120"/>
+              </a:rPr>
+              <a:t>Key idea</a:t>
+            </a:r>
+            <a:endParaRPr lang="en-US" sz="950" dirty="0"/>
+          </a:p>
+        </p:txBody>
+      </p:sp>
+      <p:sp>
+        <p:nvSpPr>
+          <p:cNvPr id="13" name="Text 11"/>
+          <p:cNvSpPr/>
+          <p:nvPr/>
+        </p:nvSpPr>
+        <p:spPr>
+          <a:xfrm>
+            <a:off x="8074152" y="1856232"/>
+            <a:ext cx="2825496" cy="1261872"/>
+          </a:xfrm>
+          <a:prstGeom prst="rect">
+            <a:avLst/>
+          </a:prstGeom>
+          <a:noFill/>
+          <a:ln/>
+        </p:spPr>
+        <p:txBody>
+          <a:bodyPr wrap="square" lIns="0" tIns="0" rIns="0" bIns="0" rtlCol="0" anchor="t">
+            <a:normAutofit/>
+          </a:bodyPr>
+          <a:lstStyle/>
+          <a:p>
+            <a:pPr indent="0" marL="0">
+              <a:buNone/>
+            </a:pPr>
+            <a:r>
+              <a:rPr lang="en-US" sz="1250" dirty="0">
                 <a:solidFill>
                   <a:srgbClr val="17364A"/>
                 </a:solidFill>
@@ -3061,9 +3484,116 @@
                 <a:ea typeface="Aptos" pitchFamily="34" charset="-122"/>
                 <a:cs typeface="Aptos" pitchFamily="34" charset="-120"/>
               </a:rPr>
-              <a:t>Fluent but false outputs. A polished output may contain unsupported claims. Guardrails include source checking, citations, and reviewer signoff. Omitted caveats. AI may simplify uncertainty away. Guardrails include completeness review and required caveat checks. Inappropriate tone or accessibility. Outputs may be stigmatizing or inaccessible. Guardrails include plain language, equity, language access, and accessibility review.</a:t>
-            </a:r>
-            <a:endParaRPr lang="en-US" sz="1420" dirty="0"/>
+              <a:t>Generative AI evaluation should begin with intended use.</a:t>
+            </a:r>
+            <a:endParaRPr lang="en-US" sz="1250" dirty="0"/>
+          </a:p>
+        </p:txBody>
+      </p:sp>
+      <p:sp>
+        <p:nvSpPr>
+          <p:cNvPr id="14" name="Shape 12"/>
+          <p:cNvSpPr/>
+          <p:nvPr/>
+        </p:nvSpPr>
+        <p:spPr>
+          <a:xfrm>
+            <a:off x="7909560" y="3520440"/>
+            <a:ext cx="3154680" cy="1737360"/>
+          </a:xfrm>
+          <a:prstGeom prst="roundRect">
+            <a:avLst>
+              <a:gd name="adj" fmla="val 6316"/>
+            </a:avLst>
+          </a:prstGeom>
+          <a:solidFill>
+            <a:srgbClr val="EAF6F8"/>
+          </a:solidFill>
+          <a:ln w="12700">
+            <a:solidFill>
+              <a:srgbClr val="B9D7E6"/>
+            </a:solidFill>
+            <a:prstDash val="solid"/>
+          </a:ln>
+        </p:spPr>
+      </p:sp>
+      <p:sp>
+        <p:nvSpPr>
+          <p:cNvPr id="15" name="Text 13"/>
+          <p:cNvSpPr/>
+          <p:nvPr/>
+        </p:nvSpPr>
+        <p:spPr>
+          <a:xfrm>
+            <a:off x="8074152" y="3666744"/>
+            <a:ext cx="2825496" cy="201168"/>
+          </a:xfrm>
+          <a:prstGeom prst="rect">
+            <a:avLst/>
+          </a:prstGeom>
+          <a:noFill/>
+          <a:ln/>
+        </p:spPr>
+        <p:txBody>
+          <a:bodyPr wrap="square" lIns="0" tIns="0" rIns="0" bIns="0" rtlCol="0" anchor="ctr"/>
+          <a:lstStyle/>
+          <a:p>
+            <a:pPr indent="0" marL="0">
+              <a:buNone/>
+            </a:pPr>
+            <a:r>
+              <a:rPr lang="en-US" sz="950" b="1" dirty="0">
+                <a:solidFill>
+                  <a:srgbClr val="0068B7"/>
+                </a:solidFill>
+                <a:latin typeface="Aptos" pitchFamily="34" charset="0"/>
+                <a:ea typeface="Aptos" pitchFamily="34" charset="-122"/>
+                <a:cs typeface="Aptos" pitchFamily="34" charset="-120"/>
+              </a:rPr>
+              <a:t>Use this for</a:t>
+            </a:r>
+            <a:endParaRPr lang="en-US" sz="950" dirty="0"/>
+          </a:p>
+        </p:txBody>
+      </p:sp>
+      <p:sp>
+        <p:nvSpPr>
+          <p:cNvPr id="16" name="Text 14"/>
+          <p:cNvSpPr/>
+          <p:nvPr/>
+        </p:nvSpPr>
+        <p:spPr>
+          <a:xfrm>
+            <a:off x="8074152" y="3959352"/>
+            <a:ext cx="2825496" cy="1170432"/>
+          </a:xfrm>
+          <a:prstGeom prst="rect">
+            <a:avLst/>
+          </a:prstGeom>
+          <a:noFill/>
+          <a:ln/>
+        </p:spPr>
+        <p:txBody>
+          <a:bodyPr wrap="square" lIns="0" tIns="0" rIns="0" bIns="0" rtlCol="0" anchor="t">
+            <a:normAutofit/>
+          </a:bodyPr>
+          <a:lstStyle/>
+          <a:p>
+            <a:pPr indent="0" marL="0">
+              <a:buNone/>
+            </a:pPr>
+            <a:r>
+              <a:rPr lang="en-US" sz="1250" dirty="0">
+                <a:solidFill>
+                  <a:srgbClr val="17364A"/>
+                </a:solidFill>
+                <a:latin typeface="Aptos" pitchFamily="34" charset="0"/>
+                <a:ea typeface="Aptos" pitchFamily="34" charset="-122"/>
+                <a:cs typeface="Aptos" pitchFamily="34" charset="-120"/>
+              </a:rPr>
+              <a:t>Connect the concept to public health decisions, safeguards, documentation, or implementation work.</a:t>
+            </a:r>
+            <a:endParaRPr lang="en-US" sz="1250" dirty="0"/>
           </a:p>
         </p:txBody>
       </p:sp>
@@ -3126,7 +3656,32 @@
       </p:sp>
       <p:sp>
         <p:nvSpPr>
-          <p:cNvPr id="3" name="Text 1"/>
+          <p:cNvPr id="3" name="Shape 1"/>
+          <p:cNvSpPr/>
+          <p:nvPr/>
+        </p:nvSpPr>
+        <p:spPr>
+          <a:xfrm>
+            <a:off x="0" y="164592"/>
+            <a:ext cx="146304" cy="6693408"/>
+          </a:xfrm>
+          <a:prstGeom prst="rect">
+            <a:avLst/>
+          </a:prstGeom>
+          <a:solidFill>
+            <a:srgbClr val="2F8A28"/>
+          </a:solidFill>
+          <a:ln w="12700">
+            <a:solidFill>
+              <a:srgbClr val="2F8A28"/>
+            </a:solidFill>
+            <a:prstDash val="solid"/>
+          </a:ln>
+        </p:spPr>
+      </p:sp>
+      <p:sp>
+        <p:nvSpPr>
+          <p:cNvPr id="4" name="Text 2"/>
           <p:cNvSpPr/>
           <p:nvPr/>
         </p:nvSpPr>
@@ -3165,7 +3720,7 @@
       </p:sp>
       <p:sp>
         <p:nvSpPr>
-          <p:cNvPr id="4" name="Text 2"/>
+          <p:cNvPr id="5" name="Text 3"/>
           <p:cNvSpPr/>
           <p:nvPr/>
         </p:nvSpPr>
@@ -3204,7 +3759,7 @@
       </p:sp>
       <p:sp>
         <p:nvSpPr>
-          <p:cNvPr id="5" name="Text 3"/>
+          <p:cNvPr id="6" name="Text 4"/>
           <p:cNvSpPr/>
           <p:nvPr/>
         </p:nvSpPr>
@@ -3243,7 +3798,7 @@
       </p:sp>
       <p:sp>
         <p:nvSpPr>
-          <p:cNvPr id="6" name="Text 4"/>
+          <p:cNvPr id="7" name="Text 5"/>
           <p:cNvSpPr/>
           <p:nvPr/>
         </p:nvSpPr>
@@ -3276,7 +3831,7 @@
                 <a:ea typeface="Aptos Display" pitchFamily="34" charset="-122"/>
                 <a:cs typeface="Aptos Display" pitchFamily="34" charset="-120"/>
               </a:rPr>
-              <a:t>Risks, Failure Modes, and Guardrails Continued</a:t>
+              <a:t>Technical Deep Dive Continued</a:t>
             </a:r>
             <a:endParaRPr lang="en-US" sz="2700" dirty="0"/>
           </a:p>
@@ -3284,32 +3839,178 @@
       </p:sp>
       <p:sp>
         <p:nvSpPr>
-          <p:cNvPr id="7" name="Text 5"/>
-          <p:cNvSpPr/>
-          <p:nvPr/>
-        </p:nvSpPr>
-        <p:spPr>
-          <a:xfrm>
-            <a:off x="822960" y="1325880"/>
-            <a:ext cx="10378440" cy="4800600"/>
-          </a:xfrm>
-          <a:prstGeom prst="rect">
-            <a:avLst/>
-          </a:prstGeom>
-          <a:noFill/>
-          <a:ln/>
-        </p:spPr>
-        <p:txBody>
-          <a:bodyPr wrap="square" lIns="1016" tIns="1016" rIns="1016" bIns="1016" rtlCol="0" anchor="t">
+          <p:cNvPr id="8" name="Text 6"/>
+          <p:cNvSpPr/>
+          <p:nvPr/>
+        </p:nvSpPr>
+        <p:spPr>
+          <a:xfrm>
+            <a:off x="868680" y="1417320"/>
+            <a:ext cx="6675120" cy="4434840"/>
+          </a:xfrm>
+          <a:prstGeom prst="rect">
+            <a:avLst/>
+          </a:prstGeom>
+          <a:noFill/>
+          <a:ln/>
+        </p:spPr>
+        <p:txBody>
+          <a:bodyPr wrap="square" lIns="635" tIns="635" rIns="635" bIns="635" rtlCol="0" anchor="t">
             <a:normAutofit/>
           </a:bodyPr>
           <a:lstStyle/>
           <a:p>
+            <a:r>
+              <a:rPr lang="en-US" sz="1700" dirty="0">
+                <a:solidFill>
+                  <a:srgbClr val="17364A"/>
+                </a:solidFill>
+                <a:latin typeface="Aptos" pitchFamily="34" charset="0"/>
+                <a:ea typeface="Aptos" pitchFamily="34" charset="-122"/>
+                <a:cs typeface="Aptos" pitchFamily="34" charset="-120"/>
+              </a:rPr>
+              <a:t>Equity and accessibility review should be included when outputs affect staff, partners, or the public.</a:t>
+            </a:r>
+            <a:endParaRPr lang="en-US" sz="1700" dirty="0"/>
+          </a:p>
+          <a:p>
+            <a:r>
+              <a:rPr lang="en-US" sz="1700" dirty="0">
+                <a:solidFill>
+                  <a:srgbClr val="17364A"/>
+                </a:solidFill>
+                <a:latin typeface="Aptos" pitchFamily="34" charset="0"/>
+                <a:ea typeface="Aptos" pitchFamily="34" charset="-122"/>
+                <a:cs typeface="Aptos" pitchFamily="34" charset="-120"/>
+              </a:rPr>
+              <a:t>Reviewers should assess reading level, language access, disability accessibility, cultural context, stigma, blame, and.</a:t>
+            </a:r>
+            <a:endParaRPr lang="en-US" sz="1700" dirty="0"/>
+          </a:p>
+          <a:p>
+            <a:r>
+              <a:rPr lang="en-US" sz="1700" dirty="0">
+                <a:solidFill>
+                  <a:srgbClr val="17364A"/>
+                </a:solidFill>
+                <a:latin typeface="Aptos" pitchFamily="34" charset="0"/>
+                <a:ea typeface="Aptos" pitchFamily="34" charset="-122"/>
+                <a:cs typeface="Aptos" pitchFamily="34" charset="-120"/>
+              </a:rPr>
+              <a:t>Translation or multilingual adaptation should include review by qualified humans when used for public-facing or.</a:t>
+            </a:r>
+            <a:endParaRPr lang="en-US" sz="1700" dirty="0"/>
+          </a:p>
+          <a:p>
+            <a:r>
+              <a:rPr lang="en-US" sz="1700" dirty="0">
+                <a:solidFill>
+                  <a:srgbClr val="17364A"/>
+                </a:solidFill>
+                <a:latin typeface="Aptos" pitchFamily="34" charset="0"/>
+                <a:ea typeface="Aptos" pitchFamily="34" charset="-122"/>
+                <a:cs typeface="Aptos" pitchFamily="34" charset="-120"/>
+              </a:rPr>
+              <a:t>Documentation should be proportionate to risk.</a:t>
+            </a:r>
+            <a:endParaRPr lang="en-US" sz="1700" dirty="0"/>
+          </a:p>
+        </p:txBody>
+      </p:sp>
+      <p:sp>
+        <p:nvSpPr>
+          <p:cNvPr id="9" name="Shape 7"/>
+          <p:cNvSpPr/>
+          <p:nvPr/>
+        </p:nvSpPr>
+        <p:spPr>
+          <a:xfrm>
+            <a:off x="7909560" y="1417320"/>
+            <a:ext cx="3154680" cy="1828800"/>
+          </a:xfrm>
+          <a:prstGeom prst="roundRect">
+            <a:avLst>
+              <a:gd name="adj" fmla="val 6000"/>
+            </a:avLst>
+          </a:prstGeom>
+          <a:solidFill>
+            <a:srgbClr val="EEF8ED"/>
+          </a:solidFill>
+          <a:ln w="12700">
+            <a:solidFill>
+              <a:srgbClr val="B9D7E6"/>
+            </a:solidFill>
+            <a:prstDash val="solid"/>
+          </a:ln>
+        </p:spPr>
+      </p:sp>
+      <p:sp>
+        <p:nvSpPr>
+          <p:cNvPr id="10" name="Text 8"/>
+          <p:cNvSpPr/>
+          <p:nvPr/>
+        </p:nvSpPr>
+        <p:spPr>
+          <a:xfrm>
+            <a:off x="8074152" y="1563624"/>
+            <a:ext cx="2825496" cy="201168"/>
+          </a:xfrm>
+          <a:prstGeom prst="rect">
+            <a:avLst/>
+          </a:prstGeom>
+          <a:noFill/>
+          <a:ln/>
+        </p:spPr>
+        <p:txBody>
+          <a:bodyPr wrap="square" lIns="0" tIns="0" rIns="0" bIns="0" rtlCol="0" anchor="ctr"/>
+          <a:lstStyle/>
+          <a:p>
             <a:pPr indent="0" marL="0">
               <a:buNone/>
             </a:pPr>
             <a:r>
-              <a:rPr lang="en-US" sz="1420" dirty="0">
+              <a:rPr lang="en-US" sz="950" b="1" dirty="0">
+                <a:solidFill>
+                  <a:srgbClr val="0068B7"/>
+                </a:solidFill>
+                <a:latin typeface="Aptos" pitchFamily="34" charset="0"/>
+                <a:ea typeface="Aptos" pitchFamily="34" charset="-122"/>
+                <a:cs typeface="Aptos" pitchFamily="34" charset="-120"/>
+              </a:rPr>
+              <a:t>Key idea</a:t>
+            </a:r>
+            <a:endParaRPr lang="en-US" sz="950" dirty="0"/>
+          </a:p>
+        </p:txBody>
+      </p:sp>
+      <p:sp>
+        <p:nvSpPr>
+          <p:cNvPr id="11" name="Text 9"/>
+          <p:cNvSpPr/>
+          <p:nvPr/>
+        </p:nvSpPr>
+        <p:spPr>
+          <a:xfrm>
+            <a:off x="8074152" y="1856232"/>
+            <a:ext cx="2825496" cy="1261872"/>
+          </a:xfrm>
+          <a:prstGeom prst="rect">
+            <a:avLst/>
+          </a:prstGeom>
+          <a:noFill/>
+          <a:ln/>
+        </p:spPr>
+        <p:txBody>
+          <a:bodyPr wrap="square" lIns="0" tIns="0" rIns="0" bIns="0" rtlCol="0" anchor="t">
+            <a:normAutofit/>
+          </a:bodyPr>
+          <a:lstStyle/>
+          <a:p>
+            <a:pPr indent="0" marL="0">
+              <a:buNone/>
+            </a:pPr>
+            <a:r>
+              <a:rPr lang="en-US" sz="1250" dirty="0">
                 <a:solidFill>
                   <a:srgbClr val="17364A"/>
                 </a:solidFill>
@@ -3317,9 +4018,116 @@
                 <a:ea typeface="Aptos" pitchFamily="34" charset="-122"/>
                 <a:cs typeface="Aptos" pitchFamily="34" charset="-120"/>
               </a:rPr>
-              <a:t>Privacy exposure. Prompts or outputs may include sensitive data. Guardrails include approved tools, data-use tiers, redaction, access controls, and records guidance.</a:t>
-            </a:r>
-            <a:endParaRPr lang="en-US" sz="1420" dirty="0"/>
+              <a:t>Equity and accessibility review should be included when outputs affect staff, partners, or the public.</a:t>
+            </a:r>
+            <a:endParaRPr lang="en-US" sz="1250" dirty="0"/>
+          </a:p>
+        </p:txBody>
+      </p:sp>
+      <p:sp>
+        <p:nvSpPr>
+          <p:cNvPr id="12" name="Shape 10"/>
+          <p:cNvSpPr/>
+          <p:nvPr/>
+        </p:nvSpPr>
+        <p:spPr>
+          <a:xfrm>
+            <a:off x="7909560" y="3520440"/>
+            <a:ext cx="3154680" cy="1737360"/>
+          </a:xfrm>
+          <a:prstGeom prst="roundRect">
+            <a:avLst>
+              <a:gd name="adj" fmla="val 6316"/>
+            </a:avLst>
+          </a:prstGeom>
+          <a:solidFill>
+            <a:srgbClr val="EAF6F8"/>
+          </a:solidFill>
+          <a:ln w="12700">
+            <a:solidFill>
+              <a:srgbClr val="B9D7E6"/>
+            </a:solidFill>
+            <a:prstDash val="solid"/>
+          </a:ln>
+        </p:spPr>
+      </p:sp>
+      <p:sp>
+        <p:nvSpPr>
+          <p:cNvPr id="13" name="Text 11"/>
+          <p:cNvSpPr/>
+          <p:nvPr/>
+        </p:nvSpPr>
+        <p:spPr>
+          <a:xfrm>
+            <a:off x="8074152" y="3666744"/>
+            <a:ext cx="2825496" cy="201168"/>
+          </a:xfrm>
+          <a:prstGeom prst="rect">
+            <a:avLst/>
+          </a:prstGeom>
+          <a:noFill/>
+          <a:ln/>
+        </p:spPr>
+        <p:txBody>
+          <a:bodyPr wrap="square" lIns="0" tIns="0" rIns="0" bIns="0" rtlCol="0" anchor="ctr"/>
+          <a:lstStyle/>
+          <a:p>
+            <a:pPr indent="0" marL="0">
+              <a:buNone/>
+            </a:pPr>
+            <a:r>
+              <a:rPr lang="en-US" sz="950" b="1" dirty="0">
+                <a:solidFill>
+                  <a:srgbClr val="0068B7"/>
+                </a:solidFill>
+                <a:latin typeface="Aptos" pitchFamily="34" charset="0"/>
+                <a:ea typeface="Aptos" pitchFamily="34" charset="-122"/>
+                <a:cs typeface="Aptos" pitchFamily="34" charset="-120"/>
+              </a:rPr>
+              <a:t>Use this for</a:t>
+            </a:r>
+            <a:endParaRPr lang="en-US" sz="950" dirty="0"/>
+          </a:p>
+        </p:txBody>
+      </p:sp>
+      <p:sp>
+        <p:nvSpPr>
+          <p:cNvPr id="14" name="Text 12"/>
+          <p:cNvSpPr/>
+          <p:nvPr/>
+        </p:nvSpPr>
+        <p:spPr>
+          <a:xfrm>
+            <a:off x="8074152" y="3959352"/>
+            <a:ext cx="2825496" cy="1170432"/>
+          </a:xfrm>
+          <a:prstGeom prst="rect">
+            <a:avLst/>
+          </a:prstGeom>
+          <a:noFill/>
+          <a:ln/>
+        </p:spPr>
+        <p:txBody>
+          <a:bodyPr wrap="square" lIns="0" tIns="0" rIns="0" bIns="0" rtlCol="0" anchor="t">
+            <a:normAutofit/>
+          </a:bodyPr>
+          <a:lstStyle/>
+          <a:p>
+            <a:pPr indent="0" marL="0">
+              <a:buNone/>
+            </a:pPr>
+            <a:r>
+              <a:rPr lang="en-US" sz="1250" dirty="0">
+                <a:solidFill>
+                  <a:srgbClr val="17364A"/>
+                </a:solidFill>
+                <a:latin typeface="Aptos" pitchFamily="34" charset="0"/>
+                <a:ea typeface="Aptos" pitchFamily="34" charset="-122"/>
+                <a:cs typeface="Aptos" pitchFamily="34" charset="-120"/>
+              </a:rPr>
+              <a:t>Connect the concept to public health decisions, safeguards, documentation, or implementation work.</a:t>
+            </a:r>
+            <a:endParaRPr lang="en-US" sz="1250" dirty="0"/>
           </a:p>
         </p:txBody>
       </p:sp>
@@ -3382,7 +4190,32 @@
       </p:sp>
       <p:sp>
         <p:nvSpPr>
-          <p:cNvPr id="3" name="Text 1"/>
+          <p:cNvPr id="3" name="Shape 1"/>
+          <p:cNvSpPr/>
+          <p:nvPr/>
+        </p:nvSpPr>
+        <p:spPr>
+          <a:xfrm>
+            <a:off x="0" y="164592"/>
+            <a:ext cx="146304" cy="6693408"/>
+          </a:xfrm>
+          <a:prstGeom prst="rect">
+            <a:avLst/>
+          </a:prstGeom>
+          <a:solidFill>
+            <a:srgbClr val="2F8A28"/>
+          </a:solidFill>
+          <a:ln w="12700">
+            <a:solidFill>
+              <a:srgbClr val="2F8A28"/>
+            </a:solidFill>
+            <a:prstDash val="solid"/>
+          </a:ln>
+        </p:spPr>
+      </p:sp>
+      <p:sp>
+        <p:nvSpPr>
+          <p:cNvPr id="4" name="Text 2"/>
           <p:cNvSpPr/>
           <p:nvPr/>
         </p:nvSpPr>
@@ -3421,7 +4254,7 @@
       </p:sp>
       <p:sp>
         <p:nvSpPr>
-          <p:cNvPr id="4" name="Text 2"/>
+          <p:cNvPr id="5" name="Text 3"/>
           <p:cNvSpPr/>
           <p:nvPr/>
         </p:nvSpPr>
@@ -3460,7 +4293,7 @@
       </p:sp>
       <p:sp>
         <p:nvSpPr>
-          <p:cNvPr id="5" name="Text 3"/>
+          <p:cNvPr id="6" name="Text 4"/>
           <p:cNvSpPr/>
           <p:nvPr/>
         </p:nvSpPr>
@@ -3499,13 +4332,77 @@
       </p:sp>
       <p:sp>
         <p:nvSpPr>
-          <p:cNvPr id="6" name="Text 4"/>
+          <p:cNvPr id="7" name="Shape 5"/>
           <p:cNvSpPr/>
           <p:nvPr/>
         </p:nvSpPr>
         <p:spPr>
           <a:xfrm>
             <a:off x="640080" y="658368"/>
+            <a:ext cx="420624" cy="420624"/>
+          </a:xfrm>
+          <a:prstGeom prst="ellipse">
+            <a:avLst/>
+          </a:prstGeom>
+          <a:solidFill>
+            <a:srgbClr val="0068B7"/>
+          </a:solidFill>
+          <a:ln w="12700">
+            <a:solidFill>
+              <a:srgbClr val="0068B7"/>
+            </a:solidFill>
+            <a:prstDash val="solid"/>
+          </a:ln>
+        </p:spPr>
+      </p:sp>
+      <p:sp>
+        <p:nvSpPr>
+          <p:cNvPr id="8" name="Text 6"/>
+          <p:cNvSpPr/>
+          <p:nvPr/>
+        </p:nvSpPr>
+        <p:spPr>
+          <a:xfrm>
+            <a:off x="640080" y="731520"/>
+            <a:ext cx="420624" cy="164592"/>
+          </a:xfrm>
+          <a:prstGeom prst="rect">
+            <a:avLst/>
+          </a:prstGeom>
+          <a:noFill/>
+          <a:ln/>
+        </p:spPr>
+        <p:txBody>
+          <a:bodyPr wrap="square" lIns="0" tIns="0" rIns="0" bIns="0" rtlCol="0" anchor="ctr"/>
+          <a:lstStyle/>
+          <a:p>
+            <a:pPr algn="ctr" indent="0" marL="0">
+              <a:buNone/>
+            </a:pPr>
+            <a:r>
+              <a:rPr lang="en-US" sz="1100" b="1" dirty="0">
+                <a:solidFill>
+                  <a:srgbClr val="FFFFFF"/>
+                </a:solidFill>
+                <a:latin typeface="Aptos" pitchFamily="34" charset="0"/>
+                <a:ea typeface="Aptos" pitchFamily="34" charset="-122"/>
+                <a:cs typeface="Aptos" pitchFamily="34" charset="-120"/>
+              </a:rPr>
+              <a:t>6</a:t>
+            </a:r>
+            <a:endParaRPr lang="en-US" sz="1100" dirty="0"/>
+          </a:p>
+        </p:txBody>
+      </p:sp>
+      <p:sp>
+        <p:nvSpPr>
+          <p:cNvPr id="9" name="Text 7"/>
+          <p:cNvSpPr/>
+          <p:nvPr/>
+        </p:nvSpPr>
+        <p:spPr>
+          <a:xfrm>
+            <a:off x="640080" y="621792"/>
             <a:ext cx="10881360" cy="566928"/>
           </a:xfrm>
           <a:prstGeom prst="rect">
@@ -3532,7 +4429,7 @@
                 <a:ea typeface="Aptos Display" pitchFamily="34" charset="-122"/>
                 <a:cs typeface="Aptos Display" pitchFamily="34" charset="-120"/>
               </a:rPr>
-              <a:t>Application to AI-Supported Workflows</a:t>
+              <a:t>Risks, Failure Modes, and Guardrails</a:t>
             </a:r>
             <a:endParaRPr lang="en-US" sz="2700" dirty="0"/>
           </a:p>
@@ -3540,32 +4437,178 @@
       </p:sp>
       <p:sp>
         <p:nvSpPr>
-          <p:cNvPr id="7" name="Text 5"/>
-          <p:cNvSpPr/>
-          <p:nvPr/>
-        </p:nvSpPr>
-        <p:spPr>
-          <a:xfrm>
-            <a:off x="822960" y="1325880"/>
-            <a:ext cx="10378440" cy="4800600"/>
-          </a:xfrm>
-          <a:prstGeom prst="rect">
-            <a:avLst/>
-          </a:prstGeom>
-          <a:noFill/>
-          <a:ln/>
-        </p:spPr>
-        <p:txBody>
-          <a:bodyPr wrap="square" lIns="1016" tIns="1016" rIns="1016" bIns="1016" rtlCol="0" anchor="t">
+          <p:cNvPr id="10" name="Text 8"/>
+          <p:cNvSpPr/>
+          <p:nvPr/>
+        </p:nvSpPr>
+        <p:spPr>
+          <a:xfrm>
+            <a:off x="868680" y="1417320"/>
+            <a:ext cx="6675120" cy="4434840"/>
+          </a:xfrm>
+          <a:prstGeom prst="rect">
+            <a:avLst/>
+          </a:prstGeom>
+          <a:noFill/>
+          <a:ln/>
+        </p:spPr>
+        <p:txBody>
+          <a:bodyPr wrap="square" lIns="635" tIns="635" rIns="635" bIns="635" rtlCol="0" anchor="t">
             <a:normAutofit/>
           </a:bodyPr>
           <a:lstStyle/>
           <a:p>
+            <a:r>
+              <a:rPr lang="en-US" sz="1700" dirty="0">
+                <a:solidFill>
+                  <a:srgbClr val="17364A"/>
+                </a:solidFill>
+                <a:latin typeface="Aptos" pitchFamily="34" charset="0"/>
+                <a:ea typeface="Aptos" pitchFamily="34" charset="-122"/>
+                <a:cs typeface="Aptos" pitchFamily="34" charset="-120"/>
+              </a:rPr>
+              <a:t>Fluent but false outputs.</a:t>
+            </a:r>
+            <a:endParaRPr lang="en-US" sz="1700" dirty="0"/>
+          </a:p>
+          <a:p>
+            <a:r>
+              <a:rPr lang="en-US" sz="1700" dirty="0">
+                <a:solidFill>
+                  <a:srgbClr val="17364A"/>
+                </a:solidFill>
+                <a:latin typeface="Aptos" pitchFamily="34" charset="0"/>
+                <a:ea typeface="Aptos" pitchFamily="34" charset="-122"/>
+                <a:cs typeface="Aptos" pitchFamily="34" charset="-120"/>
+              </a:rPr>
+              <a:t>A polished output may contain unsupported claims.</a:t>
+            </a:r>
+            <a:endParaRPr lang="en-US" sz="1700" dirty="0"/>
+          </a:p>
+          <a:p>
+            <a:r>
+              <a:rPr lang="en-US" sz="1700" dirty="0">
+                <a:solidFill>
+                  <a:srgbClr val="17364A"/>
+                </a:solidFill>
+                <a:latin typeface="Aptos" pitchFamily="34" charset="0"/>
+                <a:ea typeface="Aptos" pitchFamily="34" charset="-122"/>
+                <a:cs typeface="Aptos" pitchFamily="34" charset="-120"/>
+              </a:rPr>
+              <a:t>Guardrails include source checking, citations, and reviewer signoff.</a:t>
+            </a:r>
+            <a:endParaRPr lang="en-US" sz="1700" dirty="0"/>
+          </a:p>
+          <a:p>
+            <a:r>
+              <a:rPr lang="en-US" sz="1700" dirty="0">
+                <a:solidFill>
+                  <a:srgbClr val="17364A"/>
+                </a:solidFill>
+                <a:latin typeface="Aptos" pitchFamily="34" charset="0"/>
+                <a:ea typeface="Aptos" pitchFamily="34" charset="-122"/>
+                <a:cs typeface="Aptos" pitchFamily="34" charset="-120"/>
+              </a:rPr>
+              <a:t>Omitted caveats.</a:t>
+            </a:r>
+            <a:endParaRPr lang="en-US" sz="1700" dirty="0"/>
+          </a:p>
+        </p:txBody>
+      </p:sp>
+      <p:sp>
+        <p:nvSpPr>
+          <p:cNvPr id="11" name="Shape 9"/>
+          <p:cNvSpPr/>
+          <p:nvPr/>
+        </p:nvSpPr>
+        <p:spPr>
+          <a:xfrm>
+            <a:off x="7909560" y="1417320"/>
+            <a:ext cx="3154680" cy="1828800"/>
+          </a:xfrm>
+          <a:prstGeom prst="roundRect">
+            <a:avLst>
+              <a:gd name="adj" fmla="val 6000"/>
+            </a:avLst>
+          </a:prstGeom>
+          <a:solidFill>
+            <a:srgbClr val="EEF8ED"/>
+          </a:solidFill>
+          <a:ln w="12700">
+            <a:solidFill>
+              <a:srgbClr val="B9D7E6"/>
+            </a:solidFill>
+            <a:prstDash val="solid"/>
+          </a:ln>
+        </p:spPr>
+      </p:sp>
+      <p:sp>
+        <p:nvSpPr>
+          <p:cNvPr id="12" name="Text 10"/>
+          <p:cNvSpPr/>
+          <p:nvPr/>
+        </p:nvSpPr>
+        <p:spPr>
+          <a:xfrm>
+            <a:off x="8074152" y="1563624"/>
+            <a:ext cx="2825496" cy="201168"/>
+          </a:xfrm>
+          <a:prstGeom prst="rect">
+            <a:avLst/>
+          </a:prstGeom>
+          <a:noFill/>
+          <a:ln/>
+        </p:spPr>
+        <p:txBody>
+          <a:bodyPr wrap="square" lIns="0" tIns="0" rIns="0" bIns="0" rtlCol="0" anchor="ctr"/>
+          <a:lstStyle/>
+          <a:p>
             <a:pPr indent="0" marL="0">
               <a:buNone/>
             </a:pPr>
             <a:r>
-              <a:rPr lang="en-US" sz="1420" dirty="0">
+              <a:rPr lang="en-US" sz="950" b="1" dirty="0">
+                <a:solidFill>
+                  <a:srgbClr val="0068B7"/>
+                </a:solidFill>
+                <a:latin typeface="Aptos" pitchFamily="34" charset="0"/>
+                <a:ea typeface="Aptos" pitchFamily="34" charset="-122"/>
+                <a:cs typeface="Aptos" pitchFamily="34" charset="-120"/>
+              </a:rPr>
+              <a:t>Key idea</a:t>
+            </a:r>
+            <a:endParaRPr lang="en-US" sz="950" dirty="0"/>
+          </a:p>
+        </p:txBody>
+      </p:sp>
+      <p:sp>
+        <p:nvSpPr>
+          <p:cNvPr id="13" name="Text 11"/>
+          <p:cNvSpPr/>
+          <p:nvPr/>
+        </p:nvSpPr>
+        <p:spPr>
+          <a:xfrm>
+            <a:off x="8074152" y="1856232"/>
+            <a:ext cx="2825496" cy="1261872"/>
+          </a:xfrm>
+          <a:prstGeom prst="rect">
+            <a:avLst/>
+          </a:prstGeom>
+          <a:noFill/>
+          <a:ln/>
+        </p:spPr>
+        <p:txBody>
+          <a:bodyPr wrap="square" lIns="0" tIns="0" rIns="0" bIns="0" rtlCol="0" anchor="t">
+            <a:normAutofit/>
+          </a:bodyPr>
+          <a:lstStyle/>
+          <a:p>
+            <a:pPr indent="0" marL="0">
+              <a:buNone/>
+            </a:pPr>
+            <a:r>
+              <a:rPr lang="en-US" sz="1250" dirty="0">
                 <a:solidFill>
                   <a:srgbClr val="17364A"/>
                 </a:solidFill>
@@ -3573,9 +4616,116 @@
                 <a:ea typeface="Aptos" pitchFamily="34" charset="-122"/>
                 <a:cs typeface="Aptos" pitchFamily="34" charset="-120"/>
               </a:rPr>
-              <a:t>Generative AI output evaluation applies to drafting, summarization, classification, translation, code generation, and decision-support explanation. It is also relevant to RAG and agentic workflows because generated text may summarize retrieved sources or explain automated actions. Evaluation should be built into workflow design, not added after deployment. The strongest approach is to create rubrics for specific output types. A case summary rubric will differ from a public message rubric, and a policy synthesis rubric will differ from a code review rubric. Each rubric should define what reviewers must check, who approves final use, and how errors are documented.</a:t>
-            </a:r>
-            <a:endParaRPr lang="en-US" sz="1420" dirty="0"/>
+              <a:t>Fluent but false outputs.</a:t>
+            </a:r>
+            <a:endParaRPr lang="en-US" sz="1250" dirty="0"/>
+          </a:p>
+        </p:txBody>
+      </p:sp>
+      <p:sp>
+        <p:nvSpPr>
+          <p:cNvPr id="14" name="Shape 12"/>
+          <p:cNvSpPr/>
+          <p:nvPr/>
+        </p:nvSpPr>
+        <p:spPr>
+          <a:xfrm>
+            <a:off x="7909560" y="3520440"/>
+            <a:ext cx="3154680" cy="1737360"/>
+          </a:xfrm>
+          <a:prstGeom prst="roundRect">
+            <a:avLst>
+              <a:gd name="adj" fmla="val 6316"/>
+            </a:avLst>
+          </a:prstGeom>
+          <a:solidFill>
+            <a:srgbClr val="EAF6F8"/>
+          </a:solidFill>
+          <a:ln w="12700">
+            <a:solidFill>
+              <a:srgbClr val="B9D7E6"/>
+            </a:solidFill>
+            <a:prstDash val="solid"/>
+          </a:ln>
+        </p:spPr>
+      </p:sp>
+      <p:sp>
+        <p:nvSpPr>
+          <p:cNvPr id="15" name="Text 13"/>
+          <p:cNvSpPr/>
+          <p:nvPr/>
+        </p:nvSpPr>
+        <p:spPr>
+          <a:xfrm>
+            <a:off x="8074152" y="3666744"/>
+            <a:ext cx="2825496" cy="201168"/>
+          </a:xfrm>
+          <a:prstGeom prst="rect">
+            <a:avLst/>
+          </a:prstGeom>
+          <a:noFill/>
+          <a:ln/>
+        </p:spPr>
+        <p:txBody>
+          <a:bodyPr wrap="square" lIns="0" tIns="0" rIns="0" bIns="0" rtlCol="0" anchor="ctr"/>
+          <a:lstStyle/>
+          <a:p>
+            <a:pPr indent="0" marL="0">
+              <a:buNone/>
+            </a:pPr>
+            <a:r>
+              <a:rPr lang="en-US" sz="950" b="1" dirty="0">
+                <a:solidFill>
+                  <a:srgbClr val="0068B7"/>
+                </a:solidFill>
+                <a:latin typeface="Aptos" pitchFamily="34" charset="0"/>
+                <a:ea typeface="Aptos" pitchFamily="34" charset="-122"/>
+                <a:cs typeface="Aptos" pitchFamily="34" charset="-120"/>
+              </a:rPr>
+              <a:t>Use this for</a:t>
+            </a:r>
+            <a:endParaRPr lang="en-US" sz="950" dirty="0"/>
+          </a:p>
+        </p:txBody>
+      </p:sp>
+      <p:sp>
+        <p:nvSpPr>
+          <p:cNvPr id="16" name="Text 14"/>
+          <p:cNvSpPr/>
+          <p:nvPr/>
+        </p:nvSpPr>
+        <p:spPr>
+          <a:xfrm>
+            <a:off x="8074152" y="3959352"/>
+            <a:ext cx="2825496" cy="1170432"/>
+          </a:xfrm>
+          <a:prstGeom prst="rect">
+            <a:avLst/>
+          </a:prstGeom>
+          <a:noFill/>
+          <a:ln/>
+        </p:spPr>
+        <p:txBody>
+          <a:bodyPr wrap="square" lIns="0" tIns="0" rIns="0" bIns="0" rtlCol="0" anchor="t">
+            <a:normAutofit/>
+          </a:bodyPr>
+          <a:lstStyle/>
+          <a:p>
+            <a:pPr indent="0" marL="0">
+              <a:buNone/>
+            </a:pPr>
+            <a:r>
+              <a:rPr lang="en-US" sz="1250" dirty="0">
+                <a:solidFill>
+                  <a:srgbClr val="17364A"/>
+                </a:solidFill>
+                <a:latin typeface="Aptos" pitchFamily="34" charset="0"/>
+                <a:ea typeface="Aptos" pitchFamily="34" charset="-122"/>
+                <a:cs typeface="Aptos" pitchFamily="34" charset="-120"/>
+              </a:rPr>
+              <a:t>Connect the concept to public health decisions, safeguards, documentation, or implementation work.</a:t>
+            </a:r>
+            <a:endParaRPr lang="en-US" sz="1250" dirty="0"/>
           </a:p>
         </p:txBody>
       </p:sp>
@@ -3638,7 +4788,32 @@
       </p:sp>
       <p:sp>
         <p:nvSpPr>
-          <p:cNvPr id="3" name="Text 1"/>
+          <p:cNvPr id="3" name="Shape 1"/>
+          <p:cNvSpPr/>
+          <p:nvPr/>
+        </p:nvSpPr>
+        <p:spPr>
+          <a:xfrm>
+            <a:off x="0" y="164592"/>
+            <a:ext cx="146304" cy="6693408"/>
+          </a:xfrm>
+          <a:prstGeom prst="rect">
+            <a:avLst/>
+          </a:prstGeom>
+          <a:solidFill>
+            <a:srgbClr val="2F8A28"/>
+          </a:solidFill>
+          <a:ln w="12700">
+            <a:solidFill>
+              <a:srgbClr val="2F8A28"/>
+            </a:solidFill>
+            <a:prstDash val="solid"/>
+          </a:ln>
+        </p:spPr>
+      </p:sp>
+      <p:sp>
+        <p:nvSpPr>
+          <p:cNvPr id="4" name="Text 2"/>
           <p:cNvSpPr/>
           <p:nvPr/>
         </p:nvSpPr>
@@ -3677,7 +4852,7 @@
       </p:sp>
       <p:sp>
         <p:nvSpPr>
-          <p:cNvPr id="4" name="Text 2"/>
+          <p:cNvPr id="5" name="Text 3"/>
           <p:cNvSpPr/>
           <p:nvPr/>
         </p:nvSpPr>
@@ -3716,7 +4891,7 @@
       </p:sp>
       <p:sp>
         <p:nvSpPr>
-          <p:cNvPr id="5" name="Text 3"/>
+          <p:cNvPr id="6" name="Text 4"/>
           <p:cNvSpPr/>
           <p:nvPr/>
         </p:nvSpPr>
@@ -3755,7 +4930,7 @@
       </p:sp>
       <p:sp>
         <p:nvSpPr>
-          <p:cNvPr id="6" name="Text 4"/>
+          <p:cNvPr id="7" name="Text 5"/>
           <p:cNvSpPr/>
           <p:nvPr/>
         </p:nvSpPr>
@@ -3788,7 +4963,7 @@
                 <a:ea typeface="Aptos Display" pitchFamily="34" charset="-122"/>
                 <a:cs typeface="Aptos Display" pitchFamily="34" charset="-120"/>
               </a:rPr>
-              <a:t>Reflection Questions</a:t>
+              <a:t>Risks, Failure Modes, and Guardrails Continued</a:t>
             </a:r>
             <a:endParaRPr lang="en-US" sz="2700" dirty="0"/>
           </a:p>
@@ -3796,32 +4971,164 @@
       </p:sp>
       <p:sp>
         <p:nvSpPr>
-          <p:cNvPr id="7" name="Text 5"/>
-          <p:cNvSpPr/>
-          <p:nvPr/>
-        </p:nvSpPr>
-        <p:spPr>
-          <a:xfrm>
-            <a:off x="822960" y="1325880"/>
-            <a:ext cx="10378440" cy="4800600"/>
-          </a:xfrm>
-          <a:prstGeom prst="rect">
-            <a:avLst/>
-          </a:prstGeom>
-          <a:noFill/>
-          <a:ln/>
-        </p:spPr>
-        <p:txBody>
-          <a:bodyPr wrap="square" lIns="1016" tIns="1016" rIns="1016" bIns="1016" rtlCol="0" anchor="t">
+          <p:cNvPr id="8" name="Text 6"/>
+          <p:cNvSpPr/>
+          <p:nvPr/>
+        </p:nvSpPr>
+        <p:spPr>
+          <a:xfrm>
+            <a:off x="868680" y="1417320"/>
+            <a:ext cx="6675120" cy="4434840"/>
+          </a:xfrm>
+          <a:prstGeom prst="rect">
+            <a:avLst/>
+          </a:prstGeom>
+          <a:noFill/>
+          <a:ln/>
+        </p:spPr>
+        <p:txBody>
+          <a:bodyPr wrap="square" lIns="635" tIns="635" rIns="635" bIns="635" rtlCol="0" anchor="t">
             <a:normAutofit/>
           </a:bodyPr>
           <a:lstStyle/>
           <a:p>
+            <a:r>
+              <a:rPr lang="en-US" sz="1700" dirty="0">
+                <a:solidFill>
+                  <a:srgbClr val="17364A"/>
+                </a:solidFill>
+                <a:latin typeface="Aptos" pitchFamily="34" charset="0"/>
+                <a:ea typeface="Aptos" pitchFamily="34" charset="-122"/>
+                <a:cs typeface="Aptos" pitchFamily="34" charset="-120"/>
+              </a:rPr>
+              <a:t>Privacy exposure.</a:t>
+            </a:r>
+            <a:endParaRPr lang="en-US" sz="1700" dirty="0"/>
+          </a:p>
+          <a:p>
+            <a:r>
+              <a:rPr lang="en-US" sz="1700" dirty="0">
+                <a:solidFill>
+                  <a:srgbClr val="17364A"/>
+                </a:solidFill>
+                <a:latin typeface="Aptos" pitchFamily="34" charset="0"/>
+                <a:ea typeface="Aptos" pitchFamily="34" charset="-122"/>
+                <a:cs typeface="Aptos" pitchFamily="34" charset="-120"/>
+              </a:rPr>
+              <a:t>Prompts or outputs may include sensitive data.</a:t>
+            </a:r>
+            <a:endParaRPr lang="en-US" sz="1700" dirty="0"/>
+          </a:p>
+          <a:p>
+            <a:r>
+              <a:rPr lang="en-US" sz="1700" dirty="0">
+                <a:solidFill>
+                  <a:srgbClr val="17364A"/>
+                </a:solidFill>
+                <a:latin typeface="Aptos" pitchFamily="34" charset="0"/>
+                <a:ea typeface="Aptos" pitchFamily="34" charset="-122"/>
+                <a:cs typeface="Aptos" pitchFamily="34" charset="-120"/>
+              </a:rPr>
+              <a:t>Guardrails include approved tools, data-use tiers, redaction, access controls, and records guidance.</a:t>
+            </a:r>
+            <a:endParaRPr lang="en-US" sz="1700" dirty="0"/>
+          </a:p>
+        </p:txBody>
+      </p:sp>
+      <p:sp>
+        <p:nvSpPr>
+          <p:cNvPr id="9" name="Shape 7"/>
+          <p:cNvSpPr/>
+          <p:nvPr/>
+        </p:nvSpPr>
+        <p:spPr>
+          <a:xfrm>
+            <a:off x="7909560" y="1417320"/>
+            <a:ext cx="3154680" cy="1828800"/>
+          </a:xfrm>
+          <a:prstGeom prst="roundRect">
+            <a:avLst>
+              <a:gd name="adj" fmla="val 6000"/>
+            </a:avLst>
+          </a:prstGeom>
+          <a:solidFill>
+            <a:srgbClr val="EEF8ED"/>
+          </a:solidFill>
+          <a:ln w="12700">
+            <a:solidFill>
+              <a:srgbClr val="B9D7E6"/>
+            </a:solidFill>
+            <a:prstDash val="solid"/>
+          </a:ln>
+        </p:spPr>
+      </p:sp>
+      <p:sp>
+        <p:nvSpPr>
+          <p:cNvPr id="10" name="Text 8"/>
+          <p:cNvSpPr/>
+          <p:nvPr/>
+        </p:nvSpPr>
+        <p:spPr>
+          <a:xfrm>
+            <a:off x="8074152" y="1563624"/>
+            <a:ext cx="2825496" cy="201168"/>
+          </a:xfrm>
+          <a:prstGeom prst="rect">
+            <a:avLst/>
+          </a:prstGeom>
+          <a:noFill/>
+          <a:ln/>
+        </p:spPr>
+        <p:txBody>
+          <a:bodyPr wrap="square" lIns="0" tIns="0" rIns="0" bIns="0" rtlCol="0" anchor="ctr"/>
+          <a:lstStyle/>
+          <a:p>
             <a:pPr indent="0" marL="0">
               <a:buNone/>
             </a:pPr>
             <a:r>
-              <a:rPr lang="en-US" sz="1420" dirty="0">
+              <a:rPr lang="en-US" sz="950" b="1" dirty="0">
+                <a:solidFill>
+                  <a:srgbClr val="0068B7"/>
+                </a:solidFill>
+                <a:latin typeface="Aptos" pitchFamily="34" charset="0"/>
+                <a:ea typeface="Aptos" pitchFamily="34" charset="-122"/>
+                <a:cs typeface="Aptos" pitchFamily="34" charset="-120"/>
+              </a:rPr>
+              <a:t>Key idea</a:t>
+            </a:r>
+            <a:endParaRPr lang="en-US" sz="950" dirty="0"/>
+          </a:p>
+        </p:txBody>
+      </p:sp>
+      <p:sp>
+        <p:nvSpPr>
+          <p:cNvPr id="11" name="Text 9"/>
+          <p:cNvSpPr/>
+          <p:nvPr/>
+        </p:nvSpPr>
+        <p:spPr>
+          <a:xfrm>
+            <a:off x="8074152" y="1856232"/>
+            <a:ext cx="2825496" cy="1261872"/>
+          </a:xfrm>
+          <a:prstGeom prst="rect">
+            <a:avLst/>
+          </a:prstGeom>
+          <a:noFill/>
+          <a:ln/>
+        </p:spPr>
+        <p:txBody>
+          <a:bodyPr wrap="square" lIns="0" tIns="0" rIns="0" bIns="0" rtlCol="0" anchor="t">
+            <a:normAutofit/>
+          </a:bodyPr>
+          <a:lstStyle/>
+          <a:p>
+            <a:pPr indent="0" marL="0">
+              <a:buNone/>
+            </a:pPr>
+            <a:r>
+              <a:rPr lang="en-US" sz="1250" dirty="0">
                 <a:solidFill>
                   <a:srgbClr val="17364A"/>
                 </a:solidFill>
@@ -3829,9 +5136,116 @@
                 <a:ea typeface="Aptos" pitchFamily="34" charset="-122"/>
                 <a:cs typeface="Aptos" pitchFamily="34" charset="-120"/>
               </a:rPr>
-              <a:t>What type of generative AI output is being evaluated? What source material should be used to verify the output? What errors or omissions would be most harmful?</a:t>
-            </a:r>
-            <a:endParaRPr lang="en-US" sz="1420" dirty="0"/>
+              <a:t>Privacy exposure.</a:t>
+            </a:r>
+            <a:endParaRPr lang="en-US" sz="1250" dirty="0"/>
+          </a:p>
+        </p:txBody>
+      </p:sp>
+      <p:sp>
+        <p:nvSpPr>
+          <p:cNvPr id="12" name="Shape 10"/>
+          <p:cNvSpPr/>
+          <p:nvPr/>
+        </p:nvSpPr>
+        <p:spPr>
+          <a:xfrm>
+            <a:off x="7909560" y="3520440"/>
+            <a:ext cx="3154680" cy="1737360"/>
+          </a:xfrm>
+          <a:prstGeom prst="roundRect">
+            <a:avLst>
+              <a:gd name="adj" fmla="val 6316"/>
+            </a:avLst>
+          </a:prstGeom>
+          <a:solidFill>
+            <a:srgbClr val="EAF6F8"/>
+          </a:solidFill>
+          <a:ln w="12700">
+            <a:solidFill>
+              <a:srgbClr val="B9D7E6"/>
+            </a:solidFill>
+            <a:prstDash val="solid"/>
+          </a:ln>
+        </p:spPr>
+      </p:sp>
+      <p:sp>
+        <p:nvSpPr>
+          <p:cNvPr id="13" name="Text 11"/>
+          <p:cNvSpPr/>
+          <p:nvPr/>
+        </p:nvSpPr>
+        <p:spPr>
+          <a:xfrm>
+            <a:off x="8074152" y="3666744"/>
+            <a:ext cx="2825496" cy="201168"/>
+          </a:xfrm>
+          <a:prstGeom prst="rect">
+            <a:avLst/>
+          </a:prstGeom>
+          <a:noFill/>
+          <a:ln/>
+        </p:spPr>
+        <p:txBody>
+          <a:bodyPr wrap="square" lIns="0" tIns="0" rIns="0" bIns="0" rtlCol="0" anchor="ctr"/>
+          <a:lstStyle/>
+          <a:p>
+            <a:pPr indent="0" marL="0">
+              <a:buNone/>
+            </a:pPr>
+            <a:r>
+              <a:rPr lang="en-US" sz="950" b="1" dirty="0">
+                <a:solidFill>
+                  <a:srgbClr val="0068B7"/>
+                </a:solidFill>
+                <a:latin typeface="Aptos" pitchFamily="34" charset="0"/>
+                <a:ea typeface="Aptos" pitchFamily="34" charset="-122"/>
+                <a:cs typeface="Aptos" pitchFamily="34" charset="-120"/>
+              </a:rPr>
+              <a:t>Use this for</a:t>
+            </a:r>
+            <a:endParaRPr lang="en-US" sz="950" dirty="0"/>
+          </a:p>
+        </p:txBody>
+      </p:sp>
+      <p:sp>
+        <p:nvSpPr>
+          <p:cNvPr id="14" name="Text 12"/>
+          <p:cNvSpPr/>
+          <p:nvPr/>
+        </p:nvSpPr>
+        <p:spPr>
+          <a:xfrm>
+            <a:off x="8074152" y="3959352"/>
+            <a:ext cx="2825496" cy="1170432"/>
+          </a:xfrm>
+          <a:prstGeom prst="rect">
+            <a:avLst/>
+          </a:prstGeom>
+          <a:noFill/>
+          <a:ln/>
+        </p:spPr>
+        <p:txBody>
+          <a:bodyPr wrap="square" lIns="0" tIns="0" rIns="0" bIns="0" rtlCol="0" anchor="t">
+            <a:normAutofit/>
+          </a:bodyPr>
+          <a:lstStyle/>
+          <a:p>
+            <a:pPr indent="0" marL="0">
+              <a:buNone/>
+            </a:pPr>
+            <a:r>
+              <a:rPr lang="en-US" sz="1250" dirty="0">
+                <a:solidFill>
+                  <a:srgbClr val="17364A"/>
+                </a:solidFill>
+                <a:latin typeface="Aptos" pitchFamily="34" charset="0"/>
+                <a:ea typeface="Aptos" pitchFamily="34" charset="-122"/>
+                <a:cs typeface="Aptos" pitchFamily="34" charset="-120"/>
+              </a:rPr>
+              <a:t>Connect the concept to public health decisions, safeguards, documentation, or implementation work.</a:t>
+            </a:r>
+            <a:endParaRPr lang="en-US" sz="1250" dirty="0"/>
           </a:p>
         </p:txBody>
       </p:sp>
@@ -3894,7 +5308,32 @@
       </p:sp>
       <p:sp>
         <p:nvSpPr>
-          <p:cNvPr id="3" name="Text 1"/>
+          <p:cNvPr id="3" name="Shape 1"/>
+          <p:cNvSpPr/>
+          <p:nvPr/>
+        </p:nvSpPr>
+        <p:spPr>
+          <a:xfrm>
+            <a:off x="0" y="164592"/>
+            <a:ext cx="146304" cy="6693408"/>
+          </a:xfrm>
+          <a:prstGeom prst="rect">
+            <a:avLst/>
+          </a:prstGeom>
+          <a:solidFill>
+            <a:srgbClr val="2F8A28"/>
+          </a:solidFill>
+          <a:ln w="12700">
+            <a:solidFill>
+              <a:srgbClr val="2F8A28"/>
+            </a:solidFill>
+            <a:prstDash val="solid"/>
+          </a:ln>
+        </p:spPr>
+      </p:sp>
+      <p:sp>
+        <p:nvSpPr>
+          <p:cNvPr id="4" name="Text 2"/>
           <p:cNvSpPr/>
           <p:nvPr/>
         </p:nvSpPr>
@@ -3933,7 +5372,7 @@
       </p:sp>
       <p:sp>
         <p:nvSpPr>
-          <p:cNvPr id="4" name="Text 2"/>
+          <p:cNvPr id="5" name="Text 3"/>
           <p:cNvSpPr/>
           <p:nvPr/>
         </p:nvSpPr>
@@ -3972,7 +5411,7 @@
       </p:sp>
       <p:sp>
         <p:nvSpPr>
-          <p:cNvPr id="5" name="Text 3"/>
+          <p:cNvPr id="6" name="Text 4"/>
           <p:cNvSpPr/>
           <p:nvPr/>
         </p:nvSpPr>
@@ -4011,13 +5450,77 @@
       </p:sp>
       <p:sp>
         <p:nvSpPr>
-          <p:cNvPr id="6" name="Text 4"/>
+          <p:cNvPr id="7" name="Shape 5"/>
           <p:cNvSpPr/>
           <p:nvPr/>
         </p:nvSpPr>
         <p:spPr>
           <a:xfrm>
             <a:off x="640080" y="658368"/>
+            <a:ext cx="420624" cy="420624"/>
+          </a:xfrm>
+          <a:prstGeom prst="ellipse">
+            <a:avLst/>
+          </a:prstGeom>
+          <a:solidFill>
+            <a:srgbClr val="0068B7"/>
+          </a:solidFill>
+          <a:ln w="12700">
+            <a:solidFill>
+              <a:srgbClr val="0068B7"/>
+            </a:solidFill>
+            <a:prstDash val="solid"/>
+          </a:ln>
+        </p:spPr>
+      </p:sp>
+      <p:sp>
+        <p:nvSpPr>
+          <p:cNvPr id="8" name="Text 6"/>
+          <p:cNvSpPr/>
+          <p:nvPr/>
+        </p:nvSpPr>
+        <p:spPr>
+          <a:xfrm>
+            <a:off x="640080" y="731520"/>
+            <a:ext cx="420624" cy="164592"/>
+          </a:xfrm>
+          <a:prstGeom prst="rect">
+            <a:avLst/>
+          </a:prstGeom>
+          <a:noFill/>
+          <a:ln/>
+        </p:spPr>
+        <p:txBody>
+          <a:bodyPr wrap="square" lIns="0" tIns="0" rIns="0" bIns="0" rtlCol="0" anchor="ctr"/>
+          <a:lstStyle/>
+          <a:p>
+            <a:pPr algn="ctr" indent="0" marL="0">
+              <a:buNone/>
+            </a:pPr>
+            <a:r>
+              <a:rPr lang="en-US" sz="1100" b="1" dirty="0">
+                <a:solidFill>
+                  <a:srgbClr val="FFFFFF"/>
+                </a:solidFill>
+                <a:latin typeface="Aptos" pitchFamily="34" charset="0"/>
+                <a:ea typeface="Aptos" pitchFamily="34" charset="-122"/>
+                <a:cs typeface="Aptos" pitchFamily="34" charset="-120"/>
+              </a:rPr>
+              <a:t>7</a:t>
+            </a:r>
+            <a:endParaRPr lang="en-US" sz="1100" dirty="0"/>
+          </a:p>
+        </p:txBody>
+      </p:sp>
+      <p:sp>
+        <p:nvSpPr>
+          <p:cNvPr id="9" name="Text 7"/>
+          <p:cNvSpPr/>
+          <p:nvPr/>
+        </p:nvSpPr>
+        <p:spPr>
+          <a:xfrm>
+            <a:off x="640080" y="621792"/>
             <a:ext cx="10881360" cy="566928"/>
           </a:xfrm>
           <a:prstGeom prst="rect">
@@ -4044,7 +5547,7 @@
                 <a:ea typeface="Aptos Display" pitchFamily="34" charset="-122"/>
                 <a:cs typeface="Aptos Display" pitchFamily="34" charset="-120"/>
               </a:rPr>
-              <a:t>Reflection Questions Continued</a:t>
+              <a:t>Application to AI-Supported Workflows</a:t>
             </a:r>
             <a:endParaRPr lang="en-US" sz="2700" dirty="0"/>
           </a:p>
@@ -4052,32 +5555,178 @@
       </p:sp>
       <p:sp>
         <p:nvSpPr>
-          <p:cNvPr id="7" name="Text 5"/>
-          <p:cNvSpPr/>
-          <p:nvPr/>
-        </p:nvSpPr>
-        <p:spPr>
-          <a:xfrm>
-            <a:off x="822960" y="1325880"/>
-            <a:ext cx="10378440" cy="4800600"/>
-          </a:xfrm>
-          <a:prstGeom prst="rect">
-            <a:avLst/>
-          </a:prstGeom>
-          <a:noFill/>
-          <a:ln/>
-        </p:spPr>
-        <p:txBody>
-          <a:bodyPr wrap="square" lIns="1016" tIns="1016" rIns="1016" bIns="1016" rtlCol="0" anchor="t">
+          <p:cNvPr id="10" name="Text 8"/>
+          <p:cNvSpPr/>
+          <p:nvPr/>
+        </p:nvSpPr>
+        <p:spPr>
+          <a:xfrm>
+            <a:off x="868680" y="1417320"/>
+            <a:ext cx="6675120" cy="4434840"/>
+          </a:xfrm>
+          <a:prstGeom prst="rect">
+            <a:avLst/>
+          </a:prstGeom>
+          <a:noFill/>
+          <a:ln/>
+        </p:spPr>
+        <p:txBody>
+          <a:bodyPr wrap="square" lIns="635" tIns="635" rIns="635" bIns="635" rtlCol="0" anchor="t">
             <a:normAutofit/>
           </a:bodyPr>
           <a:lstStyle/>
           <a:p>
+            <a:r>
+              <a:rPr lang="en-US" sz="1700" dirty="0">
+                <a:solidFill>
+                  <a:srgbClr val="17364A"/>
+                </a:solidFill>
+                <a:latin typeface="Aptos" pitchFamily="34" charset="0"/>
+                <a:ea typeface="Aptos" pitchFamily="34" charset="-122"/>
+                <a:cs typeface="Aptos" pitchFamily="34" charset="-120"/>
+              </a:rPr>
+              <a:t>Generative AI output evaluation applies to drafting, summarization, classification, translation, code generation, and.</a:t>
+            </a:r>
+            <a:endParaRPr lang="en-US" sz="1700" dirty="0"/>
+          </a:p>
+          <a:p>
+            <a:r>
+              <a:rPr lang="en-US" sz="1700" dirty="0">
+                <a:solidFill>
+                  <a:srgbClr val="17364A"/>
+                </a:solidFill>
+                <a:latin typeface="Aptos" pitchFamily="34" charset="0"/>
+                <a:ea typeface="Aptos" pitchFamily="34" charset="-122"/>
+                <a:cs typeface="Aptos" pitchFamily="34" charset="-120"/>
+              </a:rPr>
+              <a:t>It is also relevant to RAG and agentic workflows because generated text may summarize retrieved sources or explain.</a:t>
+            </a:r>
+            <a:endParaRPr lang="en-US" sz="1700" dirty="0"/>
+          </a:p>
+          <a:p>
+            <a:r>
+              <a:rPr lang="en-US" sz="1700" dirty="0">
+                <a:solidFill>
+                  <a:srgbClr val="17364A"/>
+                </a:solidFill>
+                <a:latin typeface="Aptos" pitchFamily="34" charset="0"/>
+                <a:ea typeface="Aptos" pitchFamily="34" charset="-122"/>
+                <a:cs typeface="Aptos" pitchFamily="34" charset="-120"/>
+              </a:rPr>
+              <a:t>Evaluation should be built into workflow design, not added after deployment.</a:t>
+            </a:r>
+            <a:endParaRPr lang="en-US" sz="1700" dirty="0"/>
+          </a:p>
+          <a:p>
+            <a:r>
+              <a:rPr lang="en-US" sz="1700" dirty="0">
+                <a:solidFill>
+                  <a:srgbClr val="17364A"/>
+                </a:solidFill>
+                <a:latin typeface="Aptos" pitchFamily="34" charset="0"/>
+                <a:ea typeface="Aptos" pitchFamily="34" charset="-122"/>
+                <a:cs typeface="Aptos" pitchFamily="34" charset="-120"/>
+              </a:rPr>
+              <a:t>The strongest approach is to create rubrics for specific output types.</a:t>
+            </a:r>
+            <a:endParaRPr lang="en-US" sz="1700" dirty="0"/>
+          </a:p>
+        </p:txBody>
+      </p:sp>
+      <p:sp>
+        <p:nvSpPr>
+          <p:cNvPr id="11" name="Shape 9"/>
+          <p:cNvSpPr/>
+          <p:nvPr/>
+        </p:nvSpPr>
+        <p:spPr>
+          <a:xfrm>
+            <a:off x="7909560" y="1417320"/>
+            <a:ext cx="3154680" cy="1828800"/>
+          </a:xfrm>
+          <a:prstGeom prst="roundRect">
+            <a:avLst>
+              <a:gd name="adj" fmla="val 6000"/>
+            </a:avLst>
+          </a:prstGeom>
+          <a:solidFill>
+            <a:srgbClr val="EEF8ED"/>
+          </a:solidFill>
+          <a:ln w="12700">
+            <a:solidFill>
+              <a:srgbClr val="B9D7E6"/>
+            </a:solidFill>
+            <a:prstDash val="solid"/>
+          </a:ln>
+        </p:spPr>
+      </p:sp>
+      <p:sp>
+        <p:nvSpPr>
+          <p:cNvPr id="12" name="Text 10"/>
+          <p:cNvSpPr/>
+          <p:nvPr/>
+        </p:nvSpPr>
+        <p:spPr>
+          <a:xfrm>
+            <a:off x="8074152" y="1563624"/>
+            <a:ext cx="2825496" cy="201168"/>
+          </a:xfrm>
+          <a:prstGeom prst="rect">
+            <a:avLst/>
+          </a:prstGeom>
+          <a:noFill/>
+          <a:ln/>
+        </p:spPr>
+        <p:txBody>
+          <a:bodyPr wrap="square" lIns="0" tIns="0" rIns="0" bIns="0" rtlCol="0" anchor="ctr"/>
+          <a:lstStyle/>
+          <a:p>
             <a:pPr indent="0" marL="0">
               <a:buNone/>
             </a:pPr>
             <a:r>
-              <a:rPr lang="en-US" sz="1420" dirty="0">
+              <a:rPr lang="en-US" sz="950" b="1" dirty="0">
+                <a:solidFill>
+                  <a:srgbClr val="0068B7"/>
+                </a:solidFill>
+                <a:latin typeface="Aptos" pitchFamily="34" charset="0"/>
+                <a:ea typeface="Aptos" pitchFamily="34" charset="-122"/>
+                <a:cs typeface="Aptos" pitchFamily="34" charset="-120"/>
+              </a:rPr>
+              <a:t>Key idea</a:t>
+            </a:r>
+            <a:endParaRPr lang="en-US" sz="950" dirty="0"/>
+          </a:p>
+        </p:txBody>
+      </p:sp>
+      <p:sp>
+        <p:nvSpPr>
+          <p:cNvPr id="13" name="Text 11"/>
+          <p:cNvSpPr/>
+          <p:nvPr/>
+        </p:nvSpPr>
+        <p:spPr>
+          <a:xfrm>
+            <a:off x="8074152" y="1856232"/>
+            <a:ext cx="2825496" cy="1261872"/>
+          </a:xfrm>
+          <a:prstGeom prst="rect">
+            <a:avLst/>
+          </a:prstGeom>
+          <a:noFill/>
+          <a:ln/>
+        </p:spPr>
+        <p:txBody>
+          <a:bodyPr wrap="square" lIns="0" tIns="0" rIns="0" bIns="0" rtlCol="0" anchor="t">
+            <a:normAutofit/>
+          </a:bodyPr>
+          <a:lstStyle/>
+          <a:p>
+            <a:pPr indent="0" marL="0">
+              <a:buNone/>
+            </a:pPr>
+            <a:r>
+              <a:rPr lang="en-US" sz="1250" dirty="0">
                 <a:solidFill>
                   <a:srgbClr val="17364A"/>
                 </a:solidFill>
@@ -4085,9 +5734,116 @@
                 <a:ea typeface="Aptos" pitchFamily="34" charset="-122"/>
                 <a:cs typeface="Aptos" pitchFamily="34" charset="-120"/>
               </a:rPr>
-              <a:t>What review criteria are needed for equity, accessibility, language, and tone? What documentation is required before the output can be used?</a:t>
-            </a:r>
-            <a:endParaRPr lang="en-US" sz="1420" dirty="0"/>
+              <a:t>Generative AI output evaluation applies to drafting, summarization, classification, translation, code generation, and.</a:t>
+            </a:r>
+            <a:endParaRPr lang="en-US" sz="1250" dirty="0"/>
+          </a:p>
+        </p:txBody>
+      </p:sp>
+      <p:sp>
+        <p:nvSpPr>
+          <p:cNvPr id="14" name="Shape 12"/>
+          <p:cNvSpPr/>
+          <p:nvPr/>
+        </p:nvSpPr>
+        <p:spPr>
+          <a:xfrm>
+            <a:off x="7909560" y="3520440"/>
+            <a:ext cx="3154680" cy="1737360"/>
+          </a:xfrm>
+          <a:prstGeom prst="roundRect">
+            <a:avLst>
+              <a:gd name="adj" fmla="val 6316"/>
+            </a:avLst>
+          </a:prstGeom>
+          <a:solidFill>
+            <a:srgbClr val="EAF6F8"/>
+          </a:solidFill>
+          <a:ln w="12700">
+            <a:solidFill>
+              <a:srgbClr val="B9D7E6"/>
+            </a:solidFill>
+            <a:prstDash val="solid"/>
+          </a:ln>
+        </p:spPr>
+      </p:sp>
+      <p:sp>
+        <p:nvSpPr>
+          <p:cNvPr id="15" name="Text 13"/>
+          <p:cNvSpPr/>
+          <p:nvPr/>
+        </p:nvSpPr>
+        <p:spPr>
+          <a:xfrm>
+            <a:off x="8074152" y="3666744"/>
+            <a:ext cx="2825496" cy="201168"/>
+          </a:xfrm>
+          <a:prstGeom prst="rect">
+            <a:avLst/>
+          </a:prstGeom>
+          <a:noFill/>
+          <a:ln/>
+        </p:spPr>
+        <p:txBody>
+          <a:bodyPr wrap="square" lIns="0" tIns="0" rIns="0" bIns="0" rtlCol="0" anchor="ctr"/>
+          <a:lstStyle/>
+          <a:p>
+            <a:pPr indent="0" marL="0">
+              <a:buNone/>
+            </a:pPr>
+            <a:r>
+              <a:rPr lang="en-US" sz="950" b="1" dirty="0">
+                <a:solidFill>
+                  <a:srgbClr val="0068B7"/>
+                </a:solidFill>
+                <a:latin typeface="Aptos" pitchFamily="34" charset="0"/>
+                <a:ea typeface="Aptos" pitchFamily="34" charset="-122"/>
+                <a:cs typeface="Aptos" pitchFamily="34" charset="-120"/>
+              </a:rPr>
+              <a:t>Use this for</a:t>
+            </a:r>
+            <a:endParaRPr lang="en-US" sz="950" dirty="0"/>
+          </a:p>
+        </p:txBody>
+      </p:sp>
+      <p:sp>
+        <p:nvSpPr>
+          <p:cNvPr id="16" name="Text 14"/>
+          <p:cNvSpPr/>
+          <p:nvPr/>
+        </p:nvSpPr>
+        <p:spPr>
+          <a:xfrm>
+            <a:off x="8074152" y="3959352"/>
+            <a:ext cx="2825496" cy="1170432"/>
+          </a:xfrm>
+          <a:prstGeom prst="rect">
+            <a:avLst/>
+          </a:prstGeom>
+          <a:noFill/>
+          <a:ln/>
+        </p:spPr>
+        <p:txBody>
+          <a:bodyPr wrap="square" lIns="0" tIns="0" rIns="0" bIns="0" rtlCol="0" anchor="t">
+            <a:normAutofit/>
+          </a:bodyPr>
+          <a:lstStyle/>
+          <a:p>
+            <a:pPr indent="0" marL="0">
+              <a:buNone/>
+            </a:pPr>
+            <a:r>
+              <a:rPr lang="en-US" sz="1250" dirty="0">
+                <a:solidFill>
+                  <a:srgbClr val="17364A"/>
+                </a:solidFill>
+                <a:latin typeface="Aptos" pitchFamily="34" charset="0"/>
+                <a:ea typeface="Aptos" pitchFamily="34" charset="-122"/>
+                <a:cs typeface="Aptos" pitchFamily="34" charset="-120"/>
+              </a:rPr>
+              <a:t>Connect the concept to public health decisions, safeguards, documentation, or implementation work.</a:t>
+            </a:r>
+            <a:endParaRPr lang="en-US" sz="1250" dirty="0"/>
           </a:p>
         </p:txBody>
       </p:sp>
@@ -4150,7 +5906,32 @@
       </p:sp>
       <p:sp>
         <p:nvSpPr>
-          <p:cNvPr id="3" name="Text 1"/>
+          <p:cNvPr id="3" name="Shape 1"/>
+          <p:cNvSpPr/>
+          <p:nvPr/>
+        </p:nvSpPr>
+        <p:spPr>
+          <a:xfrm>
+            <a:off x="0" y="164592"/>
+            <a:ext cx="146304" cy="6693408"/>
+          </a:xfrm>
+          <a:prstGeom prst="rect">
+            <a:avLst/>
+          </a:prstGeom>
+          <a:solidFill>
+            <a:srgbClr val="2F8A28"/>
+          </a:solidFill>
+          <a:ln w="12700">
+            <a:solidFill>
+              <a:srgbClr val="2F8A28"/>
+            </a:solidFill>
+            <a:prstDash val="solid"/>
+          </a:ln>
+        </p:spPr>
+      </p:sp>
+      <p:sp>
+        <p:nvSpPr>
+          <p:cNvPr id="4" name="Text 2"/>
           <p:cNvSpPr/>
           <p:nvPr/>
         </p:nvSpPr>
@@ -4189,7 +5970,7 @@
       </p:sp>
       <p:sp>
         <p:nvSpPr>
-          <p:cNvPr id="4" name="Text 2"/>
+          <p:cNvPr id="5" name="Text 3"/>
           <p:cNvSpPr/>
           <p:nvPr/>
         </p:nvSpPr>
@@ -4228,7 +6009,7 @@
       </p:sp>
       <p:sp>
         <p:nvSpPr>
-          <p:cNvPr id="5" name="Text 3"/>
+          <p:cNvPr id="6" name="Text 4"/>
           <p:cNvSpPr/>
           <p:nvPr/>
         </p:nvSpPr>
@@ -4267,13 +6048,77 @@
       </p:sp>
       <p:sp>
         <p:nvSpPr>
-          <p:cNvPr id="6" name="Text 4"/>
+          <p:cNvPr id="7" name="Shape 5"/>
           <p:cNvSpPr/>
           <p:nvPr/>
         </p:nvSpPr>
         <p:spPr>
           <a:xfrm>
             <a:off x="640080" y="658368"/>
+            <a:ext cx="420624" cy="420624"/>
+          </a:xfrm>
+          <a:prstGeom prst="ellipse">
+            <a:avLst/>
+          </a:prstGeom>
+          <a:solidFill>
+            <a:srgbClr val="0068B7"/>
+          </a:solidFill>
+          <a:ln w="12700">
+            <a:solidFill>
+              <a:srgbClr val="0068B7"/>
+            </a:solidFill>
+            <a:prstDash val="solid"/>
+          </a:ln>
+        </p:spPr>
+      </p:sp>
+      <p:sp>
+        <p:nvSpPr>
+          <p:cNvPr id="8" name="Text 6"/>
+          <p:cNvSpPr/>
+          <p:nvPr/>
+        </p:nvSpPr>
+        <p:spPr>
+          <a:xfrm>
+            <a:off x="640080" y="731520"/>
+            <a:ext cx="420624" cy="164592"/>
+          </a:xfrm>
+          <a:prstGeom prst="rect">
+            <a:avLst/>
+          </a:prstGeom>
+          <a:noFill/>
+          <a:ln/>
+        </p:spPr>
+        <p:txBody>
+          <a:bodyPr wrap="square" lIns="0" tIns="0" rIns="0" bIns="0" rtlCol="0" anchor="ctr"/>
+          <a:lstStyle/>
+          <a:p>
+            <a:pPr algn="ctr" indent="0" marL="0">
+              <a:buNone/>
+            </a:pPr>
+            <a:r>
+              <a:rPr lang="en-US" sz="1100" b="1" dirty="0">
+                <a:solidFill>
+                  <a:srgbClr val="FFFFFF"/>
+                </a:solidFill>
+                <a:latin typeface="Aptos" pitchFamily="34" charset="0"/>
+                <a:ea typeface="Aptos" pitchFamily="34" charset="-122"/>
+                <a:cs typeface="Aptos" pitchFamily="34" charset="-120"/>
+              </a:rPr>
+              <a:t>8</a:t>
+            </a:r>
+            <a:endParaRPr lang="en-US" sz="1100" dirty="0"/>
+          </a:p>
+        </p:txBody>
+      </p:sp>
+      <p:sp>
+        <p:nvSpPr>
+          <p:cNvPr id="9" name="Text 7"/>
+          <p:cNvSpPr/>
+          <p:nvPr/>
+        </p:nvSpPr>
+        <p:spPr>
+          <a:xfrm>
+            <a:off x="640080" y="621792"/>
             <a:ext cx="10881360" cy="566928"/>
           </a:xfrm>
           <a:prstGeom prst="rect">
@@ -4300,7 +6145,7 @@
                 <a:ea typeface="Aptos Display" pitchFamily="34" charset="-122"/>
                 <a:cs typeface="Aptos Display" pitchFamily="34" charset="-120"/>
               </a:rPr>
-              <a:t>Practical Exercise</a:t>
+              <a:t>Reflection Questions</a:t>
             </a:r>
             <a:endParaRPr lang="en-US" sz="2700" dirty="0"/>
           </a:p>
@@ -4308,32 +6153,164 @@
       </p:sp>
       <p:sp>
         <p:nvSpPr>
-          <p:cNvPr id="7" name="Text 5"/>
-          <p:cNvSpPr/>
-          <p:nvPr/>
-        </p:nvSpPr>
-        <p:spPr>
-          <a:xfrm>
-            <a:off x="822960" y="1325880"/>
-            <a:ext cx="10378440" cy="4800600"/>
-          </a:xfrm>
-          <a:prstGeom prst="rect">
-            <a:avLst/>
-          </a:prstGeom>
-          <a:noFill/>
-          <a:ln/>
-        </p:spPr>
-        <p:txBody>
-          <a:bodyPr wrap="square" lIns="1016" tIns="1016" rIns="1016" bIns="1016" rtlCol="0" anchor="t">
+          <p:cNvPr id="10" name="Text 8"/>
+          <p:cNvSpPr/>
+          <p:nvPr/>
+        </p:nvSpPr>
+        <p:spPr>
+          <a:xfrm>
+            <a:off x="868680" y="1417320"/>
+            <a:ext cx="6675120" cy="4434840"/>
+          </a:xfrm>
+          <a:prstGeom prst="rect">
+            <a:avLst/>
+          </a:prstGeom>
+          <a:noFill/>
+          <a:ln/>
+        </p:spPr>
+        <p:txBody>
+          <a:bodyPr wrap="square" lIns="635" tIns="635" rIns="635" bIns="635" rtlCol="0" anchor="t">
             <a:normAutofit/>
           </a:bodyPr>
           <a:lstStyle/>
           <a:p>
+            <a:r>
+              <a:rPr lang="en-US" sz="1700" dirty="0">
+                <a:solidFill>
+                  <a:srgbClr val="17364A"/>
+                </a:solidFill>
+                <a:latin typeface="Aptos" pitchFamily="34" charset="0"/>
+                <a:ea typeface="Aptos" pitchFamily="34" charset="-122"/>
+                <a:cs typeface="Aptos" pitchFamily="34" charset="-120"/>
+              </a:rPr>
+              <a:t>What type of generative AI output is being evaluated?</a:t>
+            </a:r>
+            <a:endParaRPr lang="en-US" sz="1700" dirty="0"/>
+          </a:p>
+          <a:p>
+            <a:r>
+              <a:rPr lang="en-US" sz="1700" dirty="0">
+                <a:solidFill>
+                  <a:srgbClr val="17364A"/>
+                </a:solidFill>
+                <a:latin typeface="Aptos" pitchFamily="34" charset="0"/>
+                <a:ea typeface="Aptos" pitchFamily="34" charset="-122"/>
+                <a:cs typeface="Aptos" pitchFamily="34" charset="-120"/>
+              </a:rPr>
+              <a:t>What source material should be used to verify the output?</a:t>
+            </a:r>
+            <a:endParaRPr lang="en-US" sz="1700" dirty="0"/>
+          </a:p>
+          <a:p>
+            <a:r>
+              <a:rPr lang="en-US" sz="1700" dirty="0">
+                <a:solidFill>
+                  <a:srgbClr val="17364A"/>
+                </a:solidFill>
+                <a:latin typeface="Aptos" pitchFamily="34" charset="0"/>
+                <a:ea typeface="Aptos" pitchFamily="34" charset="-122"/>
+                <a:cs typeface="Aptos" pitchFamily="34" charset="-120"/>
+              </a:rPr>
+              <a:t>What errors or omissions would be most harmful?</a:t>
+            </a:r>
+            <a:endParaRPr lang="en-US" sz="1700" dirty="0"/>
+          </a:p>
+        </p:txBody>
+      </p:sp>
+      <p:sp>
+        <p:nvSpPr>
+          <p:cNvPr id="11" name="Shape 9"/>
+          <p:cNvSpPr/>
+          <p:nvPr/>
+        </p:nvSpPr>
+        <p:spPr>
+          <a:xfrm>
+            <a:off x="7909560" y="1417320"/>
+            <a:ext cx="3154680" cy="1828800"/>
+          </a:xfrm>
+          <a:prstGeom prst="roundRect">
+            <a:avLst>
+              <a:gd name="adj" fmla="val 6000"/>
+            </a:avLst>
+          </a:prstGeom>
+          <a:solidFill>
+            <a:srgbClr val="EEF8ED"/>
+          </a:solidFill>
+          <a:ln w="12700">
+            <a:solidFill>
+              <a:srgbClr val="B9D7E6"/>
+            </a:solidFill>
+            <a:prstDash val="solid"/>
+          </a:ln>
+        </p:spPr>
+      </p:sp>
+      <p:sp>
+        <p:nvSpPr>
+          <p:cNvPr id="12" name="Text 10"/>
+          <p:cNvSpPr/>
+          <p:nvPr/>
+        </p:nvSpPr>
+        <p:spPr>
+          <a:xfrm>
+            <a:off x="8074152" y="1563624"/>
+            <a:ext cx="2825496" cy="201168"/>
+          </a:xfrm>
+          <a:prstGeom prst="rect">
+            <a:avLst/>
+          </a:prstGeom>
+          <a:noFill/>
+          <a:ln/>
+        </p:spPr>
+        <p:txBody>
+          <a:bodyPr wrap="square" lIns="0" tIns="0" rIns="0" bIns="0" rtlCol="0" anchor="ctr"/>
+          <a:lstStyle/>
+          <a:p>
             <a:pPr indent="0" marL="0">
               <a:buNone/>
             </a:pPr>
             <a:r>
-              <a:rPr lang="en-US" sz="1420" dirty="0">
+              <a:rPr lang="en-US" sz="950" b="1" dirty="0">
+                <a:solidFill>
+                  <a:srgbClr val="0068B7"/>
+                </a:solidFill>
+                <a:latin typeface="Aptos" pitchFamily="34" charset="0"/>
+                <a:ea typeface="Aptos" pitchFamily="34" charset="-122"/>
+                <a:cs typeface="Aptos" pitchFamily="34" charset="-120"/>
+              </a:rPr>
+              <a:t>Key idea</a:t>
+            </a:r>
+            <a:endParaRPr lang="en-US" sz="950" dirty="0"/>
+          </a:p>
+        </p:txBody>
+      </p:sp>
+      <p:sp>
+        <p:nvSpPr>
+          <p:cNvPr id="13" name="Text 11"/>
+          <p:cNvSpPr/>
+          <p:nvPr/>
+        </p:nvSpPr>
+        <p:spPr>
+          <a:xfrm>
+            <a:off x="8074152" y="1856232"/>
+            <a:ext cx="2825496" cy="1261872"/>
+          </a:xfrm>
+          <a:prstGeom prst="rect">
+            <a:avLst/>
+          </a:prstGeom>
+          <a:noFill/>
+          <a:ln/>
+        </p:spPr>
+        <p:txBody>
+          <a:bodyPr wrap="square" lIns="0" tIns="0" rIns="0" bIns="0" rtlCol="0" anchor="t">
+            <a:normAutofit/>
+          </a:bodyPr>
+          <a:lstStyle/>
+          <a:p>
+            <a:pPr indent="0" marL="0">
+              <a:buNone/>
+            </a:pPr>
+            <a:r>
+              <a:rPr lang="en-US" sz="1250" dirty="0">
                 <a:solidFill>
                   <a:srgbClr val="17364A"/>
                 </a:solidFill>
@@ -4341,9 +6318,116 @@
                 <a:ea typeface="Aptos" pitchFamily="34" charset="-122"/>
                 <a:cs typeface="Aptos" pitchFamily="34" charset="-120"/>
               </a:rPr>
-              <a:t>Create a generative AI output evaluation rubric for one public health use case. Include intended use, source verification, factuality, completeness, unsupported claims, omissions, bias, tone, accessibility, privacy, approval requirements, and escalation criteria. Then apply the rubric to a sample AI-generated output and document whether the output should be accepted, edited, rejected, or escalated.</a:t>
-            </a:r>
-            <a:endParaRPr lang="en-US" sz="1420" dirty="0"/>
+              <a:t>What type of generative AI output is being evaluated?</a:t>
+            </a:r>
+            <a:endParaRPr lang="en-US" sz="1250" dirty="0"/>
+          </a:p>
+        </p:txBody>
+      </p:sp>
+      <p:sp>
+        <p:nvSpPr>
+          <p:cNvPr id="14" name="Shape 12"/>
+          <p:cNvSpPr/>
+          <p:nvPr/>
+        </p:nvSpPr>
+        <p:spPr>
+          <a:xfrm>
+            <a:off x="7909560" y="3520440"/>
+            <a:ext cx="3154680" cy="1737360"/>
+          </a:xfrm>
+          <a:prstGeom prst="roundRect">
+            <a:avLst>
+              <a:gd name="adj" fmla="val 6316"/>
+            </a:avLst>
+          </a:prstGeom>
+          <a:solidFill>
+            <a:srgbClr val="EAF6F8"/>
+          </a:solidFill>
+          <a:ln w="12700">
+            <a:solidFill>
+              <a:srgbClr val="B9D7E6"/>
+            </a:solidFill>
+            <a:prstDash val="solid"/>
+          </a:ln>
+        </p:spPr>
+      </p:sp>
+      <p:sp>
+        <p:nvSpPr>
+          <p:cNvPr id="15" name="Text 13"/>
+          <p:cNvSpPr/>
+          <p:nvPr/>
+        </p:nvSpPr>
+        <p:spPr>
+          <a:xfrm>
+            <a:off x="8074152" y="3666744"/>
+            <a:ext cx="2825496" cy="201168"/>
+          </a:xfrm>
+          <a:prstGeom prst="rect">
+            <a:avLst/>
+          </a:prstGeom>
+          <a:noFill/>
+          <a:ln/>
+        </p:spPr>
+        <p:txBody>
+          <a:bodyPr wrap="square" lIns="0" tIns="0" rIns="0" bIns="0" rtlCol="0" anchor="ctr"/>
+          <a:lstStyle/>
+          <a:p>
+            <a:pPr indent="0" marL="0">
+              <a:buNone/>
+            </a:pPr>
+            <a:r>
+              <a:rPr lang="en-US" sz="950" b="1" dirty="0">
+                <a:solidFill>
+                  <a:srgbClr val="0068B7"/>
+                </a:solidFill>
+                <a:latin typeface="Aptos" pitchFamily="34" charset="0"/>
+                <a:ea typeface="Aptos" pitchFamily="34" charset="-122"/>
+                <a:cs typeface="Aptos" pitchFamily="34" charset="-120"/>
+              </a:rPr>
+              <a:t>Use this for</a:t>
+            </a:r>
+            <a:endParaRPr lang="en-US" sz="950" dirty="0"/>
+          </a:p>
+        </p:txBody>
+      </p:sp>
+      <p:sp>
+        <p:nvSpPr>
+          <p:cNvPr id="16" name="Text 14"/>
+          <p:cNvSpPr/>
+          <p:nvPr/>
+        </p:nvSpPr>
+        <p:spPr>
+          <a:xfrm>
+            <a:off x="8074152" y="3959352"/>
+            <a:ext cx="2825496" cy="1170432"/>
+          </a:xfrm>
+          <a:prstGeom prst="rect">
+            <a:avLst/>
+          </a:prstGeom>
+          <a:noFill/>
+          <a:ln/>
+        </p:spPr>
+        <p:txBody>
+          <a:bodyPr wrap="square" lIns="0" tIns="0" rIns="0" bIns="0" rtlCol="0" anchor="t">
+            <a:normAutofit/>
+          </a:bodyPr>
+          <a:lstStyle/>
+          <a:p>
+            <a:pPr indent="0" marL="0">
+              <a:buNone/>
+            </a:pPr>
+            <a:r>
+              <a:rPr lang="en-US" sz="1250" dirty="0">
+                <a:solidFill>
+                  <a:srgbClr val="17364A"/>
+                </a:solidFill>
+                <a:latin typeface="Aptos" pitchFamily="34" charset="0"/>
+                <a:ea typeface="Aptos" pitchFamily="34" charset="-122"/>
+                <a:cs typeface="Aptos" pitchFamily="34" charset="-120"/>
+              </a:rPr>
+              <a:t>Connect the concept to public health decisions, safeguards, documentation, or implementation work.</a:t>
+            </a:r>
+            <a:endParaRPr lang="en-US" sz="1250" dirty="0"/>
           </a:p>
         </p:txBody>
       </p:sp>
@@ -4406,7 +6490,32 @@
       </p:sp>
       <p:sp>
         <p:nvSpPr>
-          <p:cNvPr id="3" name="Text 1"/>
+          <p:cNvPr id="3" name="Shape 1"/>
+          <p:cNvSpPr/>
+          <p:nvPr/>
+        </p:nvSpPr>
+        <p:spPr>
+          <a:xfrm>
+            <a:off x="0" y="164592"/>
+            <a:ext cx="146304" cy="6693408"/>
+          </a:xfrm>
+          <a:prstGeom prst="rect">
+            <a:avLst/>
+          </a:prstGeom>
+          <a:solidFill>
+            <a:srgbClr val="2F8A28"/>
+          </a:solidFill>
+          <a:ln w="12700">
+            <a:solidFill>
+              <a:srgbClr val="2F8A28"/>
+            </a:solidFill>
+            <a:prstDash val="solid"/>
+          </a:ln>
+        </p:spPr>
+      </p:sp>
+      <p:sp>
+        <p:nvSpPr>
+          <p:cNvPr id="4" name="Text 2"/>
           <p:cNvSpPr/>
           <p:nvPr/>
         </p:nvSpPr>
@@ -4445,7 +6554,7 @@
       </p:sp>
       <p:sp>
         <p:nvSpPr>
-          <p:cNvPr id="4" name="Text 2"/>
+          <p:cNvPr id="5" name="Text 3"/>
           <p:cNvSpPr/>
           <p:nvPr/>
         </p:nvSpPr>
@@ -4484,7 +6593,7 @@
       </p:sp>
       <p:sp>
         <p:nvSpPr>
-          <p:cNvPr id="5" name="Text 3"/>
+          <p:cNvPr id="6" name="Text 4"/>
           <p:cNvSpPr/>
           <p:nvPr/>
         </p:nvSpPr>
@@ -4523,7 +6632,7 @@
       </p:sp>
       <p:sp>
         <p:nvSpPr>
-          <p:cNvPr id="6" name="Text 4"/>
+          <p:cNvPr id="7" name="Text 5"/>
           <p:cNvSpPr/>
           <p:nvPr/>
         </p:nvSpPr>
@@ -4556,7 +6665,7 @@
                 <a:ea typeface="Aptos Display" pitchFamily="34" charset="-122"/>
                 <a:cs typeface="Aptos Display" pitchFamily="34" charset="-120"/>
               </a:rPr>
-              <a:t>Expected Artifact or Evidence</a:t>
+              <a:t>Reflection Questions Continued</a:t>
             </a:r>
             <a:endParaRPr lang="en-US" sz="2700" dirty="0"/>
           </a:p>
@@ -4564,32 +6673,150 @@
       </p:sp>
       <p:sp>
         <p:nvSpPr>
-          <p:cNvPr id="7" name="Text 5"/>
-          <p:cNvSpPr/>
-          <p:nvPr/>
-        </p:nvSpPr>
-        <p:spPr>
-          <a:xfrm>
-            <a:off x="822960" y="1325880"/>
-            <a:ext cx="10378440" cy="4800600"/>
-          </a:xfrm>
-          <a:prstGeom prst="rect">
-            <a:avLst/>
-          </a:prstGeom>
-          <a:noFill/>
-          <a:ln/>
-        </p:spPr>
-        <p:txBody>
-          <a:bodyPr wrap="square" lIns="1016" tIns="1016" rIns="1016" bIns="1016" rtlCol="0" anchor="t">
+          <p:cNvPr id="8" name="Text 6"/>
+          <p:cNvSpPr/>
+          <p:nvPr/>
+        </p:nvSpPr>
+        <p:spPr>
+          <a:xfrm>
+            <a:off x="868680" y="1417320"/>
+            <a:ext cx="6675120" cy="4434840"/>
+          </a:xfrm>
+          <a:prstGeom prst="rect">
+            <a:avLst/>
+          </a:prstGeom>
+          <a:noFill/>
+          <a:ln/>
+        </p:spPr>
+        <p:txBody>
+          <a:bodyPr wrap="square" lIns="635" tIns="635" rIns="635" bIns="635" rtlCol="0" anchor="t">
             <a:normAutofit/>
           </a:bodyPr>
           <a:lstStyle/>
           <a:p>
+            <a:r>
+              <a:rPr lang="en-US" sz="1700" dirty="0">
+                <a:solidFill>
+                  <a:srgbClr val="17364A"/>
+                </a:solidFill>
+                <a:latin typeface="Aptos" pitchFamily="34" charset="0"/>
+                <a:ea typeface="Aptos" pitchFamily="34" charset="-122"/>
+                <a:cs typeface="Aptos" pitchFamily="34" charset="-120"/>
+              </a:rPr>
+              <a:t>What review criteria are needed for equity, accessibility, language, and tone?</a:t>
+            </a:r>
+            <a:endParaRPr lang="en-US" sz="1700" dirty="0"/>
+          </a:p>
+          <a:p>
+            <a:r>
+              <a:rPr lang="en-US" sz="1700" dirty="0">
+                <a:solidFill>
+                  <a:srgbClr val="17364A"/>
+                </a:solidFill>
+                <a:latin typeface="Aptos" pitchFamily="34" charset="0"/>
+                <a:ea typeface="Aptos" pitchFamily="34" charset="-122"/>
+                <a:cs typeface="Aptos" pitchFamily="34" charset="-120"/>
+              </a:rPr>
+              <a:t>What documentation is required before the output can be used?</a:t>
+            </a:r>
+            <a:endParaRPr lang="en-US" sz="1700" dirty="0"/>
+          </a:p>
+        </p:txBody>
+      </p:sp>
+      <p:sp>
+        <p:nvSpPr>
+          <p:cNvPr id="9" name="Shape 7"/>
+          <p:cNvSpPr/>
+          <p:nvPr/>
+        </p:nvSpPr>
+        <p:spPr>
+          <a:xfrm>
+            <a:off x="7909560" y="1417320"/>
+            <a:ext cx="3154680" cy="1828800"/>
+          </a:xfrm>
+          <a:prstGeom prst="roundRect">
+            <a:avLst>
+              <a:gd name="adj" fmla="val 6000"/>
+            </a:avLst>
+          </a:prstGeom>
+          <a:solidFill>
+            <a:srgbClr val="EEF8ED"/>
+          </a:solidFill>
+          <a:ln w="12700">
+            <a:solidFill>
+              <a:srgbClr val="B9D7E6"/>
+            </a:solidFill>
+            <a:prstDash val="solid"/>
+          </a:ln>
+        </p:spPr>
+      </p:sp>
+      <p:sp>
+        <p:nvSpPr>
+          <p:cNvPr id="10" name="Text 8"/>
+          <p:cNvSpPr/>
+          <p:nvPr/>
+        </p:nvSpPr>
+        <p:spPr>
+          <a:xfrm>
+            <a:off x="8074152" y="1563624"/>
+            <a:ext cx="2825496" cy="201168"/>
+          </a:xfrm>
+          <a:prstGeom prst="rect">
+            <a:avLst/>
+          </a:prstGeom>
+          <a:noFill/>
+          <a:ln/>
+        </p:spPr>
+        <p:txBody>
+          <a:bodyPr wrap="square" lIns="0" tIns="0" rIns="0" bIns="0" rtlCol="0" anchor="ctr"/>
+          <a:lstStyle/>
+          <a:p>
             <a:pPr indent="0" marL="0">
               <a:buNone/>
             </a:pPr>
             <a:r>
-              <a:rPr lang="en-US" sz="1420" dirty="0">
+              <a:rPr lang="en-US" sz="950" b="1" dirty="0">
+                <a:solidFill>
+                  <a:srgbClr val="0068B7"/>
+                </a:solidFill>
+                <a:latin typeface="Aptos" pitchFamily="34" charset="0"/>
+                <a:ea typeface="Aptos" pitchFamily="34" charset="-122"/>
+                <a:cs typeface="Aptos" pitchFamily="34" charset="-120"/>
+              </a:rPr>
+              <a:t>Key idea</a:t>
+            </a:r>
+            <a:endParaRPr lang="en-US" sz="950" dirty="0"/>
+          </a:p>
+        </p:txBody>
+      </p:sp>
+      <p:sp>
+        <p:nvSpPr>
+          <p:cNvPr id="11" name="Text 9"/>
+          <p:cNvSpPr/>
+          <p:nvPr/>
+        </p:nvSpPr>
+        <p:spPr>
+          <a:xfrm>
+            <a:off x="8074152" y="1856232"/>
+            <a:ext cx="2825496" cy="1261872"/>
+          </a:xfrm>
+          <a:prstGeom prst="rect">
+            <a:avLst/>
+          </a:prstGeom>
+          <a:noFill/>
+          <a:ln/>
+        </p:spPr>
+        <p:txBody>
+          <a:bodyPr wrap="square" lIns="0" tIns="0" rIns="0" bIns="0" rtlCol="0" anchor="t">
+            <a:normAutofit/>
+          </a:bodyPr>
+          <a:lstStyle/>
+          <a:p>
+            <a:pPr indent="0" marL="0">
+              <a:buNone/>
+            </a:pPr>
+            <a:r>
+              <a:rPr lang="en-US" sz="1250" dirty="0">
                 <a:solidFill>
                   <a:srgbClr val="17364A"/>
                 </a:solidFill>
@@ -4597,9 +6824,116 @@
                 <a:ea typeface="Aptos" pitchFamily="34" charset="-122"/>
                 <a:cs typeface="Aptos" pitchFamily="34" charset="-120"/>
               </a:rPr>
-              <a:t>Generative AI output evaluation rubric Completed sample review Source verification notes</a:t>
-            </a:r>
-            <a:endParaRPr lang="en-US" sz="1420" dirty="0"/>
+              <a:t>What review criteria are needed for equity, accessibility, language, and tone?</a:t>
+            </a:r>
+            <a:endParaRPr lang="en-US" sz="1250" dirty="0"/>
+          </a:p>
+        </p:txBody>
+      </p:sp>
+      <p:sp>
+        <p:nvSpPr>
+          <p:cNvPr id="12" name="Shape 10"/>
+          <p:cNvSpPr/>
+          <p:nvPr/>
+        </p:nvSpPr>
+        <p:spPr>
+          <a:xfrm>
+            <a:off x="7909560" y="3520440"/>
+            <a:ext cx="3154680" cy="1737360"/>
+          </a:xfrm>
+          <a:prstGeom prst="roundRect">
+            <a:avLst>
+              <a:gd name="adj" fmla="val 6316"/>
+            </a:avLst>
+          </a:prstGeom>
+          <a:solidFill>
+            <a:srgbClr val="EAF6F8"/>
+          </a:solidFill>
+          <a:ln w="12700">
+            <a:solidFill>
+              <a:srgbClr val="B9D7E6"/>
+            </a:solidFill>
+            <a:prstDash val="solid"/>
+          </a:ln>
+        </p:spPr>
+      </p:sp>
+      <p:sp>
+        <p:nvSpPr>
+          <p:cNvPr id="13" name="Text 11"/>
+          <p:cNvSpPr/>
+          <p:nvPr/>
+        </p:nvSpPr>
+        <p:spPr>
+          <a:xfrm>
+            <a:off x="8074152" y="3666744"/>
+            <a:ext cx="2825496" cy="201168"/>
+          </a:xfrm>
+          <a:prstGeom prst="rect">
+            <a:avLst/>
+          </a:prstGeom>
+          <a:noFill/>
+          <a:ln/>
+        </p:spPr>
+        <p:txBody>
+          <a:bodyPr wrap="square" lIns="0" tIns="0" rIns="0" bIns="0" rtlCol="0" anchor="ctr"/>
+          <a:lstStyle/>
+          <a:p>
+            <a:pPr indent="0" marL="0">
+              <a:buNone/>
+            </a:pPr>
+            <a:r>
+              <a:rPr lang="en-US" sz="950" b="1" dirty="0">
+                <a:solidFill>
+                  <a:srgbClr val="0068B7"/>
+                </a:solidFill>
+                <a:latin typeface="Aptos" pitchFamily="34" charset="0"/>
+                <a:ea typeface="Aptos" pitchFamily="34" charset="-122"/>
+                <a:cs typeface="Aptos" pitchFamily="34" charset="-120"/>
+              </a:rPr>
+              <a:t>Use this for</a:t>
+            </a:r>
+            <a:endParaRPr lang="en-US" sz="950" dirty="0"/>
+          </a:p>
+        </p:txBody>
+      </p:sp>
+      <p:sp>
+        <p:nvSpPr>
+          <p:cNvPr id="14" name="Text 12"/>
+          <p:cNvSpPr/>
+          <p:nvPr/>
+        </p:nvSpPr>
+        <p:spPr>
+          <a:xfrm>
+            <a:off x="8074152" y="3959352"/>
+            <a:ext cx="2825496" cy="1170432"/>
+          </a:xfrm>
+          <a:prstGeom prst="rect">
+            <a:avLst/>
+          </a:prstGeom>
+          <a:noFill/>
+          <a:ln/>
+        </p:spPr>
+        <p:txBody>
+          <a:bodyPr wrap="square" lIns="0" tIns="0" rIns="0" bIns="0" rtlCol="0" anchor="t">
+            <a:normAutofit/>
+          </a:bodyPr>
+          <a:lstStyle/>
+          <a:p>
+            <a:pPr indent="0" marL="0">
+              <a:buNone/>
+            </a:pPr>
+            <a:r>
+              <a:rPr lang="en-US" sz="1250" dirty="0">
+                <a:solidFill>
+                  <a:srgbClr val="17364A"/>
+                </a:solidFill>
+                <a:latin typeface="Aptos" pitchFamily="34" charset="0"/>
+                <a:ea typeface="Aptos" pitchFamily="34" charset="-122"/>
+                <a:cs typeface="Aptos" pitchFamily="34" charset="-120"/>
+              </a:rPr>
+              <a:t>Connect the concept to public health decisions, safeguards, documentation, or implementation work.</a:t>
+            </a:r>
+            <a:endParaRPr lang="en-US" sz="1250" dirty="0"/>
           </a:p>
         </p:txBody>
       </p:sp>
@@ -4662,7 +6996,32 @@
       </p:sp>
       <p:sp>
         <p:nvSpPr>
-          <p:cNvPr id="3" name="Text 1"/>
+          <p:cNvPr id="3" name="Shape 1"/>
+          <p:cNvSpPr/>
+          <p:nvPr/>
+        </p:nvSpPr>
+        <p:spPr>
+          <a:xfrm>
+            <a:off x="0" y="164592"/>
+            <a:ext cx="146304" cy="6693408"/>
+          </a:xfrm>
+          <a:prstGeom prst="rect">
+            <a:avLst/>
+          </a:prstGeom>
+          <a:solidFill>
+            <a:srgbClr val="2F8A28"/>
+          </a:solidFill>
+          <a:ln w="12700">
+            <a:solidFill>
+              <a:srgbClr val="2F8A28"/>
+            </a:solidFill>
+            <a:prstDash val="solid"/>
+          </a:ln>
+        </p:spPr>
+      </p:sp>
+      <p:sp>
+        <p:nvSpPr>
+          <p:cNvPr id="4" name="Text 2"/>
           <p:cNvSpPr/>
           <p:nvPr/>
         </p:nvSpPr>
@@ -4701,7 +7060,7 @@
       </p:sp>
       <p:sp>
         <p:nvSpPr>
-          <p:cNvPr id="4" name="Text 2"/>
+          <p:cNvPr id="5" name="Text 3"/>
           <p:cNvSpPr/>
           <p:nvPr/>
         </p:nvSpPr>
@@ -4740,7 +7099,7 @@
       </p:sp>
       <p:sp>
         <p:nvSpPr>
-          <p:cNvPr id="5" name="Text 3"/>
+          <p:cNvPr id="6" name="Text 4"/>
           <p:cNvSpPr/>
           <p:nvPr/>
         </p:nvSpPr>
@@ -4779,13 +7138,77 @@
       </p:sp>
       <p:sp>
         <p:nvSpPr>
-          <p:cNvPr id="6" name="Text 4"/>
+          <p:cNvPr id="7" name="Shape 5"/>
           <p:cNvSpPr/>
           <p:nvPr/>
         </p:nvSpPr>
         <p:spPr>
           <a:xfrm>
             <a:off x="640080" y="658368"/>
+            <a:ext cx="420624" cy="420624"/>
+          </a:xfrm>
+          <a:prstGeom prst="ellipse">
+            <a:avLst/>
+          </a:prstGeom>
+          <a:solidFill>
+            <a:srgbClr val="0068B7"/>
+          </a:solidFill>
+          <a:ln w="12700">
+            <a:solidFill>
+              <a:srgbClr val="0068B7"/>
+            </a:solidFill>
+            <a:prstDash val="solid"/>
+          </a:ln>
+        </p:spPr>
+      </p:sp>
+      <p:sp>
+        <p:nvSpPr>
+          <p:cNvPr id="8" name="Text 6"/>
+          <p:cNvSpPr/>
+          <p:nvPr/>
+        </p:nvSpPr>
+        <p:spPr>
+          <a:xfrm>
+            <a:off x="640080" y="731520"/>
+            <a:ext cx="420624" cy="164592"/>
+          </a:xfrm>
+          <a:prstGeom prst="rect">
+            <a:avLst/>
+          </a:prstGeom>
+          <a:noFill/>
+          <a:ln/>
+        </p:spPr>
+        <p:txBody>
+          <a:bodyPr wrap="square" lIns="0" tIns="0" rIns="0" bIns="0" rtlCol="0" anchor="ctr"/>
+          <a:lstStyle/>
+          <a:p>
+            <a:pPr algn="ctr" indent="0" marL="0">
+              <a:buNone/>
+            </a:pPr>
+            <a:r>
+              <a:rPr lang="en-US" sz="1100" b="1" dirty="0">
+                <a:solidFill>
+                  <a:srgbClr val="FFFFFF"/>
+                </a:solidFill>
+                <a:latin typeface="Aptos" pitchFamily="34" charset="0"/>
+                <a:ea typeface="Aptos" pitchFamily="34" charset="-122"/>
+                <a:cs typeface="Aptos" pitchFamily="34" charset="-120"/>
+              </a:rPr>
+              <a:t>9</a:t>
+            </a:r>
+            <a:endParaRPr lang="en-US" sz="1100" dirty="0"/>
+          </a:p>
+        </p:txBody>
+      </p:sp>
+      <p:sp>
+        <p:nvSpPr>
+          <p:cNvPr id="9" name="Text 7"/>
+          <p:cNvSpPr/>
+          <p:nvPr/>
+        </p:nvSpPr>
+        <p:spPr>
+          <a:xfrm>
+            <a:off x="640080" y="621792"/>
             <a:ext cx="10881360" cy="566928"/>
           </a:xfrm>
           <a:prstGeom prst="rect">
@@ -4812,7 +7235,7 @@
                 <a:ea typeface="Aptos Display" pitchFamily="34" charset="-122"/>
                 <a:cs typeface="Aptos Display" pitchFamily="34" charset="-120"/>
               </a:rPr>
-              <a:t>Expected Artifact or Evidence Continued</a:t>
+              <a:t>Practical Exercise</a:t>
             </a:r>
             <a:endParaRPr lang="en-US" sz="2700" dirty="0"/>
           </a:p>
@@ -4820,32 +7243,164 @@
       </p:sp>
       <p:sp>
         <p:nvSpPr>
-          <p:cNvPr id="7" name="Text 5"/>
-          <p:cNvSpPr/>
-          <p:nvPr/>
-        </p:nvSpPr>
-        <p:spPr>
-          <a:xfrm>
-            <a:off x="822960" y="1325880"/>
-            <a:ext cx="10378440" cy="4800600"/>
-          </a:xfrm>
-          <a:prstGeom prst="rect">
-            <a:avLst/>
-          </a:prstGeom>
-          <a:noFill/>
-          <a:ln/>
-        </p:spPr>
-        <p:txBody>
-          <a:bodyPr wrap="square" lIns="1016" tIns="1016" rIns="1016" bIns="1016" rtlCol="0" anchor="t">
+          <p:cNvPr id="10" name="Text 8"/>
+          <p:cNvSpPr/>
+          <p:nvPr/>
+        </p:nvSpPr>
+        <p:spPr>
+          <a:xfrm>
+            <a:off x="868680" y="1417320"/>
+            <a:ext cx="6675120" cy="4434840"/>
+          </a:xfrm>
+          <a:prstGeom prst="rect">
+            <a:avLst/>
+          </a:prstGeom>
+          <a:noFill/>
+          <a:ln/>
+        </p:spPr>
+        <p:txBody>
+          <a:bodyPr wrap="square" lIns="635" tIns="635" rIns="635" bIns="635" rtlCol="0" anchor="t">
             <a:normAutofit/>
           </a:bodyPr>
           <a:lstStyle/>
           <a:p>
+            <a:r>
+              <a:rPr lang="en-US" sz="1700" dirty="0">
+                <a:solidFill>
+                  <a:srgbClr val="17364A"/>
+                </a:solidFill>
+                <a:latin typeface="Aptos" pitchFamily="34" charset="0"/>
+                <a:ea typeface="Aptos" pitchFamily="34" charset="-122"/>
+                <a:cs typeface="Aptos" pitchFamily="34" charset="-120"/>
+              </a:rPr>
+              <a:t>Create a generative AI output evaluation rubric for one public health use case.</a:t>
+            </a:r>
+            <a:endParaRPr lang="en-US" sz="1700" dirty="0"/>
+          </a:p>
+          <a:p>
+            <a:r>
+              <a:rPr lang="en-US" sz="1700" dirty="0">
+                <a:solidFill>
+                  <a:srgbClr val="17364A"/>
+                </a:solidFill>
+                <a:latin typeface="Aptos" pitchFamily="34" charset="0"/>
+                <a:ea typeface="Aptos" pitchFamily="34" charset="-122"/>
+                <a:cs typeface="Aptos" pitchFamily="34" charset="-120"/>
+              </a:rPr>
+              <a:t>Include intended use, source verification, factuality, completeness, unsupported claims, omissions, bias, tone,.</a:t>
+            </a:r>
+            <a:endParaRPr lang="en-US" sz="1700" dirty="0"/>
+          </a:p>
+          <a:p>
+            <a:r>
+              <a:rPr lang="en-US" sz="1700" dirty="0">
+                <a:solidFill>
+                  <a:srgbClr val="17364A"/>
+                </a:solidFill>
+                <a:latin typeface="Aptos" pitchFamily="34" charset="0"/>
+                <a:ea typeface="Aptos" pitchFamily="34" charset="-122"/>
+                <a:cs typeface="Aptos" pitchFamily="34" charset="-120"/>
+              </a:rPr>
+              <a:t>Then apply the rubric to a sample AI-generated output and document whether the output should be accepted, edited, rejected,.</a:t>
+            </a:r>
+            <a:endParaRPr lang="en-US" sz="1700" dirty="0"/>
+          </a:p>
+        </p:txBody>
+      </p:sp>
+      <p:sp>
+        <p:nvSpPr>
+          <p:cNvPr id="11" name="Shape 9"/>
+          <p:cNvSpPr/>
+          <p:nvPr/>
+        </p:nvSpPr>
+        <p:spPr>
+          <a:xfrm>
+            <a:off x="7909560" y="1417320"/>
+            <a:ext cx="3154680" cy="1828800"/>
+          </a:xfrm>
+          <a:prstGeom prst="roundRect">
+            <a:avLst>
+              <a:gd name="adj" fmla="val 6000"/>
+            </a:avLst>
+          </a:prstGeom>
+          <a:solidFill>
+            <a:srgbClr val="EEF8ED"/>
+          </a:solidFill>
+          <a:ln w="12700">
+            <a:solidFill>
+              <a:srgbClr val="B9D7E6"/>
+            </a:solidFill>
+            <a:prstDash val="solid"/>
+          </a:ln>
+        </p:spPr>
+      </p:sp>
+      <p:sp>
+        <p:nvSpPr>
+          <p:cNvPr id="12" name="Text 10"/>
+          <p:cNvSpPr/>
+          <p:nvPr/>
+        </p:nvSpPr>
+        <p:spPr>
+          <a:xfrm>
+            <a:off x="8074152" y="1563624"/>
+            <a:ext cx="2825496" cy="201168"/>
+          </a:xfrm>
+          <a:prstGeom prst="rect">
+            <a:avLst/>
+          </a:prstGeom>
+          <a:noFill/>
+          <a:ln/>
+        </p:spPr>
+        <p:txBody>
+          <a:bodyPr wrap="square" lIns="0" tIns="0" rIns="0" bIns="0" rtlCol="0" anchor="ctr"/>
+          <a:lstStyle/>
+          <a:p>
             <a:pPr indent="0" marL="0">
               <a:buNone/>
             </a:pPr>
             <a:r>
-              <a:rPr lang="en-US" sz="1420" dirty="0">
+              <a:rPr lang="en-US" sz="950" b="1" dirty="0">
+                <a:solidFill>
+                  <a:srgbClr val="0068B7"/>
+                </a:solidFill>
+                <a:latin typeface="Aptos" pitchFamily="34" charset="0"/>
+                <a:ea typeface="Aptos" pitchFamily="34" charset="-122"/>
+                <a:cs typeface="Aptos" pitchFamily="34" charset="-120"/>
+              </a:rPr>
+              <a:t>Key idea</a:t>
+            </a:r>
+            <a:endParaRPr lang="en-US" sz="950" dirty="0"/>
+          </a:p>
+        </p:txBody>
+      </p:sp>
+      <p:sp>
+        <p:nvSpPr>
+          <p:cNvPr id="13" name="Text 11"/>
+          <p:cNvSpPr/>
+          <p:nvPr/>
+        </p:nvSpPr>
+        <p:spPr>
+          <a:xfrm>
+            <a:off x="8074152" y="1856232"/>
+            <a:ext cx="2825496" cy="1261872"/>
+          </a:xfrm>
+          <a:prstGeom prst="rect">
+            <a:avLst/>
+          </a:prstGeom>
+          <a:noFill/>
+          <a:ln/>
+        </p:spPr>
+        <p:txBody>
+          <a:bodyPr wrap="square" lIns="0" tIns="0" rIns="0" bIns="0" rtlCol="0" anchor="t">
+            <a:normAutofit/>
+          </a:bodyPr>
+          <a:lstStyle/>
+          <a:p>
+            <a:pPr indent="0" marL="0">
+              <a:buNone/>
+            </a:pPr>
+            <a:r>
+              <a:rPr lang="en-US" sz="1250" dirty="0">
                 <a:solidFill>
                   <a:srgbClr val="17364A"/>
                 </a:solidFill>
@@ -4853,9 +7408,116 @@
                 <a:ea typeface="Aptos" pitchFamily="34" charset="-122"/>
                 <a:cs typeface="Aptos" pitchFamily="34" charset="-120"/>
               </a:rPr>
-              <a:t>Approval or escalation documentation</a:t>
-            </a:r>
-            <a:endParaRPr lang="en-US" sz="1420" dirty="0"/>
+              <a:t>Create a generative AI output evaluation rubric for one public health use case.</a:t>
+            </a:r>
+            <a:endParaRPr lang="en-US" sz="1250" dirty="0"/>
+          </a:p>
+        </p:txBody>
+      </p:sp>
+      <p:sp>
+        <p:nvSpPr>
+          <p:cNvPr id="14" name="Shape 12"/>
+          <p:cNvSpPr/>
+          <p:nvPr/>
+        </p:nvSpPr>
+        <p:spPr>
+          <a:xfrm>
+            <a:off x="7909560" y="3520440"/>
+            <a:ext cx="3154680" cy="1737360"/>
+          </a:xfrm>
+          <a:prstGeom prst="roundRect">
+            <a:avLst>
+              <a:gd name="adj" fmla="val 6316"/>
+            </a:avLst>
+          </a:prstGeom>
+          <a:solidFill>
+            <a:srgbClr val="EAF6F8"/>
+          </a:solidFill>
+          <a:ln w="12700">
+            <a:solidFill>
+              <a:srgbClr val="B9D7E6"/>
+            </a:solidFill>
+            <a:prstDash val="solid"/>
+          </a:ln>
+        </p:spPr>
+      </p:sp>
+      <p:sp>
+        <p:nvSpPr>
+          <p:cNvPr id="15" name="Text 13"/>
+          <p:cNvSpPr/>
+          <p:nvPr/>
+        </p:nvSpPr>
+        <p:spPr>
+          <a:xfrm>
+            <a:off x="8074152" y="3666744"/>
+            <a:ext cx="2825496" cy="201168"/>
+          </a:xfrm>
+          <a:prstGeom prst="rect">
+            <a:avLst/>
+          </a:prstGeom>
+          <a:noFill/>
+          <a:ln/>
+        </p:spPr>
+        <p:txBody>
+          <a:bodyPr wrap="square" lIns="0" tIns="0" rIns="0" bIns="0" rtlCol="0" anchor="ctr"/>
+          <a:lstStyle/>
+          <a:p>
+            <a:pPr indent="0" marL="0">
+              <a:buNone/>
+            </a:pPr>
+            <a:r>
+              <a:rPr lang="en-US" sz="950" b="1" dirty="0">
+                <a:solidFill>
+                  <a:srgbClr val="0068B7"/>
+                </a:solidFill>
+                <a:latin typeface="Aptos" pitchFamily="34" charset="0"/>
+                <a:ea typeface="Aptos" pitchFamily="34" charset="-122"/>
+                <a:cs typeface="Aptos" pitchFamily="34" charset="-120"/>
+              </a:rPr>
+              <a:t>Use this for</a:t>
+            </a:r>
+            <a:endParaRPr lang="en-US" sz="950" dirty="0"/>
+          </a:p>
+        </p:txBody>
+      </p:sp>
+      <p:sp>
+        <p:nvSpPr>
+          <p:cNvPr id="16" name="Text 14"/>
+          <p:cNvSpPr/>
+          <p:nvPr/>
+        </p:nvSpPr>
+        <p:spPr>
+          <a:xfrm>
+            <a:off x="8074152" y="3959352"/>
+            <a:ext cx="2825496" cy="1170432"/>
+          </a:xfrm>
+          <a:prstGeom prst="rect">
+            <a:avLst/>
+          </a:prstGeom>
+          <a:noFill/>
+          <a:ln/>
+        </p:spPr>
+        <p:txBody>
+          <a:bodyPr wrap="square" lIns="0" tIns="0" rIns="0" bIns="0" rtlCol="0" anchor="t">
+            <a:normAutofit/>
+          </a:bodyPr>
+          <a:lstStyle/>
+          <a:p>
+            <a:pPr indent="0" marL="0">
+              <a:buNone/>
+            </a:pPr>
+            <a:r>
+              <a:rPr lang="en-US" sz="1250" dirty="0">
+                <a:solidFill>
+                  <a:srgbClr val="17364A"/>
+                </a:solidFill>
+                <a:latin typeface="Aptos" pitchFamily="34" charset="0"/>
+                <a:ea typeface="Aptos" pitchFamily="34" charset="-122"/>
+                <a:cs typeface="Aptos" pitchFamily="34" charset="-120"/>
+              </a:rPr>
+              <a:t>Connect the concept to public health decisions, safeguards, documentation, or implementation work.</a:t>
+            </a:r>
+            <a:endParaRPr lang="en-US" sz="1250" dirty="0"/>
           </a:p>
         </p:txBody>
       </p:sp>
@@ -4918,7 +7580,32 @@
       </p:sp>
       <p:sp>
         <p:nvSpPr>
-          <p:cNvPr id="3" name="Text 1"/>
+          <p:cNvPr id="3" name="Shape 1"/>
+          <p:cNvSpPr/>
+          <p:nvPr/>
+        </p:nvSpPr>
+        <p:spPr>
+          <a:xfrm>
+            <a:off x="0" y="164592"/>
+            <a:ext cx="146304" cy="6693408"/>
+          </a:xfrm>
+          <a:prstGeom prst="rect">
+            <a:avLst/>
+          </a:prstGeom>
+          <a:solidFill>
+            <a:srgbClr val="2F8A28"/>
+          </a:solidFill>
+          <a:ln w="12700">
+            <a:solidFill>
+              <a:srgbClr val="2F8A28"/>
+            </a:solidFill>
+            <a:prstDash val="solid"/>
+          </a:ln>
+        </p:spPr>
+      </p:sp>
+      <p:sp>
+        <p:nvSpPr>
+          <p:cNvPr id="4" name="Text 2"/>
           <p:cNvSpPr/>
           <p:nvPr/>
         </p:nvSpPr>
@@ -4957,7 +7644,7 @@
       </p:sp>
       <p:sp>
         <p:nvSpPr>
-          <p:cNvPr id="4" name="Text 2"/>
+          <p:cNvPr id="5" name="Text 3"/>
           <p:cNvSpPr/>
           <p:nvPr/>
         </p:nvSpPr>
@@ -4996,7 +7683,7 @@
       </p:sp>
       <p:sp>
         <p:nvSpPr>
-          <p:cNvPr id="5" name="Text 3"/>
+          <p:cNvPr id="6" name="Text 4"/>
           <p:cNvSpPr/>
           <p:nvPr/>
         </p:nvSpPr>
@@ -5035,13 +7722,77 @@
       </p:sp>
       <p:sp>
         <p:nvSpPr>
-          <p:cNvPr id="6" name="Text 4"/>
+          <p:cNvPr id="7" name="Shape 5"/>
           <p:cNvSpPr/>
           <p:nvPr/>
         </p:nvSpPr>
         <p:spPr>
           <a:xfrm>
             <a:off x="640080" y="658368"/>
+            <a:ext cx="420624" cy="420624"/>
+          </a:xfrm>
+          <a:prstGeom prst="ellipse">
+            <a:avLst/>
+          </a:prstGeom>
+          <a:solidFill>
+            <a:srgbClr val="0068B7"/>
+          </a:solidFill>
+          <a:ln w="12700">
+            <a:solidFill>
+              <a:srgbClr val="0068B7"/>
+            </a:solidFill>
+            <a:prstDash val="solid"/>
+          </a:ln>
+        </p:spPr>
+      </p:sp>
+      <p:sp>
+        <p:nvSpPr>
+          <p:cNvPr id="8" name="Text 6"/>
+          <p:cNvSpPr/>
+          <p:nvPr/>
+        </p:nvSpPr>
+        <p:spPr>
+          <a:xfrm>
+            <a:off x="640080" y="731520"/>
+            <a:ext cx="420624" cy="164592"/>
+          </a:xfrm>
+          <a:prstGeom prst="rect">
+            <a:avLst/>
+          </a:prstGeom>
+          <a:noFill/>
+          <a:ln/>
+        </p:spPr>
+        <p:txBody>
+          <a:bodyPr wrap="square" lIns="0" tIns="0" rIns="0" bIns="0" rtlCol="0" anchor="ctr"/>
+          <a:lstStyle/>
+          <a:p>
+            <a:pPr algn="ctr" indent="0" marL="0">
+              <a:buNone/>
+            </a:pPr>
+            <a:r>
+              <a:rPr lang="en-US" sz="1100" b="1" dirty="0">
+                <a:solidFill>
+                  <a:srgbClr val="FFFFFF"/>
+                </a:solidFill>
+                <a:latin typeface="Aptos" pitchFamily="34" charset="0"/>
+                <a:ea typeface="Aptos" pitchFamily="34" charset="-122"/>
+                <a:cs typeface="Aptos" pitchFamily="34" charset="-120"/>
+              </a:rPr>
+              <a:t>10</a:t>
+            </a:r>
+            <a:endParaRPr lang="en-US" sz="1100" dirty="0"/>
+          </a:p>
+        </p:txBody>
+      </p:sp>
+      <p:sp>
+        <p:nvSpPr>
+          <p:cNvPr id="9" name="Text 7"/>
+          <p:cNvSpPr/>
+          <p:nvPr/>
+        </p:nvSpPr>
+        <p:spPr>
+          <a:xfrm>
+            <a:off x="640080" y="621792"/>
             <a:ext cx="10881360" cy="566928"/>
           </a:xfrm>
           <a:prstGeom prst="rect">
@@ -5068,7 +7819,7 @@
                 <a:ea typeface="Aptos Display" pitchFamily="34" charset="-122"/>
                 <a:cs typeface="Aptos Display" pitchFamily="34" charset="-120"/>
               </a:rPr>
-              <a:t>Expected Assignment</a:t>
+              <a:t>Expected Artifact or Evidence</a:t>
             </a:r>
             <a:endParaRPr lang="en-US" sz="2700" dirty="0"/>
           </a:p>
@@ -5076,14 +7827,14 @@
       </p:sp>
       <p:sp>
         <p:nvSpPr>
-          <p:cNvPr id="7" name="Text 5"/>
-          <p:cNvSpPr/>
-          <p:nvPr/>
-        </p:nvSpPr>
-        <p:spPr>
-          <a:xfrm>
-            <a:off x="822960" y="1325880"/>
-            <a:ext cx="10378440" cy="4800600"/>
+          <p:cNvPr id="10" name="Text 8"/>
+          <p:cNvSpPr/>
+          <p:nvPr/>
+        </p:nvSpPr>
+        <p:spPr>
+          <a:xfrm>
+            <a:off x="868680" y="1417320"/>
+            <a:ext cx="6675120" cy="4434840"/>
           </a:xfrm>
           <a:prstGeom prst="rect">
             <a:avLst/>
@@ -5098,7 +7849,7 @@
           <a:lstStyle/>
           <a:p>
             <a:r>
-              <a:rPr lang="en-US" sz="1450" dirty="0">
+              <a:rPr lang="en-US" sz="1700" dirty="0">
                 <a:solidFill>
                   <a:srgbClr val="17364A"/>
                 </a:solidFill>
@@ -5108,11 +7859,11 @@
               </a:rPr>
               <a:t>Generative AI output evaluation rubric</a:t>
             </a:r>
-            <a:endParaRPr lang="en-US" sz="1450" dirty="0"/>
-          </a:p>
-          <a:p>
-            <a:r>
-              <a:rPr lang="en-US" sz="1450" dirty="0">
+            <a:endParaRPr lang="en-US" sz="1700" dirty="0"/>
+          </a:p>
+          <a:p>
+            <a:r>
+              <a:rPr lang="en-US" sz="1700" dirty="0">
                 <a:solidFill>
                   <a:srgbClr val="17364A"/>
                 </a:solidFill>
@@ -5122,11 +7873,11 @@
               </a:rPr>
               <a:t>Completed sample review</a:t>
             </a:r>
-            <a:endParaRPr lang="en-US" sz="1450" dirty="0"/>
-          </a:p>
-          <a:p>
-            <a:r>
-              <a:rPr lang="en-US" sz="1450" dirty="0">
+            <a:endParaRPr lang="en-US" sz="1700" dirty="0"/>
+          </a:p>
+          <a:p>
+            <a:r>
+              <a:rPr lang="en-US" sz="1700" dirty="0">
                 <a:solidFill>
                   <a:srgbClr val="17364A"/>
                 </a:solidFill>
@@ -5136,11 +7887,104 @@
               </a:rPr>
               <a:t>Source verification notes</a:t>
             </a:r>
-            <a:endParaRPr lang="en-US" sz="1450" dirty="0"/>
-          </a:p>
-          <a:p>
-            <a:r>
-              <a:rPr lang="en-US" sz="1450" dirty="0">
+            <a:endParaRPr lang="en-US" sz="1700" dirty="0"/>
+          </a:p>
+        </p:txBody>
+      </p:sp>
+      <p:sp>
+        <p:nvSpPr>
+          <p:cNvPr id="11" name="Shape 9"/>
+          <p:cNvSpPr/>
+          <p:nvPr/>
+        </p:nvSpPr>
+        <p:spPr>
+          <a:xfrm>
+            <a:off x="7909560" y="1417320"/>
+            <a:ext cx="3154680" cy="1828800"/>
+          </a:xfrm>
+          <a:prstGeom prst="roundRect">
+            <a:avLst>
+              <a:gd name="adj" fmla="val 6000"/>
+            </a:avLst>
+          </a:prstGeom>
+          <a:solidFill>
+            <a:srgbClr val="EEF8ED"/>
+          </a:solidFill>
+          <a:ln w="12700">
+            <a:solidFill>
+              <a:srgbClr val="B9D7E6"/>
+            </a:solidFill>
+            <a:prstDash val="solid"/>
+          </a:ln>
+        </p:spPr>
+      </p:sp>
+      <p:sp>
+        <p:nvSpPr>
+          <p:cNvPr id="12" name="Text 10"/>
+          <p:cNvSpPr/>
+          <p:nvPr/>
+        </p:nvSpPr>
+        <p:spPr>
+          <a:xfrm>
+            <a:off x="8074152" y="1563624"/>
+            <a:ext cx="2825496" cy="201168"/>
+          </a:xfrm>
+          <a:prstGeom prst="rect">
+            <a:avLst/>
+          </a:prstGeom>
+          <a:noFill/>
+          <a:ln/>
+        </p:spPr>
+        <p:txBody>
+          <a:bodyPr wrap="square" lIns="0" tIns="0" rIns="0" bIns="0" rtlCol="0" anchor="ctr"/>
+          <a:lstStyle/>
+          <a:p>
+            <a:pPr indent="0" marL="0">
+              <a:buNone/>
+            </a:pPr>
+            <a:r>
+              <a:rPr lang="en-US" sz="950" b="1" dirty="0">
+                <a:solidFill>
+                  <a:srgbClr val="0068B7"/>
+                </a:solidFill>
+                <a:latin typeface="Aptos" pitchFamily="34" charset="0"/>
+                <a:ea typeface="Aptos" pitchFamily="34" charset="-122"/>
+                <a:cs typeface="Aptos" pitchFamily="34" charset="-120"/>
+              </a:rPr>
+              <a:t>Key idea</a:t>
+            </a:r>
+            <a:endParaRPr lang="en-US" sz="950" dirty="0"/>
+          </a:p>
+        </p:txBody>
+      </p:sp>
+      <p:sp>
+        <p:nvSpPr>
+          <p:cNvPr id="13" name="Text 11"/>
+          <p:cNvSpPr/>
+          <p:nvPr/>
+        </p:nvSpPr>
+        <p:spPr>
+          <a:xfrm>
+            <a:off x="8074152" y="1856232"/>
+            <a:ext cx="2825496" cy="1261872"/>
+          </a:xfrm>
+          <a:prstGeom prst="rect">
+            <a:avLst/>
+          </a:prstGeom>
+          <a:noFill/>
+          <a:ln/>
+        </p:spPr>
+        <p:txBody>
+          <a:bodyPr wrap="square" lIns="0" tIns="0" rIns="0" bIns="0" rtlCol="0" anchor="t">
+            <a:normAutofit/>
+          </a:bodyPr>
+          <a:lstStyle/>
+          <a:p>
+            <a:pPr indent="0" marL="0">
+              <a:buNone/>
+            </a:pPr>
+            <a:r>
+              <a:rPr lang="en-US" sz="1250" dirty="0">
                 <a:solidFill>
                   <a:srgbClr val="17364A"/>
                 </a:solidFill>
@@ -5148,9 +7992,116 @@
                 <a:ea typeface="Aptos" pitchFamily="34" charset="-122"/>
                 <a:cs typeface="Aptos" pitchFamily="34" charset="-120"/>
               </a:rPr>
-              <a:t>Approval or escalation documentation</a:t>
-            </a:r>
-            <a:endParaRPr lang="en-US" sz="1450" dirty="0"/>
+              <a:t>Generative AI output evaluation rubric</a:t>
+            </a:r>
+            <a:endParaRPr lang="en-US" sz="1250" dirty="0"/>
+          </a:p>
+        </p:txBody>
+      </p:sp>
+      <p:sp>
+        <p:nvSpPr>
+          <p:cNvPr id="14" name="Shape 12"/>
+          <p:cNvSpPr/>
+          <p:nvPr/>
+        </p:nvSpPr>
+        <p:spPr>
+          <a:xfrm>
+            <a:off x="7909560" y="3520440"/>
+            <a:ext cx="3154680" cy="1737360"/>
+          </a:xfrm>
+          <a:prstGeom prst="roundRect">
+            <a:avLst>
+              <a:gd name="adj" fmla="val 6316"/>
+            </a:avLst>
+          </a:prstGeom>
+          <a:solidFill>
+            <a:srgbClr val="EAF6F8"/>
+          </a:solidFill>
+          <a:ln w="12700">
+            <a:solidFill>
+              <a:srgbClr val="B9D7E6"/>
+            </a:solidFill>
+            <a:prstDash val="solid"/>
+          </a:ln>
+        </p:spPr>
+      </p:sp>
+      <p:sp>
+        <p:nvSpPr>
+          <p:cNvPr id="15" name="Text 13"/>
+          <p:cNvSpPr/>
+          <p:nvPr/>
+        </p:nvSpPr>
+        <p:spPr>
+          <a:xfrm>
+            <a:off x="8074152" y="3666744"/>
+            <a:ext cx="2825496" cy="201168"/>
+          </a:xfrm>
+          <a:prstGeom prst="rect">
+            <a:avLst/>
+          </a:prstGeom>
+          <a:noFill/>
+          <a:ln/>
+        </p:spPr>
+        <p:txBody>
+          <a:bodyPr wrap="square" lIns="0" tIns="0" rIns="0" bIns="0" rtlCol="0" anchor="ctr"/>
+          <a:lstStyle/>
+          <a:p>
+            <a:pPr indent="0" marL="0">
+              <a:buNone/>
+            </a:pPr>
+            <a:r>
+              <a:rPr lang="en-US" sz="950" b="1" dirty="0">
+                <a:solidFill>
+                  <a:srgbClr val="0068B7"/>
+                </a:solidFill>
+                <a:latin typeface="Aptos" pitchFamily="34" charset="0"/>
+                <a:ea typeface="Aptos" pitchFamily="34" charset="-122"/>
+                <a:cs typeface="Aptos" pitchFamily="34" charset="-120"/>
+              </a:rPr>
+              <a:t>Use this for</a:t>
+            </a:r>
+            <a:endParaRPr lang="en-US" sz="950" dirty="0"/>
+          </a:p>
+        </p:txBody>
+      </p:sp>
+      <p:sp>
+        <p:nvSpPr>
+          <p:cNvPr id="16" name="Text 14"/>
+          <p:cNvSpPr/>
+          <p:nvPr/>
+        </p:nvSpPr>
+        <p:spPr>
+          <a:xfrm>
+            <a:off x="8074152" y="3959352"/>
+            <a:ext cx="2825496" cy="1170432"/>
+          </a:xfrm>
+          <a:prstGeom prst="rect">
+            <a:avLst/>
+          </a:prstGeom>
+          <a:noFill/>
+          <a:ln/>
+        </p:spPr>
+        <p:txBody>
+          <a:bodyPr wrap="square" lIns="0" tIns="0" rIns="0" bIns="0" rtlCol="0" anchor="t">
+            <a:normAutofit/>
+          </a:bodyPr>
+          <a:lstStyle/>
+          <a:p>
+            <a:pPr indent="0" marL="0">
+              <a:buNone/>
+            </a:pPr>
+            <a:r>
+              <a:rPr lang="en-US" sz="1250" dirty="0">
+                <a:solidFill>
+                  <a:srgbClr val="17364A"/>
+                </a:solidFill>
+                <a:latin typeface="Aptos" pitchFamily="34" charset="0"/>
+                <a:ea typeface="Aptos" pitchFamily="34" charset="-122"/>
+                <a:cs typeface="Aptos" pitchFamily="34" charset="-120"/>
+              </a:rPr>
+              <a:t>Connect the concept to public health decisions, safeguards, documentation, or implementation work.</a:t>
+            </a:r>
+            <a:endParaRPr lang="en-US" sz="1250" dirty="0"/>
           </a:p>
         </p:txBody>
       </p:sp>
@@ -5213,7 +8164,32 @@
       </p:sp>
       <p:sp>
         <p:nvSpPr>
-          <p:cNvPr id="3" name="Text 1"/>
+          <p:cNvPr id="3" name="Shape 1"/>
+          <p:cNvSpPr/>
+          <p:nvPr/>
+        </p:nvSpPr>
+        <p:spPr>
+          <a:xfrm>
+            <a:off x="0" y="164592"/>
+            <a:ext cx="146304" cy="6693408"/>
+          </a:xfrm>
+          <a:prstGeom prst="rect">
+            <a:avLst/>
+          </a:prstGeom>
+          <a:solidFill>
+            <a:srgbClr val="2F8A28"/>
+          </a:solidFill>
+          <a:ln w="12700">
+            <a:solidFill>
+              <a:srgbClr val="2F8A28"/>
+            </a:solidFill>
+            <a:prstDash val="solid"/>
+          </a:ln>
+        </p:spPr>
+      </p:sp>
+      <p:sp>
+        <p:nvSpPr>
+          <p:cNvPr id="4" name="Text 2"/>
           <p:cNvSpPr/>
           <p:nvPr/>
         </p:nvSpPr>
@@ -5252,7 +8228,7 @@
       </p:sp>
       <p:sp>
         <p:nvSpPr>
-          <p:cNvPr id="4" name="Text 2"/>
+          <p:cNvPr id="5" name="Text 3"/>
           <p:cNvSpPr/>
           <p:nvPr/>
         </p:nvSpPr>
@@ -5291,7 +8267,7 @@
       </p:sp>
       <p:sp>
         <p:nvSpPr>
-          <p:cNvPr id="5" name="Text 3"/>
+          <p:cNvPr id="6" name="Text 4"/>
           <p:cNvSpPr/>
           <p:nvPr/>
         </p:nvSpPr>
@@ -5330,7 +8306,7 @@
       </p:sp>
       <p:sp>
         <p:nvSpPr>
-          <p:cNvPr id="6" name="Text 4"/>
+          <p:cNvPr id="7" name="Text 5"/>
           <p:cNvSpPr/>
           <p:nvPr/>
         </p:nvSpPr>
@@ -5363,7 +8339,7 @@
                 <a:ea typeface="Aptos Display" pitchFamily="34" charset="-122"/>
                 <a:cs typeface="Aptos Display" pitchFamily="34" charset="-120"/>
               </a:rPr>
-              <a:t>Knowledge Check</a:t>
+              <a:t>Expected Artifact or Evidence Continued</a:t>
             </a:r>
             <a:endParaRPr lang="en-US" sz="2700" dirty="0"/>
           </a:p>
@@ -5371,14 +8347,14 @@
       </p:sp>
       <p:sp>
         <p:nvSpPr>
-          <p:cNvPr id="7" name="Text 5"/>
-          <p:cNvSpPr/>
-          <p:nvPr/>
-        </p:nvSpPr>
-        <p:spPr>
-          <a:xfrm>
-            <a:off x="822960" y="1325880"/>
-            <a:ext cx="10378440" cy="4800600"/>
+          <p:cNvPr id="8" name="Text 6"/>
+          <p:cNvSpPr/>
+          <p:nvPr/>
+        </p:nvSpPr>
+        <p:spPr>
+          <a:xfrm>
+            <a:off x="868680" y="1417320"/>
+            <a:ext cx="6675120" cy="4434840"/>
           </a:xfrm>
           <a:prstGeom prst="rect">
             <a:avLst/>
@@ -5393,7 +8369,7 @@
           <a:lstStyle/>
           <a:p>
             <a:r>
-              <a:rPr lang="en-US" sz="1450" dirty="0">
+              <a:rPr lang="en-US" sz="1700" dirty="0">
                 <a:solidFill>
                   <a:srgbClr val="17364A"/>
                 </a:solidFill>
@@ -5401,13 +8377,106 @@
                 <a:ea typeface="Aptos" pitchFamily="34" charset="-122"/>
                 <a:cs typeface="Aptos" pitchFamily="34" charset="-120"/>
               </a:rPr>
-              <a:t>1. Why is fluency not enough to trust a generative AI output?</a:t>
-            </a:r>
-            <a:endParaRPr lang="en-US" sz="1450" dirty="0"/>
-          </a:p>
-          <a:p>
-            <a:r>
-              <a:rPr lang="en-US" sz="1450" dirty="0">
+              <a:t>Approval or escalation documentation</a:t>
+            </a:r>
+            <a:endParaRPr lang="en-US" sz="1700" dirty="0"/>
+          </a:p>
+        </p:txBody>
+      </p:sp>
+      <p:sp>
+        <p:nvSpPr>
+          <p:cNvPr id="9" name="Shape 7"/>
+          <p:cNvSpPr/>
+          <p:nvPr/>
+        </p:nvSpPr>
+        <p:spPr>
+          <a:xfrm>
+            <a:off x="7909560" y="1417320"/>
+            <a:ext cx="3154680" cy="1828800"/>
+          </a:xfrm>
+          <a:prstGeom prst="roundRect">
+            <a:avLst>
+              <a:gd name="adj" fmla="val 6000"/>
+            </a:avLst>
+          </a:prstGeom>
+          <a:solidFill>
+            <a:srgbClr val="EEF8ED"/>
+          </a:solidFill>
+          <a:ln w="12700">
+            <a:solidFill>
+              <a:srgbClr val="B9D7E6"/>
+            </a:solidFill>
+            <a:prstDash val="solid"/>
+          </a:ln>
+        </p:spPr>
+      </p:sp>
+      <p:sp>
+        <p:nvSpPr>
+          <p:cNvPr id="10" name="Text 8"/>
+          <p:cNvSpPr/>
+          <p:nvPr/>
+        </p:nvSpPr>
+        <p:spPr>
+          <a:xfrm>
+            <a:off x="8074152" y="1563624"/>
+            <a:ext cx="2825496" cy="201168"/>
+          </a:xfrm>
+          <a:prstGeom prst="rect">
+            <a:avLst/>
+          </a:prstGeom>
+          <a:noFill/>
+          <a:ln/>
+        </p:spPr>
+        <p:txBody>
+          <a:bodyPr wrap="square" lIns="0" tIns="0" rIns="0" bIns="0" rtlCol="0" anchor="ctr"/>
+          <a:lstStyle/>
+          <a:p>
+            <a:pPr indent="0" marL="0">
+              <a:buNone/>
+            </a:pPr>
+            <a:r>
+              <a:rPr lang="en-US" sz="950" b="1" dirty="0">
+                <a:solidFill>
+                  <a:srgbClr val="0068B7"/>
+                </a:solidFill>
+                <a:latin typeface="Aptos" pitchFamily="34" charset="0"/>
+                <a:ea typeface="Aptos" pitchFamily="34" charset="-122"/>
+                <a:cs typeface="Aptos" pitchFamily="34" charset="-120"/>
+              </a:rPr>
+              <a:t>Key idea</a:t>
+            </a:r>
+            <a:endParaRPr lang="en-US" sz="950" dirty="0"/>
+          </a:p>
+        </p:txBody>
+      </p:sp>
+      <p:sp>
+        <p:nvSpPr>
+          <p:cNvPr id="11" name="Text 9"/>
+          <p:cNvSpPr/>
+          <p:nvPr/>
+        </p:nvSpPr>
+        <p:spPr>
+          <a:xfrm>
+            <a:off x="8074152" y="1856232"/>
+            <a:ext cx="2825496" cy="1261872"/>
+          </a:xfrm>
+          <a:prstGeom prst="rect">
+            <a:avLst/>
+          </a:prstGeom>
+          <a:noFill/>
+          <a:ln/>
+        </p:spPr>
+        <p:txBody>
+          <a:bodyPr wrap="square" lIns="0" tIns="0" rIns="0" bIns="0" rtlCol="0" anchor="t">
+            <a:normAutofit/>
+          </a:bodyPr>
+          <a:lstStyle/>
+          <a:p>
+            <a:pPr indent="0" marL="0">
+              <a:buNone/>
+            </a:pPr>
+            <a:r>
+              <a:rPr lang="en-US" sz="1250" dirty="0">
                 <a:solidFill>
                   <a:srgbClr val="17364A"/>
                 </a:solidFill>
@@ -5415,13 +8484,106 @@
                 <a:ea typeface="Aptos" pitchFamily="34" charset="-122"/>
                 <a:cs typeface="Aptos" pitchFamily="34" charset="-120"/>
               </a:rPr>
-              <a:t>2. What does grounding mean?</a:t>
-            </a:r>
-            <a:endParaRPr lang="en-US" sz="1450" dirty="0"/>
-          </a:p>
-          <a:p>
-            <a:r>
-              <a:rPr lang="en-US" sz="1450" dirty="0">
+              <a:t>Approval or escalation documentation</a:t>
+            </a:r>
+            <a:endParaRPr lang="en-US" sz="1250" dirty="0"/>
+          </a:p>
+        </p:txBody>
+      </p:sp>
+      <p:sp>
+        <p:nvSpPr>
+          <p:cNvPr id="12" name="Shape 10"/>
+          <p:cNvSpPr/>
+          <p:nvPr/>
+        </p:nvSpPr>
+        <p:spPr>
+          <a:xfrm>
+            <a:off x="7909560" y="3520440"/>
+            <a:ext cx="3154680" cy="1737360"/>
+          </a:xfrm>
+          <a:prstGeom prst="roundRect">
+            <a:avLst>
+              <a:gd name="adj" fmla="val 6316"/>
+            </a:avLst>
+          </a:prstGeom>
+          <a:solidFill>
+            <a:srgbClr val="EAF6F8"/>
+          </a:solidFill>
+          <a:ln w="12700">
+            <a:solidFill>
+              <a:srgbClr val="B9D7E6"/>
+            </a:solidFill>
+            <a:prstDash val="solid"/>
+          </a:ln>
+        </p:spPr>
+      </p:sp>
+      <p:sp>
+        <p:nvSpPr>
+          <p:cNvPr id="13" name="Text 11"/>
+          <p:cNvSpPr/>
+          <p:nvPr/>
+        </p:nvSpPr>
+        <p:spPr>
+          <a:xfrm>
+            <a:off x="8074152" y="3666744"/>
+            <a:ext cx="2825496" cy="201168"/>
+          </a:xfrm>
+          <a:prstGeom prst="rect">
+            <a:avLst/>
+          </a:prstGeom>
+          <a:noFill/>
+          <a:ln/>
+        </p:spPr>
+        <p:txBody>
+          <a:bodyPr wrap="square" lIns="0" tIns="0" rIns="0" bIns="0" rtlCol="0" anchor="ctr"/>
+          <a:lstStyle/>
+          <a:p>
+            <a:pPr indent="0" marL="0">
+              <a:buNone/>
+            </a:pPr>
+            <a:r>
+              <a:rPr lang="en-US" sz="950" b="1" dirty="0">
+                <a:solidFill>
+                  <a:srgbClr val="0068B7"/>
+                </a:solidFill>
+                <a:latin typeface="Aptos" pitchFamily="34" charset="0"/>
+                <a:ea typeface="Aptos" pitchFamily="34" charset="-122"/>
+                <a:cs typeface="Aptos" pitchFamily="34" charset="-120"/>
+              </a:rPr>
+              <a:t>Use this for</a:t>
+            </a:r>
+            <a:endParaRPr lang="en-US" sz="950" dirty="0"/>
+          </a:p>
+        </p:txBody>
+      </p:sp>
+      <p:sp>
+        <p:nvSpPr>
+          <p:cNvPr id="14" name="Text 12"/>
+          <p:cNvSpPr/>
+          <p:nvPr/>
+        </p:nvSpPr>
+        <p:spPr>
+          <a:xfrm>
+            <a:off x="8074152" y="3959352"/>
+            <a:ext cx="2825496" cy="1170432"/>
+          </a:xfrm>
+          <a:prstGeom prst="rect">
+            <a:avLst/>
+          </a:prstGeom>
+          <a:noFill/>
+          <a:ln/>
+        </p:spPr>
+        <p:txBody>
+          <a:bodyPr wrap="square" lIns="0" tIns="0" rIns="0" bIns="0" rtlCol="0" anchor="t">
+            <a:normAutofit/>
+          </a:bodyPr>
+          <a:lstStyle/>
+          <a:p>
+            <a:pPr indent="0" marL="0">
+              <a:buNone/>
+            </a:pPr>
+            <a:r>
+              <a:rPr lang="en-US" sz="1250" dirty="0">
                 <a:solidFill>
                   <a:srgbClr val="17364A"/>
                 </a:solidFill>
@@ -5429,37 +8591,9 @@
                 <a:ea typeface="Aptos" pitchFamily="34" charset="-122"/>
                 <a:cs typeface="Aptos" pitchFamily="34" charset="-120"/>
               </a:rPr>
-              <a:t>3. Which issue can be as harmful as an incorrect statement?</a:t>
-            </a:r>
-            <a:endParaRPr lang="en-US" sz="1450" dirty="0"/>
-          </a:p>
-          <a:p>
-            <a:r>
-              <a:rPr lang="en-US" sz="1450" dirty="0">
-                <a:solidFill>
-                  <a:srgbClr val="17364A"/>
-                </a:solidFill>
-                <a:latin typeface="Aptos" pitchFamily="34" charset="0"/>
-                <a:ea typeface="Aptos" pitchFamily="34" charset="-122"/>
-                <a:cs typeface="Aptos" pitchFamily="34" charset="-120"/>
-              </a:rPr>
-              <a:t>4. What should a rubric define?</a:t>
-            </a:r>
-            <a:endParaRPr lang="en-US" sz="1450" dirty="0"/>
-          </a:p>
-          <a:p>
-            <a:r>
-              <a:rPr lang="en-US" sz="1450" dirty="0">
-                <a:solidFill>
-                  <a:srgbClr val="17364A"/>
-                </a:solidFill>
-                <a:latin typeface="Aptos" pitchFamily="34" charset="0"/>
-                <a:ea typeface="Aptos" pitchFamily="34" charset="-122"/>
-                <a:cs typeface="Aptos" pitchFamily="34" charset="-120"/>
-              </a:rPr>
-              <a:t>5. Which output usually requires stronger review?</a:t>
-            </a:r>
-            <a:endParaRPr lang="en-US" sz="1450" dirty="0"/>
+              <a:t>Connect the concept to public health decisions, safeguards, documentation, or implementation work.</a:t>
+            </a:r>
+            <a:endParaRPr lang="en-US" sz="1250" dirty="0"/>
           </a:p>
         </p:txBody>
       </p:sp>
@@ -5522,7 +8656,32 @@
       </p:sp>
       <p:sp>
         <p:nvSpPr>
-          <p:cNvPr id="3" name="Text 1"/>
+          <p:cNvPr id="3" name="Shape 1"/>
+          <p:cNvSpPr/>
+          <p:nvPr/>
+        </p:nvSpPr>
+        <p:spPr>
+          <a:xfrm>
+            <a:off x="0" y="164592"/>
+            <a:ext cx="146304" cy="6693408"/>
+          </a:xfrm>
+          <a:prstGeom prst="rect">
+            <a:avLst/>
+          </a:prstGeom>
+          <a:solidFill>
+            <a:srgbClr val="2F8A28"/>
+          </a:solidFill>
+          <a:ln w="12700">
+            <a:solidFill>
+              <a:srgbClr val="2F8A28"/>
+            </a:solidFill>
+            <a:prstDash val="solid"/>
+          </a:ln>
+        </p:spPr>
+      </p:sp>
+      <p:sp>
+        <p:nvSpPr>
+          <p:cNvPr id="4" name="Text 2"/>
           <p:cNvSpPr/>
           <p:nvPr/>
         </p:nvSpPr>
@@ -5561,7 +8720,7 @@
       </p:sp>
       <p:sp>
         <p:nvSpPr>
-          <p:cNvPr id="4" name="Text 2"/>
+          <p:cNvPr id="5" name="Text 3"/>
           <p:cNvSpPr/>
           <p:nvPr/>
         </p:nvSpPr>
@@ -5600,7 +8759,7 @@
       </p:sp>
       <p:sp>
         <p:nvSpPr>
-          <p:cNvPr id="5" name="Text 3"/>
+          <p:cNvPr id="6" name="Text 4"/>
           <p:cNvSpPr/>
           <p:nvPr/>
         </p:nvSpPr>
@@ -5639,7 +8798,7 @@
       </p:sp>
       <p:sp>
         <p:nvSpPr>
-          <p:cNvPr id="6" name="Text 4"/>
+          <p:cNvPr id="7" name="Text 5"/>
           <p:cNvSpPr/>
           <p:nvPr/>
         </p:nvSpPr>
@@ -5672,7 +8831,7 @@
                 <a:ea typeface="Aptos Display" pitchFamily="34" charset="-122"/>
                 <a:cs typeface="Aptos Display" pitchFamily="34" charset="-120"/>
               </a:rPr>
-              <a:t>Module Context</a:t>
+              <a:t>What this module helps you do</a:t>
             </a:r>
             <a:endParaRPr lang="en-US" sz="2700" dirty="0"/>
           </a:p>
@@ -5680,14 +8839,14 @@
       </p:sp>
       <p:sp>
         <p:nvSpPr>
-          <p:cNvPr id="7" name="Text 5"/>
-          <p:cNvSpPr/>
-          <p:nvPr/>
-        </p:nvSpPr>
-        <p:spPr>
-          <a:xfrm>
-            <a:off x="822960" y="1325880"/>
-            <a:ext cx="10378440" cy="1371600"/>
+          <p:cNvPr id="8" name="Text 6"/>
+          <p:cNvSpPr/>
+          <p:nvPr/>
+        </p:nvSpPr>
+        <p:spPr>
+          <a:xfrm>
+            <a:off x="868680" y="1417320"/>
+            <a:ext cx="6675120" cy="3291840"/>
           </a:xfrm>
           <a:prstGeom prst="rect">
             <a:avLst/>
@@ -5702,7 +8861,7 @@
           <a:lstStyle/>
           <a:p>
             <a:r>
-              <a:rPr lang="en-US" sz="1600" dirty="0">
+              <a:rPr lang="en-US" sz="1700" dirty="0">
                 <a:solidFill>
                   <a:srgbClr val="17364A"/>
                 </a:solidFill>
@@ -5710,13 +8869,13 @@
                 <a:ea typeface="Aptos" pitchFamily="34" charset="-122"/>
                 <a:cs typeface="Aptos" pitchFamily="34" charset="-120"/>
               </a:rPr>
-              <a:t>Level: intermediate/practitioner</a:t>
-            </a:r>
-            <a:endParaRPr lang="en-US" sz="1600" dirty="0"/>
-          </a:p>
-          <a:p>
-            <a:r>
-              <a:rPr lang="en-US" sz="1600" dirty="0">
+              <a:t>Generative AI can draft, summarize, translate, classify, explain, and synthesize information, but its outputs require careful evaluation.</a:t>
+            </a:r>
+            <a:endParaRPr lang="en-US" sz="1700" dirty="0"/>
+          </a:p>
+          <a:p>
+            <a:r>
+              <a:rPr lang="en-US" sz="1700" dirty="0">
                 <a:solidFill>
                   <a:srgbClr val="17364A"/>
                 </a:solidFill>
@@ -5724,13 +8883,13 @@
                 <a:ea typeface="Aptos" pitchFamily="34" charset="-122"/>
                 <a:cs typeface="Aptos" pitchFamily="34" charset="-120"/>
               </a:rPr>
-              <a:t>Primary track: Analytics and Modeling Track</a:t>
-            </a:r>
-            <a:endParaRPr lang="en-US" sz="1600" dirty="0"/>
-          </a:p>
-          <a:p>
-            <a:r>
-              <a:rPr lang="en-US" sz="1600" dirty="0">
+              <a:t>In public health, generated content may affect case review, public communication, policy interpretation, community trust, staff training, or.</a:t>
+            </a:r>
+            <a:endParaRPr lang="en-US" sz="1700" dirty="0"/>
+          </a:p>
+          <a:p>
+            <a:r>
+              <a:rPr lang="en-US" sz="1700" dirty="0">
                 <a:solidFill>
                   <a:srgbClr val="17364A"/>
                 </a:solidFill>
@@ -5738,31 +8897,111 @@
                 <a:ea typeface="Aptos" pitchFamily="34" charset="-122"/>
                 <a:cs typeface="Aptos" pitchFamily="34" charset="-120"/>
               </a:rPr>
-              <a:t>Appears in tracks: analytics-modeling</a:t>
-            </a:r>
-            <a:endParaRPr lang="en-US" sz="1600" dirty="0"/>
-          </a:p>
-        </p:txBody>
-      </p:sp>
-      <p:sp>
-        <p:nvSpPr>
-          <p:cNvPr id="8" name="Text 6"/>
-          <p:cNvSpPr/>
-          <p:nvPr/>
-        </p:nvSpPr>
-        <p:spPr>
-          <a:xfrm>
-            <a:off x="822960" y="2743200"/>
-            <a:ext cx="10378440" cy="2834640"/>
-          </a:xfrm>
-          <a:prstGeom prst="rect">
-            <a:avLst/>
-          </a:prstGeom>
-          <a:noFill/>
-          <a:ln/>
-        </p:spPr>
-        <p:txBody>
-          <a:bodyPr wrap="square" lIns="1016" tIns="1016" rIns="1016" bIns="1016" rtlCol="0" anchor="t">
+              <a:t>Fluent writing does not guarantee accuracy, completeness, appropriateness, or safety.</a:t>
+            </a:r>
+            <a:endParaRPr lang="en-US" sz="1700" dirty="0"/>
+          </a:p>
+          <a:p>
+            <a:r>
+              <a:rPr lang="en-US" sz="1700" dirty="0">
+                <a:solidFill>
+                  <a:srgbClr val="17364A"/>
+                </a:solidFill>
+                <a:latin typeface="Aptos" pitchFamily="34" charset="0"/>
+                <a:ea typeface="Aptos" pitchFamily="34" charset="-122"/>
+                <a:cs typeface="Aptos" pitchFamily="34" charset="-120"/>
+              </a:rPr>
+              <a:t>This module teaches learners how to evaluate generative AI outputs using structured review criteria.</a:t>
+            </a:r>
+            <a:endParaRPr lang="en-US" sz="1700" dirty="0"/>
+          </a:p>
+        </p:txBody>
+      </p:sp>
+      <p:sp>
+        <p:nvSpPr>
+          <p:cNvPr id="9" name="Shape 7"/>
+          <p:cNvSpPr/>
+          <p:nvPr/>
+        </p:nvSpPr>
+        <p:spPr>
+          <a:xfrm>
+            <a:off x="7909560" y="1417320"/>
+            <a:ext cx="3154680" cy="1920240"/>
+          </a:xfrm>
+          <a:prstGeom prst="roundRect">
+            <a:avLst>
+              <a:gd name="adj" fmla="val 5714"/>
+            </a:avLst>
+          </a:prstGeom>
+          <a:solidFill>
+            <a:srgbClr val="EAF6F8"/>
+          </a:solidFill>
+          <a:ln w="12700">
+            <a:solidFill>
+              <a:srgbClr val="B9D7E6"/>
+            </a:solidFill>
+            <a:prstDash val="solid"/>
+          </a:ln>
+        </p:spPr>
+      </p:sp>
+      <p:sp>
+        <p:nvSpPr>
+          <p:cNvPr id="10" name="Text 8"/>
+          <p:cNvSpPr/>
+          <p:nvPr/>
+        </p:nvSpPr>
+        <p:spPr>
+          <a:xfrm>
+            <a:off x="8074152" y="1563624"/>
+            <a:ext cx="2825496" cy="201168"/>
+          </a:xfrm>
+          <a:prstGeom prst="rect">
+            <a:avLst/>
+          </a:prstGeom>
+          <a:noFill/>
+          <a:ln/>
+        </p:spPr>
+        <p:txBody>
+          <a:bodyPr wrap="square" lIns="0" tIns="0" rIns="0" bIns="0" rtlCol="0" anchor="ctr"/>
+          <a:lstStyle/>
+          <a:p>
+            <a:pPr indent="0" marL="0">
+              <a:buNone/>
+            </a:pPr>
+            <a:r>
+              <a:rPr lang="en-US" sz="950" b="1" dirty="0">
+                <a:solidFill>
+                  <a:srgbClr val="0068B7"/>
+                </a:solidFill>
+                <a:latin typeface="Aptos" pitchFamily="34" charset="0"/>
+                <a:ea typeface="Aptos" pitchFamily="34" charset="-122"/>
+                <a:cs typeface="Aptos" pitchFamily="34" charset="-120"/>
+              </a:rPr>
+              <a:t>Module details</a:t>
+            </a:r>
+            <a:endParaRPr lang="en-US" sz="950" dirty="0"/>
+          </a:p>
+        </p:txBody>
+      </p:sp>
+      <p:sp>
+        <p:nvSpPr>
+          <p:cNvPr id="11" name="Text 9"/>
+          <p:cNvSpPr/>
+          <p:nvPr/>
+        </p:nvSpPr>
+        <p:spPr>
+          <a:xfrm>
+            <a:off x="8074152" y="1856232"/>
+            <a:ext cx="2825496" cy="1353312"/>
+          </a:xfrm>
+          <a:prstGeom prst="rect">
+            <a:avLst/>
+          </a:prstGeom>
+          <a:noFill/>
+          <a:ln/>
+        </p:spPr>
+        <p:txBody>
+          <a:bodyPr wrap="square" lIns="0" tIns="0" rIns="0" bIns="0" rtlCol="0" anchor="t">
             <a:normAutofit/>
           </a:bodyPr>
           <a:lstStyle/>
@@ -5771,7 +9010,7 @@
               <a:buNone/>
             </a:pPr>
             <a:r>
-              <a:rPr lang="en-US" sz="1400" dirty="0">
+              <a:rPr lang="en-US" sz="1250" dirty="0">
                 <a:solidFill>
                   <a:srgbClr val="17364A"/>
                 </a:solidFill>
@@ -5779,9 +9018,150 @@
                 <a:ea typeface="Aptos" pitchFamily="34" charset="-122"/>
                 <a:cs typeface="Aptos" pitchFamily="34" charset="-120"/>
               </a:rPr>
-              <a:t>Generative AI can draft, summarize, translate, classify, explain, and synthesize information, but its outputs require careful evaluation. In public health, generated content may affect case review, public communication, policy interpretation, community trust, staff training, or leadership decisions. Fluent writing does not guarantee accuracy, completeness, appropriateness, or safety. This module teaches learners how to evaluate generative AI outputs using structured review criteria. The module emphasizes factuality, source grounding, omissions, unsupported claims, bias, privacy, tone, accessibility, language quality, and fitness for intended use. Learners will distinguish low-risk drafting support from outputs that require stronger review because they could affect public health action. By the end of the module, learners should be able to create and apply an evaluation rubric for generative AI outputs in a public health workflow.</a:t>
-            </a:r>
-            <a:endParaRPr lang="en-US" sz="1400" dirty="0"/>
+              <a:t>Level: intermediate/practitioner</a:t>
+            </a:r>
+            <a:endParaRPr lang="en-US" sz="1250" dirty="0"/>
+          </a:p>
+          <a:p>
+            <a:pPr indent="0" marL="0">
+              <a:buNone/>
+            </a:pPr>
+            <a:r>
+              <a:rPr lang="en-US" sz="1250" dirty="0">
+                <a:solidFill>
+                  <a:srgbClr val="17364A"/>
+                </a:solidFill>
+                <a:latin typeface="Aptos" pitchFamily="34" charset="0"/>
+                <a:ea typeface="Aptos" pitchFamily="34" charset="-122"/>
+                <a:cs typeface="Aptos" pitchFamily="34" charset="-120"/>
+              </a:rPr>
+              <a:t>Primary track: Analytics and Modeling Track</a:t>
+            </a:r>
+            <a:endParaRPr lang="en-US" sz="1250" dirty="0"/>
+          </a:p>
+          <a:p>
+            <a:pPr indent="0" marL="0">
+              <a:buNone/>
+            </a:pPr>
+            <a:r>
+              <a:rPr lang="en-US" sz="1250" dirty="0">
+                <a:solidFill>
+                  <a:srgbClr val="17364A"/>
+                </a:solidFill>
+                <a:latin typeface="Aptos" pitchFamily="34" charset="0"/>
+                <a:ea typeface="Aptos" pitchFamily="34" charset="-122"/>
+                <a:cs typeface="Aptos" pitchFamily="34" charset="-120"/>
+              </a:rPr>
+              <a:t>Appears in tracks: analytics-modeling</a:t>
+            </a:r>
+            <a:endParaRPr lang="en-US" sz="1250" dirty="0"/>
+          </a:p>
+        </p:txBody>
+      </p:sp>
+      <p:sp>
+        <p:nvSpPr>
+          <p:cNvPr id="12" name="Shape 10"/>
+          <p:cNvSpPr/>
+          <p:nvPr/>
+        </p:nvSpPr>
+        <p:spPr>
+          <a:xfrm>
+            <a:off x="7909560" y="3611880"/>
+            <a:ext cx="3154680" cy="1783080"/>
+          </a:xfrm>
+          <a:prstGeom prst="roundRect">
+            <a:avLst>
+              <a:gd name="adj" fmla="val 6154"/>
+            </a:avLst>
+          </a:prstGeom>
+          <a:solidFill>
+            <a:srgbClr val="EEF8ED"/>
+          </a:solidFill>
+          <a:ln w="12700">
+            <a:solidFill>
+              <a:srgbClr val="B9D7E6"/>
+            </a:solidFill>
+            <a:prstDash val="solid"/>
+          </a:ln>
+        </p:spPr>
+      </p:sp>
+      <p:sp>
+        <p:nvSpPr>
+          <p:cNvPr id="13" name="Text 11"/>
+          <p:cNvSpPr/>
+          <p:nvPr/>
+        </p:nvSpPr>
+        <p:spPr>
+          <a:xfrm>
+            <a:off x="8074152" y="3758184"/>
+            <a:ext cx="2825496" cy="201168"/>
+          </a:xfrm>
+          <a:prstGeom prst="rect">
+            <a:avLst/>
+          </a:prstGeom>
+          <a:noFill/>
+          <a:ln/>
+        </p:spPr>
+        <p:txBody>
+          <a:bodyPr wrap="square" lIns="0" tIns="0" rIns="0" bIns="0" rtlCol="0" anchor="ctr"/>
+          <a:lstStyle/>
+          <a:p>
+            <a:pPr indent="0" marL="0">
+              <a:buNone/>
+            </a:pPr>
+            <a:r>
+              <a:rPr lang="en-US" sz="950" b="1" dirty="0">
+                <a:solidFill>
+                  <a:srgbClr val="0068B7"/>
+                </a:solidFill>
+                <a:latin typeface="Aptos" pitchFamily="34" charset="0"/>
+                <a:ea typeface="Aptos" pitchFamily="34" charset="-122"/>
+                <a:cs typeface="Aptos" pitchFamily="34" charset="-120"/>
+              </a:rPr>
+              <a:t>Learning approach</a:t>
+            </a:r>
+            <a:endParaRPr lang="en-US" sz="950" dirty="0"/>
+          </a:p>
+        </p:txBody>
+      </p:sp>
+      <p:sp>
+        <p:nvSpPr>
+          <p:cNvPr id="14" name="Text 12"/>
+          <p:cNvSpPr/>
+          <p:nvPr/>
+        </p:nvSpPr>
+        <p:spPr>
+          <a:xfrm>
+            <a:off x="8074152" y="4050792"/>
+            <a:ext cx="2825496" cy="1216152"/>
+          </a:xfrm>
+          <a:prstGeom prst="rect">
+            <a:avLst/>
+          </a:prstGeom>
+          <a:noFill/>
+          <a:ln/>
+        </p:spPr>
+        <p:txBody>
+          <a:bodyPr wrap="square" lIns="0" tIns="0" rIns="0" bIns="0" rtlCol="0" anchor="t">
+            <a:normAutofit/>
+          </a:bodyPr>
+          <a:lstStyle/>
+          <a:p>
+            <a:pPr indent="0" marL="0">
+              <a:buNone/>
+            </a:pPr>
+            <a:r>
+              <a:rPr lang="en-US" sz="1250" dirty="0">
+                <a:solidFill>
+                  <a:srgbClr val="17364A"/>
+                </a:solidFill>
+                <a:latin typeface="Aptos" pitchFamily="34" charset="0"/>
+                <a:ea typeface="Aptos" pitchFamily="34" charset="-122"/>
+                <a:cs typeface="Aptos" pitchFamily="34" charset="-120"/>
+              </a:rPr>
+              <a:t>Review the core ideas, complete the practical exercise, check your understanding, and use the related plays and tools to apply the lesson.</a:t>
+            </a:r>
+            <a:endParaRPr lang="en-US" sz="1250" dirty="0"/>
           </a:p>
         </p:txBody>
       </p:sp>
@@ -5844,7 +9224,32 @@
       </p:sp>
       <p:sp>
         <p:nvSpPr>
-          <p:cNvPr id="3" name="Text 1"/>
+          <p:cNvPr id="3" name="Shape 1"/>
+          <p:cNvSpPr/>
+          <p:nvPr/>
+        </p:nvSpPr>
+        <p:spPr>
+          <a:xfrm>
+            <a:off x="0" y="164592"/>
+            <a:ext cx="146304" cy="6693408"/>
+          </a:xfrm>
+          <a:prstGeom prst="rect">
+            <a:avLst/>
+          </a:prstGeom>
+          <a:solidFill>
+            <a:srgbClr val="2F8A28"/>
+          </a:solidFill>
+          <a:ln w="12700">
+            <a:solidFill>
+              <a:srgbClr val="2F8A28"/>
+            </a:solidFill>
+            <a:prstDash val="solid"/>
+          </a:ln>
+        </p:spPr>
+      </p:sp>
+      <p:sp>
+        <p:nvSpPr>
+          <p:cNvPr id="4" name="Text 2"/>
           <p:cNvSpPr/>
           <p:nvPr/>
         </p:nvSpPr>
@@ -5883,7 +9288,7 @@
       </p:sp>
       <p:sp>
         <p:nvSpPr>
-          <p:cNvPr id="4" name="Text 2"/>
+          <p:cNvPr id="5" name="Text 3"/>
           <p:cNvSpPr/>
           <p:nvPr/>
         </p:nvSpPr>
@@ -5922,7 +9327,7 @@
       </p:sp>
       <p:sp>
         <p:nvSpPr>
-          <p:cNvPr id="5" name="Text 3"/>
+          <p:cNvPr id="6" name="Text 4"/>
           <p:cNvSpPr/>
           <p:nvPr/>
         </p:nvSpPr>
@@ -5961,13 +9366,77 @@
       </p:sp>
       <p:sp>
         <p:nvSpPr>
-          <p:cNvPr id="6" name="Text 4"/>
+          <p:cNvPr id="7" name="Shape 5"/>
           <p:cNvSpPr/>
           <p:nvPr/>
         </p:nvSpPr>
         <p:spPr>
           <a:xfrm>
             <a:off x="640080" y="658368"/>
+            <a:ext cx="420624" cy="420624"/>
+          </a:xfrm>
+          <a:prstGeom prst="ellipse">
+            <a:avLst/>
+          </a:prstGeom>
+          <a:solidFill>
+            <a:srgbClr val="0068B7"/>
+          </a:solidFill>
+          <a:ln w="12700">
+            <a:solidFill>
+              <a:srgbClr val="0068B7"/>
+            </a:solidFill>
+            <a:prstDash val="solid"/>
+          </a:ln>
+        </p:spPr>
+      </p:sp>
+      <p:sp>
+        <p:nvSpPr>
+          <p:cNvPr id="8" name="Text 6"/>
+          <p:cNvSpPr/>
+          <p:nvPr/>
+        </p:nvSpPr>
+        <p:spPr>
+          <a:xfrm>
+            <a:off x="640080" y="731520"/>
+            <a:ext cx="420624" cy="164592"/>
+          </a:xfrm>
+          <a:prstGeom prst="rect">
+            <a:avLst/>
+          </a:prstGeom>
+          <a:noFill/>
+          <a:ln/>
+        </p:spPr>
+        <p:txBody>
+          <a:bodyPr wrap="square" lIns="0" tIns="0" rIns="0" bIns="0" rtlCol="0" anchor="ctr"/>
+          <a:lstStyle/>
+          <a:p>
+            <a:pPr algn="ctr" indent="0" marL="0">
+              <a:buNone/>
+            </a:pPr>
+            <a:r>
+              <a:rPr lang="en-US" sz="1100" b="1" dirty="0">
+                <a:solidFill>
+                  <a:srgbClr val="FFFFFF"/>
+                </a:solidFill>
+                <a:latin typeface="Aptos" pitchFamily="34" charset="0"/>
+                <a:ea typeface="Aptos" pitchFamily="34" charset="-122"/>
+                <a:cs typeface="Aptos" pitchFamily="34" charset="-120"/>
+              </a:rPr>
+              <a:t>11</a:t>
+            </a:r>
+            <a:endParaRPr lang="en-US" sz="1100" dirty="0"/>
+          </a:p>
+        </p:txBody>
+      </p:sp>
+      <p:sp>
+        <p:nvSpPr>
+          <p:cNvPr id="9" name="Text 7"/>
+          <p:cNvSpPr/>
+          <p:nvPr/>
+        </p:nvSpPr>
+        <p:spPr>
+          <a:xfrm>
+            <a:off x="640080" y="621792"/>
             <a:ext cx="10881360" cy="566928"/>
           </a:xfrm>
           <a:prstGeom prst="rect">
@@ -5994,7 +9463,7 @@
                 <a:ea typeface="Aptos Display" pitchFamily="34" charset="-122"/>
                 <a:cs typeface="Aptos Display" pitchFamily="34" charset="-120"/>
               </a:rPr>
-              <a:t>References and Resources</a:t>
+              <a:t>Expected Assignment</a:t>
             </a:r>
             <a:endParaRPr lang="en-US" sz="2700" dirty="0"/>
           </a:p>
@@ -6002,14 +9471,14 @@
       </p:sp>
       <p:sp>
         <p:nvSpPr>
-          <p:cNvPr id="7" name="Text 5"/>
-          <p:cNvSpPr/>
-          <p:nvPr/>
-        </p:nvSpPr>
-        <p:spPr>
-          <a:xfrm>
-            <a:off x="822960" y="1325880"/>
-            <a:ext cx="10378440" cy="4800600"/>
+          <p:cNvPr id="10" name="Text 8"/>
+          <p:cNvSpPr/>
+          <p:nvPr/>
+        </p:nvSpPr>
+        <p:spPr>
+          <a:xfrm>
+            <a:off x="868680" y="1417320"/>
+            <a:ext cx="6675120" cy="4434840"/>
           </a:xfrm>
           <a:prstGeom prst="rect">
             <a:avLst/>
@@ -6024,7 +9493,7 @@
           <a:lstStyle/>
           <a:p>
             <a:r>
-              <a:rPr lang="en-US" sz="1450" dirty="0">
+              <a:rPr lang="en-US" sz="1700" dirty="0">
                 <a:solidFill>
                   <a:srgbClr val="17364A"/>
                 </a:solidFill>
@@ -6032,13 +9501,13 @@
                 <a:ea typeface="Aptos" pitchFamily="34" charset="-122"/>
                 <a:cs typeface="Aptos" pitchFamily="34" charset="-120"/>
               </a:rPr>
-              <a:t>NIST AI RMF Generative AI Profile: https://www.nist.gov/publications/artificial-intelligence-risk-management-framework-generative-artificial-intelligence</a:t>
-            </a:r>
-            <a:endParaRPr lang="en-US" sz="1450" dirty="0"/>
-          </a:p>
-          <a:p>
-            <a:r>
-              <a:rPr lang="en-US" sz="1450" dirty="0">
+              <a:t>Generative AI output evaluation rubric</a:t>
+            </a:r>
+            <a:endParaRPr lang="en-US" sz="1700" dirty="0"/>
+          </a:p>
+          <a:p>
+            <a:r>
+              <a:rPr lang="en-US" sz="1700" dirty="0">
                 <a:solidFill>
                   <a:srgbClr val="17364A"/>
                 </a:solidFill>
@@ -6046,13 +9515,1209 @@
                 <a:ea typeface="Aptos" pitchFamily="34" charset="-122"/>
                 <a:cs typeface="Aptos" pitchFamily="34" charset="-120"/>
               </a:rPr>
+              <a:t>Completed sample review</a:t>
+            </a:r>
+            <a:endParaRPr lang="en-US" sz="1700" dirty="0"/>
+          </a:p>
+          <a:p>
+            <a:r>
+              <a:rPr lang="en-US" sz="1700" dirty="0">
+                <a:solidFill>
+                  <a:srgbClr val="17364A"/>
+                </a:solidFill>
+                <a:latin typeface="Aptos" pitchFamily="34" charset="0"/>
+                <a:ea typeface="Aptos" pitchFamily="34" charset="-122"/>
+                <a:cs typeface="Aptos" pitchFamily="34" charset="-120"/>
+              </a:rPr>
+              <a:t>Source verification notes</a:t>
+            </a:r>
+            <a:endParaRPr lang="en-US" sz="1700" dirty="0"/>
+          </a:p>
+          <a:p>
+            <a:r>
+              <a:rPr lang="en-US" sz="1700" dirty="0">
+                <a:solidFill>
+                  <a:srgbClr val="17364A"/>
+                </a:solidFill>
+                <a:latin typeface="Aptos" pitchFamily="34" charset="0"/>
+                <a:ea typeface="Aptos" pitchFamily="34" charset="-122"/>
+                <a:cs typeface="Aptos" pitchFamily="34" charset="-120"/>
+              </a:rPr>
+              <a:t>Approval or escalation documentation</a:t>
+            </a:r>
+            <a:endParaRPr lang="en-US" sz="1700" dirty="0"/>
+          </a:p>
+        </p:txBody>
+      </p:sp>
+      <p:sp>
+        <p:nvSpPr>
+          <p:cNvPr id="11" name="Shape 9"/>
+          <p:cNvSpPr/>
+          <p:nvPr/>
+        </p:nvSpPr>
+        <p:spPr>
+          <a:xfrm>
+            <a:off x="7909560" y="1417320"/>
+            <a:ext cx="3154680" cy="1828800"/>
+          </a:xfrm>
+          <a:prstGeom prst="roundRect">
+            <a:avLst>
+              <a:gd name="adj" fmla="val 6000"/>
+            </a:avLst>
+          </a:prstGeom>
+          <a:solidFill>
+            <a:srgbClr val="EEF8ED"/>
+          </a:solidFill>
+          <a:ln w="12700">
+            <a:solidFill>
+              <a:srgbClr val="B9D7E6"/>
+            </a:solidFill>
+            <a:prstDash val="solid"/>
+          </a:ln>
+        </p:spPr>
+      </p:sp>
+      <p:sp>
+        <p:nvSpPr>
+          <p:cNvPr id="12" name="Text 10"/>
+          <p:cNvSpPr/>
+          <p:nvPr/>
+        </p:nvSpPr>
+        <p:spPr>
+          <a:xfrm>
+            <a:off x="8074152" y="1563624"/>
+            <a:ext cx="2825496" cy="201168"/>
+          </a:xfrm>
+          <a:prstGeom prst="rect">
+            <a:avLst/>
+          </a:prstGeom>
+          <a:noFill/>
+          <a:ln/>
+        </p:spPr>
+        <p:txBody>
+          <a:bodyPr wrap="square" lIns="0" tIns="0" rIns="0" bIns="0" rtlCol="0" anchor="ctr"/>
+          <a:lstStyle/>
+          <a:p>
+            <a:pPr indent="0" marL="0">
+              <a:buNone/>
+            </a:pPr>
+            <a:r>
+              <a:rPr lang="en-US" sz="950" b="1" dirty="0">
+                <a:solidFill>
+                  <a:srgbClr val="0068B7"/>
+                </a:solidFill>
+                <a:latin typeface="Aptos" pitchFamily="34" charset="0"/>
+                <a:ea typeface="Aptos" pitchFamily="34" charset="-122"/>
+                <a:cs typeface="Aptos" pitchFamily="34" charset="-120"/>
+              </a:rPr>
+              <a:t>Key idea</a:t>
+            </a:r>
+            <a:endParaRPr lang="en-US" sz="950" dirty="0"/>
+          </a:p>
+        </p:txBody>
+      </p:sp>
+      <p:sp>
+        <p:nvSpPr>
+          <p:cNvPr id="13" name="Text 11"/>
+          <p:cNvSpPr/>
+          <p:nvPr/>
+        </p:nvSpPr>
+        <p:spPr>
+          <a:xfrm>
+            <a:off x="8074152" y="1856232"/>
+            <a:ext cx="2825496" cy="1261872"/>
+          </a:xfrm>
+          <a:prstGeom prst="rect">
+            <a:avLst/>
+          </a:prstGeom>
+          <a:noFill/>
+          <a:ln/>
+        </p:spPr>
+        <p:txBody>
+          <a:bodyPr wrap="square" lIns="0" tIns="0" rIns="0" bIns="0" rtlCol="0" anchor="t">
+            <a:normAutofit/>
+          </a:bodyPr>
+          <a:lstStyle/>
+          <a:p>
+            <a:pPr indent="0" marL="0">
+              <a:buNone/>
+            </a:pPr>
+            <a:r>
+              <a:rPr lang="en-US" sz="1250" dirty="0">
+                <a:solidFill>
+                  <a:srgbClr val="17364A"/>
+                </a:solidFill>
+                <a:latin typeface="Aptos" pitchFamily="34" charset="0"/>
+                <a:ea typeface="Aptos" pitchFamily="34" charset="-122"/>
+                <a:cs typeface="Aptos" pitchFamily="34" charset="-120"/>
+              </a:rPr>
+              <a:t>Generative AI output evaluation rubric</a:t>
+            </a:r>
+            <a:endParaRPr lang="en-US" sz="1250" dirty="0"/>
+          </a:p>
+        </p:txBody>
+      </p:sp>
+      <p:sp>
+        <p:nvSpPr>
+          <p:cNvPr id="14" name="Shape 12"/>
+          <p:cNvSpPr/>
+          <p:nvPr/>
+        </p:nvSpPr>
+        <p:spPr>
+          <a:xfrm>
+            <a:off x="7909560" y="3520440"/>
+            <a:ext cx="3154680" cy="1737360"/>
+          </a:xfrm>
+          <a:prstGeom prst="roundRect">
+            <a:avLst>
+              <a:gd name="adj" fmla="val 6316"/>
+            </a:avLst>
+          </a:prstGeom>
+          <a:solidFill>
+            <a:srgbClr val="EAF6F8"/>
+          </a:solidFill>
+          <a:ln w="12700">
+            <a:solidFill>
+              <a:srgbClr val="B9D7E6"/>
+            </a:solidFill>
+            <a:prstDash val="solid"/>
+          </a:ln>
+        </p:spPr>
+      </p:sp>
+      <p:sp>
+        <p:nvSpPr>
+          <p:cNvPr id="15" name="Text 13"/>
+          <p:cNvSpPr/>
+          <p:nvPr/>
+        </p:nvSpPr>
+        <p:spPr>
+          <a:xfrm>
+            <a:off x="8074152" y="3666744"/>
+            <a:ext cx="2825496" cy="201168"/>
+          </a:xfrm>
+          <a:prstGeom prst="rect">
+            <a:avLst/>
+          </a:prstGeom>
+          <a:noFill/>
+          <a:ln/>
+        </p:spPr>
+        <p:txBody>
+          <a:bodyPr wrap="square" lIns="0" tIns="0" rIns="0" bIns="0" rtlCol="0" anchor="ctr"/>
+          <a:lstStyle/>
+          <a:p>
+            <a:pPr indent="0" marL="0">
+              <a:buNone/>
+            </a:pPr>
+            <a:r>
+              <a:rPr lang="en-US" sz="950" b="1" dirty="0">
+                <a:solidFill>
+                  <a:srgbClr val="0068B7"/>
+                </a:solidFill>
+                <a:latin typeface="Aptos" pitchFamily="34" charset="0"/>
+                <a:ea typeface="Aptos" pitchFamily="34" charset="-122"/>
+                <a:cs typeface="Aptos" pitchFamily="34" charset="-120"/>
+              </a:rPr>
+              <a:t>Use this for</a:t>
+            </a:r>
+            <a:endParaRPr lang="en-US" sz="950" dirty="0"/>
+          </a:p>
+        </p:txBody>
+      </p:sp>
+      <p:sp>
+        <p:nvSpPr>
+          <p:cNvPr id="16" name="Text 14"/>
+          <p:cNvSpPr/>
+          <p:nvPr/>
+        </p:nvSpPr>
+        <p:spPr>
+          <a:xfrm>
+            <a:off x="8074152" y="3959352"/>
+            <a:ext cx="2825496" cy="1170432"/>
+          </a:xfrm>
+          <a:prstGeom prst="rect">
+            <a:avLst/>
+          </a:prstGeom>
+          <a:noFill/>
+          <a:ln/>
+        </p:spPr>
+        <p:txBody>
+          <a:bodyPr wrap="square" lIns="0" tIns="0" rIns="0" bIns="0" rtlCol="0" anchor="t">
+            <a:normAutofit/>
+          </a:bodyPr>
+          <a:lstStyle/>
+          <a:p>
+            <a:pPr indent="0" marL="0">
+              <a:buNone/>
+            </a:pPr>
+            <a:r>
+              <a:rPr lang="en-US" sz="1250" dirty="0">
+                <a:solidFill>
+                  <a:srgbClr val="17364A"/>
+                </a:solidFill>
+                <a:latin typeface="Aptos" pitchFamily="34" charset="0"/>
+                <a:ea typeface="Aptos" pitchFamily="34" charset="-122"/>
+                <a:cs typeface="Aptos" pitchFamily="34" charset="-120"/>
+              </a:rPr>
+              <a:t>Connect the concept to public health decisions, safeguards, documentation, or implementation work.</a:t>
+            </a:r>
+            <a:endParaRPr lang="en-US" sz="1250" dirty="0"/>
+          </a:p>
+        </p:txBody>
+      </p:sp>
+    </p:spTree>
+  </p:cSld>
+  <p:clrMapOvr>
+    <a:masterClrMapping/>
+  </p:clrMapOvr>
+</p:sld>
+</file>
+
+<file path=ppt/slides/slide21.xml><?xml version="1.0" encoding="utf-8"?>
+<p:sld xmlns:a="http://schemas.openxmlformats.org/drawingml/2006/main" xmlns:r="http://schemas.openxmlformats.org/officeDocument/2006/relationships" xmlns:p="http://schemas.openxmlformats.org/presentationml/2006/main">
+  <p:cSld name="Slide 21">
+    <p:bg>
+      <p:bgPr>
+        <a:solidFill>
+          <a:srgbClr val="F7FBFD"/>
+        </a:solidFill>
+      </p:bgPr>
+    </p:bg>
+    <p:spTree>
+      <p:nvGrpSpPr>
+        <p:cNvPr id="1" name=""/>
+        <p:cNvGrpSpPr/>
+        <p:nvPr/>
+      </p:nvGrpSpPr>
+      <p:grpSpPr>
+        <a:xfrm>
+          <a:off x="0" y="0"/>
+          <a:ext cx="0" cy="0"/>
+          <a:chOff x="0" y="0"/>
+          <a:chExt cx="0" cy="0"/>
+        </a:xfrm>
+      </p:grpSpPr>
+      <p:sp>
+        <p:nvSpPr>
+          <p:cNvPr id="2" name="Shape 0"/>
+          <p:cNvSpPr/>
+          <p:nvPr/>
+        </p:nvSpPr>
+        <p:spPr>
+          <a:xfrm>
+            <a:off x="0" y="0"/>
+            <a:ext cx="12191695" cy="164592"/>
+          </a:xfrm>
+          <a:prstGeom prst="rect">
+            <a:avLst/>
+          </a:prstGeom>
+          <a:solidFill>
+            <a:srgbClr val="0068B7"/>
+          </a:solidFill>
+          <a:ln w="12700">
+            <a:solidFill>
+              <a:srgbClr val="0068B7"/>
+            </a:solidFill>
+            <a:prstDash val="solid"/>
+          </a:ln>
+        </p:spPr>
+      </p:sp>
+      <p:sp>
+        <p:nvSpPr>
+          <p:cNvPr id="3" name="Shape 1"/>
+          <p:cNvSpPr/>
+          <p:nvPr/>
+        </p:nvSpPr>
+        <p:spPr>
+          <a:xfrm>
+            <a:off x="0" y="164592"/>
+            <a:ext cx="146304" cy="6693408"/>
+          </a:xfrm>
+          <a:prstGeom prst="rect">
+            <a:avLst/>
+          </a:prstGeom>
+          <a:solidFill>
+            <a:srgbClr val="2F8A28"/>
+          </a:solidFill>
+          <a:ln w="12700">
+            <a:solidFill>
+              <a:srgbClr val="2F8A28"/>
+            </a:solidFill>
+            <a:prstDash val="solid"/>
+          </a:ln>
+        </p:spPr>
+      </p:sp>
+      <p:sp>
+        <p:nvSpPr>
+          <p:cNvPr id="4" name="Text 2"/>
+          <p:cNvSpPr/>
+          <p:nvPr/>
+        </p:nvSpPr>
+        <p:spPr>
+          <a:xfrm>
+            <a:off x="502920" y="292608"/>
+            <a:ext cx="10149840" cy="256032"/>
+          </a:xfrm>
+          <a:prstGeom prst="rect">
+            <a:avLst/>
+          </a:prstGeom>
+          <a:noFill/>
+          <a:ln/>
+        </p:spPr>
+        <p:txBody>
+          <a:bodyPr wrap="square" lIns="0" tIns="0" rIns="0" bIns="0" rtlCol="0" anchor="ctr"/>
+          <a:lstStyle/>
+          <a:p>
+            <a:pPr indent="0" marL="0">
+              <a:buNone/>
+            </a:pPr>
+            <a:r>
+              <a:rPr lang="en-US" sz="900" b="1" dirty="0">
+                <a:solidFill>
+                  <a:srgbClr val="5F7181"/>
+                </a:solidFill>
+                <a:latin typeface="Aptos" pitchFamily="34" charset="0"/>
+                <a:ea typeface="Aptos" pitchFamily="34" charset="-122"/>
+                <a:cs typeface="Aptos" pitchFamily="34" charset="-120"/>
+              </a:rPr>
+              <a:t>Evaluation of Generative AI Outputs</a:t>
+            </a:r>
+            <a:endParaRPr lang="en-US" sz="900" dirty="0"/>
+          </a:p>
+        </p:txBody>
+      </p:sp>
+      <p:sp>
+        <p:nvSpPr>
+          <p:cNvPr id="5" name="Text 3"/>
+          <p:cNvSpPr/>
+          <p:nvPr/>
+        </p:nvSpPr>
+        <p:spPr>
+          <a:xfrm>
+            <a:off x="502920" y="6537960"/>
+            <a:ext cx="7772400" cy="201168"/>
+          </a:xfrm>
+          <a:prstGeom prst="rect">
+            <a:avLst/>
+          </a:prstGeom>
+          <a:noFill/>
+          <a:ln/>
+        </p:spPr>
+        <p:txBody>
+          <a:bodyPr wrap="square" lIns="0" tIns="0" rIns="0" bIns="0" rtlCol="0" anchor="ctr"/>
+          <a:lstStyle/>
+          <a:p>
+            <a:pPr indent="0" marL="0">
+              <a:buNone/>
+            </a:pPr>
+            <a:r>
+              <a:rPr lang="en-US" sz="800" dirty="0">
+                <a:solidFill>
+                  <a:srgbClr val="5F7181"/>
+                </a:solidFill>
+                <a:latin typeface="Aptos" pitchFamily="34" charset="0"/>
+                <a:ea typeface="Aptos" pitchFamily="34" charset="-122"/>
+                <a:cs typeface="Aptos" pitchFamily="34" charset="-120"/>
+              </a:rPr>
+              <a:t>AI Playbook and Toolkit for Public Health Departments</a:t>
+            </a:r>
+            <a:endParaRPr lang="en-US" sz="800" dirty="0"/>
+          </a:p>
+        </p:txBody>
+      </p:sp>
+      <p:sp>
+        <p:nvSpPr>
+          <p:cNvPr id="6" name="Text 4"/>
+          <p:cNvSpPr/>
+          <p:nvPr/>
+        </p:nvSpPr>
+        <p:spPr>
+          <a:xfrm>
+            <a:off x="9966960" y="6537960"/>
+            <a:ext cx="1645920" cy="201168"/>
+          </a:xfrm>
+          <a:prstGeom prst="rect">
+            <a:avLst/>
+          </a:prstGeom>
+          <a:noFill/>
+          <a:ln/>
+        </p:spPr>
+        <p:txBody>
+          <a:bodyPr wrap="square" lIns="0" tIns="0" rIns="0" bIns="0" rtlCol="0" anchor="ctr"/>
+          <a:lstStyle/>
+          <a:p>
+            <a:pPr algn="r" indent="0" marL="0">
+              <a:buNone/>
+            </a:pPr>
+            <a:r>
+              <a:rPr lang="en-US" sz="800" dirty="0">
+                <a:solidFill>
+                  <a:srgbClr val="5F7181"/>
+                </a:solidFill>
+                <a:latin typeface="Aptos" pitchFamily="34" charset="0"/>
+                <a:ea typeface="Aptos" pitchFamily="34" charset="-122"/>
+                <a:cs typeface="Aptos" pitchFamily="34" charset="-120"/>
+              </a:rPr>
+              <a:t>© Paula Soper</a:t>
+            </a:r>
+            <a:endParaRPr lang="en-US" sz="800" dirty="0"/>
+          </a:p>
+        </p:txBody>
+      </p:sp>
+      <p:sp>
+        <p:nvSpPr>
+          <p:cNvPr id="7" name="Shape 5"/>
+          <p:cNvSpPr/>
+          <p:nvPr/>
+        </p:nvSpPr>
+        <p:spPr>
+          <a:xfrm>
+            <a:off x="640080" y="658368"/>
+            <a:ext cx="420624" cy="420624"/>
+          </a:xfrm>
+          <a:prstGeom prst="ellipse">
+            <a:avLst/>
+          </a:prstGeom>
+          <a:solidFill>
+            <a:srgbClr val="0068B7"/>
+          </a:solidFill>
+          <a:ln w="12700">
+            <a:solidFill>
+              <a:srgbClr val="0068B7"/>
+            </a:solidFill>
+            <a:prstDash val="solid"/>
+          </a:ln>
+        </p:spPr>
+      </p:sp>
+      <p:sp>
+        <p:nvSpPr>
+          <p:cNvPr id="8" name="Text 6"/>
+          <p:cNvSpPr/>
+          <p:nvPr/>
+        </p:nvSpPr>
+        <p:spPr>
+          <a:xfrm>
+            <a:off x="640080" y="731520"/>
+            <a:ext cx="420624" cy="164592"/>
+          </a:xfrm>
+          <a:prstGeom prst="rect">
+            <a:avLst/>
+          </a:prstGeom>
+          <a:noFill/>
+          <a:ln/>
+        </p:spPr>
+        <p:txBody>
+          <a:bodyPr wrap="square" lIns="0" tIns="0" rIns="0" bIns="0" rtlCol="0" anchor="ctr"/>
+          <a:lstStyle/>
+          <a:p>
+            <a:pPr algn="ctr" indent="0" marL="0">
+              <a:buNone/>
+            </a:pPr>
+            <a:r>
+              <a:rPr lang="en-US" sz="1100" b="1" dirty="0">
+                <a:solidFill>
+                  <a:srgbClr val="FFFFFF"/>
+                </a:solidFill>
+                <a:latin typeface="Aptos" pitchFamily="34" charset="0"/>
+                <a:ea typeface="Aptos" pitchFamily="34" charset="-122"/>
+                <a:cs typeface="Aptos" pitchFamily="34" charset="-120"/>
+              </a:rPr>
+              <a:t>12</a:t>
+            </a:r>
+            <a:endParaRPr lang="en-US" sz="1100" dirty="0"/>
+          </a:p>
+        </p:txBody>
+      </p:sp>
+      <p:sp>
+        <p:nvSpPr>
+          <p:cNvPr id="9" name="Text 7"/>
+          <p:cNvSpPr/>
+          <p:nvPr/>
+        </p:nvSpPr>
+        <p:spPr>
+          <a:xfrm>
+            <a:off x="640080" y="621792"/>
+            <a:ext cx="10881360" cy="566928"/>
+          </a:xfrm>
+          <a:prstGeom prst="rect">
+            <a:avLst/>
+          </a:prstGeom>
+          <a:noFill/>
+          <a:ln/>
+        </p:spPr>
+        <p:txBody>
+          <a:bodyPr wrap="square" lIns="0" tIns="0" rIns="0" bIns="0" rtlCol="0" anchor="ctr">
+            <a:normAutofit/>
+          </a:bodyPr>
+          <a:lstStyle/>
+          <a:p>
+            <a:pPr indent="0" marL="0">
+              <a:buNone/>
+            </a:pPr>
+            <a:r>
+              <a:rPr lang="en-US" sz="2700" b="1" dirty="0">
+                <a:solidFill>
+                  <a:srgbClr val="003A63"/>
+                </a:solidFill>
+                <a:latin typeface="Aptos Display" pitchFamily="34" charset="0"/>
+                <a:ea typeface="Aptos Display" pitchFamily="34" charset="-122"/>
+                <a:cs typeface="Aptos Display" pitchFamily="34" charset="-120"/>
+              </a:rPr>
+              <a:t>Knowledge Check</a:t>
+            </a:r>
+            <a:endParaRPr lang="en-US" sz="2700" dirty="0"/>
+          </a:p>
+        </p:txBody>
+      </p:sp>
+      <p:sp>
+        <p:nvSpPr>
+          <p:cNvPr id="10" name="Text 8"/>
+          <p:cNvSpPr/>
+          <p:nvPr/>
+        </p:nvSpPr>
+        <p:spPr>
+          <a:xfrm>
+            <a:off x="868680" y="1417320"/>
+            <a:ext cx="6675120" cy="4434840"/>
+          </a:xfrm>
+          <a:prstGeom prst="rect">
+            <a:avLst/>
+          </a:prstGeom>
+          <a:noFill/>
+          <a:ln/>
+        </p:spPr>
+        <p:txBody>
+          <a:bodyPr wrap="square" lIns="635" tIns="635" rIns="635" bIns="635" rtlCol="0" anchor="t">
+            <a:normAutofit/>
+          </a:bodyPr>
+          <a:lstStyle/>
+          <a:p>
+            <a:r>
+              <a:rPr lang="en-US" sz="1700" dirty="0">
+                <a:solidFill>
+                  <a:srgbClr val="17364A"/>
+                </a:solidFill>
+                <a:latin typeface="Aptos" pitchFamily="34" charset="0"/>
+                <a:ea typeface="Aptos" pitchFamily="34" charset="-122"/>
+                <a:cs typeface="Aptos" pitchFamily="34" charset="-120"/>
+              </a:rPr>
+              <a:t>1. Why is fluency not enough to trust a generative AI output?</a:t>
+            </a:r>
+            <a:endParaRPr lang="en-US" sz="1700" dirty="0"/>
+          </a:p>
+          <a:p>
+            <a:r>
+              <a:rPr lang="en-US" sz="1700" dirty="0">
+                <a:solidFill>
+                  <a:srgbClr val="17364A"/>
+                </a:solidFill>
+                <a:latin typeface="Aptos" pitchFamily="34" charset="0"/>
+                <a:ea typeface="Aptos" pitchFamily="34" charset="-122"/>
+                <a:cs typeface="Aptos" pitchFamily="34" charset="-120"/>
+              </a:rPr>
+              <a:t>2. What does grounding mean?</a:t>
+            </a:r>
+            <a:endParaRPr lang="en-US" sz="1700" dirty="0"/>
+          </a:p>
+          <a:p>
+            <a:r>
+              <a:rPr lang="en-US" sz="1700" dirty="0">
+                <a:solidFill>
+                  <a:srgbClr val="17364A"/>
+                </a:solidFill>
+                <a:latin typeface="Aptos" pitchFamily="34" charset="0"/>
+                <a:ea typeface="Aptos" pitchFamily="34" charset="-122"/>
+                <a:cs typeface="Aptos" pitchFamily="34" charset="-120"/>
+              </a:rPr>
+              <a:t>3. Which issue can be as harmful as an incorrect statement?</a:t>
+            </a:r>
+            <a:endParaRPr lang="en-US" sz="1700" dirty="0"/>
+          </a:p>
+          <a:p>
+            <a:r>
+              <a:rPr lang="en-US" sz="1700" dirty="0">
+                <a:solidFill>
+                  <a:srgbClr val="17364A"/>
+                </a:solidFill>
+                <a:latin typeface="Aptos" pitchFamily="34" charset="0"/>
+                <a:ea typeface="Aptos" pitchFamily="34" charset="-122"/>
+                <a:cs typeface="Aptos" pitchFamily="34" charset="-120"/>
+              </a:rPr>
+              <a:t>4. What should a rubric define?</a:t>
+            </a:r>
+            <a:endParaRPr lang="en-US" sz="1700" dirty="0"/>
+          </a:p>
+        </p:txBody>
+      </p:sp>
+      <p:sp>
+        <p:nvSpPr>
+          <p:cNvPr id="11" name="Shape 9"/>
+          <p:cNvSpPr/>
+          <p:nvPr/>
+        </p:nvSpPr>
+        <p:spPr>
+          <a:xfrm>
+            <a:off x="7909560" y="1417320"/>
+            <a:ext cx="3154680" cy="1828800"/>
+          </a:xfrm>
+          <a:prstGeom prst="roundRect">
+            <a:avLst>
+              <a:gd name="adj" fmla="val 6000"/>
+            </a:avLst>
+          </a:prstGeom>
+          <a:solidFill>
+            <a:srgbClr val="EEF8ED"/>
+          </a:solidFill>
+          <a:ln w="12700">
+            <a:solidFill>
+              <a:srgbClr val="B9D7E6"/>
+            </a:solidFill>
+            <a:prstDash val="solid"/>
+          </a:ln>
+        </p:spPr>
+      </p:sp>
+      <p:sp>
+        <p:nvSpPr>
+          <p:cNvPr id="12" name="Text 10"/>
+          <p:cNvSpPr/>
+          <p:nvPr/>
+        </p:nvSpPr>
+        <p:spPr>
+          <a:xfrm>
+            <a:off x="8074152" y="1563624"/>
+            <a:ext cx="2825496" cy="201168"/>
+          </a:xfrm>
+          <a:prstGeom prst="rect">
+            <a:avLst/>
+          </a:prstGeom>
+          <a:noFill/>
+          <a:ln/>
+        </p:spPr>
+        <p:txBody>
+          <a:bodyPr wrap="square" lIns="0" tIns="0" rIns="0" bIns="0" rtlCol="0" anchor="ctr"/>
+          <a:lstStyle/>
+          <a:p>
+            <a:pPr indent="0" marL="0">
+              <a:buNone/>
+            </a:pPr>
+            <a:r>
+              <a:rPr lang="en-US" sz="950" b="1" dirty="0">
+                <a:solidFill>
+                  <a:srgbClr val="0068B7"/>
+                </a:solidFill>
+                <a:latin typeface="Aptos" pitchFamily="34" charset="0"/>
+                <a:ea typeface="Aptos" pitchFamily="34" charset="-122"/>
+                <a:cs typeface="Aptos" pitchFamily="34" charset="-120"/>
+              </a:rPr>
+              <a:t>Key idea</a:t>
+            </a:r>
+            <a:endParaRPr lang="en-US" sz="950" dirty="0"/>
+          </a:p>
+        </p:txBody>
+      </p:sp>
+      <p:sp>
+        <p:nvSpPr>
+          <p:cNvPr id="13" name="Text 11"/>
+          <p:cNvSpPr/>
+          <p:nvPr/>
+        </p:nvSpPr>
+        <p:spPr>
+          <a:xfrm>
+            <a:off x="8074152" y="1856232"/>
+            <a:ext cx="2825496" cy="1261872"/>
+          </a:xfrm>
+          <a:prstGeom prst="rect">
+            <a:avLst/>
+          </a:prstGeom>
+          <a:noFill/>
+          <a:ln/>
+        </p:spPr>
+        <p:txBody>
+          <a:bodyPr wrap="square" lIns="0" tIns="0" rIns="0" bIns="0" rtlCol="0" anchor="t">
+            <a:normAutofit/>
+          </a:bodyPr>
+          <a:lstStyle/>
+          <a:p>
+            <a:pPr indent="0" marL="0">
+              <a:buNone/>
+            </a:pPr>
+            <a:r>
+              <a:rPr lang="en-US" sz="1250" dirty="0">
+                <a:solidFill>
+                  <a:srgbClr val="17364A"/>
+                </a:solidFill>
+                <a:latin typeface="Aptos" pitchFamily="34" charset="0"/>
+                <a:ea typeface="Aptos" pitchFamily="34" charset="-122"/>
+                <a:cs typeface="Aptos" pitchFamily="34" charset="-120"/>
+              </a:rPr>
+              <a:t>1. Why is fluency not enough to trust a generative AI output?</a:t>
+            </a:r>
+            <a:endParaRPr lang="en-US" sz="1250" dirty="0"/>
+          </a:p>
+        </p:txBody>
+      </p:sp>
+      <p:sp>
+        <p:nvSpPr>
+          <p:cNvPr id="14" name="Shape 12"/>
+          <p:cNvSpPr/>
+          <p:nvPr/>
+        </p:nvSpPr>
+        <p:spPr>
+          <a:xfrm>
+            <a:off x="7909560" y="3520440"/>
+            <a:ext cx="3154680" cy="1737360"/>
+          </a:xfrm>
+          <a:prstGeom prst="roundRect">
+            <a:avLst>
+              <a:gd name="adj" fmla="val 6316"/>
+            </a:avLst>
+          </a:prstGeom>
+          <a:solidFill>
+            <a:srgbClr val="EAF6F8"/>
+          </a:solidFill>
+          <a:ln w="12700">
+            <a:solidFill>
+              <a:srgbClr val="B9D7E6"/>
+            </a:solidFill>
+            <a:prstDash val="solid"/>
+          </a:ln>
+        </p:spPr>
+      </p:sp>
+      <p:sp>
+        <p:nvSpPr>
+          <p:cNvPr id="15" name="Text 13"/>
+          <p:cNvSpPr/>
+          <p:nvPr/>
+        </p:nvSpPr>
+        <p:spPr>
+          <a:xfrm>
+            <a:off x="8074152" y="3666744"/>
+            <a:ext cx="2825496" cy="201168"/>
+          </a:xfrm>
+          <a:prstGeom prst="rect">
+            <a:avLst/>
+          </a:prstGeom>
+          <a:noFill/>
+          <a:ln/>
+        </p:spPr>
+        <p:txBody>
+          <a:bodyPr wrap="square" lIns="0" tIns="0" rIns="0" bIns="0" rtlCol="0" anchor="ctr"/>
+          <a:lstStyle/>
+          <a:p>
+            <a:pPr indent="0" marL="0">
+              <a:buNone/>
+            </a:pPr>
+            <a:r>
+              <a:rPr lang="en-US" sz="950" b="1" dirty="0">
+                <a:solidFill>
+                  <a:srgbClr val="0068B7"/>
+                </a:solidFill>
+                <a:latin typeface="Aptos" pitchFamily="34" charset="0"/>
+                <a:ea typeface="Aptos" pitchFamily="34" charset="-122"/>
+                <a:cs typeface="Aptos" pitchFamily="34" charset="-120"/>
+              </a:rPr>
+              <a:t>Use this for</a:t>
+            </a:r>
+            <a:endParaRPr lang="en-US" sz="950" dirty="0"/>
+          </a:p>
+        </p:txBody>
+      </p:sp>
+      <p:sp>
+        <p:nvSpPr>
+          <p:cNvPr id="16" name="Text 14"/>
+          <p:cNvSpPr/>
+          <p:nvPr/>
+        </p:nvSpPr>
+        <p:spPr>
+          <a:xfrm>
+            <a:off x="8074152" y="3959352"/>
+            <a:ext cx="2825496" cy="1170432"/>
+          </a:xfrm>
+          <a:prstGeom prst="rect">
+            <a:avLst/>
+          </a:prstGeom>
+          <a:noFill/>
+          <a:ln/>
+        </p:spPr>
+        <p:txBody>
+          <a:bodyPr wrap="square" lIns="0" tIns="0" rIns="0" bIns="0" rtlCol="0" anchor="t">
+            <a:normAutofit/>
+          </a:bodyPr>
+          <a:lstStyle/>
+          <a:p>
+            <a:pPr indent="0" marL="0">
+              <a:buNone/>
+            </a:pPr>
+            <a:r>
+              <a:rPr lang="en-US" sz="1250" dirty="0">
+                <a:solidFill>
+                  <a:srgbClr val="17364A"/>
+                </a:solidFill>
+                <a:latin typeface="Aptos" pitchFamily="34" charset="0"/>
+                <a:ea typeface="Aptos" pitchFamily="34" charset="-122"/>
+                <a:cs typeface="Aptos" pitchFamily="34" charset="-120"/>
+              </a:rPr>
+              <a:t>Connect the concept to public health decisions, safeguards, documentation, or implementation work.</a:t>
+            </a:r>
+            <a:endParaRPr lang="en-US" sz="1250" dirty="0"/>
+          </a:p>
+        </p:txBody>
+      </p:sp>
+    </p:spTree>
+  </p:cSld>
+  <p:clrMapOvr>
+    <a:masterClrMapping/>
+  </p:clrMapOvr>
+</p:sld>
+</file>
+
+<file path=ppt/slides/slide22.xml><?xml version="1.0" encoding="utf-8"?>
+<p:sld xmlns:a="http://schemas.openxmlformats.org/drawingml/2006/main" xmlns:r="http://schemas.openxmlformats.org/officeDocument/2006/relationships" xmlns:p="http://schemas.openxmlformats.org/presentationml/2006/main">
+  <p:cSld name="Slide 22">
+    <p:bg>
+      <p:bgPr>
+        <a:solidFill>
+          <a:srgbClr val="F7FBFD"/>
+        </a:solidFill>
+      </p:bgPr>
+    </p:bg>
+    <p:spTree>
+      <p:nvGrpSpPr>
+        <p:cNvPr id="1" name=""/>
+        <p:cNvGrpSpPr/>
+        <p:nvPr/>
+      </p:nvGrpSpPr>
+      <p:grpSpPr>
+        <a:xfrm>
+          <a:off x="0" y="0"/>
+          <a:ext cx="0" cy="0"/>
+          <a:chOff x="0" y="0"/>
+          <a:chExt cx="0" cy="0"/>
+        </a:xfrm>
+      </p:grpSpPr>
+      <p:sp>
+        <p:nvSpPr>
+          <p:cNvPr id="2" name="Shape 0"/>
+          <p:cNvSpPr/>
+          <p:nvPr/>
+        </p:nvSpPr>
+        <p:spPr>
+          <a:xfrm>
+            <a:off x="0" y="0"/>
+            <a:ext cx="12191695" cy="164592"/>
+          </a:xfrm>
+          <a:prstGeom prst="rect">
+            <a:avLst/>
+          </a:prstGeom>
+          <a:solidFill>
+            <a:srgbClr val="0068B7"/>
+          </a:solidFill>
+          <a:ln w="12700">
+            <a:solidFill>
+              <a:srgbClr val="0068B7"/>
+            </a:solidFill>
+            <a:prstDash val="solid"/>
+          </a:ln>
+        </p:spPr>
+      </p:sp>
+      <p:sp>
+        <p:nvSpPr>
+          <p:cNvPr id="3" name="Shape 1"/>
+          <p:cNvSpPr/>
+          <p:nvPr/>
+        </p:nvSpPr>
+        <p:spPr>
+          <a:xfrm>
+            <a:off x="0" y="164592"/>
+            <a:ext cx="146304" cy="6693408"/>
+          </a:xfrm>
+          <a:prstGeom prst="rect">
+            <a:avLst/>
+          </a:prstGeom>
+          <a:solidFill>
+            <a:srgbClr val="2F8A28"/>
+          </a:solidFill>
+          <a:ln w="12700">
+            <a:solidFill>
+              <a:srgbClr val="2F8A28"/>
+            </a:solidFill>
+            <a:prstDash val="solid"/>
+          </a:ln>
+        </p:spPr>
+      </p:sp>
+      <p:sp>
+        <p:nvSpPr>
+          <p:cNvPr id="4" name="Text 2"/>
+          <p:cNvSpPr/>
+          <p:nvPr/>
+        </p:nvSpPr>
+        <p:spPr>
+          <a:xfrm>
+            <a:off x="502920" y="292608"/>
+            <a:ext cx="10149840" cy="256032"/>
+          </a:xfrm>
+          <a:prstGeom prst="rect">
+            <a:avLst/>
+          </a:prstGeom>
+          <a:noFill/>
+          <a:ln/>
+        </p:spPr>
+        <p:txBody>
+          <a:bodyPr wrap="square" lIns="0" tIns="0" rIns="0" bIns="0" rtlCol="0" anchor="ctr"/>
+          <a:lstStyle/>
+          <a:p>
+            <a:pPr indent="0" marL="0">
+              <a:buNone/>
+            </a:pPr>
+            <a:r>
+              <a:rPr lang="en-US" sz="900" b="1" dirty="0">
+                <a:solidFill>
+                  <a:srgbClr val="5F7181"/>
+                </a:solidFill>
+                <a:latin typeface="Aptos" pitchFamily="34" charset="0"/>
+                <a:ea typeface="Aptos" pitchFamily="34" charset="-122"/>
+                <a:cs typeface="Aptos" pitchFamily="34" charset="-120"/>
+              </a:rPr>
+              <a:t>Evaluation of Generative AI Outputs</a:t>
+            </a:r>
+            <a:endParaRPr lang="en-US" sz="900" dirty="0"/>
+          </a:p>
+        </p:txBody>
+      </p:sp>
+      <p:sp>
+        <p:nvSpPr>
+          <p:cNvPr id="5" name="Text 3"/>
+          <p:cNvSpPr/>
+          <p:nvPr/>
+        </p:nvSpPr>
+        <p:spPr>
+          <a:xfrm>
+            <a:off x="502920" y="6537960"/>
+            <a:ext cx="7772400" cy="201168"/>
+          </a:xfrm>
+          <a:prstGeom prst="rect">
+            <a:avLst/>
+          </a:prstGeom>
+          <a:noFill/>
+          <a:ln/>
+        </p:spPr>
+        <p:txBody>
+          <a:bodyPr wrap="square" lIns="0" tIns="0" rIns="0" bIns="0" rtlCol="0" anchor="ctr"/>
+          <a:lstStyle/>
+          <a:p>
+            <a:pPr indent="0" marL="0">
+              <a:buNone/>
+            </a:pPr>
+            <a:r>
+              <a:rPr lang="en-US" sz="800" dirty="0">
+                <a:solidFill>
+                  <a:srgbClr val="5F7181"/>
+                </a:solidFill>
+                <a:latin typeface="Aptos" pitchFamily="34" charset="0"/>
+                <a:ea typeface="Aptos" pitchFamily="34" charset="-122"/>
+                <a:cs typeface="Aptos" pitchFamily="34" charset="-120"/>
+              </a:rPr>
+              <a:t>AI Playbook and Toolkit for Public Health Departments</a:t>
+            </a:r>
+            <a:endParaRPr lang="en-US" sz="800" dirty="0"/>
+          </a:p>
+        </p:txBody>
+      </p:sp>
+      <p:sp>
+        <p:nvSpPr>
+          <p:cNvPr id="6" name="Text 4"/>
+          <p:cNvSpPr/>
+          <p:nvPr/>
+        </p:nvSpPr>
+        <p:spPr>
+          <a:xfrm>
+            <a:off x="9966960" y="6537960"/>
+            <a:ext cx="1645920" cy="201168"/>
+          </a:xfrm>
+          <a:prstGeom prst="rect">
+            <a:avLst/>
+          </a:prstGeom>
+          <a:noFill/>
+          <a:ln/>
+        </p:spPr>
+        <p:txBody>
+          <a:bodyPr wrap="square" lIns="0" tIns="0" rIns="0" bIns="0" rtlCol="0" anchor="ctr"/>
+          <a:lstStyle/>
+          <a:p>
+            <a:pPr algn="r" indent="0" marL="0">
+              <a:buNone/>
+            </a:pPr>
+            <a:r>
+              <a:rPr lang="en-US" sz="800" dirty="0">
+                <a:solidFill>
+                  <a:srgbClr val="5F7181"/>
+                </a:solidFill>
+                <a:latin typeface="Aptos" pitchFamily="34" charset="0"/>
+                <a:ea typeface="Aptos" pitchFamily="34" charset="-122"/>
+                <a:cs typeface="Aptos" pitchFamily="34" charset="-120"/>
+              </a:rPr>
+              <a:t>© Paula Soper</a:t>
+            </a:r>
+            <a:endParaRPr lang="en-US" sz="800" dirty="0"/>
+          </a:p>
+        </p:txBody>
+      </p:sp>
+      <p:sp>
+        <p:nvSpPr>
+          <p:cNvPr id="7" name="Shape 5"/>
+          <p:cNvSpPr/>
+          <p:nvPr/>
+        </p:nvSpPr>
+        <p:spPr>
+          <a:xfrm>
+            <a:off x="640080" y="658368"/>
+            <a:ext cx="420624" cy="420624"/>
+          </a:xfrm>
+          <a:prstGeom prst="ellipse">
+            <a:avLst/>
+          </a:prstGeom>
+          <a:solidFill>
+            <a:srgbClr val="0068B7"/>
+          </a:solidFill>
+          <a:ln w="12700">
+            <a:solidFill>
+              <a:srgbClr val="0068B7"/>
+            </a:solidFill>
+            <a:prstDash val="solid"/>
+          </a:ln>
+        </p:spPr>
+      </p:sp>
+      <p:sp>
+        <p:nvSpPr>
+          <p:cNvPr id="8" name="Text 6"/>
+          <p:cNvSpPr/>
+          <p:nvPr/>
+        </p:nvSpPr>
+        <p:spPr>
+          <a:xfrm>
+            <a:off x="640080" y="731520"/>
+            <a:ext cx="420624" cy="164592"/>
+          </a:xfrm>
+          <a:prstGeom prst="rect">
+            <a:avLst/>
+          </a:prstGeom>
+          <a:noFill/>
+          <a:ln/>
+        </p:spPr>
+        <p:txBody>
+          <a:bodyPr wrap="square" lIns="0" tIns="0" rIns="0" bIns="0" rtlCol="0" anchor="ctr"/>
+          <a:lstStyle/>
+          <a:p>
+            <a:pPr algn="ctr" indent="0" marL="0">
+              <a:buNone/>
+            </a:pPr>
+            <a:r>
+              <a:rPr lang="en-US" sz="1100" b="1" dirty="0">
+                <a:solidFill>
+                  <a:srgbClr val="FFFFFF"/>
+                </a:solidFill>
+                <a:latin typeface="Aptos" pitchFamily="34" charset="0"/>
+                <a:ea typeface="Aptos" pitchFamily="34" charset="-122"/>
+                <a:cs typeface="Aptos" pitchFamily="34" charset="-120"/>
+              </a:rPr>
+              <a:t>13</a:t>
+            </a:r>
+            <a:endParaRPr lang="en-US" sz="1100" dirty="0"/>
+          </a:p>
+        </p:txBody>
+      </p:sp>
+      <p:sp>
+        <p:nvSpPr>
+          <p:cNvPr id="9" name="Text 7"/>
+          <p:cNvSpPr/>
+          <p:nvPr/>
+        </p:nvSpPr>
+        <p:spPr>
+          <a:xfrm>
+            <a:off x="640080" y="621792"/>
+            <a:ext cx="10881360" cy="566928"/>
+          </a:xfrm>
+          <a:prstGeom prst="rect">
+            <a:avLst/>
+          </a:prstGeom>
+          <a:noFill/>
+          <a:ln/>
+        </p:spPr>
+        <p:txBody>
+          <a:bodyPr wrap="square" lIns="0" tIns="0" rIns="0" bIns="0" rtlCol="0" anchor="ctr">
+            <a:normAutofit/>
+          </a:bodyPr>
+          <a:lstStyle/>
+          <a:p>
+            <a:pPr indent="0" marL="0">
+              <a:buNone/>
+            </a:pPr>
+            <a:r>
+              <a:rPr lang="en-US" sz="2700" b="1" dirty="0">
+                <a:solidFill>
+                  <a:srgbClr val="003A63"/>
+                </a:solidFill>
+                <a:latin typeface="Aptos Display" pitchFamily="34" charset="0"/>
+                <a:ea typeface="Aptos Display" pitchFamily="34" charset="-122"/>
+                <a:cs typeface="Aptos Display" pitchFamily="34" charset="-120"/>
+              </a:rPr>
+              <a:t>References and Resources</a:t>
+            </a:r>
+            <a:endParaRPr lang="en-US" sz="2700" dirty="0"/>
+          </a:p>
+        </p:txBody>
+      </p:sp>
+      <p:sp>
+        <p:nvSpPr>
+          <p:cNvPr id="10" name="Text 8"/>
+          <p:cNvSpPr/>
+          <p:nvPr/>
+        </p:nvSpPr>
+        <p:spPr>
+          <a:xfrm>
+            <a:off x="868680" y="1417320"/>
+            <a:ext cx="6675120" cy="4434840"/>
+          </a:xfrm>
+          <a:prstGeom prst="rect">
+            <a:avLst/>
+          </a:prstGeom>
+          <a:noFill/>
+          <a:ln/>
+        </p:spPr>
+        <p:txBody>
+          <a:bodyPr wrap="square" lIns="635" tIns="635" rIns="635" bIns="635" rtlCol="0" anchor="t">
+            <a:normAutofit/>
+          </a:bodyPr>
+          <a:lstStyle/>
+          <a:p>
+            <a:r>
+              <a:rPr lang="en-US" sz="1700" dirty="0">
+                <a:solidFill>
+                  <a:srgbClr val="17364A"/>
+                </a:solidFill>
+                <a:latin typeface="Aptos" pitchFamily="34" charset="0"/>
+                <a:ea typeface="Aptos" pitchFamily="34" charset="-122"/>
+                <a:cs typeface="Aptos" pitchFamily="34" charset="-120"/>
+              </a:rPr>
+              <a:t>NIST AI RMF Generative AI Profile:.</a:t>
+            </a:r>
+            <a:endParaRPr lang="en-US" sz="1700" dirty="0"/>
+          </a:p>
+          <a:p>
+            <a:r>
+              <a:rPr lang="en-US" sz="1700" dirty="0">
+                <a:solidFill>
+                  <a:srgbClr val="17364A"/>
+                </a:solidFill>
+                <a:latin typeface="Aptos" pitchFamily="34" charset="0"/>
+                <a:ea typeface="Aptos" pitchFamily="34" charset="-122"/>
+                <a:cs typeface="Aptos" pitchFamily="34" charset="-120"/>
+              </a:rPr>
               <a:t>NIST Artificial Intelligence Risk Management Framework: https://www.nist.gov/itl/ai-risk-management-framework</a:t>
             </a:r>
-            <a:endParaRPr lang="en-US" sz="1450" dirty="0"/>
-          </a:p>
-          <a:p>
-            <a:r>
-              <a:rPr lang="en-US" sz="1450" dirty="0">
+            <a:endParaRPr lang="en-US" sz="1700" dirty="0"/>
+          </a:p>
+          <a:p>
+            <a:r>
+              <a:rPr lang="en-US" sz="1700" dirty="0">
                 <a:solidFill>
                   <a:srgbClr val="17364A"/>
                 </a:solidFill>
@@ -6062,11 +10727,11 @@
               </a:rPr>
               <a:t>OWASP Top 10 for Large Language Model Applications: https://owasp.org/www-project-top-10-for-large-language-model-applications/</a:t>
             </a:r>
-            <a:endParaRPr lang="en-US" sz="1450" dirty="0"/>
-          </a:p>
-          <a:p>
-            <a:r>
-              <a:rPr lang="en-US" sz="1450" dirty="0">
+            <a:endParaRPr lang="en-US" sz="1700" dirty="0"/>
+          </a:p>
+          <a:p>
+            <a:r>
+              <a:rPr lang="en-US" sz="1700" dirty="0">
                 <a:solidFill>
                   <a:srgbClr val="17364A"/>
                 </a:solidFill>
@@ -6076,7 +10741,221 @@
               </a:rPr>
               <a:t>WHO Guidance on Large Multi-Modal Models: https://www.who.int/publications/i/item/9789240084759</a:t>
             </a:r>
-            <a:endParaRPr lang="en-US" sz="1450" dirty="0"/>
+            <a:endParaRPr lang="en-US" sz="1700" dirty="0"/>
+          </a:p>
+        </p:txBody>
+      </p:sp>
+      <p:sp>
+        <p:nvSpPr>
+          <p:cNvPr id="11" name="Shape 9"/>
+          <p:cNvSpPr/>
+          <p:nvPr/>
+        </p:nvSpPr>
+        <p:spPr>
+          <a:xfrm>
+            <a:off x="7909560" y="1417320"/>
+            <a:ext cx="3154680" cy="1828800"/>
+          </a:xfrm>
+          <a:prstGeom prst="roundRect">
+            <a:avLst>
+              <a:gd name="adj" fmla="val 6000"/>
+            </a:avLst>
+          </a:prstGeom>
+          <a:solidFill>
+            <a:srgbClr val="EEF8ED"/>
+          </a:solidFill>
+          <a:ln w="12700">
+            <a:solidFill>
+              <a:srgbClr val="B9D7E6"/>
+            </a:solidFill>
+            <a:prstDash val="solid"/>
+          </a:ln>
+        </p:spPr>
+      </p:sp>
+      <p:sp>
+        <p:nvSpPr>
+          <p:cNvPr id="12" name="Text 10"/>
+          <p:cNvSpPr/>
+          <p:nvPr/>
+        </p:nvSpPr>
+        <p:spPr>
+          <a:xfrm>
+            <a:off x="8074152" y="1563624"/>
+            <a:ext cx="2825496" cy="201168"/>
+          </a:xfrm>
+          <a:prstGeom prst="rect">
+            <a:avLst/>
+          </a:prstGeom>
+          <a:noFill/>
+          <a:ln/>
+        </p:spPr>
+        <p:txBody>
+          <a:bodyPr wrap="square" lIns="0" tIns="0" rIns="0" bIns="0" rtlCol="0" anchor="ctr"/>
+          <a:lstStyle/>
+          <a:p>
+            <a:pPr indent="0" marL="0">
+              <a:buNone/>
+            </a:pPr>
+            <a:r>
+              <a:rPr lang="en-US" sz="950" b="1" dirty="0">
+                <a:solidFill>
+                  <a:srgbClr val="0068B7"/>
+                </a:solidFill>
+                <a:latin typeface="Aptos" pitchFamily="34" charset="0"/>
+                <a:ea typeface="Aptos" pitchFamily="34" charset="-122"/>
+                <a:cs typeface="Aptos" pitchFamily="34" charset="-120"/>
+              </a:rPr>
+              <a:t>Key idea</a:t>
+            </a:r>
+            <a:endParaRPr lang="en-US" sz="950" dirty="0"/>
+          </a:p>
+        </p:txBody>
+      </p:sp>
+      <p:sp>
+        <p:nvSpPr>
+          <p:cNvPr id="13" name="Text 11"/>
+          <p:cNvSpPr/>
+          <p:nvPr/>
+        </p:nvSpPr>
+        <p:spPr>
+          <a:xfrm>
+            <a:off x="8074152" y="1856232"/>
+            <a:ext cx="2825496" cy="1261872"/>
+          </a:xfrm>
+          <a:prstGeom prst="rect">
+            <a:avLst/>
+          </a:prstGeom>
+          <a:noFill/>
+          <a:ln/>
+        </p:spPr>
+        <p:txBody>
+          <a:bodyPr wrap="square" lIns="0" tIns="0" rIns="0" bIns="0" rtlCol="0" anchor="t">
+            <a:normAutofit/>
+          </a:bodyPr>
+          <a:lstStyle/>
+          <a:p>
+            <a:pPr indent="0" marL="0">
+              <a:buNone/>
+            </a:pPr>
+            <a:r>
+              <a:rPr lang="en-US" sz="1250" dirty="0">
+                <a:solidFill>
+                  <a:srgbClr val="17364A"/>
+                </a:solidFill>
+                <a:latin typeface="Aptos" pitchFamily="34" charset="0"/>
+                <a:ea typeface="Aptos" pitchFamily="34" charset="-122"/>
+                <a:cs typeface="Aptos" pitchFamily="34" charset="-120"/>
+              </a:rPr>
+              <a:t>NIST AI RMF Generative AI Profile:.</a:t>
+            </a:r>
+            <a:endParaRPr lang="en-US" sz="1250" dirty="0"/>
+          </a:p>
+        </p:txBody>
+      </p:sp>
+      <p:sp>
+        <p:nvSpPr>
+          <p:cNvPr id="14" name="Shape 12"/>
+          <p:cNvSpPr/>
+          <p:nvPr/>
+        </p:nvSpPr>
+        <p:spPr>
+          <a:xfrm>
+            <a:off x="7909560" y="3520440"/>
+            <a:ext cx="3154680" cy="1737360"/>
+          </a:xfrm>
+          <a:prstGeom prst="roundRect">
+            <a:avLst>
+              <a:gd name="adj" fmla="val 6316"/>
+            </a:avLst>
+          </a:prstGeom>
+          <a:solidFill>
+            <a:srgbClr val="EAF6F8"/>
+          </a:solidFill>
+          <a:ln w="12700">
+            <a:solidFill>
+              <a:srgbClr val="B9D7E6"/>
+            </a:solidFill>
+            <a:prstDash val="solid"/>
+          </a:ln>
+        </p:spPr>
+      </p:sp>
+      <p:sp>
+        <p:nvSpPr>
+          <p:cNvPr id="15" name="Text 13"/>
+          <p:cNvSpPr/>
+          <p:nvPr/>
+        </p:nvSpPr>
+        <p:spPr>
+          <a:xfrm>
+            <a:off x="8074152" y="3666744"/>
+            <a:ext cx="2825496" cy="201168"/>
+          </a:xfrm>
+          <a:prstGeom prst="rect">
+            <a:avLst/>
+          </a:prstGeom>
+          <a:noFill/>
+          <a:ln/>
+        </p:spPr>
+        <p:txBody>
+          <a:bodyPr wrap="square" lIns="0" tIns="0" rIns="0" bIns="0" rtlCol="0" anchor="ctr"/>
+          <a:lstStyle/>
+          <a:p>
+            <a:pPr indent="0" marL="0">
+              <a:buNone/>
+            </a:pPr>
+            <a:r>
+              <a:rPr lang="en-US" sz="950" b="1" dirty="0">
+                <a:solidFill>
+                  <a:srgbClr val="0068B7"/>
+                </a:solidFill>
+                <a:latin typeface="Aptos" pitchFamily="34" charset="0"/>
+                <a:ea typeface="Aptos" pitchFamily="34" charset="-122"/>
+                <a:cs typeface="Aptos" pitchFamily="34" charset="-120"/>
+              </a:rPr>
+              <a:t>Use this for</a:t>
+            </a:r>
+            <a:endParaRPr lang="en-US" sz="950" dirty="0"/>
+          </a:p>
+        </p:txBody>
+      </p:sp>
+      <p:sp>
+        <p:nvSpPr>
+          <p:cNvPr id="16" name="Text 14"/>
+          <p:cNvSpPr/>
+          <p:nvPr/>
+        </p:nvSpPr>
+        <p:spPr>
+          <a:xfrm>
+            <a:off x="8074152" y="3959352"/>
+            <a:ext cx="2825496" cy="1170432"/>
+          </a:xfrm>
+          <a:prstGeom prst="rect">
+            <a:avLst/>
+          </a:prstGeom>
+          <a:noFill/>
+          <a:ln/>
+        </p:spPr>
+        <p:txBody>
+          <a:bodyPr wrap="square" lIns="0" tIns="0" rIns="0" bIns="0" rtlCol="0" anchor="t">
+            <a:normAutofit/>
+          </a:bodyPr>
+          <a:lstStyle/>
+          <a:p>
+            <a:pPr indent="0" marL="0">
+              <a:buNone/>
+            </a:pPr>
+            <a:r>
+              <a:rPr lang="en-US" sz="1250" dirty="0">
+                <a:solidFill>
+                  <a:srgbClr val="17364A"/>
+                </a:solidFill>
+                <a:latin typeface="Aptos" pitchFamily="34" charset="0"/>
+                <a:ea typeface="Aptos" pitchFamily="34" charset="-122"/>
+                <a:cs typeface="Aptos" pitchFamily="34" charset="-120"/>
+              </a:rPr>
+              <a:t>Connect the concept to public health decisions, safeguards, documentation, or implementation work.</a:t>
+            </a:r>
+            <a:endParaRPr lang="en-US" sz="1250" dirty="0"/>
           </a:p>
         </p:txBody>
       </p:sp>
@@ -6139,7 +11018,32 @@
       </p:sp>
       <p:sp>
         <p:nvSpPr>
-          <p:cNvPr id="3" name="Text 1"/>
+          <p:cNvPr id="3" name="Shape 1"/>
+          <p:cNvSpPr/>
+          <p:nvPr/>
+        </p:nvSpPr>
+        <p:spPr>
+          <a:xfrm>
+            <a:off x="0" y="164592"/>
+            <a:ext cx="146304" cy="6693408"/>
+          </a:xfrm>
+          <a:prstGeom prst="rect">
+            <a:avLst/>
+          </a:prstGeom>
+          <a:solidFill>
+            <a:srgbClr val="2F8A28"/>
+          </a:solidFill>
+          <a:ln w="12700">
+            <a:solidFill>
+              <a:srgbClr val="2F8A28"/>
+            </a:solidFill>
+            <a:prstDash val="solid"/>
+          </a:ln>
+        </p:spPr>
+      </p:sp>
+      <p:sp>
+        <p:nvSpPr>
+          <p:cNvPr id="4" name="Text 2"/>
           <p:cNvSpPr/>
           <p:nvPr/>
         </p:nvSpPr>
@@ -6178,7 +11082,7 @@
       </p:sp>
       <p:sp>
         <p:nvSpPr>
-          <p:cNvPr id="4" name="Text 2"/>
+          <p:cNvPr id="5" name="Text 3"/>
           <p:cNvSpPr/>
           <p:nvPr/>
         </p:nvSpPr>
@@ -6217,7 +11121,7 @@
       </p:sp>
       <p:sp>
         <p:nvSpPr>
-          <p:cNvPr id="5" name="Text 3"/>
+          <p:cNvPr id="6" name="Text 4"/>
           <p:cNvSpPr/>
           <p:nvPr/>
         </p:nvSpPr>
@@ -6256,7 +11160,7 @@
       </p:sp>
       <p:sp>
         <p:nvSpPr>
-          <p:cNvPr id="6" name="Text 4"/>
+          <p:cNvPr id="7" name="Text 5"/>
           <p:cNvSpPr/>
           <p:nvPr/>
         </p:nvSpPr>
@@ -6289,7 +11193,7 @@
                 <a:ea typeface="Aptos Display" pitchFamily="34" charset="-122"/>
                 <a:cs typeface="Aptos Display" pitchFamily="34" charset="-120"/>
               </a:rPr>
-              <a:t>Learning Objectives</a:t>
+              <a:t>How this module connects to the playbook</a:t>
             </a:r>
             <a:endParaRPr lang="en-US" sz="2700" dirty="0"/>
           </a:p>
@@ -6297,14 +11201,14 @@
       </p:sp>
       <p:sp>
         <p:nvSpPr>
-          <p:cNvPr id="7" name="Text 5"/>
-          <p:cNvSpPr/>
-          <p:nvPr/>
-        </p:nvSpPr>
-        <p:spPr>
-          <a:xfrm>
-            <a:off x="822960" y="1325880"/>
-            <a:ext cx="10378440" cy="4800600"/>
+          <p:cNvPr id="8" name="Text 6"/>
+          <p:cNvSpPr/>
+          <p:nvPr/>
+        </p:nvSpPr>
+        <p:spPr>
+          <a:xfrm>
+            <a:off x="868680" y="1417320"/>
+            <a:ext cx="6903720" cy="4480560"/>
           </a:xfrm>
           <a:prstGeom prst="rect">
             <a:avLst/>
@@ -6319,7 +11223,7 @@
           <a:lstStyle/>
           <a:p>
             <a:r>
-              <a:rPr lang="en-US" sz="1450" dirty="0">
+              <a:rPr lang="en-US" sz="1540" dirty="0">
                 <a:solidFill>
                   <a:srgbClr val="17364A"/>
                 </a:solidFill>
@@ -6327,13 +11231,13 @@
                 <a:ea typeface="Aptos" pitchFamily="34" charset="-122"/>
                 <a:cs typeface="Aptos" pitchFamily="34" charset="-120"/>
               </a:rPr>
-              <a:t>Explain why generative AI outputs require structured review before public health use.</a:t>
-            </a:r>
-            <a:endParaRPr lang="en-US" sz="1450" dirty="0"/>
-          </a:p>
-          <a:p>
-            <a:r>
-              <a:rPr lang="en-US" sz="1450" dirty="0">
+              <a:t>Play 4: Engage Stakeholders - This lesson informs Play 4 by helping learners connect the lesson topic to engage stakeholders work in.</a:t>
+            </a:r>
+            <a:endParaRPr lang="en-US" sz="1540" dirty="0"/>
+          </a:p>
+          <a:p>
+            <a:r>
+              <a:rPr lang="en-US" sz="1540" dirty="0">
                 <a:solidFill>
                   <a:srgbClr val="17364A"/>
                 </a:solidFill>
@@ -6341,13 +11245,13 @@
                 <a:ea typeface="Aptos" pitchFamily="34" charset="-122"/>
                 <a:cs typeface="Aptos" pitchFamily="34" charset="-120"/>
               </a:rPr>
-              <a:t>Distinguish factuality, source grounding, completeness, relevance, tone, and accessibility.</a:t>
-            </a:r>
-            <a:endParaRPr lang="en-US" sz="1450" dirty="0"/>
-          </a:p>
-          <a:p>
-            <a:r>
-              <a:rPr lang="en-US" sz="1450" dirty="0">
+              <a:t>Play 7: Prioritize Use Cases - This lesson informs Play 7 by helping learners connect the lesson topic to prioritize use cases work.</a:t>
+            </a:r>
+            <a:endParaRPr lang="en-US" sz="1540" dirty="0"/>
+          </a:p>
+          <a:p>
+            <a:r>
+              <a:rPr lang="en-US" sz="1540" dirty="0">
                 <a:solidFill>
                   <a:srgbClr val="17364A"/>
                 </a:solidFill>
@@ -6355,13 +11259,13 @@
                 <a:ea typeface="Aptos" pitchFamily="34" charset="-122"/>
                 <a:cs typeface="Aptos" pitchFamily="34" charset="-120"/>
               </a:rPr>
-              <a:t>Identify hallucinations, omissions, unsupported claims, and misleading certainty.</a:t>
-            </a:r>
-            <a:endParaRPr lang="en-US" sz="1450" dirty="0"/>
-          </a:p>
-          <a:p>
-            <a:r>
-              <a:rPr lang="en-US" sz="1450" dirty="0">
+              <a:t>Play 1: Vision &amp; Guardrails - This lesson informs Play 1 by helping learners connect the lesson topic to vision &amp; guardrails work in.</a:t>
+            </a:r>
+            <a:endParaRPr lang="en-US" sz="1540" dirty="0"/>
+          </a:p>
+          <a:p>
+            <a:r>
+              <a:rPr lang="en-US" sz="1540" dirty="0">
                 <a:solidFill>
                   <a:srgbClr val="17364A"/>
                 </a:solidFill>
@@ -6369,13 +11273,106 @@
                 <a:ea typeface="Aptos" pitchFamily="34" charset="-122"/>
                 <a:cs typeface="Aptos" pitchFamily="34" charset="-120"/>
               </a:rPr>
-              <a:t>Design review criteria for different output types, including summaries, drafts, classifications, and recommendations.</a:t>
-            </a:r>
-            <a:endParaRPr lang="en-US" sz="1450" dirty="0"/>
-          </a:p>
-          <a:p>
-            <a:r>
-              <a:rPr lang="en-US" sz="1450" dirty="0">
+              <a:t>Play 13: Monitor and Evaluate AI Systems - This lesson informs Play 13 by helping learners connect the lesson topic to monitor and.</a:t>
+            </a:r>
+            <a:endParaRPr lang="en-US" sz="1540" dirty="0"/>
+          </a:p>
+        </p:txBody>
+      </p:sp>
+      <p:sp>
+        <p:nvSpPr>
+          <p:cNvPr id="9" name="Shape 7"/>
+          <p:cNvSpPr/>
+          <p:nvPr/>
+        </p:nvSpPr>
+        <p:spPr>
+          <a:xfrm>
+            <a:off x="8046720" y="1417320"/>
+            <a:ext cx="3063240" cy="2103120"/>
+          </a:xfrm>
+          <a:prstGeom prst="roundRect">
+            <a:avLst>
+              <a:gd name="adj" fmla="val 5217"/>
+            </a:avLst>
+          </a:prstGeom>
+          <a:solidFill>
+            <a:srgbClr val="EEF8ED"/>
+          </a:solidFill>
+          <a:ln w="12700">
+            <a:solidFill>
+              <a:srgbClr val="B9D7E6"/>
+            </a:solidFill>
+            <a:prstDash val="solid"/>
+          </a:ln>
+        </p:spPr>
+      </p:sp>
+      <p:sp>
+        <p:nvSpPr>
+          <p:cNvPr id="10" name="Text 8"/>
+          <p:cNvSpPr/>
+          <p:nvPr/>
+        </p:nvSpPr>
+        <p:spPr>
+          <a:xfrm>
+            <a:off x="8211312" y="1563624"/>
+            <a:ext cx="2734056" cy="201168"/>
+          </a:xfrm>
+          <a:prstGeom prst="rect">
+            <a:avLst/>
+          </a:prstGeom>
+          <a:noFill/>
+          <a:ln/>
+        </p:spPr>
+        <p:txBody>
+          <a:bodyPr wrap="square" lIns="0" tIns="0" rIns="0" bIns="0" rtlCol="0" anchor="ctr"/>
+          <a:lstStyle/>
+          <a:p>
+            <a:pPr indent="0" marL="0">
+              <a:buNone/>
+            </a:pPr>
+            <a:r>
+              <a:rPr lang="en-US" sz="950" b="1" dirty="0">
+                <a:solidFill>
+                  <a:srgbClr val="0068B7"/>
+                </a:solidFill>
+                <a:latin typeface="Aptos" pitchFamily="34" charset="0"/>
+                <a:ea typeface="Aptos" pitchFamily="34" charset="-122"/>
+                <a:cs typeface="Aptos" pitchFamily="34" charset="-120"/>
+              </a:rPr>
+              <a:t>Apply the lesson</a:t>
+            </a:r>
+            <a:endParaRPr lang="en-US" sz="950" dirty="0"/>
+          </a:p>
+        </p:txBody>
+      </p:sp>
+      <p:sp>
+        <p:nvSpPr>
+          <p:cNvPr id="11" name="Text 9"/>
+          <p:cNvSpPr/>
+          <p:nvPr/>
+        </p:nvSpPr>
+        <p:spPr>
+          <a:xfrm>
+            <a:off x="8211312" y="1856232"/>
+            <a:ext cx="2734056" cy="1536192"/>
+          </a:xfrm>
+          <a:prstGeom prst="rect">
+            <a:avLst/>
+          </a:prstGeom>
+          <a:noFill/>
+          <a:ln/>
+        </p:spPr>
+        <p:txBody>
+          <a:bodyPr wrap="square" lIns="0" tIns="0" rIns="0" bIns="0" rtlCol="0" anchor="t">
+            <a:normAutofit/>
+          </a:bodyPr>
+          <a:lstStyle/>
+          <a:p>
+            <a:pPr indent="0" marL="0">
+              <a:buNone/>
+            </a:pPr>
+            <a:r>
+              <a:rPr lang="en-US" sz="1250" dirty="0">
                 <a:solidFill>
                   <a:srgbClr val="17364A"/>
                 </a:solidFill>
@@ -6383,9 +11380,116 @@
                 <a:ea typeface="Aptos" pitchFamily="34" charset="-122"/>
                 <a:cs typeface="Aptos" pitchFamily="34" charset="-120"/>
               </a:rPr>
-              <a:t>Apply stronger review requirements for sensitive, public-facing, or consequential outputs.</a:t>
-            </a:r>
-            <a:endParaRPr lang="en-US" sz="1450" dirty="0"/>
+              <a:t>Use the related plays to identify decisions, participants, timing, approvals, and documentation needed for responsible implementation.</a:t>
+            </a:r>
+            <a:endParaRPr lang="en-US" sz="1250" dirty="0"/>
+          </a:p>
+        </p:txBody>
+      </p:sp>
+      <p:sp>
+        <p:nvSpPr>
+          <p:cNvPr id="12" name="Shape 10"/>
+          <p:cNvSpPr/>
+          <p:nvPr/>
+        </p:nvSpPr>
+        <p:spPr>
+          <a:xfrm>
+            <a:off x="8046720" y="3794760"/>
+            <a:ext cx="3063240" cy="1508760"/>
+          </a:xfrm>
+          <a:prstGeom prst="roundRect">
+            <a:avLst>
+              <a:gd name="adj" fmla="val 7273"/>
+            </a:avLst>
+          </a:prstGeom>
+          <a:solidFill>
+            <a:srgbClr val="FFF4D9"/>
+          </a:solidFill>
+          <a:ln w="12700">
+            <a:solidFill>
+              <a:srgbClr val="B9D7E6"/>
+            </a:solidFill>
+            <a:prstDash val="solid"/>
+          </a:ln>
+        </p:spPr>
+      </p:sp>
+      <p:sp>
+        <p:nvSpPr>
+          <p:cNvPr id="13" name="Text 11"/>
+          <p:cNvSpPr/>
+          <p:nvPr/>
+        </p:nvSpPr>
+        <p:spPr>
+          <a:xfrm>
+            <a:off x="8211312" y="3941064"/>
+            <a:ext cx="2734056" cy="201168"/>
+          </a:xfrm>
+          <a:prstGeom prst="rect">
+            <a:avLst/>
+          </a:prstGeom>
+          <a:noFill/>
+          <a:ln/>
+        </p:spPr>
+        <p:txBody>
+          <a:bodyPr wrap="square" lIns="0" tIns="0" rIns="0" bIns="0" rtlCol="0" anchor="ctr"/>
+          <a:lstStyle/>
+          <a:p>
+            <a:pPr indent="0" marL="0">
+              <a:buNone/>
+            </a:pPr>
+            <a:r>
+              <a:rPr lang="en-US" sz="950" b="1" dirty="0">
+                <a:solidFill>
+                  <a:srgbClr val="0068B7"/>
+                </a:solidFill>
+                <a:latin typeface="Aptos" pitchFamily="34" charset="0"/>
+                <a:ea typeface="Aptos" pitchFamily="34" charset="-122"/>
+                <a:cs typeface="Aptos" pitchFamily="34" charset="-120"/>
+              </a:rPr>
+              <a:t>Keep in mind</a:t>
+            </a:r>
+            <a:endParaRPr lang="en-US" sz="950" dirty="0"/>
+          </a:p>
+        </p:txBody>
+      </p:sp>
+      <p:sp>
+        <p:nvSpPr>
+          <p:cNvPr id="14" name="Text 12"/>
+          <p:cNvSpPr/>
+          <p:nvPr/>
+        </p:nvSpPr>
+        <p:spPr>
+          <a:xfrm>
+            <a:off x="8211312" y="4233672"/>
+            <a:ext cx="2734056" cy="941832"/>
+          </a:xfrm>
+          <a:prstGeom prst="rect">
+            <a:avLst/>
+          </a:prstGeom>
+          <a:noFill/>
+          <a:ln/>
+        </p:spPr>
+        <p:txBody>
+          <a:bodyPr wrap="square" lIns="0" tIns="0" rIns="0" bIns="0" rtlCol="0" anchor="t">
+            <a:normAutofit/>
+          </a:bodyPr>
+          <a:lstStyle/>
+          <a:p>
+            <a:pPr indent="0" marL="0">
+              <a:buNone/>
+            </a:pPr>
+            <a:r>
+              <a:rPr lang="en-US" sz="1250" dirty="0">
+                <a:solidFill>
+                  <a:srgbClr val="17364A"/>
+                </a:solidFill>
+                <a:latin typeface="Aptos" pitchFamily="34" charset="0"/>
+                <a:ea typeface="Aptos" pitchFamily="34" charset="-122"/>
+                <a:cs typeface="Aptos" pitchFamily="34" charset="-120"/>
+              </a:rPr>
+              <a:t>The playbook connection helps turn training into agency work, not just individual knowledge.</a:t>
+            </a:r>
+            <a:endParaRPr lang="en-US" sz="1250" dirty="0"/>
           </a:p>
         </p:txBody>
       </p:sp>
@@ -6448,7 +11552,32 @@
       </p:sp>
       <p:sp>
         <p:nvSpPr>
-          <p:cNvPr id="3" name="Text 1"/>
+          <p:cNvPr id="3" name="Shape 1"/>
+          <p:cNvSpPr/>
+          <p:nvPr/>
+        </p:nvSpPr>
+        <p:spPr>
+          <a:xfrm>
+            <a:off x="0" y="164592"/>
+            <a:ext cx="146304" cy="6693408"/>
+          </a:xfrm>
+          <a:prstGeom prst="rect">
+            <a:avLst/>
+          </a:prstGeom>
+          <a:solidFill>
+            <a:srgbClr val="2F8A28"/>
+          </a:solidFill>
+          <a:ln w="12700">
+            <a:solidFill>
+              <a:srgbClr val="2F8A28"/>
+            </a:solidFill>
+            <a:prstDash val="solid"/>
+          </a:ln>
+        </p:spPr>
+      </p:sp>
+      <p:sp>
+        <p:nvSpPr>
+          <p:cNvPr id="4" name="Text 2"/>
           <p:cNvSpPr/>
           <p:nvPr/>
         </p:nvSpPr>
@@ -6487,7 +11616,7 @@
       </p:sp>
       <p:sp>
         <p:nvSpPr>
-          <p:cNvPr id="4" name="Text 2"/>
+          <p:cNvPr id="5" name="Text 3"/>
           <p:cNvSpPr/>
           <p:nvPr/>
         </p:nvSpPr>
@@ -6526,7 +11655,7 @@
       </p:sp>
       <p:sp>
         <p:nvSpPr>
-          <p:cNvPr id="5" name="Text 3"/>
+          <p:cNvPr id="6" name="Text 4"/>
           <p:cNvSpPr/>
           <p:nvPr/>
         </p:nvSpPr>
@@ -6565,7 +11694,7 @@
       </p:sp>
       <p:sp>
         <p:nvSpPr>
-          <p:cNvPr id="6" name="Text 4"/>
+          <p:cNvPr id="7" name="Text 5"/>
           <p:cNvSpPr/>
           <p:nvPr/>
         </p:nvSpPr>
@@ -6598,7 +11727,7 @@
                 <a:ea typeface="Aptos Display" pitchFamily="34" charset="-122"/>
                 <a:cs typeface="Aptos Display" pitchFamily="34" charset="-120"/>
               </a:rPr>
-              <a:t>Learning Objectives Continued</a:t>
+              <a:t>Related toolkit resources</a:t>
             </a:r>
             <a:endParaRPr lang="en-US" sz="2700" dirty="0"/>
           </a:p>
@@ -6606,14 +11735,14 @@
       </p:sp>
       <p:sp>
         <p:nvSpPr>
-          <p:cNvPr id="7" name="Text 5"/>
-          <p:cNvSpPr/>
-          <p:nvPr/>
-        </p:nvSpPr>
-        <p:spPr>
-          <a:xfrm>
-            <a:off x="822960" y="1325880"/>
-            <a:ext cx="10378440" cy="4800600"/>
+          <p:cNvPr id="8" name="Text 6"/>
+          <p:cNvSpPr/>
+          <p:nvPr/>
+        </p:nvSpPr>
+        <p:spPr>
+          <a:xfrm>
+            <a:off x="868680" y="1417320"/>
+            <a:ext cx="6903720" cy="4480560"/>
           </a:xfrm>
           <a:prstGeom prst="rect">
             <a:avLst/>
@@ -6628,7 +11757,7 @@
           <a:lstStyle/>
           <a:p>
             <a:r>
-              <a:rPr lang="en-US" sz="1450" dirty="0">
+              <a:rPr lang="en-US" sz="1460" dirty="0">
                 <a:solidFill>
                   <a:srgbClr val="17364A"/>
                 </a:solidFill>
@@ -6636,9 +11765,279 @@
                 <a:ea typeface="Aptos" pitchFamily="34" charset="-122"/>
                 <a:cs typeface="Aptos" pitchFamily="34" charset="-120"/>
               </a:rPr>
-              <a:t>Produce a generative AI output evaluation rubric.</a:t>
-            </a:r>
-            <a:endParaRPr lang="en-US" sz="1450" dirty="0"/>
+              <a:t>Tool 1: AI Vision &amp; Principles Workshop (Workshop) - Use this tool to complete or strengthen the practical exercise for the module.</a:t>
+            </a:r>
+            <a:endParaRPr lang="en-US" sz="1460" dirty="0"/>
+          </a:p>
+          <a:p>
+            <a:r>
+              <a:rPr lang="en-US" sz="1460" dirty="0">
+                <a:solidFill>
+                  <a:srgbClr val="17364A"/>
+                </a:solidFill>
+                <a:latin typeface="Aptos" pitchFamily="34" charset="0"/>
+                <a:ea typeface="Aptos" pitchFamily="34" charset="-122"/>
+                <a:cs typeface="Aptos" pitchFamily="34" charset="-120"/>
+              </a:rPr>
+              <a:t>Tool 3: Equity Impact Assessment Checklist (Checklist) - Use this tool to complete or strengthen the practical exercise for the.</a:t>
+            </a:r>
+            <a:endParaRPr lang="en-US" sz="1460" dirty="0"/>
+          </a:p>
+          <a:p>
+            <a:r>
+              <a:rPr lang="en-US" sz="1460" dirty="0">
+                <a:solidFill>
+                  <a:srgbClr val="17364A"/>
+                </a:solidFill>
+                <a:latin typeface="Aptos" pitchFamily="34" charset="0"/>
+                <a:ea typeface="Aptos" pitchFamily="34" charset="-122"/>
+                <a:cs typeface="Aptos" pitchFamily="34" charset="-120"/>
+              </a:rPr>
+              <a:t>Tool 20: Community Engagement Planning (Planning) - Use Community Engagement Planning to translate this lesson into a documented.</a:t>
+            </a:r>
+            <a:endParaRPr lang="en-US" sz="1460" dirty="0"/>
+          </a:p>
+          <a:p>
+            <a:r>
+              <a:rPr lang="en-US" sz="1460" dirty="0">
+                <a:solidFill>
+                  <a:srgbClr val="17364A"/>
+                </a:solidFill>
+                <a:latin typeface="Aptos" pitchFamily="34" charset="0"/>
+                <a:ea typeface="Aptos" pitchFamily="34" charset="-122"/>
+                <a:cs typeface="Aptos" pitchFamily="34" charset="-120"/>
+              </a:rPr>
+              <a:t>Tool 21: Stakeholder Mapping &amp; RACI (Template) - Use Stakeholder Mapping &amp; RACI to translate this lesson into a documented public.</a:t>
+            </a:r>
+            <a:endParaRPr lang="en-US" sz="1460" dirty="0"/>
+          </a:p>
+          <a:p>
+            <a:r>
+              <a:rPr lang="en-US" sz="1460" dirty="0">
+                <a:solidFill>
+                  <a:srgbClr val="17364A"/>
+                </a:solidFill>
+                <a:latin typeface="Aptos" pitchFamily="34" charset="0"/>
+                <a:ea typeface="Aptos" pitchFamily="34" charset="-122"/>
+                <a:cs typeface="Aptos" pitchFamily="34" charset="-120"/>
+              </a:rPr>
+              <a:t>Tool 22: Missing Voices Analysis (Checklist) - Use this tool to complete or strengthen the practical exercise for the module using.</a:t>
+            </a:r>
+            <a:endParaRPr lang="en-US" sz="1460" dirty="0"/>
+          </a:p>
+        </p:txBody>
+      </p:sp>
+      <p:sp>
+        <p:nvSpPr>
+          <p:cNvPr id="9" name="Shape 7"/>
+          <p:cNvSpPr/>
+          <p:nvPr/>
+        </p:nvSpPr>
+        <p:spPr>
+          <a:xfrm>
+            <a:off x="8046720" y="1417320"/>
+            <a:ext cx="3063240" cy="2103120"/>
+          </a:xfrm>
+          <a:prstGeom prst="roundRect">
+            <a:avLst>
+              <a:gd name="adj" fmla="val 5217"/>
+            </a:avLst>
+          </a:prstGeom>
+          <a:solidFill>
+            <a:srgbClr val="EAF6F8"/>
+          </a:solidFill>
+          <a:ln w="12700">
+            <a:solidFill>
+              <a:srgbClr val="B9D7E6"/>
+            </a:solidFill>
+            <a:prstDash val="solid"/>
+          </a:ln>
+        </p:spPr>
+      </p:sp>
+      <p:sp>
+        <p:nvSpPr>
+          <p:cNvPr id="10" name="Text 8"/>
+          <p:cNvSpPr/>
+          <p:nvPr/>
+        </p:nvSpPr>
+        <p:spPr>
+          <a:xfrm>
+            <a:off x="8211312" y="1563624"/>
+            <a:ext cx="2734056" cy="201168"/>
+          </a:xfrm>
+          <a:prstGeom prst="rect">
+            <a:avLst/>
+          </a:prstGeom>
+          <a:noFill/>
+          <a:ln/>
+        </p:spPr>
+        <p:txBody>
+          <a:bodyPr wrap="square" lIns="0" tIns="0" rIns="0" bIns="0" rtlCol="0" anchor="ctr"/>
+          <a:lstStyle/>
+          <a:p>
+            <a:pPr indent="0" marL="0">
+              <a:buNone/>
+            </a:pPr>
+            <a:r>
+              <a:rPr lang="en-US" sz="950" b="1" dirty="0">
+                <a:solidFill>
+                  <a:srgbClr val="0068B7"/>
+                </a:solidFill>
+                <a:latin typeface="Aptos" pitchFamily="34" charset="0"/>
+                <a:ea typeface="Aptos" pitchFamily="34" charset="-122"/>
+                <a:cs typeface="Aptos" pitchFamily="34" charset="-120"/>
+              </a:rPr>
+              <a:t>Use the tools</a:t>
+            </a:r>
+            <a:endParaRPr lang="en-US" sz="950" dirty="0"/>
+          </a:p>
+        </p:txBody>
+      </p:sp>
+      <p:sp>
+        <p:nvSpPr>
+          <p:cNvPr id="11" name="Text 9"/>
+          <p:cNvSpPr/>
+          <p:nvPr/>
+        </p:nvSpPr>
+        <p:spPr>
+          <a:xfrm>
+            <a:off x="8211312" y="1856232"/>
+            <a:ext cx="2734056" cy="1536192"/>
+          </a:xfrm>
+          <a:prstGeom prst="rect">
+            <a:avLst/>
+          </a:prstGeom>
+          <a:noFill/>
+          <a:ln/>
+        </p:spPr>
+        <p:txBody>
+          <a:bodyPr wrap="square" lIns="0" tIns="0" rIns="0" bIns="0" rtlCol="0" anchor="t">
+            <a:normAutofit/>
+          </a:bodyPr>
+          <a:lstStyle/>
+          <a:p>
+            <a:pPr indent="0" marL="0">
+              <a:buNone/>
+            </a:pPr>
+            <a:r>
+              <a:rPr lang="en-US" sz="1250" dirty="0">
+                <a:solidFill>
+                  <a:srgbClr val="17364A"/>
+                </a:solidFill>
+                <a:latin typeface="Aptos" pitchFamily="34" charset="0"/>
+                <a:ea typeface="Aptos" pitchFamily="34" charset="-122"/>
+                <a:cs typeface="Aptos" pitchFamily="34" charset="-120"/>
+              </a:rPr>
+              <a:t>Use linked tools when your department needs a structured worksheet, template, checklist, review process, or documentation artifact.</a:t>
+            </a:r>
+            <a:endParaRPr lang="en-US" sz="1250" dirty="0"/>
+          </a:p>
+        </p:txBody>
+      </p:sp>
+      <p:sp>
+        <p:nvSpPr>
+          <p:cNvPr id="12" name="Shape 10"/>
+          <p:cNvSpPr/>
+          <p:nvPr/>
+        </p:nvSpPr>
+        <p:spPr>
+          <a:xfrm>
+            <a:off x="8046720" y="3794760"/>
+            <a:ext cx="3063240" cy="1508760"/>
+          </a:xfrm>
+          <a:prstGeom prst="roundRect">
+            <a:avLst>
+              <a:gd name="adj" fmla="val 7273"/>
+            </a:avLst>
+          </a:prstGeom>
+          <a:solidFill>
+            <a:srgbClr val="EEF8ED"/>
+          </a:solidFill>
+          <a:ln w="12700">
+            <a:solidFill>
+              <a:srgbClr val="B9D7E6"/>
+            </a:solidFill>
+            <a:prstDash val="solid"/>
+          </a:ln>
+        </p:spPr>
+      </p:sp>
+      <p:sp>
+        <p:nvSpPr>
+          <p:cNvPr id="13" name="Text 11"/>
+          <p:cNvSpPr/>
+          <p:nvPr/>
+        </p:nvSpPr>
+        <p:spPr>
+          <a:xfrm>
+            <a:off x="8211312" y="3941064"/>
+            <a:ext cx="2734056" cy="201168"/>
+          </a:xfrm>
+          <a:prstGeom prst="rect">
+            <a:avLst/>
+          </a:prstGeom>
+          <a:noFill/>
+          <a:ln/>
+        </p:spPr>
+        <p:txBody>
+          <a:bodyPr wrap="square" lIns="0" tIns="0" rIns="0" bIns="0" rtlCol="0" anchor="ctr"/>
+          <a:lstStyle/>
+          <a:p>
+            <a:pPr indent="0" marL="0">
+              <a:buNone/>
+            </a:pPr>
+            <a:r>
+              <a:rPr lang="en-US" sz="950" b="1" dirty="0">
+                <a:solidFill>
+                  <a:srgbClr val="0068B7"/>
+                </a:solidFill>
+                <a:latin typeface="Aptos" pitchFamily="34" charset="0"/>
+                <a:ea typeface="Aptos" pitchFamily="34" charset="-122"/>
+                <a:cs typeface="Aptos" pitchFamily="34" charset="-120"/>
+              </a:rPr>
+              <a:t>Avoid duplication</a:t>
+            </a:r>
+            <a:endParaRPr lang="en-US" sz="950" dirty="0"/>
+          </a:p>
+        </p:txBody>
+      </p:sp>
+      <p:sp>
+        <p:nvSpPr>
+          <p:cNvPr id="14" name="Text 12"/>
+          <p:cNvSpPr/>
+          <p:nvPr/>
+        </p:nvSpPr>
+        <p:spPr>
+          <a:xfrm>
+            <a:off x="8211312" y="4233672"/>
+            <a:ext cx="2734056" cy="941832"/>
+          </a:xfrm>
+          <a:prstGeom prst="rect">
+            <a:avLst/>
+          </a:prstGeom>
+          <a:noFill/>
+          <a:ln/>
+        </p:spPr>
+        <p:txBody>
+          <a:bodyPr wrap="square" lIns="0" tIns="0" rIns="0" bIns="0" rtlCol="0" anchor="t">
+            <a:normAutofit/>
+          </a:bodyPr>
+          <a:lstStyle/>
+          <a:p>
+            <a:pPr indent="0" marL="0">
+              <a:buNone/>
+            </a:pPr>
+            <a:r>
+              <a:rPr lang="en-US" sz="1250" dirty="0">
+                <a:solidFill>
+                  <a:srgbClr val="17364A"/>
+                </a:solidFill>
+                <a:latin typeface="Aptos" pitchFamily="34" charset="0"/>
+                <a:ea typeface="Aptos" pitchFamily="34" charset="-122"/>
+                <a:cs typeface="Aptos" pitchFamily="34" charset="-120"/>
+              </a:rPr>
+              <a:t>If your department already has a strong equivalent tool, adapt or use the existing process instead of recreating it.</a:t>
+            </a:r>
+            <a:endParaRPr lang="en-US" sz="1250" dirty="0"/>
           </a:p>
         </p:txBody>
       </p:sp>
@@ -6701,7 +12100,32 @@
       </p:sp>
       <p:sp>
         <p:nvSpPr>
-          <p:cNvPr id="3" name="Text 1"/>
+          <p:cNvPr id="3" name="Shape 1"/>
+          <p:cNvSpPr/>
+          <p:nvPr/>
+        </p:nvSpPr>
+        <p:spPr>
+          <a:xfrm>
+            <a:off x="0" y="164592"/>
+            <a:ext cx="146304" cy="6693408"/>
+          </a:xfrm>
+          <a:prstGeom prst="rect">
+            <a:avLst/>
+          </a:prstGeom>
+          <a:solidFill>
+            <a:srgbClr val="2F8A28"/>
+          </a:solidFill>
+          <a:ln w="12700">
+            <a:solidFill>
+              <a:srgbClr val="2F8A28"/>
+            </a:solidFill>
+            <a:prstDash val="solid"/>
+          </a:ln>
+        </p:spPr>
+      </p:sp>
+      <p:sp>
+        <p:nvSpPr>
+          <p:cNvPr id="4" name="Text 2"/>
           <p:cNvSpPr/>
           <p:nvPr/>
         </p:nvSpPr>
@@ -6740,7 +12164,7 @@
       </p:sp>
       <p:sp>
         <p:nvSpPr>
-          <p:cNvPr id="4" name="Text 2"/>
+          <p:cNvPr id="5" name="Text 3"/>
           <p:cNvSpPr/>
           <p:nvPr/>
         </p:nvSpPr>
@@ -6779,7 +12203,7 @@
       </p:sp>
       <p:sp>
         <p:nvSpPr>
-          <p:cNvPr id="5" name="Text 3"/>
+          <p:cNvPr id="6" name="Text 4"/>
           <p:cNvSpPr/>
           <p:nvPr/>
         </p:nvSpPr>
@@ -6818,13 +12242,77 @@
       </p:sp>
       <p:sp>
         <p:nvSpPr>
-          <p:cNvPr id="6" name="Text 4"/>
+          <p:cNvPr id="7" name="Shape 5"/>
           <p:cNvSpPr/>
           <p:nvPr/>
         </p:nvSpPr>
         <p:spPr>
           <a:xfrm>
             <a:off x="640080" y="658368"/>
+            <a:ext cx="420624" cy="420624"/>
+          </a:xfrm>
+          <a:prstGeom prst="ellipse">
+            <a:avLst/>
+          </a:prstGeom>
+          <a:solidFill>
+            <a:srgbClr val="0068B7"/>
+          </a:solidFill>
+          <a:ln w="12700">
+            <a:solidFill>
+              <a:srgbClr val="0068B7"/>
+            </a:solidFill>
+            <a:prstDash val="solid"/>
+          </a:ln>
+        </p:spPr>
+      </p:sp>
+      <p:sp>
+        <p:nvSpPr>
+          <p:cNvPr id="8" name="Text 6"/>
+          <p:cNvSpPr/>
+          <p:nvPr/>
+        </p:nvSpPr>
+        <p:spPr>
+          <a:xfrm>
+            <a:off x="640080" y="731520"/>
+            <a:ext cx="420624" cy="164592"/>
+          </a:xfrm>
+          <a:prstGeom prst="rect">
+            <a:avLst/>
+          </a:prstGeom>
+          <a:noFill/>
+          <a:ln/>
+        </p:spPr>
+        <p:txBody>
+          <a:bodyPr wrap="square" lIns="0" tIns="0" rIns="0" bIns="0" rtlCol="0" anchor="ctr"/>
+          <a:lstStyle/>
+          <a:p>
+            <a:pPr algn="ctr" indent="0" marL="0">
+              <a:buNone/>
+            </a:pPr>
+            <a:r>
+              <a:rPr lang="en-US" sz="1100" b="1" dirty="0">
+                <a:solidFill>
+                  <a:srgbClr val="FFFFFF"/>
+                </a:solidFill>
+                <a:latin typeface="Aptos" pitchFamily="34" charset="0"/>
+                <a:ea typeface="Aptos" pitchFamily="34" charset="-122"/>
+                <a:cs typeface="Aptos" pitchFamily="34" charset="-120"/>
+              </a:rPr>
+              <a:t>1</a:t>
+            </a:r>
+            <a:endParaRPr lang="en-US" sz="1100" dirty="0"/>
+          </a:p>
+        </p:txBody>
+      </p:sp>
+      <p:sp>
+        <p:nvSpPr>
+          <p:cNvPr id="9" name="Text 7"/>
+          <p:cNvSpPr/>
+          <p:nvPr/>
+        </p:nvSpPr>
+        <p:spPr>
+          <a:xfrm>
+            <a:off x="640080" y="621792"/>
             <a:ext cx="10881360" cy="566928"/>
           </a:xfrm>
           <a:prstGeom prst="rect">
@@ -6851,7 +12339,7 @@
                 <a:ea typeface="Aptos Display" pitchFamily="34" charset="-122"/>
                 <a:cs typeface="Aptos Display" pitchFamily="34" charset="-120"/>
               </a:rPr>
-              <a:t>Module Overview</a:t>
+              <a:t>Learning Objectives</a:t>
             </a:r>
             <a:endParaRPr lang="en-US" sz="2700" dirty="0"/>
           </a:p>
@@ -6859,32 +12347,178 @@
       </p:sp>
       <p:sp>
         <p:nvSpPr>
-          <p:cNvPr id="7" name="Text 5"/>
-          <p:cNvSpPr/>
-          <p:nvPr/>
-        </p:nvSpPr>
-        <p:spPr>
-          <a:xfrm>
-            <a:off x="822960" y="1325880"/>
-            <a:ext cx="10378440" cy="4800600"/>
-          </a:xfrm>
-          <a:prstGeom prst="rect">
-            <a:avLst/>
-          </a:prstGeom>
-          <a:noFill/>
-          <a:ln/>
-        </p:spPr>
-        <p:txBody>
-          <a:bodyPr wrap="square" lIns="1016" tIns="1016" rIns="1016" bIns="1016" rtlCol="0" anchor="t">
+          <p:cNvPr id="10" name="Text 8"/>
+          <p:cNvSpPr/>
+          <p:nvPr/>
+        </p:nvSpPr>
+        <p:spPr>
+          <a:xfrm>
+            <a:off x="868680" y="1417320"/>
+            <a:ext cx="6675120" cy="4434840"/>
+          </a:xfrm>
+          <a:prstGeom prst="rect">
+            <a:avLst/>
+          </a:prstGeom>
+          <a:noFill/>
+          <a:ln/>
+        </p:spPr>
+        <p:txBody>
+          <a:bodyPr wrap="square" lIns="635" tIns="635" rIns="635" bIns="635" rtlCol="0" anchor="t">
             <a:normAutofit/>
           </a:bodyPr>
           <a:lstStyle/>
           <a:p>
+            <a:r>
+              <a:rPr lang="en-US" sz="1700" dirty="0">
+                <a:solidFill>
+                  <a:srgbClr val="17364A"/>
+                </a:solidFill>
+                <a:latin typeface="Aptos" pitchFamily="34" charset="0"/>
+                <a:ea typeface="Aptos" pitchFamily="34" charset="-122"/>
+                <a:cs typeface="Aptos" pitchFamily="34" charset="-120"/>
+              </a:rPr>
+              <a:t>Explain why generative AI outputs require structured review before public health use.</a:t>
+            </a:r>
+            <a:endParaRPr lang="en-US" sz="1700" dirty="0"/>
+          </a:p>
+          <a:p>
+            <a:r>
+              <a:rPr lang="en-US" sz="1700" dirty="0">
+                <a:solidFill>
+                  <a:srgbClr val="17364A"/>
+                </a:solidFill>
+                <a:latin typeface="Aptos" pitchFamily="34" charset="0"/>
+                <a:ea typeface="Aptos" pitchFamily="34" charset="-122"/>
+                <a:cs typeface="Aptos" pitchFamily="34" charset="-120"/>
+              </a:rPr>
+              <a:t>Distinguish factuality, source grounding, completeness, relevance, tone, and accessibility.</a:t>
+            </a:r>
+            <a:endParaRPr lang="en-US" sz="1700" dirty="0"/>
+          </a:p>
+          <a:p>
+            <a:r>
+              <a:rPr lang="en-US" sz="1700" dirty="0">
+                <a:solidFill>
+                  <a:srgbClr val="17364A"/>
+                </a:solidFill>
+                <a:latin typeface="Aptos" pitchFamily="34" charset="0"/>
+                <a:ea typeface="Aptos" pitchFamily="34" charset="-122"/>
+                <a:cs typeface="Aptos" pitchFamily="34" charset="-120"/>
+              </a:rPr>
+              <a:t>Identify hallucinations, omissions, unsupported claims, and misleading certainty.</a:t>
+            </a:r>
+            <a:endParaRPr lang="en-US" sz="1700" dirty="0"/>
+          </a:p>
+          <a:p>
+            <a:r>
+              <a:rPr lang="en-US" sz="1700" dirty="0">
+                <a:solidFill>
+                  <a:srgbClr val="17364A"/>
+                </a:solidFill>
+                <a:latin typeface="Aptos" pitchFamily="34" charset="0"/>
+                <a:ea typeface="Aptos" pitchFamily="34" charset="-122"/>
+                <a:cs typeface="Aptos" pitchFamily="34" charset="-120"/>
+              </a:rPr>
+              <a:t>Design review criteria for different output types, including summaries, drafts, classifications, and recommendations.</a:t>
+            </a:r>
+            <a:endParaRPr lang="en-US" sz="1700" dirty="0"/>
+          </a:p>
+        </p:txBody>
+      </p:sp>
+      <p:sp>
+        <p:nvSpPr>
+          <p:cNvPr id="11" name="Shape 9"/>
+          <p:cNvSpPr/>
+          <p:nvPr/>
+        </p:nvSpPr>
+        <p:spPr>
+          <a:xfrm>
+            <a:off x="7909560" y="1417320"/>
+            <a:ext cx="3154680" cy="1828800"/>
+          </a:xfrm>
+          <a:prstGeom prst="roundRect">
+            <a:avLst>
+              <a:gd name="adj" fmla="val 6000"/>
+            </a:avLst>
+          </a:prstGeom>
+          <a:solidFill>
+            <a:srgbClr val="EEF8ED"/>
+          </a:solidFill>
+          <a:ln w="12700">
+            <a:solidFill>
+              <a:srgbClr val="B9D7E6"/>
+            </a:solidFill>
+            <a:prstDash val="solid"/>
+          </a:ln>
+        </p:spPr>
+      </p:sp>
+      <p:sp>
+        <p:nvSpPr>
+          <p:cNvPr id="12" name="Text 10"/>
+          <p:cNvSpPr/>
+          <p:nvPr/>
+        </p:nvSpPr>
+        <p:spPr>
+          <a:xfrm>
+            <a:off x="8074152" y="1563624"/>
+            <a:ext cx="2825496" cy="201168"/>
+          </a:xfrm>
+          <a:prstGeom prst="rect">
+            <a:avLst/>
+          </a:prstGeom>
+          <a:noFill/>
+          <a:ln/>
+        </p:spPr>
+        <p:txBody>
+          <a:bodyPr wrap="square" lIns="0" tIns="0" rIns="0" bIns="0" rtlCol="0" anchor="ctr"/>
+          <a:lstStyle/>
+          <a:p>
             <a:pPr indent="0" marL="0">
               <a:buNone/>
             </a:pPr>
             <a:r>
-              <a:rPr lang="en-US" sz="1420" dirty="0">
+              <a:rPr lang="en-US" sz="950" b="1" dirty="0">
+                <a:solidFill>
+                  <a:srgbClr val="0068B7"/>
+                </a:solidFill>
+                <a:latin typeface="Aptos" pitchFamily="34" charset="0"/>
+                <a:ea typeface="Aptos" pitchFamily="34" charset="-122"/>
+                <a:cs typeface="Aptos" pitchFamily="34" charset="-120"/>
+              </a:rPr>
+              <a:t>Key idea</a:t>
+            </a:r>
+            <a:endParaRPr lang="en-US" sz="950" dirty="0"/>
+          </a:p>
+        </p:txBody>
+      </p:sp>
+      <p:sp>
+        <p:nvSpPr>
+          <p:cNvPr id="13" name="Text 11"/>
+          <p:cNvSpPr/>
+          <p:nvPr/>
+        </p:nvSpPr>
+        <p:spPr>
+          <a:xfrm>
+            <a:off x="8074152" y="1856232"/>
+            <a:ext cx="2825496" cy="1261872"/>
+          </a:xfrm>
+          <a:prstGeom prst="rect">
+            <a:avLst/>
+          </a:prstGeom>
+          <a:noFill/>
+          <a:ln/>
+        </p:spPr>
+        <p:txBody>
+          <a:bodyPr wrap="square" lIns="0" tIns="0" rIns="0" bIns="0" rtlCol="0" anchor="t">
+            <a:normAutofit/>
+          </a:bodyPr>
+          <a:lstStyle/>
+          <a:p>
+            <a:pPr indent="0" marL="0">
+              <a:buNone/>
+            </a:pPr>
+            <a:r>
+              <a:rPr lang="en-US" sz="1250" dirty="0">
                 <a:solidFill>
                   <a:srgbClr val="17364A"/>
                 </a:solidFill>
@@ -6892,9 +12526,116 @@
                 <a:ea typeface="Aptos" pitchFamily="34" charset="-122"/>
                 <a:cs typeface="Aptos" pitchFamily="34" charset="-120"/>
               </a:rPr>
-              <a:t>Generative AI can draft, summarize, translate, classify, explain, and synthesize information, but its outputs require careful evaluation. In public health, generated content may affect case review, public communication, policy interpretation, community trust, staff training, or leadership decisions. Fluent writing does not guarantee accuracy, completeness, appropriateness, or safety. This module teaches learners how to evaluate generative AI outputs using structured review criteria. The module emphasizes factuality, source grounding, omissions, unsupported claims, bias, privacy, tone, accessibility, language quality, and fitness for intended use. Learners will distinguish low-risk drafting support from outputs that require stronger review because they could affect public health action. By the end of the module, learners should be able to create and apply an evaluation rubric for generative AI outputs in a public health workflow.</a:t>
-            </a:r>
-            <a:endParaRPr lang="en-US" sz="1420" dirty="0"/>
+              <a:t>Explain why generative AI outputs require structured review before public health use.</a:t>
+            </a:r>
+            <a:endParaRPr lang="en-US" sz="1250" dirty="0"/>
+          </a:p>
+        </p:txBody>
+      </p:sp>
+      <p:sp>
+        <p:nvSpPr>
+          <p:cNvPr id="14" name="Shape 12"/>
+          <p:cNvSpPr/>
+          <p:nvPr/>
+        </p:nvSpPr>
+        <p:spPr>
+          <a:xfrm>
+            <a:off x="7909560" y="3520440"/>
+            <a:ext cx="3154680" cy="1737360"/>
+          </a:xfrm>
+          <a:prstGeom prst="roundRect">
+            <a:avLst>
+              <a:gd name="adj" fmla="val 6316"/>
+            </a:avLst>
+          </a:prstGeom>
+          <a:solidFill>
+            <a:srgbClr val="EAF6F8"/>
+          </a:solidFill>
+          <a:ln w="12700">
+            <a:solidFill>
+              <a:srgbClr val="B9D7E6"/>
+            </a:solidFill>
+            <a:prstDash val="solid"/>
+          </a:ln>
+        </p:spPr>
+      </p:sp>
+      <p:sp>
+        <p:nvSpPr>
+          <p:cNvPr id="15" name="Text 13"/>
+          <p:cNvSpPr/>
+          <p:nvPr/>
+        </p:nvSpPr>
+        <p:spPr>
+          <a:xfrm>
+            <a:off x="8074152" y="3666744"/>
+            <a:ext cx="2825496" cy="201168"/>
+          </a:xfrm>
+          <a:prstGeom prst="rect">
+            <a:avLst/>
+          </a:prstGeom>
+          <a:noFill/>
+          <a:ln/>
+        </p:spPr>
+        <p:txBody>
+          <a:bodyPr wrap="square" lIns="0" tIns="0" rIns="0" bIns="0" rtlCol="0" anchor="ctr"/>
+          <a:lstStyle/>
+          <a:p>
+            <a:pPr indent="0" marL="0">
+              <a:buNone/>
+            </a:pPr>
+            <a:r>
+              <a:rPr lang="en-US" sz="950" b="1" dirty="0">
+                <a:solidFill>
+                  <a:srgbClr val="0068B7"/>
+                </a:solidFill>
+                <a:latin typeface="Aptos" pitchFamily="34" charset="0"/>
+                <a:ea typeface="Aptos" pitchFamily="34" charset="-122"/>
+                <a:cs typeface="Aptos" pitchFamily="34" charset="-120"/>
+              </a:rPr>
+              <a:t>Use this for</a:t>
+            </a:r>
+            <a:endParaRPr lang="en-US" sz="950" dirty="0"/>
+          </a:p>
+        </p:txBody>
+      </p:sp>
+      <p:sp>
+        <p:nvSpPr>
+          <p:cNvPr id="16" name="Text 14"/>
+          <p:cNvSpPr/>
+          <p:nvPr/>
+        </p:nvSpPr>
+        <p:spPr>
+          <a:xfrm>
+            <a:off x="8074152" y="3959352"/>
+            <a:ext cx="2825496" cy="1170432"/>
+          </a:xfrm>
+          <a:prstGeom prst="rect">
+            <a:avLst/>
+          </a:prstGeom>
+          <a:noFill/>
+          <a:ln/>
+        </p:spPr>
+        <p:txBody>
+          <a:bodyPr wrap="square" lIns="0" tIns="0" rIns="0" bIns="0" rtlCol="0" anchor="t">
+            <a:normAutofit/>
+          </a:bodyPr>
+          <a:lstStyle/>
+          <a:p>
+            <a:pPr indent="0" marL="0">
+              <a:buNone/>
+            </a:pPr>
+            <a:r>
+              <a:rPr lang="en-US" sz="1250" dirty="0">
+                <a:solidFill>
+                  <a:srgbClr val="17364A"/>
+                </a:solidFill>
+                <a:latin typeface="Aptos" pitchFamily="34" charset="0"/>
+                <a:ea typeface="Aptos" pitchFamily="34" charset="-122"/>
+                <a:cs typeface="Aptos" pitchFamily="34" charset="-120"/>
+              </a:rPr>
+              <a:t>Connect the concept to public health decisions, safeguards, documentation, or implementation work.</a:t>
+            </a:r>
+            <a:endParaRPr lang="en-US" sz="1250" dirty="0"/>
           </a:p>
         </p:txBody>
       </p:sp>
@@ -6957,7 +12698,32 @@
       </p:sp>
       <p:sp>
         <p:nvSpPr>
-          <p:cNvPr id="3" name="Text 1"/>
+          <p:cNvPr id="3" name="Shape 1"/>
+          <p:cNvSpPr/>
+          <p:nvPr/>
+        </p:nvSpPr>
+        <p:spPr>
+          <a:xfrm>
+            <a:off x="0" y="164592"/>
+            <a:ext cx="146304" cy="6693408"/>
+          </a:xfrm>
+          <a:prstGeom prst="rect">
+            <a:avLst/>
+          </a:prstGeom>
+          <a:solidFill>
+            <a:srgbClr val="2F8A28"/>
+          </a:solidFill>
+          <a:ln w="12700">
+            <a:solidFill>
+              <a:srgbClr val="2F8A28"/>
+            </a:solidFill>
+            <a:prstDash val="solid"/>
+          </a:ln>
+        </p:spPr>
+      </p:sp>
+      <p:sp>
+        <p:nvSpPr>
+          <p:cNvPr id="4" name="Text 2"/>
           <p:cNvSpPr/>
           <p:nvPr/>
         </p:nvSpPr>
@@ -6996,7 +12762,7 @@
       </p:sp>
       <p:sp>
         <p:nvSpPr>
-          <p:cNvPr id="4" name="Text 2"/>
+          <p:cNvPr id="5" name="Text 3"/>
           <p:cNvSpPr/>
           <p:nvPr/>
         </p:nvSpPr>
@@ -7035,7 +12801,7 @@
       </p:sp>
       <p:sp>
         <p:nvSpPr>
-          <p:cNvPr id="5" name="Text 3"/>
+          <p:cNvPr id="6" name="Text 4"/>
           <p:cNvSpPr/>
           <p:nvPr/>
         </p:nvSpPr>
@@ -7074,7 +12840,7 @@
       </p:sp>
       <p:sp>
         <p:nvSpPr>
-          <p:cNvPr id="6" name="Text 4"/>
+          <p:cNvPr id="7" name="Text 5"/>
           <p:cNvSpPr/>
           <p:nvPr/>
         </p:nvSpPr>
@@ -7107,7 +12873,7 @@
                 <a:ea typeface="Aptos Display" pitchFamily="34" charset="-122"/>
                 <a:cs typeface="Aptos Display" pitchFamily="34" charset="-120"/>
               </a:rPr>
-              <a:t>Why This Topic Matters for Public Health AI</a:t>
+              <a:t>Learning Objectives Continued</a:t>
             </a:r>
             <a:endParaRPr lang="en-US" sz="2700" dirty="0"/>
           </a:p>
@@ -7115,32 +12881,136 @@
       </p:sp>
       <p:sp>
         <p:nvSpPr>
-          <p:cNvPr id="7" name="Text 5"/>
-          <p:cNvSpPr/>
-          <p:nvPr/>
-        </p:nvSpPr>
-        <p:spPr>
-          <a:xfrm>
-            <a:off x="822960" y="1325880"/>
-            <a:ext cx="10378440" cy="4800600"/>
-          </a:xfrm>
-          <a:prstGeom prst="rect">
-            <a:avLst/>
-          </a:prstGeom>
-          <a:noFill/>
-          <a:ln/>
-        </p:spPr>
-        <p:txBody>
-          <a:bodyPr wrap="square" lIns="1016" tIns="1016" rIns="1016" bIns="1016" rtlCol="0" anchor="t">
+          <p:cNvPr id="8" name="Text 6"/>
+          <p:cNvSpPr/>
+          <p:nvPr/>
+        </p:nvSpPr>
+        <p:spPr>
+          <a:xfrm>
+            <a:off x="868680" y="1417320"/>
+            <a:ext cx="6675120" cy="4434840"/>
+          </a:xfrm>
+          <a:prstGeom prst="rect">
+            <a:avLst/>
+          </a:prstGeom>
+          <a:noFill/>
+          <a:ln/>
+        </p:spPr>
+        <p:txBody>
+          <a:bodyPr wrap="square" lIns="635" tIns="635" rIns="635" bIns="635" rtlCol="0" anchor="t">
             <a:normAutofit/>
           </a:bodyPr>
           <a:lstStyle/>
           <a:p>
+            <a:r>
+              <a:rPr lang="en-US" sz="1700" dirty="0">
+                <a:solidFill>
+                  <a:srgbClr val="17364A"/>
+                </a:solidFill>
+                <a:latin typeface="Aptos" pitchFamily="34" charset="0"/>
+                <a:ea typeface="Aptos" pitchFamily="34" charset="-122"/>
+                <a:cs typeface="Aptos" pitchFamily="34" charset="-120"/>
+              </a:rPr>
+              <a:t>Produce a generative AI output evaluation rubric.</a:t>
+            </a:r>
+            <a:endParaRPr lang="en-US" sz="1700" dirty="0"/>
+          </a:p>
+        </p:txBody>
+      </p:sp>
+      <p:sp>
+        <p:nvSpPr>
+          <p:cNvPr id="9" name="Shape 7"/>
+          <p:cNvSpPr/>
+          <p:nvPr/>
+        </p:nvSpPr>
+        <p:spPr>
+          <a:xfrm>
+            <a:off x="7909560" y="1417320"/>
+            <a:ext cx="3154680" cy="1828800"/>
+          </a:xfrm>
+          <a:prstGeom prst="roundRect">
+            <a:avLst>
+              <a:gd name="adj" fmla="val 6000"/>
+            </a:avLst>
+          </a:prstGeom>
+          <a:solidFill>
+            <a:srgbClr val="EEF8ED"/>
+          </a:solidFill>
+          <a:ln w="12700">
+            <a:solidFill>
+              <a:srgbClr val="B9D7E6"/>
+            </a:solidFill>
+            <a:prstDash val="solid"/>
+          </a:ln>
+        </p:spPr>
+      </p:sp>
+      <p:sp>
+        <p:nvSpPr>
+          <p:cNvPr id="10" name="Text 8"/>
+          <p:cNvSpPr/>
+          <p:nvPr/>
+        </p:nvSpPr>
+        <p:spPr>
+          <a:xfrm>
+            <a:off x="8074152" y="1563624"/>
+            <a:ext cx="2825496" cy="201168"/>
+          </a:xfrm>
+          <a:prstGeom prst="rect">
+            <a:avLst/>
+          </a:prstGeom>
+          <a:noFill/>
+          <a:ln/>
+        </p:spPr>
+        <p:txBody>
+          <a:bodyPr wrap="square" lIns="0" tIns="0" rIns="0" bIns="0" rtlCol="0" anchor="ctr"/>
+          <a:lstStyle/>
+          <a:p>
             <a:pPr indent="0" marL="0">
               <a:buNone/>
             </a:pPr>
             <a:r>
-              <a:rPr lang="en-US" sz="1420" dirty="0">
+              <a:rPr lang="en-US" sz="950" b="1" dirty="0">
+                <a:solidFill>
+                  <a:srgbClr val="0068B7"/>
+                </a:solidFill>
+                <a:latin typeface="Aptos" pitchFamily="34" charset="0"/>
+                <a:ea typeface="Aptos" pitchFamily="34" charset="-122"/>
+                <a:cs typeface="Aptos" pitchFamily="34" charset="-120"/>
+              </a:rPr>
+              <a:t>Key idea</a:t>
+            </a:r>
+            <a:endParaRPr lang="en-US" sz="950" dirty="0"/>
+          </a:p>
+        </p:txBody>
+      </p:sp>
+      <p:sp>
+        <p:nvSpPr>
+          <p:cNvPr id="11" name="Text 9"/>
+          <p:cNvSpPr/>
+          <p:nvPr/>
+        </p:nvSpPr>
+        <p:spPr>
+          <a:xfrm>
+            <a:off x="8074152" y="1856232"/>
+            <a:ext cx="2825496" cy="1261872"/>
+          </a:xfrm>
+          <a:prstGeom prst="rect">
+            <a:avLst/>
+          </a:prstGeom>
+          <a:noFill/>
+          <a:ln/>
+        </p:spPr>
+        <p:txBody>
+          <a:bodyPr wrap="square" lIns="0" tIns="0" rIns="0" bIns="0" rtlCol="0" anchor="t">
+            <a:normAutofit/>
+          </a:bodyPr>
+          <a:lstStyle/>
+          <a:p>
+            <a:pPr indent="0" marL="0">
+              <a:buNone/>
+            </a:pPr>
+            <a:r>
+              <a:rPr lang="en-US" sz="1250" dirty="0">
                 <a:solidFill>
                   <a:srgbClr val="17364A"/>
                 </a:solidFill>
@@ -7148,9 +13018,116 @@
                 <a:ea typeface="Aptos" pitchFamily="34" charset="-122"/>
                 <a:cs typeface="Aptos" pitchFamily="34" charset="-120"/>
               </a:rPr>
-              <a:t>Generative AI matters for public health because it can reduce burden in text-heavy workflows. Staff may use it to summarize guidance, draft meeting notes, simplify technical language, translate or adapt messages, organize case information, or synthesize stakeholder feedback. These uses can be valuable when they save time and improve clarity. The same capabilities create risk. Generative AI can invent facts, omit caveats, misstate guidance, flatten uncertainty, or produce language that sounds more definitive than the evidence supports. It may introduce bias, inappropriate tone, or inaccessible wording. When sensitive data are involved, prompting and output handling can also create privacy and records concerns. Public health agencies need structured evaluation because informal review is inconsistent. A reviewer may notice grammar errors but miss unsupported claims. Another may trust a polished summary without checking source documents. A rubric helps reviewers evaluate outputs against the purpose, source material, audience, and safeguards required for the use case.</a:t>
-            </a:r>
-            <a:endParaRPr lang="en-US" sz="1420" dirty="0"/>
+              <a:t>Produce a generative AI output evaluation rubric.</a:t>
+            </a:r>
+            <a:endParaRPr lang="en-US" sz="1250" dirty="0"/>
+          </a:p>
+        </p:txBody>
+      </p:sp>
+      <p:sp>
+        <p:nvSpPr>
+          <p:cNvPr id="12" name="Shape 10"/>
+          <p:cNvSpPr/>
+          <p:nvPr/>
+        </p:nvSpPr>
+        <p:spPr>
+          <a:xfrm>
+            <a:off x="7909560" y="3520440"/>
+            <a:ext cx="3154680" cy="1737360"/>
+          </a:xfrm>
+          <a:prstGeom prst="roundRect">
+            <a:avLst>
+              <a:gd name="adj" fmla="val 6316"/>
+            </a:avLst>
+          </a:prstGeom>
+          <a:solidFill>
+            <a:srgbClr val="EAF6F8"/>
+          </a:solidFill>
+          <a:ln w="12700">
+            <a:solidFill>
+              <a:srgbClr val="B9D7E6"/>
+            </a:solidFill>
+            <a:prstDash val="solid"/>
+          </a:ln>
+        </p:spPr>
+      </p:sp>
+      <p:sp>
+        <p:nvSpPr>
+          <p:cNvPr id="13" name="Text 11"/>
+          <p:cNvSpPr/>
+          <p:nvPr/>
+        </p:nvSpPr>
+        <p:spPr>
+          <a:xfrm>
+            <a:off x="8074152" y="3666744"/>
+            <a:ext cx="2825496" cy="201168"/>
+          </a:xfrm>
+          <a:prstGeom prst="rect">
+            <a:avLst/>
+          </a:prstGeom>
+          <a:noFill/>
+          <a:ln/>
+        </p:spPr>
+        <p:txBody>
+          <a:bodyPr wrap="square" lIns="0" tIns="0" rIns="0" bIns="0" rtlCol="0" anchor="ctr"/>
+          <a:lstStyle/>
+          <a:p>
+            <a:pPr indent="0" marL="0">
+              <a:buNone/>
+            </a:pPr>
+            <a:r>
+              <a:rPr lang="en-US" sz="950" b="1" dirty="0">
+                <a:solidFill>
+                  <a:srgbClr val="0068B7"/>
+                </a:solidFill>
+                <a:latin typeface="Aptos" pitchFamily="34" charset="0"/>
+                <a:ea typeface="Aptos" pitchFamily="34" charset="-122"/>
+                <a:cs typeface="Aptos" pitchFamily="34" charset="-120"/>
+              </a:rPr>
+              <a:t>Use this for</a:t>
+            </a:r>
+            <a:endParaRPr lang="en-US" sz="950" dirty="0"/>
+          </a:p>
+        </p:txBody>
+      </p:sp>
+      <p:sp>
+        <p:nvSpPr>
+          <p:cNvPr id="14" name="Text 12"/>
+          <p:cNvSpPr/>
+          <p:nvPr/>
+        </p:nvSpPr>
+        <p:spPr>
+          <a:xfrm>
+            <a:off x="8074152" y="3959352"/>
+            <a:ext cx="2825496" cy="1170432"/>
+          </a:xfrm>
+          <a:prstGeom prst="rect">
+            <a:avLst/>
+          </a:prstGeom>
+          <a:noFill/>
+          <a:ln/>
+        </p:spPr>
+        <p:txBody>
+          <a:bodyPr wrap="square" lIns="0" tIns="0" rIns="0" bIns="0" rtlCol="0" anchor="t">
+            <a:normAutofit/>
+          </a:bodyPr>
+          <a:lstStyle/>
+          <a:p>
+            <a:pPr indent="0" marL="0">
+              <a:buNone/>
+            </a:pPr>
+            <a:r>
+              <a:rPr lang="en-US" sz="1250" dirty="0">
+                <a:solidFill>
+                  <a:srgbClr val="17364A"/>
+                </a:solidFill>
+                <a:latin typeface="Aptos" pitchFamily="34" charset="0"/>
+                <a:ea typeface="Aptos" pitchFamily="34" charset="-122"/>
+                <a:cs typeface="Aptos" pitchFamily="34" charset="-120"/>
+              </a:rPr>
+              <a:t>Connect the concept to public health decisions, safeguards, documentation, or implementation work.</a:t>
+            </a:r>
+            <a:endParaRPr lang="en-US" sz="1250" dirty="0"/>
           </a:p>
         </p:txBody>
       </p:sp>
@@ -7213,7 +13190,32 @@
       </p:sp>
       <p:sp>
         <p:nvSpPr>
-          <p:cNvPr id="3" name="Text 1"/>
+          <p:cNvPr id="3" name="Shape 1"/>
+          <p:cNvSpPr/>
+          <p:nvPr/>
+        </p:nvSpPr>
+        <p:spPr>
+          <a:xfrm>
+            <a:off x="0" y="164592"/>
+            <a:ext cx="146304" cy="6693408"/>
+          </a:xfrm>
+          <a:prstGeom prst="rect">
+            <a:avLst/>
+          </a:prstGeom>
+          <a:solidFill>
+            <a:srgbClr val="2F8A28"/>
+          </a:solidFill>
+          <a:ln w="12700">
+            <a:solidFill>
+              <a:srgbClr val="2F8A28"/>
+            </a:solidFill>
+            <a:prstDash val="solid"/>
+          </a:ln>
+        </p:spPr>
+      </p:sp>
+      <p:sp>
+        <p:nvSpPr>
+          <p:cNvPr id="4" name="Text 2"/>
           <p:cNvSpPr/>
           <p:nvPr/>
         </p:nvSpPr>
@@ -7252,7 +13254,7 @@
       </p:sp>
       <p:sp>
         <p:nvSpPr>
-          <p:cNvPr id="4" name="Text 2"/>
+          <p:cNvPr id="5" name="Text 3"/>
           <p:cNvSpPr/>
           <p:nvPr/>
         </p:nvSpPr>
@@ -7291,7 +13293,7 @@
       </p:sp>
       <p:sp>
         <p:nvSpPr>
-          <p:cNvPr id="5" name="Text 3"/>
+          <p:cNvPr id="6" name="Text 4"/>
           <p:cNvSpPr/>
           <p:nvPr/>
         </p:nvSpPr>
@@ -7330,13 +13332,77 @@
       </p:sp>
       <p:sp>
         <p:nvSpPr>
-          <p:cNvPr id="6" name="Text 4"/>
+          <p:cNvPr id="7" name="Shape 5"/>
           <p:cNvSpPr/>
           <p:nvPr/>
         </p:nvSpPr>
         <p:spPr>
           <a:xfrm>
             <a:off x="640080" y="658368"/>
+            <a:ext cx="420624" cy="420624"/>
+          </a:xfrm>
+          <a:prstGeom prst="ellipse">
+            <a:avLst/>
+          </a:prstGeom>
+          <a:solidFill>
+            <a:srgbClr val="0068B7"/>
+          </a:solidFill>
+          <a:ln w="12700">
+            <a:solidFill>
+              <a:srgbClr val="0068B7"/>
+            </a:solidFill>
+            <a:prstDash val="solid"/>
+          </a:ln>
+        </p:spPr>
+      </p:sp>
+      <p:sp>
+        <p:nvSpPr>
+          <p:cNvPr id="8" name="Text 6"/>
+          <p:cNvSpPr/>
+          <p:nvPr/>
+        </p:nvSpPr>
+        <p:spPr>
+          <a:xfrm>
+            <a:off x="640080" y="731520"/>
+            <a:ext cx="420624" cy="164592"/>
+          </a:xfrm>
+          <a:prstGeom prst="rect">
+            <a:avLst/>
+          </a:prstGeom>
+          <a:noFill/>
+          <a:ln/>
+        </p:spPr>
+        <p:txBody>
+          <a:bodyPr wrap="square" lIns="0" tIns="0" rIns="0" bIns="0" rtlCol="0" anchor="ctr"/>
+          <a:lstStyle/>
+          <a:p>
+            <a:pPr algn="ctr" indent="0" marL="0">
+              <a:buNone/>
+            </a:pPr>
+            <a:r>
+              <a:rPr lang="en-US" sz="1100" b="1" dirty="0">
+                <a:solidFill>
+                  <a:srgbClr val="FFFFFF"/>
+                </a:solidFill>
+                <a:latin typeface="Aptos" pitchFamily="34" charset="0"/>
+                <a:ea typeface="Aptos" pitchFamily="34" charset="-122"/>
+                <a:cs typeface="Aptos" pitchFamily="34" charset="-120"/>
+              </a:rPr>
+              <a:t>2</a:t>
+            </a:r>
+            <a:endParaRPr lang="en-US" sz="1100" dirty="0"/>
+          </a:p>
+        </p:txBody>
+      </p:sp>
+      <p:sp>
+        <p:nvSpPr>
+          <p:cNvPr id="9" name="Text 7"/>
+          <p:cNvSpPr/>
+          <p:nvPr/>
+        </p:nvSpPr>
+        <p:spPr>
+          <a:xfrm>
+            <a:off x="640080" y="621792"/>
             <a:ext cx="10881360" cy="566928"/>
           </a:xfrm>
           <a:prstGeom prst="rect">
@@ -7363,7 +13429,7 @@
                 <a:ea typeface="Aptos Display" pitchFamily="34" charset="-122"/>
                 <a:cs typeface="Aptos Display" pitchFamily="34" charset="-120"/>
               </a:rPr>
-              <a:t>Public Health Example</a:t>
+              <a:t>Module Overview</a:t>
             </a:r>
             <a:endParaRPr lang="en-US" sz="2700" dirty="0"/>
           </a:p>
@@ -7371,32 +13437,178 @@
       </p:sp>
       <p:sp>
         <p:nvSpPr>
-          <p:cNvPr id="7" name="Text 5"/>
-          <p:cNvSpPr/>
-          <p:nvPr/>
-        </p:nvSpPr>
-        <p:spPr>
-          <a:xfrm>
-            <a:off x="822960" y="1325880"/>
-            <a:ext cx="10378440" cy="4800600"/>
-          </a:xfrm>
-          <a:prstGeom prst="rect">
-            <a:avLst/>
-          </a:prstGeom>
-          <a:noFill/>
-          <a:ln/>
-        </p:spPr>
-        <p:txBody>
-          <a:bodyPr wrap="square" lIns="1016" tIns="1016" rIns="1016" bIns="1016" rtlCol="0" anchor="t">
+          <p:cNvPr id="10" name="Text 8"/>
+          <p:cNvSpPr/>
+          <p:nvPr/>
+        </p:nvSpPr>
+        <p:spPr>
+          <a:xfrm>
+            <a:off x="868680" y="1417320"/>
+            <a:ext cx="6675120" cy="4434840"/>
+          </a:xfrm>
+          <a:prstGeom prst="rect">
+            <a:avLst/>
+          </a:prstGeom>
+          <a:noFill/>
+          <a:ln/>
+        </p:spPr>
+        <p:txBody>
+          <a:bodyPr wrap="square" lIns="635" tIns="635" rIns="635" bIns="635" rtlCol="0" anchor="t">
             <a:normAutofit/>
           </a:bodyPr>
           <a:lstStyle/>
           <a:p>
+            <a:r>
+              <a:rPr lang="en-US" sz="1700" dirty="0">
+                <a:solidFill>
+                  <a:srgbClr val="17364A"/>
+                </a:solidFill>
+                <a:latin typeface="Aptos" pitchFamily="34" charset="0"/>
+                <a:ea typeface="Aptos" pitchFamily="34" charset="-122"/>
+                <a:cs typeface="Aptos" pitchFamily="34" charset="-120"/>
+              </a:rPr>
+              <a:t>Generative AI can draft, summarize, translate, classify, explain, and synthesize information, but its outputs require.</a:t>
+            </a:r>
+            <a:endParaRPr lang="en-US" sz="1700" dirty="0"/>
+          </a:p>
+          <a:p>
+            <a:r>
+              <a:rPr lang="en-US" sz="1700" dirty="0">
+                <a:solidFill>
+                  <a:srgbClr val="17364A"/>
+                </a:solidFill>
+                <a:latin typeface="Aptos" pitchFamily="34" charset="0"/>
+                <a:ea typeface="Aptos" pitchFamily="34" charset="-122"/>
+                <a:cs typeface="Aptos" pitchFamily="34" charset="-120"/>
+              </a:rPr>
+              <a:t>In public health, generated content may affect case review, public communication, policy interpretation, community trust,.</a:t>
+            </a:r>
+            <a:endParaRPr lang="en-US" sz="1700" dirty="0"/>
+          </a:p>
+          <a:p>
+            <a:r>
+              <a:rPr lang="en-US" sz="1700" dirty="0">
+                <a:solidFill>
+                  <a:srgbClr val="17364A"/>
+                </a:solidFill>
+                <a:latin typeface="Aptos" pitchFamily="34" charset="0"/>
+                <a:ea typeface="Aptos" pitchFamily="34" charset="-122"/>
+                <a:cs typeface="Aptos" pitchFamily="34" charset="-120"/>
+              </a:rPr>
+              <a:t>Fluent writing does not guarantee accuracy, completeness, appropriateness, or safety.</a:t>
+            </a:r>
+            <a:endParaRPr lang="en-US" sz="1700" dirty="0"/>
+          </a:p>
+          <a:p>
+            <a:r>
+              <a:rPr lang="en-US" sz="1700" dirty="0">
+                <a:solidFill>
+                  <a:srgbClr val="17364A"/>
+                </a:solidFill>
+                <a:latin typeface="Aptos" pitchFamily="34" charset="0"/>
+                <a:ea typeface="Aptos" pitchFamily="34" charset="-122"/>
+                <a:cs typeface="Aptos" pitchFamily="34" charset="-120"/>
+              </a:rPr>
+              <a:t>This module teaches learners how to evaluate generative AI outputs using structured review criteria.</a:t>
+            </a:r>
+            <a:endParaRPr lang="en-US" sz="1700" dirty="0"/>
+          </a:p>
+        </p:txBody>
+      </p:sp>
+      <p:sp>
+        <p:nvSpPr>
+          <p:cNvPr id="11" name="Shape 9"/>
+          <p:cNvSpPr/>
+          <p:nvPr/>
+        </p:nvSpPr>
+        <p:spPr>
+          <a:xfrm>
+            <a:off x="7909560" y="1417320"/>
+            <a:ext cx="3154680" cy="1828800"/>
+          </a:xfrm>
+          <a:prstGeom prst="roundRect">
+            <a:avLst>
+              <a:gd name="adj" fmla="val 6000"/>
+            </a:avLst>
+          </a:prstGeom>
+          <a:solidFill>
+            <a:srgbClr val="EEF8ED"/>
+          </a:solidFill>
+          <a:ln w="12700">
+            <a:solidFill>
+              <a:srgbClr val="B9D7E6"/>
+            </a:solidFill>
+            <a:prstDash val="solid"/>
+          </a:ln>
+        </p:spPr>
+      </p:sp>
+      <p:sp>
+        <p:nvSpPr>
+          <p:cNvPr id="12" name="Text 10"/>
+          <p:cNvSpPr/>
+          <p:nvPr/>
+        </p:nvSpPr>
+        <p:spPr>
+          <a:xfrm>
+            <a:off x="8074152" y="1563624"/>
+            <a:ext cx="2825496" cy="201168"/>
+          </a:xfrm>
+          <a:prstGeom prst="rect">
+            <a:avLst/>
+          </a:prstGeom>
+          <a:noFill/>
+          <a:ln/>
+        </p:spPr>
+        <p:txBody>
+          <a:bodyPr wrap="square" lIns="0" tIns="0" rIns="0" bIns="0" rtlCol="0" anchor="ctr"/>
+          <a:lstStyle/>
+          <a:p>
             <a:pPr indent="0" marL="0">
               <a:buNone/>
             </a:pPr>
             <a:r>
-              <a:rPr lang="en-US" sz="1420" dirty="0">
+              <a:rPr lang="en-US" sz="950" b="1" dirty="0">
+                <a:solidFill>
+                  <a:srgbClr val="0068B7"/>
+                </a:solidFill>
+                <a:latin typeface="Aptos" pitchFamily="34" charset="0"/>
+                <a:ea typeface="Aptos" pitchFamily="34" charset="-122"/>
+                <a:cs typeface="Aptos" pitchFamily="34" charset="-120"/>
+              </a:rPr>
+              <a:t>Key idea</a:t>
+            </a:r>
+            <a:endParaRPr lang="en-US" sz="950" dirty="0"/>
+          </a:p>
+        </p:txBody>
+      </p:sp>
+      <p:sp>
+        <p:nvSpPr>
+          <p:cNvPr id="13" name="Text 11"/>
+          <p:cNvSpPr/>
+          <p:nvPr/>
+        </p:nvSpPr>
+        <p:spPr>
+          <a:xfrm>
+            <a:off x="8074152" y="1856232"/>
+            <a:ext cx="2825496" cy="1261872"/>
+          </a:xfrm>
+          <a:prstGeom prst="rect">
+            <a:avLst/>
+          </a:prstGeom>
+          <a:noFill/>
+          <a:ln/>
+        </p:spPr>
+        <p:txBody>
+          <a:bodyPr wrap="square" lIns="0" tIns="0" rIns="0" bIns="0" rtlCol="0" anchor="t">
+            <a:normAutofit/>
+          </a:bodyPr>
+          <a:lstStyle/>
+          <a:p>
+            <a:pPr indent="0" marL="0">
+              <a:buNone/>
+            </a:pPr>
+            <a:r>
+              <a:rPr lang="en-US" sz="1250" dirty="0">
                 <a:solidFill>
                   <a:srgbClr val="17364A"/>
                 </a:solidFill>
@@ -7404,9 +13616,116 @@
                 <a:ea typeface="Aptos" pitchFamily="34" charset="-122"/>
                 <a:cs typeface="Aptos" pitchFamily="34" charset="-120"/>
               </a:rPr>
-              <a:t>A communications team may use generative AI to draft a plain-language public message about a local respiratory illness increase. The draft may be clear and readable, but reviewers must check whether the numbers are correct, whether the recommendations match current guidance, whether uncertainty is represented accurately, and whether the message is accessible in multiple languages. An epidemiology team may use generative AI to summarize case investigation notes for internal review. The summary must be checked against source notes because a missed exposure, incorrect date, or invented symptom could affect follow-up. The team should document whether the summary was accepted, edited, or rejected.</a:t>
-            </a:r>
-            <a:endParaRPr lang="en-US" sz="1420" dirty="0"/>
+              <a:t>Generative AI can draft, summarize, translate, classify, explain, and synthesize information, but its outputs require.</a:t>
+            </a:r>
+            <a:endParaRPr lang="en-US" sz="1250" dirty="0"/>
+          </a:p>
+        </p:txBody>
+      </p:sp>
+      <p:sp>
+        <p:nvSpPr>
+          <p:cNvPr id="14" name="Shape 12"/>
+          <p:cNvSpPr/>
+          <p:nvPr/>
+        </p:nvSpPr>
+        <p:spPr>
+          <a:xfrm>
+            <a:off x="7909560" y="3520440"/>
+            <a:ext cx="3154680" cy="1737360"/>
+          </a:xfrm>
+          <a:prstGeom prst="roundRect">
+            <a:avLst>
+              <a:gd name="adj" fmla="val 6316"/>
+            </a:avLst>
+          </a:prstGeom>
+          <a:solidFill>
+            <a:srgbClr val="EAF6F8"/>
+          </a:solidFill>
+          <a:ln w="12700">
+            <a:solidFill>
+              <a:srgbClr val="B9D7E6"/>
+            </a:solidFill>
+            <a:prstDash val="solid"/>
+          </a:ln>
+        </p:spPr>
+      </p:sp>
+      <p:sp>
+        <p:nvSpPr>
+          <p:cNvPr id="15" name="Text 13"/>
+          <p:cNvSpPr/>
+          <p:nvPr/>
+        </p:nvSpPr>
+        <p:spPr>
+          <a:xfrm>
+            <a:off x="8074152" y="3666744"/>
+            <a:ext cx="2825496" cy="201168"/>
+          </a:xfrm>
+          <a:prstGeom prst="rect">
+            <a:avLst/>
+          </a:prstGeom>
+          <a:noFill/>
+          <a:ln/>
+        </p:spPr>
+        <p:txBody>
+          <a:bodyPr wrap="square" lIns="0" tIns="0" rIns="0" bIns="0" rtlCol="0" anchor="ctr"/>
+          <a:lstStyle/>
+          <a:p>
+            <a:pPr indent="0" marL="0">
+              <a:buNone/>
+            </a:pPr>
+            <a:r>
+              <a:rPr lang="en-US" sz="950" b="1" dirty="0">
+                <a:solidFill>
+                  <a:srgbClr val="0068B7"/>
+                </a:solidFill>
+                <a:latin typeface="Aptos" pitchFamily="34" charset="0"/>
+                <a:ea typeface="Aptos" pitchFamily="34" charset="-122"/>
+                <a:cs typeface="Aptos" pitchFamily="34" charset="-120"/>
+              </a:rPr>
+              <a:t>Use this for</a:t>
+            </a:r>
+            <a:endParaRPr lang="en-US" sz="950" dirty="0"/>
+          </a:p>
+        </p:txBody>
+      </p:sp>
+      <p:sp>
+        <p:nvSpPr>
+          <p:cNvPr id="16" name="Text 14"/>
+          <p:cNvSpPr/>
+          <p:nvPr/>
+        </p:nvSpPr>
+        <p:spPr>
+          <a:xfrm>
+            <a:off x="8074152" y="3959352"/>
+            <a:ext cx="2825496" cy="1170432"/>
+          </a:xfrm>
+          <a:prstGeom prst="rect">
+            <a:avLst/>
+          </a:prstGeom>
+          <a:noFill/>
+          <a:ln/>
+        </p:spPr>
+        <p:txBody>
+          <a:bodyPr wrap="square" lIns="0" tIns="0" rIns="0" bIns="0" rtlCol="0" anchor="t">
+            <a:normAutofit/>
+          </a:bodyPr>
+          <a:lstStyle/>
+          <a:p>
+            <a:pPr indent="0" marL="0">
+              <a:buNone/>
+            </a:pPr>
+            <a:r>
+              <a:rPr lang="en-US" sz="1250" dirty="0">
+                <a:solidFill>
+                  <a:srgbClr val="17364A"/>
+                </a:solidFill>
+                <a:latin typeface="Aptos" pitchFamily="34" charset="0"/>
+                <a:ea typeface="Aptos" pitchFamily="34" charset="-122"/>
+                <a:cs typeface="Aptos" pitchFamily="34" charset="-120"/>
+              </a:rPr>
+              <a:t>Connect the concept to public health decisions, safeguards, documentation, or implementation work.</a:t>
+            </a:r>
+            <a:endParaRPr lang="en-US" sz="1250" dirty="0"/>
           </a:p>
         </p:txBody>
       </p:sp>
@@ -7469,7 +13788,32 @@
       </p:sp>
       <p:sp>
         <p:nvSpPr>
-          <p:cNvPr id="3" name="Text 1"/>
+          <p:cNvPr id="3" name="Shape 1"/>
+          <p:cNvSpPr/>
+          <p:nvPr/>
+        </p:nvSpPr>
+        <p:spPr>
+          <a:xfrm>
+            <a:off x="0" y="164592"/>
+            <a:ext cx="146304" cy="6693408"/>
+          </a:xfrm>
+          <a:prstGeom prst="rect">
+            <a:avLst/>
+          </a:prstGeom>
+          <a:solidFill>
+            <a:srgbClr val="2F8A28"/>
+          </a:solidFill>
+          <a:ln w="12700">
+            <a:solidFill>
+              <a:srgbClr val="2F8A28"/>
+            </a:solidFill>
+            <a:prstDash val="solid"/>
+          </a:ln>
+        </p:spPr>
+      </p:sp>
+      <p:sp>
+        <p:nvSpPr>
+          <p:cNvPr id="4" name="Text 2"/>
           <p:cNvSpPr/>
           <p:nvPr/>
         </p:nvSpPr>
@@ -7508,7 +13852,7 @@
       </p:sp>
       <p:sp>
         <p:nvSpPr>
-          <p:cNvPr id="4" name="Text 2"/>
+          <p:cNvPr id="5" name="Text 3"/>
           <p:cNvSpPr/>
           <p:nvPr/>
         </p:nvSpPr>
@@ -7547,7 +13891,7 @@
       </p:sp>
       <p:sp>
         <p:nvSpPr>
-          <p:cNvPr id="5" name="Text 3"/>
+          <p:cNvPr id="6" name="Text 4"/>
           <p:cNvSpPr/>
           <p:nvPr/>
         </p:nvSpPr>
@@ -7586,13 +13930,77 @@
       </p:sp>
       <p:sp>
         <p:nvSpPr>
-          <p:cNvPr id="6" name="Text 4"/>
+          <p:cNvPr id="7" name="Shape 5"/>
           <p:cNvSpPr/>
           <p:nvPr/>
         </p:nvSpPr>
         <p:spPr>
           <a:xfrm>
             <a:off x="640080" y="658368"/>
+            <a:ext cx="420624" cy="420624"/>
+          </a:xfrm>
+          <a:prstGeom prst="ellipse">
+            <a:avLst/>
+          </a:prstGeom>
+          <a:solidFill>
+            <a:srgbClr val="0068B7"/>
+          </a:solidFill>
+          <a:ln w="12700">
+            <a:solidFill>
+              <a:srgbClr val="0068B7"/>
+            </a:solidFill>
+            <a:prstDash val="solid"/>
+          </a:ln>
+        </p:spPr>
+      </p:sp>
+      <p:sp>
+        <p:nvSpPr>
+          <p:cNvPr id="8" name="Text 6"/>
+          <p:cNvSpPr/>
+          <p:nvPr/>
+        </p:nvSpPr>
+        <p:spPr>
+          <a:xfrm>
+            <a:off x="640080" y="731520"/>
+            <a:ext cx="420624" cy="164592"/>
+          </a:xfrm>
+          <a:prstGeom prst="rect">
+            <a:avLst/>
+          </a:prstGeom>
+          <a:noFill/>
+          <a:ln/>
+        </p:spPr>
+        <p:txBody>
+          <a:bodyPr wrap="square" lIns="0" tIns="0" rIns="0" bIns="0" rtlCol="0" anchor="ctr"/>
+          <a:lstStyle/>
+          <a:p>
+            <a:pPr algn="ctr" indent="0" marL="0">
+              <a:buNone/>
+            </a:pPr>
+            <a:r>
+              <a:rPr lang="en-US" sz="1100" b="1" dirty="0">
+                <a:solidFill>
+                  <a:srgbClr val="FFFFFF"/>
+                </a:solidFill>
+                <a:latin typeface="Aptos" pitchFamily="34" charset="0"/>
+                <a:ea typeface="Aptos" pitchFamily="34" charset="-122"/>
+                <a:cs typeface="Aptos" pitchFamily="34" charset="-120"/>
+              </a:rPr>
+              <a:t>3</a:t>
+            </a:r>
+            <a:endParaRPr lang="en-US" sz="1100" dirty="0"/>
+          </a:p>
+        </p:txBody>
+      </p:sp>
+      <p:sp>
+        <p:nvSpPr>
+          <p:cNvPr id="9" name="Text 7"/>
+          <p:cNvSpPr/>
+          <p:nvPr/>
+        </p:nvSpPr>
+        <p:spPr>
+          <a:xfrm>
+            <a:off x="640080" y="621792"/>
             <a:ext cx="10881360" cy="566928"/>
           </a:xfrm>
           <a:prstGeom prst="rect">
@@ -7619,7 +14027,7 @@
                 <a:ea typeface="Aptos Display" pitchFamily="34" charset="-122"/>
                 <a:cs typeface="Aptos Display" pitchFamily="34" charset="-120"/>
               </a:rPr>
-              <a:t>Technical Deep Dive</a:t>
+              <a:t>Why This Topic Matters for Public Health AI</a:t>
             </a:r>
             <a:endParaRPr lang="en-US" sz="2700" dirty="0"/>
           </a:p>
@@ -7627,32 +14035,178 @@
       </p:sp>
       <p:sp>
         <p:nvSpPr>
-          <p:cNvPr id="7" name="Text 5"/>
-          <p:cNvSpPr/>
-          <p:nvPr/>
-        </p:nvSpPr>
-        <p:spPr>
-          <a:xfrm>
-            <a:off x="822960" y="1325880"/>
-            <a:ext cx="10378440" cy="4800600"/>
-          </a:xfrm>
-          <a:prstGeom prst="rect">
-            <a:avLst/>
-          </a:prstGeom>
-          <a:noFill/>
-          <a:ln/>
-        </p:spPr>
-        <p:txBody>
-          <a:bodyPr wrap="square" lIns="1016" tIns="1016" rIns="1016" bIns="1016" rtlCol="0" anchor="t">
+          <p:cNvPr id="10" name="Text 8"/>
+          <p:cNvSpPr/>
+          <p:nvPr/>
+        </p:nvSpPr>
+        <p:spPr>
+          <a:xfrm>
+            <a:off x="868680" y="1417320"/>
+            <a:ext cx="6675120" cy="4434840"/>
+          </a:xfrm>
+          <a:prstGeom prst="rect">
+            <a:avLst/>
+          </a:prstGeom>
+          <a:noFill/>
+          <a:ln/>
+        </p:spPr>
+        <p:txBody>
+          <a:bodyPr wrap="square" lIns="635" tIns="635" rIns="635" bIns="635" rtlCol="0" anchor="t">
             <a:normAutofit/>
           </a:bodyPr>
           <a:lstStyle/>
           <a:p>
+            <a:r>
+              <a:rPr lang="en-US" sz="1700" dirty="0">
+                <a:solidFill>
+                  <a:srgbClr val="17364A"/>
+                </a:solidFill>
+                <a:latin typeface="Aptos" pitchFamily="34" charset="0"/>
+                <a:ea typeface="Aptos" pitchFamily="34" charset="-122"/>
+                <a:cs typeface="Aptos" pitchFamily="34" charset="-120"/>
+              </a:rPr>
+              <a:t>Generative AI matters for public health because it can reduce burden in text-heavy workflows.</a:t>
+            </a:r>
+            <a:endParaRPr lang="en-US" sz="1700" dirty="0"/>
+          </a:p>
+          <a:p>
+            <a:r>
+              <a:rPr lang="en-US" sz="1700" dirty="0">
+                <a:solidFill>
+                  <a:srgbClr val="17364A"/>
+                </a:solidFill>
+                <a:latin typeface="Aptos" pitchFamily="34" charset="0"/>
+                <a:ea typeface="Aptos" pitchFamily="34" charset="-122"/>
+                <a:cs typeface="Aptos" pitchFamily="34" charset="-120"/>
+              </a:rPr>
+              <a:t>Staff may use it to summarize guidance, draft meeting notes, simplify technical language, translate or adapt messages,.</a:t>
+            </a:r>
+            <a:endParaRPr lang="en-US" sz="1700" dirty="0"/>
+          </a:p>
+          <a:p>
+            <a:r>
+              <a:rPr lang="en-US" sz="1700" dirty="0">
+                <a:solidFill>
+                  <a:srgbClr val="17364A"/>
+                </a:solidFill>
+                <a:latin typeface="Aptos" pitchFamily="34" charset="0"/>
+                <a:ea typeface="Aptos" pitchFamily="34" charset="-122"/>
+                <a:cs typeface="Aptos" pitchFamily="34" charset="-120"/>
+              </a:rPr>
+              <a:t>These uses can be valuable when they save time and improve clarity.</a:t>
+            </a:r>
+            <a:endParaRPr lang="en-US" sz="1700" dirty="0"/>
+          </a:p>
+          <a:p>
+            <a:r>
+              <a:rPr lang="en-US" sz="1700" dirty="0">
+                <a:solidFill>
+                  <a:srgbClr val="17364A"/>
+                </a:solidFill>
+                <a:latin typeface="Aptos" pitchFamily="34" charset="0"/>
+                <a:ea typeface="Aptos" pitchFamily="34" charset="-122"/>
+                <a:cs typeface="Aptos" pitchFamily="34" charset="-120"/>
+              </a:rPr>
+              <a:t>The same capabilities create risk.</a:t>
+            </a:r>
+            <a:endParaRPr lang="en-US" sz="1700" dirty="0"/>
+          </a:p>
+        </p:txBody>
+      </p:sp>
+      <p:sp>
+        <p:nvSpPr>
+          <p:cNvPr id="11" name="Shape 9"/>
+          <p:cNvSpPr/>
+          <p:nvPr/>
+        </p:nvSpPr>
+        <p:spPr>
+          <a:xfrm>
+            <a:off x="7909560" y="1417320"/>
+            <a:ext cx="3154680" cy="1828800"/>
+          </a:xfrm>
+          <a:prstGeom prst="roundRect">
+            <a:avLst>
+              <a:gd name="adj" fmla="val 6000"/>
+            </a:avLst>
+          </a:prstGeom>
+          <a:solidFill>
+            <a:srgbClr val="EEF8ED"/>
+          </a:solidFill>
+          <a:ln w="12700">
+            <a:solidFill>
+              <a:srgbClr val="B9D7E6"/>
+            </a:solidFill>
+            <a:prstDash val="solid"/>
+          </a:ln>
+        </p:spPr>
+      </p:sp>
+      <p:sp>
+        <p:nvSpPr>
+          <p:cNvPr id="12" name="Text 10"/>
+          <p:cNvSpPr/>
+          <p:nvPr/>
+        </p:nvSpPr>
+        <p:spPr>
+          <a:xfrm>
+            <a:off x="8074152" y="1563624"/>
+            <a:ext cx="2825496" cy="201168"/>
+          </a:xfrm>
+          <a:prstGeom prst="rect">
+            <a:avLst/>
+          </a:prstGeom>
+          <a:noFill/>
+          <a:ln/>
+        </p:spPr>
+        <p:txBody>
+          <a:bodyPr wrap="square" lIns="0" tIns="0" rIns="0" bIns="0" rtlCol="0" anchor="ctr"/>
+          <a:lstStyle/>
+          <a:p>
             <a:pPr indent="0" marL="0">
               <a:buNone/>
             </a:pPr>
             <a:r>
-              <a:rPr lang="en-US" sz="1420" dirty="0">
+              <a:rPr lang="en-US" sz="950" b="1" dirty="0">
+                <a:solidFill>
+                  <a:srgbClr val="0068B7"/>
+                </a:solidFill>
+                <a:latin typeface="Aptos" pitchFamily="34" charset="0"/>
+                <a:ea typeface="Aptos" pitchFamily="34" charset="-122"/>
+                <a:cs typeface="Aptos" pitchFamily="34" charset="-120"/>
+              </a:rPr>
+              <a:t>Key idea</a:t>
+            </a:r>
+            <a:endParaRPr lang="en-US" sz="950" dirty="0"/>
+          </a:p>
+        </p:txBody>
+      </p:sp>
+      <p:sp>
+        <p:nvSpPr>
+          <p:cNvPr id="13" name="Text 11"/>
+          <p:cNvSpPr/>
+          <p:nvPr/>
+        </p:nvSpPr>
+        <p:spPr>
+          <a:xfrm>
+            <a:off x="8074152" y="1856232"/>
+            <a:ext cx="2825496" cy="1261872"/>
+          </a:xfrm>
+          <a:prstGeom prst="rect">
+            <a:avLst/>
+          </a:prstGeom>
+          <a:noFill/>
+          <a:ln/>
+        </p:spPr>
+        <p:txBody>
+          <a:bodyPr wrap="square" lIns="0" tIns="0" rIns="0" bIns="0" rtlCol="0" anchor="t">
+            <a:normAutofit/>
+          </a:bodyPr>
+          <a:lstStyle/>
+          <a:p>
+            <a:pPr indent="0" marL="0">
+              <a:buNone/>
+            </a:pPr>
+            <a:r>
+              <a:rPr lang="en-US" sz="1250" dirty="0">
                 <a:solidFill>
                   <a:srgbClr val="17364A"/>
                 </a:solidFill>
@@ -7660,9 +14214,116 @@
                 <a:ea typeface="Aptos" pitchFamily="34" charset="-122"/>
                 <a:cs typeface="Aptos" pitchFamily="34" charset="-120"/>
               </a:rPr>
-              <a:t>Generative AI evaluation should begin with intended use. A brainstormed outline, internal draft, public advisory, case summary, policy synthesis, or operational recommendation requires different levels of review. The more sensitive, public-facing, or consequential the use, the stronger the review should be. Factuality review requires comparison to source material. Reviewers should check names, dates, numbers, conditions, legal requirements, recommendations, and causal statements. They should also verify that the output does not add unsupported claims or remove important caveats. For RAG systems, reviewers should inspect whether citations actually support the claims they accompany. Completeness review asks whether the output includes the information needed for the task. A summary can be accurate but incomplete if it omits a critical exposure, eligibility criterion, limitation, or escalation instruction. Public health review should consider whether omitted information could change interpretation or action.</a:t>
-            </a:r>
-            <a:endParaRPr lang="en-US" sz="1420" dirty="0"/>
+              <a:t>Generative AI matters for public health because it can reduce burden in text-heavy workflows.</a:t>
+            </a:r>
+            <a:endParaRPr lang="en-US" sz="1250" dirty="0"/>
+          </a:p>
+        </p:txBody>
+      </p:sp>
+      <p:sp>
+        <p:nvSpPr>
+          <p:cNvPr id="14" name="Shape 12"/>
+          <p:cNvSpPr/>
+          <p:nvPr/>
+        </p:nvSpPr>
+        <p:spPr>
+          <a:xfrm>
+            <a:off x="7909560" y="3520440"/>
+            <a:ext cx="3154680" cy="1737360"/>
+          </a:xfrm>
+          <a:prstGeom prst="roundRect">
+            <a:avLst>
+              <a:gd name="adj" fmla="val 6316"/>
+            </a:avLst>
+          </a:prstGeom>
+          <a:solidFill>
+            <a:srgbClr val="EAF6F8"/>
+          </a:solidFill>
+          <a:ln w="12700">
+            <a:solidFill>
+              <a:srgbClr val="B9D7E6"/>
+            </a:solidFill>
+            <a:prstDash val="solid"/>
+          </a:ln>
+        </p:spPr>
+      </p:sp>
+      <p:sp>
+        <p:nvSpPr>
+          <p:cNvPr id="15" name="Text 13"/>
+          <p:cNvSpPr/>
+          <p:nvPr/>
+        </p:nvSpPr>
+        <p:spPr>
+          <a:xfrm>
+            <a:off x="8074152" y="3666744"/>
+            <a:ext cx="2825496" cy="201168"/>
+          </a:xfrm>
+          <a:prstGeom prst="rect">
+            <a:avLst/>
+          </a:prstGeom>
+          <a:noFill/>
+          <a:ln/>
+        </p:spPr>
+        <p:txBody>
+          <a:bodyPr wrap="square" lIns="0" tIns="0" rIns="0" bIns="0" rtlCol="0" anchor="ctr"/>
+          <a:lstStyle/>
+          <a:p>
+            <a:pPr indent="0" marL="0">
+              <a:buNone/>
+            </a:pPr>
+            <a:r>
+              <a:rPr lang="en-US" sz="950" b="1" dirty="0">
+                <a:solidFill>
+                  <a:srgbClr val="0068B7"/>
+                </a:solidFill>
+                <a:latin typeface="Aptos" pitchFamily="34" charset="0"/>
+                <a:ea typeface="Aptos" pitchFamily="34" charset="-122"/>
+                <a:cs typeface="Aptos" pitchFamily="34" charset="-120"/>
+              </a:rPr>
+              <a:t>Use this for</a:t>
+            </a:r>
+            <a:endParaRPr lang="en-US" sz="950" dirty="0"/>
+          </a:p>
+        </p:txBody>
+      </p:sp>
+      <p:sp>
+        <p:nvSpPr>
+          <p:cNvPr id="16" name="Text 14"/>
+          <p:cNvSpPr/>
+          <p:nvPr/>
+        </p:nvSpPr>
+        <p:spPr>
+          <a:xfrm>
+            <a:off x="8074152" y="3959352"/>
+            <a:ext cx="2825496" cy="1170432"/>
+          </a:xfrm>
+          <a:prstGeom prst="rect">
+            <a:avLst/>
+          </a:prstGeom>
+          <a:noFill/>
+          <a:ln/>
+        </p:spPr>
+        <p:txBody>
+          <a:bodyPr wrap="square" lIns="0" tIns="0" rIns="0" bIns="0" rtlCol="0" anchor="t">
+            <a:normAutofit/>
+          </a:bodyPr>
+          <a:lstStyle/>
+          <a:p>
+            <a:pPr indent="0" marL="0">
+              <a:buNone/>
+            </a:pPr>
+            <a:r>
+              <a:rPr lang="en-US" sz="1250" dirty="0">
+                <a:solidFill>
+                  <a:srgbClr val="17364A"/>
+                </a:solidFill>
+                <a:latin typeface="Aptos" pitchFamily="34" charset="0"/>
+                <a:ea typeface="Aptos" pitchFamily="34" charset="-122"/>
+                <a:cs typeface="Aptos" pitchFamily="34" charset="-120"/>
+              </a:rPr>
+              <a:t>Connect the concept to public health decisions, safeguards, documentation, or implementation work.</a:t>
+            </a:r>
+            <a:endParaRPr lang="en-US" sz="1250" dirty="0"/>
           </a:p>
         </p:txBody>
       </p:sp>
@@ -7725,7 +14386,32 @@
       </p:sp>
       <p:sp>
         <p:nvSpPr>
-          <p:cNvPr id="3" name="Text 1"/>
+          <p:cNvPr id="3" name="Shape 1"/>
+          <p:cNvSpPr/>
+          <p:nvPr/>
+        </p:nvSpPr>
+        <p:spPr>
+          <a:xfrm>
+            <a:off x="0" y="164592"/>
+            <a:ext cx="146304" cy="6693408"/>
+          </a:xfrm>
+          <a:prstGeom prst="rect">
+            <a:avLst/>
+          </a:prstGeom>
+          <a:solidFill>
+            <a:srgbClr val="2F8A28"/>
+          </a:solidFill>
+          <a:ln w="12700">
+            <a:solidFill>
+              <a:srgbClr val="2F8A28"/>
+            </a:solidFill>
+            <a:prstDash val="solid"/>
+          </a:ln>
+        </p:spPr>
+      </p:sp>
+      <p:sp>
+        <p:nvSpPr>
+          <p:cNvPr id="4" name="Text 2"/>
           <p:cNvSpPr/>
           <p:nvPr/>
         </p:nvSpPr>
@@ -7764,7 +14450,7 @@
       </p:sp>
       <p:sp>
         <p:nvSpPr>
-          <p:cNvPr id="4" name="Text 2"/>
+          <p:cNvPr id="5" name="Text 3"/>
           <p:cNvSpPr/>
           <p:nvPr/>
         </p:nvSpPr>
@@ -7803,7 +14489,7 @@
       </p:sp>
       <p:sp>
         <p:nvSpPr>
-          <p:cNvPr id="5" name="Text 3"/>
+          <p:cNvPr id="6" name="Text 4"/>
           <p:cNvSpPr/>
           <p:nvPr/>
         </p:nvSpPr>
@@ -7842,13 +14528,77 @@
       </p:sp>
       <p:sp>
         <p:nvSpPr>
-          <p:cNvPr id="6" name="Text 4"/>
+          <p:cNvPr id="7" name="Shape 5"/>
           <p:cNvSpPr/>
           <p:nvPr/>
         </p:nvSpPr>
         <p:spPr>
           <a:xfrm>
             <a:off x="640080" y="658368"/>
+            <a:ext cx="420624" cy="420624"/>
+          </a:xfrm>
+          <a:prstGeom prst="ellipse">
+            <a:avLst/>
+          </a:prstGeom>
+          <a:solidFill>
+            <a:srgbClr val="0068B7"/>
+          </a:solidFill>
+          <a:ln w="12700">
+            <a:solidFill>
+              <a:srgbClr val="0068B7"/>
+            </a:solidFill>
+            <a:prstDash val="solid"/>
+          </a:ln>
+        </p:spPr>
+      </p:sp>
+      <p:sp>
+        <p:nvSpPr>
+          <p:cNvPr id="8" name="Text 6"/>
+          <p:cNvSpPr/>
+          <p:nvPr/>
+        </p:nvSpPr>
+        <p:spPr>
+          <a:xfrm>
+            <a:off x="640080" y="731520"/>
+            <a:ext cx="420624" cy="164592"/>
+          </a:xfrm>
+          <a:prstGeom prst="rect">
+            <a:avLst/>
+          </a:prstGeom>
+          <a:noFill/>
+          <a:ln/>
+        </p:spPr>
+        <p:txBody>
+          <a:bodyPr wrap="square" lIns="0" tIns="0" rIns="0" bIns="0" rtlCol="0" anchor="ctr"/>
+          <a:lstStyle/>
+          <a:p>
+            <a:pPr algn="ctr" indent="0" marL="0">
+              <a:buNone/>
+            </a:pPr>
+            <a:r>
+              <a:rPr lang="en-US" sz="1100" b="1" dirty="0">
+                <a:solidFill>
+                  <a:srgbClr val="FFFFFF"/>
+                </a:solidFill>
+                <a:latin typeface="Aptos" pitchFamily="34" charset="0"/>
+                <a:ea typeface="Aptos" pitchFamily="34" charset="-122"/>
+                <a:cs typeface="Aptos" pitchFamily="34" charset="-120"/>
+              </a:rPr>
+              <a:t>4</a:t>
+            </a:r>
+            <a:endParaRPr lang="en-US" sz="1100" dirty="0"/>
+          </a:p>
+        </p:txBody>
+      </p:sp>
+      <p:sp>
+        <p:nvSpPr>
+          <p:cNvPr id="9" name="Text 7"/>
+          <p:cNvSpPr/>
+          <p:nvPr/>
+        </p:nvSpPr>
+        <p:spPr>
+          <a:xfrm>
+            <a:off x="640080" y="621792"/>
             <a:ext cx="10881360" cy="566928"/>
           </a:xfrm>
           <a:prstGeom prst="rect">
@@ -7875,7 +14625,7 @@
                 <a:ea typeface="Aptos Display" pitchFamily="34" charset="-122"/>
                 <a:cs typeface="Aptos Display" pitchFamily="34" charset="-120"/>
               </a:rPr>
-              <a:t>Technical Deep Dive Continued</a:t>
+              <a:t>Public Health Example</a:t>
             </a:r>
             <a:endParaRPr lang="en-US" sz="2700" dirty="0"/>
           </a:p>
@@ -7883,32 +14633,178 @@
       </p:sp>
       <p:sp>
         <p:nvSpPr>
-          <p:cNvPr id="7" name="Text 5"/>
-          <p:cNvSpPr/>
-          <p:nvPr/>
-        </p:nvSpPr>
-        <p:spPr>
-          <a:xfrm>
-            <a:off x="822960" y="1325880"/>
-            <a:ext cx="10378440" cy="4800600"/>
-          </a:xfrm>
-          <a:prstGeom prst="rect">
-            <a:avLst/>
-          </a:prstGeom>
-          <a:noFill/>
-          <a:ln/>
-        </p:spPr>
-        <p:txBody>
-          <a:bodyPr wrap="square" lIns="1016" tIns="1016" rIns="1016" bIns="1016" rtlCol="0" anchor="t">
+          <p:cNvPr id="10" name="Text 8"/>
+          <p:cNvSpPr/>
+          <p:nvPr/>
+        </p:nvSpPr>
+        <p:spPr>
+          <a:xfrm>
+            <a:off x="868680" y="1417320"/>
+            <a:ext cx="6675120" cy="4434840"/>
+          </a:xfrm>
+          <a:prstGeom prst="rect">
+            <a:avLst/>
+          </a:prstGeom>
+          <a:noFill/>
+          <a:ln/>
+        </p:spPr>
+        <p:txBody>
+          <a:bodyPr wrap="square" lIns="635" tIns="635" rIns="635" bIns="635" rtlCol="0" anchor="t">
             <a:normAutofit/>
           </a:bodyPr>
           <a:lstStyle/>
           <a:p>
+            <a:r>
+              <a:rPr lang="en-US" sz="1700" dirty="0">
+                <a:solidFill>
+                  <a:srgbClr val="17364A"/>
+                </a:solidFill>
+                <a:latin typeface="Aptos" pitchFamily="34" charset="0"/>
+                <a:ea typeface="Aptos" pitchFamily="34" charset="-122"/>
+                <a:cs typeface="Aptos" pitchFamily="34" charset="-120"/>
+              </a:rPr>
+              <a:t>A communications team may use generative AI to draft a plain-language public message about a local respiratory illness.</a:t>
+            </a:r>
+            <a:endParaRPr lang="en-US" sz="1700" dirty="0"/>
+          </a:p>
+          <a:p>
+            <a:r>
+              <a:rPr lang="en-US" sz="1700" dirty="0">
+                <a:solidFill>
+                  <a:srgbClr val="17364A"/>
+                </a:solidFill>
+                <a:latin typeface="Aptos" pitchFamily="34" charset="0"/>
+                <a:ea typeface="Aptos" pitchFamily="34" charset="-122"/>
+                <a:cs typeface="Aptos" pitchFamily="34" charset="-120"/>
+              </a:rPr>
+              <a:t>The draft may be clear and readable, but reviewers must check whether the numbers are correct, whether the recommendations.</a:t>
+            </a:r>
+            <a:endParaRPr lang="en-US" sz="1700" dirty="0"/>
+          </a:p>
+          <a:p>
+            <a:r>
+              <a:rPr lang="en-US" sz="1700" dirty="0">
+                <a:solidFill>
+                  <a:srgbClr val="17364A"/>
+                </a:solidFill>
+                <a:latin typeface="Aptos" pitchFamily="34" charset="0"/>
+                <a:ea typeface="Aptos" pitchFamily="34" charset="-122"/>
+                <a:cs typeface="Aptos" pitchFamily="34" charset="-120"/>
+              </a:rPr>
+              <a:t>An epidemiology team may use generative AI to summarize case investigation notes for internal review.</a:t>
+            </a:r>
+            <a:endParaRPr lang="en-US" sz="1700" dirty="0"/>
+          </a:p>
+          <a:p>
+            <a:r>
+              <a:rPr lang="en-US" sz="1700" dirty="0">
+                <a:solidFill>
+                  <a:srgbClr val="17364A"/>
+                </a:solidFill>
+                <a:latin typeface="Aptos" pitchFamily="34" charset="0"/>
+                <a:ea typeface="Aptos" pitchFamily="34" charset="-122"/>
+                <a:cs typeface="Aptos" pitchFamily="34" charset="-120"/>
+              </a:rPr>
+              <a:t>The summary must be checked against source notes because a missed exposure, incorrect date, or invented symptom could.</a:t>
+            </a:r>
+            <a:endParaRPr lang="en-US" sz="1700" dirty="0"/>
+          </a:p>
+        </p:txBody>
+      </p:sp>
+      <p:sp>
+        <p:nvSpPr>
+          <p:cNvPr id="11" name="Shape 9"/>
+          <p:cNvSpPr/>
+          <p:nvPr/>
+        </p:nvSpPr>
+        <p:spPr>
+          <a:xfrm>
+            <a:off x="7909560" y="1417320"/>
+            <a:ext cx="3154680" cy="1828800"/>
+          </a:xfrm>
+          <a:prstGeom prst="roundRect">
+            <a:avLst>
+              <a:gd name="adj" fmla="val 6000"/>
+            </a:avLst>
+          </a:prstGeom>
+          <a:solidFill>
+            <a:srgbClr val="EEF8ED"/>
+          </a:solidFill>
+          <a:ln w="12700">
+            <a:solidFill>
+              <a:srgbClr val="B9D7E6"/>
+            </a:solidFill>
+            <a:prstDash val="solid"/>
+          </a:ln>
+        </p:spPr>
+      </p:sp>
+      <p:sp>
+        <p:nvSpPr>
+          <p:cNvPr id="12" name="Text 10"/>
+          <p:cNvSpPr/>
+          <p:nvPr/>
+        </p:nvSpPr>
+        <p:spPr>
+          <a:xfrm>
+            <a:off x="8074152" y="1563624"/>
+            <a:ext cx="2825496" cy="201168"/>
+          </a:xfrm>
+          <a:prstGeom prst="rect">
+            <a:avLst/>
+          </a:prstGeom>
+          <a:noFill/>
+          <a:ln/>
+        </p:spPr>
+        <p:txBody>
+          <a:bodyPr wrap="square" lIns="0" tIns="0" rIns="0" bIns="0" rtlCol="0" anchor="ctr"/>
+          <a:lstStyle/>
+          <a:p>
             <a:pPr indent="0" marL="0">
               <a:buNone/>
             </a:pPr>
             <a:r>
-              <a:rPr lang="en-US" sz="1420" dirty="0">
+              <a:rPr lang="en-US" sz="950" b="1" dirty="0">
+                <a:solidFill>
+                  <a:srgbClr val="0068B7"/>
+                </a:solidFill>
+                <a:latin typeface="Aptos" pitchFamily="34" charset="0"/>
+                <a:ea typeface="Aptos" pitchFamily="34" charset="-122"/>
+                <a:cs typeface="Aptos" pitchFamily="34" charset="-120"/>
+              </a:rPr>
+              <a:t>Key idea</a:t>
+            </a:r>
+            <a:endParaRPr lang="en-US" sz="950" dirty="0"/>
+          </a:p>
+        </p:txBody>
+      </p:sp>
+      <p:sp>
+        <p:nvSpPr>
+          <p:cNvPr id="13" name="Text 11"/>
+          <p:cNvSpPr/>
+          <p:nvPr/>
+        </p:nvSpPr>
+        <p:spPr>
+          <a:xfrm>
+            <a:off x="8074152" y="1856232"/>
+            <a:ext cx="2825496" cy="1261872"/>
+          </a:xfrm>
+          <a:prstGeom prst="rect">
+            <a:avLst/>
+          </a:prstGeom>
+          <a:noFill/>
+          <a:ln/>
+        </p:spPr>
+        <p:txBody>
+          <a:bodyPr wrap="square" lIns="0" tIns="0" rIns="0" bIns="0" rtlCol="0" anchor="t">
+            <a:normAutofit/>
+          </a:bodyPr>
+          <a:lstStyle/>
+          <a:p>
+            <a:pPr indent="0" marL="0">
+              <a:buNone/>
+            </a:pPr>
+            <a:r>
+              <a:rPr lang="en-US" sz="1250" dirty="0">
                 <a:solidFill>
                   <a:srgbClr val="17364A"/>
                 </a:solidFill>
@@ -7916,9 +14812,116 @@
                 <a:ea typeface="Aptos" pitchFamily="34" charset="-122"/>
                 <a:cs typeface="Aptos" pitchFamily="34" charset="-120"/>
               </a:rPr>
-              <a:t>Equity and accessibility review should be included when outputs affect staff, partners, or the public. Reviewers should assess reading level, language access, disability accessibility, cultural context, stigma, blame, and whether the output addresses affected communities respectfully. Translation or multilingual adaptation should include review by qualified humans when used for public-facing or consequential communication. Documentation should be proportionate to risk. Low-risk drafting may require only human review before use. Higher-risk workflows may require saved prompts, source references, reviewer initials, revision history, approval records, and incident escalation procedures.</a:t>
-            </a:r>
-            <a:endParaRPr lang="en-US" sz="1420" dirty="0"/>
+              <a:t>A communications team may use generative AI to draft a plain-language public message about a local respiratory illness.</a:t>
+            </a:r>
+            <a:endParaRPr lang="en-US" sz="1250" dirty="0"/>
+          </a:p>
+        </p:txBody>
+      </p:sp>
+      <p:sp>
+        <p:nvSpPr>
+          <p:cNvPr id="14" name="Shape 12"/>
+          <p:cNvSpPr/>
+          <p:nvPr/>
+        </p:nvSpPr>
+        <p:spPr>
+          <a:xfrm>
+            <a:off x="7909560" y="3520440"/>
+            <a:ext cx="3154680" cy="1737360"/>
+          </a:xfrm>
+          <a:prstGeom prst="roundRect">
+            <a:avLst>
+              <a:gd name="adj" fmla="val 6316"/>
+            </a:avLst>
+          </a:prstGeom>
+          <a:solidFill>
+            <a:srgbClr val="EAF6F8"/>
+          </a:solidFill>
+          <a:ln w="12700">
+            <a:solidFill>
+              <a:srgbClr val="B9D7E6"/>
+            </a:solidFill>
+            <a:prstDash val="solid"/>
+          </a:ln>
+        </p:spPr>
+      </p:sp>
+      <p:sp>
+        <p:nvSpPr>
+          <p:cNvPr id="15" name="Text 13"/>
+          <p:cNvSpPr/>
+          <p:nvPr/>
+        </p:nvSpPr>
+        <p:spPr>
+          <a:xfrm>
+            <a:off x="8074152" y="3666744"/>
+            <a:ext cx="2825496" cy="201168"/>
+          </a:xfrm>
+          <a:prstGeom prst="rect">
+            <a:avLst/>
+          </a:prstGeom>
+          <a:noFill/>
+          <a:ln/>
+        </p:spPr>
+        <p:txBody>
+          <a:bodyPr wrap="square" lIns="0" tIns="0" rIns="0" bIns="0" rtlCol="0" anchor="ctr"/>
+          <a:lstStyle/>
+          <a:p>
+            <a:pPr indent="0" marL="0">
+              <a:buNone/>
+            </a:pPr>
+            <a:r>
+              <a:rPr lang="en-US" sz="950" b="1" dirty="0">
+                <a:solidFill>
+                  <a:srgbClr val="0068B7"/>
+                </a:solidFill>
+                <a:latin typeface="Aptos" pitchFamily="34" charset="0"/>
+                <a:ea typeface="Aptos" pitchFamily="34" charset="-122"/>
+                <a:cs typeface="Aptos" pitchFamily="34" charset="-120"/>
+              </a:rPr>
+              <a:t>Use this for</a:t>
+            </a:r>
+            <a:endParaRPr lang="en-US" sz="950" dirty="0"/>
+          </a:p>
+        </p:txBody>
+      </p:sp>
+      <p:sp>
+        <p:nvSpPr>
+          <p:cNvPr id="16" name="Text 14"/>
+          <p:cNvSpPr/>
+          <p:nvPr/>
+        </p:nvSpPr>
+        <p:spPr>
+          <a:xfrm>
+            <a:off x="8074152" y="3959352"/>
+            <a:ext cx="2825496" cy="1170432"/>
+          </a:xfrm>
+          <a:prstGeom prst="rect">
+            <a:avLst/>
+          </a:prstGeom>
+          <a:noFill/>
+          <a:ln/>
+        </p:spPr>
+        <p:txBody>
+          <a:bodyPr wrap="square" lIns="0" tIns="0" rIns="0" bIns="0" rtlCol="0" anchor="t">
+            <a:normAutofit/>
+          </a:bodyPr>
+          <a:lstStyle/>
+          <a:p>
+            <a:pPr indent="0" marL="0">
+              <a:buNone/>
+            </a:pPr>
+            <a:r>
+              <a:rPr lang="en-US" sz="1250" dirty="0">
+                <a:solidFill>
+                  <a:srgbClr val="17364A"/>
+                </a:solidFill>
+                <a:latin typeface="Aptos" pitchFamily="34" charset="0"/>
+                <a:ea typeface="Aptos" pitchFamily="34" charset="-122"/>
+                <a:cs typeface="Aptos" pitchFamily="34" charset="-120"/>
+              </a:rPr>
+              <a:t>Connect the concept to public health decisions, safeguards, documentation, or implementation work.</a:t>
+            </a:r>
+            <a:endParaRPr lang="en-US" sz="1250" dirty="0"/>
           </a:p>
         </p:txBody>
       </p:sp>

--- a/downloads/presentations/modules/lesson-08-evaluation-of-generative-ai-outputs.pptx
+++ b/downloads/presentations/modules/lesson-08-evaluation-of-generative-ai-outputs.pptx
@@ -2999,6 +2999,45 @@
           </a:p>
         </p:txBody>
       </p:sp>
+      <p:sp>
+        <p:nvSpPr>
+          <p:cNvPr id="8" name="Text 5"/>
+          <p:cNvSpPr/>
+          <p:nvPr/>
+        </p:nvSpPr>
+        <p:spPr>
+          <a:xfrm>
+            <a:off x="11137392" y="6510528"/>
+            <a:ext cx="411480" cy="201168"/>
+          </a:xfrm>
+          <a:prstGeom prst="rect">
+            <a:avLst/>
+          </a:prstGeom>
+          <a:noFill/>
+          <a:ln/>
+        </p:spPr>
+        <p:txBody>
+          <a:bodyPr wrap="square" lIns="0" tIns="0" rIns="0" bIns="0" rtlCol="0" anchor="ctr"/>
+          <a:lstStyle/>
+          <a:p>
+            <a:pPr algn="r" indent="0" marL="0">
+              <a:buNone/>
+            </a:pPr>
+            <a:r>
+              <a:rPr lang="en-US" sz="900" dirty="0">
+                <a:solidFill>
+                  <a:srgbClr val="5F7181"/>
+                </a:solidFill>
+                <a:latin typeface="Aptos" pitchFamily="34" charset="0"/>
+                <a:ea typeface="Aptos" pitchFamily="34" charset="-122"/>
+                <a:cs typeface="Aptos" pitchFamily="34" charset="-120"/>
+              </a:rPr>
+              <a:t>1</a:t>
+            </a:r>
+            <a:endParaRPr lang="en-US" sz="900" dirty="0"/>
+          </a:p>
+        </p:txBody>
+      </p:sp>
     </p:spTree>
   </p:cSld>
   <p:clrMapOvr>
@@ -3192,7 +3231,7 @@
                 <a:ea typeface="Aptos" pitchFamily="34" charset="-122"/>
                 <a:cs typeface="Aptos" pitchFamily="34" charset="-120"/>
               </a:rPr>
-              <a:t>© Paula Soper</a:t>
+              <a:t>Â© Paula Soper</a:t>
             </a:r>
             <a:endParaRPr lang="en-US" sz="800" dirty="0"/>
           </a:p>
@@ -3200,7 +3239,46 @@
       </p:sp>
       <p:sp>
         <p:nvSpPr>
-          <p:cNvPr id="7" name="Shape 5"/>
+          <p:cNvPr id="7" name="Text 5"/>
+          <p:cNvSpPr/>
+          <p:nvPr/>
+        </p:nvSpPr>
+        <p:spPr>
+          <a:xfrm>
+            <a:off x="11137392" y="6510528"/>
+            <a:ext cx="411480" cy="201168"/>
+          </a:xfrm>
+          <a:prstGeom prst="rect">
+            <a:avLst/>
+          </a:prstGeom>
+          <a:noFill/>
+          <a:ln/>
+        </p:spPr>
+        <p:txBody>
+          <a:bodyPr wrap="square" lIns="0" tIns="0" rIns="0" bIns="0" rtlCol="0" anchor="ctr"/>
+          <a:lstStyle/>
+          <a:p>
+            <a:pPr algn="r" indent="0" marL="0">
+              <a:buNone/>
+            </a:pPr>
+            <a:r>
+              <a:rPr lang="en-US" sz="900" dirty="0">
+                <a:solidFill>
+                  <a:srgbClr val="5F7181"/>
+                </a:solidFill>
+                <a:latin typeface="Aptos" pitchFamily="34" charset="0"/>
+                <a:ea typeface="Aptos" pitchFamily="34" charset="-122"/>
+                <a:cs typeface="Aptos" pitchFamily="34" charset="-120"/>
+              </a:rPr>
+              <a:t>10</a:t>
+            </a:r>
+            <a:endParaRPr lang="en-US" sz="900" dirty="0"/>
+          </a:p>
+        </p:txBody>
+      </p:sp>
+      <p:sp>
+        <p:nvSpPr>
+          <p:cNvPr id="8" name="Shape 6"/>
           <p:cNvSpPr/>
           <p:nvPr/>
         </p:nvSpPr>
@@ -3225,7 +3303,7 @@
       </p:sp>
       <p:sp>
         <p:nvSpPr>
-          <p:cNvPr id="8" name="Text 6"/>
+          <p:cNvPr id="9" name="Text 7"/>
           <p:cNvSpPr/>
           <p:nvPr/>
         </p:nvSpPr>
@@ -3264,14 +3342,14 @@
       </p:sp>
       <p:sp>
         <p:nvSpPr>
-          <p:cNvPr id="9" name="Text 7"/>
+          <p:cNvPr id="10" name="Text 8"/>
           <p:cNvSpPr/>
           <p:nvPr/>
         </p:nvSpPr>
         <p:spPr>
           <a:xfrm>
             <a:off x="640080" y="621792"/>
-            <a:ext cx="10881360" cy="566928"/>
+            <a:ext cx="10881360" cy="713232"/>
           </a:xfrm>
           <a:prstGeom prst="rect">
             <a:avLst/>
@@ -3289,7 +3367,7 @@
               <a:buNone/>
             </a:pPr>
             <a:r>
-              <a:rPr lang="en-US" sz="2700" b="1" dirty="0">
+              <a:rPr lang="en-US" sz="3400" b="1" dirty="0">
                 <a:solidFill>
                   <a:srgbClr val="003A63"/>
                 </a:solidFill>
@@ -3299,20 +3377,20 @@
               </a:rPr>
               <a:t>Technical Deep Dive</a:t>
             </a:r>
-            <a:endParaRPr lang="en-US" sz="2700" dirty="0"/>
-          </a:p>
-        </p:txBody>
-      </p:sp>
-      <p:sp>
-        <p:nvSpPr>
-          <p:cNvPr id="10" name="Text 8"/>
-          <p:cNvSpPr/>
-          <p:nvPr/>
-        </p:nvSpPr>
-        <p:spPr>
-          <a:xfrm>
-            <a:off x="868680" y="1417320"/>
-            <a:ext cx="6675120" cy="4434840"/>
+            <a:endParaRPr lang="en-US" sz="3400" dirty="0"/>
+          </a:p>
+        </p:txBody>
+      </p:sp>
+      <p:sp>
+        <p:nvSpPr>
+          <p:cNvPr id="11" name="Text 9"/>
+          <p:cNvSpPr/>
+          <p:nvPr/>
+        </p:nvSpPr>
+        <p:spPr>
+          <a:xfrm>
+            <a:off x="868680" y="1508760"/>
+            <a:ext cx="6537960" cy="4160520"/>
           </a:xfrm>
           <a:prstGeom prst="rect">
             <a:avLst/>
@@ -3327,7 +3405,7 @@
           <a:lstStyle/>
           <a:p>
             <a:r>
-              <a:rPr lang="en-US" sz="1700" dirty="0">
+              <a:rPr lang="en-US" sz="2100" dirty="0">
                 <a:solidFill>
                   <a:srgbClr val="17364A"/>
                 </a:solidFill>
@@ -3337,11 +3415,11 @@
               </a:rPr>
               <a:t>Generative AI evaluation should begin with intended use.</a:t>
             </a:r>
-            <a:endParaRPr lang="en-US" sz="1700" dirty="0"/>
-          </a:p>
-          <a:p>
-            <a:r>
-              <a:rPr lang="en-US" sz="1700" dirty="0">
+            <a:endParaRPr lang="en-US" sz="2100" dirty="0"/>
+          </a:p>
+          <a:p>
+            <a:r>
+              <a:rPr lang="en-US" sz="2100" dirty="0">
                 <a:solidFill>
                   <a:srgbClr val="17364A"/>
                 </a:solidFill>
@@ -3349,13 +3427,13 @@
                 <a:ea typeface="Aptos" pitchFamily="34" charset="-122"/>
                 <a:cs typeface="Aptos" pitchFamily="34" charset="-120"/>
               </a:rPr>
-              <a:t>A brainstormed outline, internal draft, public advisory, case summary, policy synthesis, or operational recommendation.</a:t>
-            </a:r>
-            <a:endParaRPr lang="en-US" sz="1700" dirty="0"/>
-          </a:p>
-          <a:p>
-            <a:r>
-              <a:rPr lang="en-US" sz="1700" dirty="0">
+              <a:t>A brainstormed outline, internal draft, public advisory, case summary, policy synthesis, or operational.</a:t>
+            </a:r>
+            <a:endParaRPr lang="en-US" sz="2100" dirty="0"/>
+          </a:p>
+          <a:p>
+            <a:r>
+              <a:rPr lang="en-US" sz="2100" dirty="0">
                 <a:solidFill>
                   <a:srgbClr val="17364A"/>
                 </a:solidFill>
@@ -3365,27 +3443,13 @@
               </a:rPr>
               <a:t>The more sensitive, public-facing, or consequential the use, the stronger the review should be.</a:t>
             </a:r>
-            <a:endParaRPr lang="en-US" sz="1700" dirty="0"/>
-          </a:p>
-          <a:p>
-            <a:r>
-              <a:rPr lang="en-US" sz="1700" dirty="0">
-                <a:solidFill>
-                  <a:srgbClr val="17364A"/>
-                </a:solidFill>
-                <a:latin typeface="Aptos" pitchFamily="34" charset="0"/>
-                <a:ea typeface="Aptos" pitchFamily="34" charset="-122"/>
-                <a:cs typeface="Aptos" pitchFamily="34" charset="-120"/>
-              </a:rPr>
-              <a:t>Factuality review requires comparison to source material.</a:t>
-            </a:r>
-            <a:endParaRPr lang="en-US" sz="1700" dirty="0"/>
-          </a:p>
-        </p:txBody>
-      </p:sp>
-      <p:sp>
-        <p:nvSpPr>
-          <p:cNvPr id="11" name="Shape 9"/>
+            <a:endParaRPr lang="en-US" sz="2100" dirty="0"/>
+          </a:p>
+        </p:txBody>
+      </p:sp>
+      <p:sp>
+        <p:nvSpPr>
+          <p:cNvPr id="12" name="Shape 10"/>
           <p:cNvSpPr/>
           <p:nvPr/>
         </p:nvSpPr>
@@ -3412,14 +3476,14 @@
       </p:sp>
       <p:sp>
         <p:nvSpPr>
-          <p:cNvPr id="12" name="Text 10"/>
+          <p:cNvPr id="13" name="Text 11"/>
           <p:cNvSpPr/>
           <p:nvPr/>
         </p:nvSpPr>
         <p:spPr>
           <a:xfrm>
             <a:off x="8074152" y="1563624"/>
-            <a:ext cx="2825496" cy="201168"/>
+            <a:ext cx="2825496" cy="256032"/>
           </a:xfrm>
           <a:prstGeom prst="rect">
             <a:avLst/>
@@ -3435,7 +3499,7 @@
               <a:buNone/>
             </a:pPr>
             <a:r>
-              <a:rPr lang="en-US" sz="950" b="1" dirty="0">
+              <a:rPr lang="en-US" sz="1300" b="1" dirty="0">
                 <a:solidFill>
                   <a:srgbClr val="0068B7"/>
                 </a:solidFill>
@@ -3445,20 +3509,20 @@
               </a:rPr>
               <a:t>Key idea</a:t>
             </a:r>
-            <a:endParaRPr lang="en-US" sz="950" dirty="0"/>
-          </a:p>
-        </p:txBody>
-      </p:sp>
-      <p:sp>
-        <p:nvSpPr>
-          <p:cNvPr id="13" name="Text 11"/>
-          <p:cNvSpPr/>
-          <p:nvPr/>
-        </p:nvSpPr>
-        <p:spPr>
-          <a:xfrm>
-            <a:off x="8074152" y="1856232"/>
-            <a:ext cx="2825496" cy="1261872"/>
+            <a:endParaRPr lang="en-US" sz="1300" dirty="0"/>
+          </a:p>
+        </p:txBody>
+      </p:sp>
+      <p:sp>
+        <p:nvSpPr>
+          <p:cNvPr id="14" name="Text 12"/>
+          <p:cNvSpPr/>
+          <p:nvPr/>
+        </p:nvSpPr>
+        <p:spPr>
+          <a:xfrm>
+            <a:off x="8074152" y="1920240"/>
+            <a:ext cx="2825496" cy="1188720"/>
           </a:xfrm>
           <a:prstGeom prst="rect">
             <a:avLst/>
@@ -3476,7 +3540,7 @@
               <a:buNone/>
             </a:pPr>
             <a:r>
-              <a:rPr lang="en-US" sz="1250" dirty="0">
+              <a:rPr lang="en-US" sz="1550" dirty="0">
                 <a:solidFill>
                   <a:srgbClr val="17364A"/>
                 </a:solidFill>
@@ -3486,13 +3550,13 @@
               </a:rPr>
               <a:t>Generative AI evaluation should begin with intended use.</a:t>
             </a:r>
-            <a:endParaRPr lang="en-US" sz="1250" dirty="0"/>
-          </a:p>
-        </p:txBody>
-      </p:sp>
-      <p:sp>
-        <p:nvSpPr>
-          <p:cNvPr id="14" name="Shape 12"/>
+            <a:endParaRPr lang="en-US" sz="1550" dirty="0"/>
+          </a:p>
+        </p:txBody>
+      </p:sp>
+      <p:sp>
+        <p:nvSpPr>
+          <p:cNvPr id="15" name="Shape 13"/>
           <p:cNvSpPr/>
           <p:nvPr/>
         </p:nvSpPr>
@@ -3519,14 +3583,14 @@
       </p:sp>
       <p:sp>
         <p:nvSpPr>
-          <p:cNvPr id="15" name="Text 13"/>
+          <p:cNvPr id="16" name="Text 14"/>
           <p:cNvSpPr/>
           <p:nvPr/>
         </p:nvSpPr>
         <p:spPr>
           <a:xfrm>
             <a:off x="8074152" y="3666744"/>
-            <a:ext cx="2825496" cy="201168"/>
+            <a:ext cx="2825496" cy="256032"/>
           </a:xfrm>
           <a:prstGeom prst="rect">
             <a:avLst/>
@@ -3542,7 +3606,7 @@
               <a:buNone/>
             </a:pPr>
             <a:r>
-              <a:rPr lang="en-US" sz="950" b="1" dirty="0">
+              <a:rPr lang="en-US" sz="1300" b="1" dirty="0">
                 <a:solidFill>
                   <a:srgbClr val="0068B7"/>
                 </a:solidFill>
@@ -3552,20 +3616,20 @@
               </a:rPr>
               <a:t>Use this for</a:t>
             </a:r>
-            <a:endParaRPr lang="en-US" sz="950" dirty="0"/>
-          </a:p>
-        </p:txBody>
-      </p:sp>
-      <p:sp>
-        <p:nvSpPr>
-          <p:cNvPr id="16" name="Text 14"/>
-          <p:cNvSpPr/>
-          <p:nvPr/>
-        </p:nvSpPr>
-        <p:spPr>
-          <a:xfrm>
-            <a:off x="8074152" y="3959352"/>
-            <a:ext cx="2825496" cy="1170432"/>
+            <a:endParaRPr lang="en-US" sz="1300" dirty="0"/>
+          </a:p>
+        </p:txBody>
+      </p:sp>
+      <p:sp>
+        <p:nvSpPr>
+          <p:cNvPr id="17" name="Text 15"/>
+          <p:cNvSpPr/>
+          <p:nvPr/>
+        </p:nvSpPr>
+        <p:spPr>
+          <a:xfrm>
+            <a:off x="8074152" y="4023360"/>
+            <a:ext cx="2825496" cy="1097280"/>
           </a:xfrm>
           <a:prstGeom prst="rect">
             <a:avLst/>
@@ -3583,7 +3647,7 @@
               <a:buNone/>
             </a:pPr>
             <a:r>
-              <a:rPr lang="en-US" sz="1250" dirty="0">
+              <a:rPr lang="en-US" sz="1550" dirty="0">
                 <a:solidFill>
                   <a:srgbClr val="17364A"/>
                 </a:solidFill>
@@ -3593,7 +3657,7 @@
               </a:rPr>
               <a:t>Connect the concept to public health decisions, safeguards, documentation, or implementation work.</a:t>
             </a:r>
-            <a:endParaRPr lang="en-US" sz="1250" dirty="0"/>
+            <a:endParaRPr lang="en-US" sz="1550" dirty="0"/>
           </a:p>
         </p:txBody>
       </p:sp>
@@ -3790,7 +3854,7 @@
                 <a:ea typeface="Aptos" pitchFamily="34" charset="-122"/>
                 <a:cs typeface="Aptos" pitchFamily="34" charset="-120"/>
               </a:rPr>
-              <a:t>© Paula Soper</a:t>
+              <a:t>Â© Paula Soper</a:t>
             </a:r>
             <a:endParaRPr lang="en-US" sz="800" dirty="0"/>
           </a:p>
@@ -3804,8 +3868,47 @@
         </p:nvSpPr>
         <p:spPr>
           <a:xfrm>
+            <a:off x="11137392" y="6510528"/>
+            <a:ext cx="411480" cy="201168"/>
+          </a:xfrm>
+          <a:prstGeom prst="rect">
+            <a:avLst/>
+          </a:prstGeom>
+          <a:noFill/>
+          <a:ln/>
+        </p:spPr>
+        <p:txBody>
+          <a:bodyPr wrap="square" lIns="0" tIns="0" rIns="0" bIns="0" rtlCol="0" anchor="ctr"/>
+          <a:lstStyle/>
+          <a:p>
+            <a:pPr algn="r" indent="0" marL="0">
+              <a:buNone/>
+            </a:pPr>
+            <a:r>
+              <a:rPr lang="en-US" sz="900" dirty="0">
+                <a:solidFill>
+                  <a:srgbClr val="5F7181"/>
+                </a:solidFill>
+                <a:latin typeface="Aptos" pitchFamily="34" charset="0"/>
+                <a:ea typeface="Aptos" pitchFamily="34" charset="-122"/>
+                <a:cs typeface="Aptos" pitchFamily="34" charset="-120"/>
+              </a:rPr>
+              <a:t>11</a:t>
+            </a:r>
+            <a:endParaRPr lang="en-US" sz="900" dirty="0"/>
+          </a:p>
+        </p:txBody>
+      </p:sp>
+      <p:sp>
+        <p:nvSpPr>
+          <p:cNvPr id="8" name="Text 6"/>
+          <p:cNvSpPr/>
+          <p:nvPr/>
+        </p:nvSpPr>
+        <p:spPr>
+          <a:xfrm>
             <a:off x="640080" y="658368"/>
-            <a:ext cx="10881360" cy="566928"/>
+            <a:ext cx="10881360" cy="713232"/>
           </a:xfrm>
           <a:prstGeom prst="rect">
             <a:avLst/>
@@ -3823,7 +3926,7 @@
               <a:buNone/>
             </a:pPr>
             <a:r>
-              <a:rPr lang="en-US" sz="2700" b="1" dirty="0">
+              <a:rPr lang="en-US" sz="3400" b="1" dirty="0">
                 <a:solidFill>
                   <a:srgbClr val="003A63"/>
                 </a:solidFill>
@@ -3833,20 +3936,20 @@
               </a:rPr>
               <a:t>Technical Deep Dive Continued</a:t>
             </a:r>
-            <a:endParaRPr lang="en-US" sz="2700" dirty="0"/>
-          </a:p>
-        </p:txBody>
-      </p:sp>
-      <p:sp>
-        <p:nvSpPr>
-          <p:cNvPr id="8" name="Text 6"/>
-          <p:cNvSpPr/>
-          <p:nvPr/>
-        </p:nvSpPr>
-        <p:spPr>
-          <a:xfrm>
-            <a:off x="868680" y="1417320"/>
-            <a:ext cx="6675120" cy="4434840"/>
+            <a:endParaRPr lang="en-US" sz="3400" dirty="0"/>
+          </a:p>
+        </p:txBody>
+      </p:sp>
+      <p:sp>
+        <p:nvSpPr>
+          <p:cNvPr id="9" name="Text 7"/>
+          <p:cNvSpPr/>
+          <p:nvPr/>
+        </p:nvSpPr>
+        <p:spPr>
+          <a:xfrm>
+            <a:off x="868680" y="1508760"/>
+            <a:ext cx="6537960" cy="4160520"/>
           </a:xfrm>
           <a:prstGeom prst="rect">
             <a:avLst/>
@@ -3861,7 +3964,7 @@
           <a:lstStyle/>
           <a:p>
             <a:r>
-              <a:rPr lang="en-US" sz="1700" dirty="0">
+              <a:rPr lang="en-US" sz="2100" dirty="0">
                 <a:solidFill>
                   <a:srgbClr val="17364A"/>
                 </a:solidFill>
@@ -3871,11 +3974,11 @@
               </a:rPr>
               <a:t>Equity and accessibility review should be included when outputs affect staff, partners, or the public.</a:t>
             </a:r>
-            <a:endParaRPr lang="en-US" sz="1700" dirty="0"/>
-          </a:p>
-          <a:p>
-            <a:r>
-              <a:rPr lang="en-US" sz="1700" dirty="0">
+            <a:endParaRPr lang="en-US" sz="2100" dirty="0"/>
+          </a:p>
+          <a:p>
+            <a:r>
+              <a:rPr lang="en-US" sz="2100" dirty="0">
                 <a:solidFill>
                   <a:srgbClr val="17364A"/>
                 </a:solidFill>
@@ -3883,13 +3986,13 @@
                 <a:ea typeface="Aptos" pitchFamily="34" charset="-122"/>
                 <a:cs typeface="Aptos" pitchFamily="34" charset="-120"/>
               </a:rPr>
-              <a:t>Reviewers should assess reading level, language access, disability accessibility, cultural context, stigma, blame, and.</a:t>
-            </a:r>
-            <a:endParaRPr lang="en-US" sz="1700" dirty="0"/>
-          </a:p>
-          <a:p>
-            <a:r>
-              <a:rPr lang="en-US" sz="1700" dirty="0">
+              <a:t>Reviewers should assess reading level, language access, disability accessibility, cultural context,.</a:t>
+            </a:r>
+            <a:endParaRPr lang="en-US" sz="2100" dirty="0"/>
+          </a:p>
+          <a:p>
+            <a:r>
+              <a:rPr lang="en-US" sz="2100" dirty="0">
                 <a:solidFill>
                   <a:srgbClr val="17364A"/>
                 </a:solidFill>
@@ -3897,29 +4000,15 @@
                 <a:ea typeface="Aptos" pitchFamily="34" charset="-122"/>
                 <a:cs typeface="Aptos" pitchFamily="34" charset="-120"/>
               </a:rPr>
-              <a:t>Translation or multilingual adaptation should include review by qualified humans when used for public-facing or.</a:t>
-            </a:r>
-            <a:endParaRPr lang="en-US" sz="1700" dirty="0"/>
-          </a:p>
-          <a:p>
-            <a:r>
-              <a:rPr lang="en-US" sz="1700" dirty="0">
-                <a:solidFill>
-                  <a:srgbClr val="17364A"/>
-                </a:solidFill>
-                <a:latin typeface="Aptos" pitchFamily="34" charset="0"/>
-                <a:ea typeface="Aptos" pitchFamily="34" charset="-122"/>
-                <a:cs typeface="Aptos" pitchFamily="34" charset="-120"/>
-              </a:rPr>
-              <a:t>Documentation should be proportionate to risk.</a:t>
-            </a:r>
-            <a:endParaRPr lang="en-US" sz="1700" dirty="0"/>
-          </a:p>
-        </p:txBody>
-      </p:sp>
-      <p:sp>
-        <p:nvSpPr>
-          <p:cNvPr id="9" name="Shape 7"/>
+              <a:t>Translation or multilingual adaptation should include review by qualified humans when used for.</a:t>
+            </a:r>
+            <a:endParaRPr lang="en-US" sz="2100" dirty="0"/>
+          </a:p>
+        </p:txBody>
+      </p:sp>
+      <p:sp>
+        <p:nvSpPr>
+          <p:cNvPr id="10" name="Shape 8"/>
           <p:cNvSpPr/>
           <p:nvPr/>
         </p:nvSpPr>
@@ -3946,14 +4035,14 @@
       </p:sp>
       <p:sp>
         <p:nvSpPr>
-          <p:cNvPr id="10" name="Text 8"/>
+          <p:cNvPr id="11" name="Text 9"/>
           <p:cNvSpPr/>
           <p:nvPr/>
         </p:nvSpPr>
         <p:spPr>
           <a:xfrm>
             <a:off x="8074152" y="1563624"/>
-            <a:ext cx="2825496" cy="201168"/>
+            <a:ext cx="2825496" cy="256032"/>
           </a:xfrm>
           <a:prstGeom prst="rect">
             <a:avLst/>
@@ -3969,7 +4058,7 @@
               <a:buNone/>
             </a:pPr>
             <a:r>
-              <a:rPr lang="en-US" sz="950" b="1" dirty="0">
+              <a:rPr lang="en-US" sz="1300" b="1" dirty="0">
                 <a:solidFill>
                   <a:srgbClr val="0068B7"/>
                 </a:solidFill>
@@ -3979,20 +4068,20 @@
               </a:rPr>
               <a:t>Key idea</a:t>
             </a:r>
-            <a:endParaRPr lang="en-US" sz="950" dirty="0"/>
-          </a:p>
-        </p:txBody>
-      </p:sp>
-      <p:sp>
-        <p:nvSpPr>
-          <p:cNvPr id="11" name="Text 9"/>
-          <p:cNvSpPr/>
-          <p:nvPr/>
-        </p:nvSpPr>
-        <p:spPr>
-          <a:xfrm>
-            <a:off x="8074152" y="1856232"/>
-            <a:ext cx="2825496" cy="1261872"/>
+            <a:endParaRPr lang="en-US" sz="1300" dirty="0"/>
+          </a:p>
+        </p:txBody>
+      </p:sp>
+      <p:sp>
+        <p:nvSpPr>
+          <p:cNvPr id="12" name="Text 10"/>
+          <p:cNvSpPr/>
+          <p:nvPr/>
+        </p:nvSpPr>
+        <p:spPr>
+          <a:xfrm>
+            <a:off x="8074152" y="1920240"/>
+            <a:ext cx="2825496" cy="1188720"/>
           </a:xfrm>
           <a:prstGeom prst="rect">
             <a:avLst/>
@@ -4010,7 +4099,7 @@
               <a:buNone/>
             </a:pPr>
             <a:r>
-              <a:rPr lang="en-US" sz="1250" dirty="0">
+              <a:rPr lang="en-US" sz="1550" dirty="0">
                 <a:solidFill>
                   <a:srgbClr val="17364A"/>
                 </a:solidFill>
@@ -4020,13 +4109,13 @@
               </a:rPr>
               <a:t>Equity and accessibility review should be included when outputs affect staff, partners, or the public.</a:t>
             </a:r>
-            <a:endParaRPr lang="en-US" sz="1250" dirty="0"/>
-          </a:p>
-        </p:txBody>
-      </p:sp>
-      <p:sp>
-        <p:nvSpPr>
-          <p:cNvPr id="12" name="Shape 10"/>
+            <a:endParaRPr lang="en-US" sz="1550" dirty="0"/>
+          </a:p>
+        </p:txBody>
+      </p:sp>
+      <p:sp>
+        <p:nvSpPr>
+          <p:cNvPr id="13" name="Shape 11"/>
           <p:cNvSpPr/>
           <p:nvPr/>
         </p:nvSpPr>
@@ -4053,14 +4142,14 @@
       </p:sp>
       <p:sp>
         <p:nvSpPr>
-          <p:cNvPr id="13" name="Text 11"/>
+          <p:cNvPr id="14" name="Text 12"/>
           <p:cNvSpPr/>
           <p:nvPr/>
         </p:nvSpPr>
         <p:spPr>
           <a:xfrm>
             <a:off x="8074152" y="3666744"/>
-            <a:ext cx="2825496" cy="201168"/>
+            <a:ext cx="2825496" cy="256032"/>
           </a:xfrm>
           <a:prstGeom prst="rect">
             <a:avLst/>
@@ -4076,7 +4165,7 @@
               <a:buNone/>
             </a:pPr>
             <a:r>
-              <a:rPr lang="en-US" sz="950" b="1" dirty="0">
+              <a:rPr lang="en-US" sz="1300" b="1" dirty="0">
                 <a:solidFill>
                   <a:srgbClr val="0068B7"/>
                 </a:solidFill>
@@ -4086,20 +4175,20 @@
               </a:rPr>
               <a:t>Use this for</a:t>
             </a:r>
-            <a:endParaRPr lang="en-US" sz="950" dirty="0"/>
-          </a:p>
-        </p:txBody>
-      </p:sp>
-      <p:sp>
-        <p:nvSpPr>
-          <p:cNvPr id="14" name="Text 12"/>
-          <p:cNvSpPr/>
-          <p:nvPr/>
-        </p:nvSpPr>
-        <p:spPr>
-          <a:xfrm>
-            <a:off x="8074152" y="3959352"/>
-            <a:ext cx="2825496" cy="1170432"/>
+            <a:endParaRPr lang="en-US" sz="1300" dirty="0"/>
+          </a:p>
+        </p:txBody>
+      </p:sp>
+      <p:sp>
+        <p:nvSpPr>
+          <p:cNvPr id="15" name="Text 13"/>
+          <p:cNvSpPr/>
+          <p:nvPr/>
+        </p:nvSpPr>
+        <p:spPr>
+          <a:xfrm>
+            <a:off x="8074152" y="4023360"/>
+            <a:ext cx="2825496" cy="1097280"/>
           </a:xfrm>
           <a:prstGeom prst="rect">
             <a:avLst/>
@@ -4117,7 +4206,7 @@
               <a:buNone/>
             </a:pPr>
             <a:r>
-              <a:rPr lang="en-US" sz="1250" dirty="0">
+              <a:rPr lang="en-US" sz="1550" dirty="0">
                 <a:solidFill>
                   <a:srgbClr val="17364A"/>
                 </a:solidFill>
@@ -4127,7 +4216,7 @@
               </a:rPr>
               <a:t>Connect the concept to public health decisions, safeguards, documentation, or implementation work.</a:t>
             </a:r>
-            <a:endParaRPr lang="en-US" sz="1250" dirty="0"/>
+            <a:endParaRPr lang="en-US" sz="1550" dirty="0"/>
           </a:p>
         </p:txBody>
       </p:sp>
@@ -4324,7 +4413,7 @@
                 <a:ea typeface="Aptos" pitchFamily="34" charset="-122"/>
                 <a:cs typeface="Aptos" pitchFamily="34" charset="-120"/>
               </a:rPr>
-              <a:t>© Paula Soper</a:t>
+              <a:t>Â© Paula Soper</a:t>
             </a:r>
             <a:endParaRPr lang="en-US" sz="800" dirty="0"/>
           </a:p>
@@ -4332,7 +4421,46 @@
       </p:sp>
       <p:sp>
         <p:nvSpPr>
-          <p:cNvPr id="7" name="Shape 5"/>
+          <p:cNvPr id="7" name="Text 5"/>
+          <p:cNvSpPr/>
+          <p:nvPr/>
+        </p:nvSpPr>
+        <p:spPr>
+          <a:xfrm>
+            <a:off x="11137392" y="6510528"/>
+            <a:ext cx="411480" cy="201168"/>
+          </a:xfrm>
+          <a:prstGeom prst="rect">
+            <a:avLst/>
+          </a:prstGeom>
+          <a:noFill/>
+          <a:ln/>
+        </p:spPr>
+        <p:txBody>
+          <a:bodyPr wrap="square" lIns="0" tIns="0" rIns="0" bIns="0" rtlCol="0" anchor="ctr"/>
+          <a:lstStyle/>
+          <a:p>
+            <a:pPr algn="r" indent="0" marL="0">
+              <a:buNone/>
+            </a:pPr>
+            <a:r>
+              <a:rPr lang="en-US" sz="900" dirty="0">
+                <a:solidFill>
+                  <a:srgbClr val="5F7181"/>
+                </a:solidFill>
+                <a:latin typeface="Aptos" pitchFamily="34" charset="0"/>
+                <a:ea typeface="Aptos" pitchFamily="34" charset="-122"/>
+                <a:cs typeface="Aptos" pitchFamily="34" charset="-120"/>
+              </a:rPr>
+              <a:t>12</a:t>
+            </a:r>
+            <a:endParaRPr lang="en-US" sz="900" dirty="0"/>
+          </a:p>
+        </p:txBody>
+      </p:sp>
+      <p:sp>
+        <p:nvSpPr>
+          <p:cNvPr id="8" name="Shape 6"/>
           <p:cNvSpPr/>
           <p:nvPr/>
         </p:nvSpPr>
@@ -4357,7 +4485,7 @@
       </p:sp>
       <p:sp>
         <p:nvSpPr>
-          <p:cNvPr id="8" name="Text 6"/>
+          <p:cNvPr id="9" name="Text 7"/>
           <p:cNvSpPr/>
           <p:nvPr/>
         </p:nvSpPr>
@@ -4396,14 +4524,14 @@
       </p:sp>
       <p:sp>
         <p:nvSpPr>
-          <p:cNvPr id="9" name="Text 7"/>
+          <p:cNvPr id="10" name="Text 8"/>
           <p:cNvSpPr/>
           <p:nvPr/>
         </p:nvSpPr>
         <p:spPr>
           <a:xfrm>
             <a:off x="640080" y="621792"/>
-            <a:ext cx="10881360" cy="566928"/>
+            <a:ext cx="10881360" cy="713232"/>
           </a:xfrm>
           <a:prstGeom prst="rect">
             <a:avLst/>
@@ -4421,7 +4549,7 @@
               <a:buNone/>
             </a:pPr>
             <a:r>
-              <a:rPr lang="en-US" sz="2700" b="1" dirty="0">
+              <a:rPr lang="en-US" sz="3400" b="1" dirty="0">
                 <a:solidFill>
                   <a:srgbClr val="003A63"/>
                 </a:solidFill>
@@ -4431,20 +4559,20 @@
               </a:rPr>
               <a:t>Risks, Failure Modes, and Guardrails</a:t>
             </a:r>
-            <a:endParaRPr lang="en-US" sz="2700" dirty="0"/>
-          </a:p>
-        </p:txBody>
-      </p:sp>
-      <p:sp>
-        <p:nvSpPr>
-          <p:cNvPr id="10" name="Text 8"/>
-          <p:cNvSpPr/>
-          <p:nvPr/>
-        </p:nvSpPr>
-        <p:spPr>
-          <a:xfrm>
-            <a:off x="868680" y="1417320"/>
-            <a:ext cx="6675120" cy="4434840"/>
+            <a:endParaRPr lang="en-US" sz="3400" dirty="0"/>
+          </a:p>
+        </p:txBody>
+      </p:sp>
+      <p:sp>
+        <p:nvSpPr>
+          <p:cNvPr id="11" name="Text 9"/>
+          <p:cNvSpPr/>
+          <p:nvPr/>
+        </p:nvSpPr>
+        <p:spPr>
+          <a:xfrm>
+            <a:off x="868680" y="1508760"/>
+            <a:ext cx="6537960" cy="4160520"/>
           </a:xfrm>
           <a:prstGeom prst="rect">
             <a:avLst/>
@@ -4459,7 +4587,7 @@
           <a:lstStyle/>
           <a:p>
             <a:r>
-              <a:rPr lang="en-US" sz="1700" dirty="0">
+              <a:rPr lang="en-US" sz="2100" dirty="0">
                 <a:solidFill>
                   <a:srgbClr val="17364A"/>
                 </a:solidFill>
@@ -4469,11 +4597,11 @@
               </a:rPr>
               <a:t>Fluent but false outputs.</a:t>
             </a:r>
-            <a:endParaRPr lang="en-US" sz="1700" dirty="0"/>
-          </a:p>
-          <a:p>
-            <a:r>
-              <a:rPr lang="en-US" sz="1700" dirty="0">
+            <a:endParaRPr lang="en-US" sz="2100" dirty="0"/>
+          </a:p>
+          <a:p>
+            <a:r>
+              <a:rPr lang="en-US" sz="2100" dirty="0">
                 <a:solidFill>
                   <a:srgbClr val="17364A"/>
                 </a:solidFill>
@@ -4483,11 +4611,11 @@
               </a:rPr>
               <a:t>A polished output may contain unsupported claims.</a:t>
             </a:r>
-            <a:endParaRPr lang="en-US" sz="1700" dirty="0"/>
-          </a:p>
-          <a:p>
-            <a:r>
-              <a:rPr lang="en-US" sz="1700" dirty="0">
+            <a:endParaRPr lang="en-US" sz="2100" dirty="0"/>
+          </a:p>
+          <a:p>
+            <a:r>
+              <a:rPr lang="en-US" sz="2100" dirty="0">
                 <a:solidFill>
                   <a:srgbClr val="17364A"/>
                 </a:solidFill>
@@ -4497,27 +4625,13 @@
               </a:rPr>
               <a:t>Guardrails include source checking, citations, and reviewer signoff.</a:t>
             </a:r>
-            <a:endParaRPr lang="en-US" sz="1700" dirty="0"/>
-          </a:p>
-          <a:p>
-            <a:r>
-              <a:rPr lang="en-US" sz="1700" dirty="0">
-                <a:solidFill>
-                  <a:srgbClr val="17364A"/>
-                </a:solidFill>
-                <a:latin typeface="Aptos" pitchFamily="34" charset="0"/>
-                <a:ea typeface="Aptos" pitchFamily="34" charset="-122"/>
-                <a:cs typeface="Aptos" pitchFamily="34" charset="-120"/>
-              </a:rPr>
-              <a:t>Omitted caveats.</a:t>
-            </a:r>
-            <a:endParaRPr lang="en-US" sz="1700" dirty="0"/>
-          </a:p>
-        </p:txBody>
-      </p:sp>
-      <p:sp>
-        <p:nvSpPr>
-          <p:cNvPr id="11" name="Shape 9"/>
+            <a:endParaRPr lang="en-US" sz="2100" dirty="0"/>
+          </a:p>
+        </p:txBody>
+      </p:sp>
+      <p:sp>
+        <p:nvSpPr>
+          <p:cNvPr id="12" name="Shape 10"/>
           <p:cNvSpPr/>
           <p:nvPr/>
         </p:nvSpPr>
@@ -4544,14 +4658,14 @@
       </p:sp>
       <p:sp>
         <p:nvSpPr>
-          <p:cNvPr id="12" name="Text 10"/>
+          <p:cNvPr id="13" name="Text 11"/>
           <p:cNvSpPr/>
           <p:nvPr/>
         </p:nvSpPr>
         <p:spPr>
           <a:xfrm>
             <a:off x="8074152" y="1563624"/>
-            <a:ext cx="2825496" cy="201168"/>
+            <a:ext cx="2825496" cy="256032"/>
           </a:xfrm>
           <a:prstGeom prst="rect">
             <a:avLst/>
@@ -4567,7 +4681,7 @@
               <a:buNone/>
             </a:pPr>
             <a:r>
-              <a:rPr lang="en-US" sz="950" b="1" dirty="0">
+              <a:rPr lang="en-US" sz="1300" b="1" dirty="0">
                 <a:solidFill>
                   <a:srgbClr val="0068B7"/>
                 </a:solidFill>
@@ -4577,20 +4691,20 @@
               </a:rPr>
               <a:t>Key idea</a:t>
             </a:r>
-            <a:endParaRPr lang="en-US" sz="950" dirty="0"/>
-          </a:p>
-        </p:txBody>
-      </p:sp>
-      <p:sp>
-        <p:nvSpPr>
-          <p:cNvPr id="13" name="Text 11"/>
-          <p:cNvSpPr/>
-          <p:nvPr/>
-        </p:nvSpPr>
-        <p:spPr>
-          <a:xfrm>
-            <a:off x="8074152" y="1856232"/>
-            <a:ext cx="2825496" cy="1261872"/>
+            <a:endParaRPr lang="en-US" sz="1300" dirty="0"/>
+          </a:p>
+        </p:txBody>
+      </p:sp>
+      <p:sp>
+        <p:nvSpPr>
+          <p:cNvPr id="14" name="Text 12"/>
+          <p:cNvSpPr/>
+          <p:nvPr/>
+        </p:nvSpPr>
+        <p:spPr>
+          <a:xfrm>
+            <a:off x="8074152" y="1920240"/>
+            <a:ext cx="2825496" cy="1188720"/>
           </a:xfrm>
           <a:prstGeom prst="rect">
             <a:avLst/>
@@ -4608,7 +4722,7 @@
               <a:buNone/>
             </a:pPr>
             <a:r>
-              <a:rPr lang="en-US" sz="1250" dirty="0">
+              <a:rPr lang="en-US" sz="1550" dirty="0">
                 <a:solidFill>
                   <a:srgbClr val="17364A"/>
                 </a:solidFill>
@@ -4618,13 +4732,13 @@
               </a:rPr>
               <a:t>Fluent but false outputs.</a:t>
             </a:r>
-            <a:endParaRPr lang="en-US" sz="1250" dirty="0"/>
-          </a:p>
-        </p:txBody>
-      </p:sp>
-      <p:sp>
-        <p:nvSpPr>
-          <p:cNvPr id="14" name="Shape 12"/>
+            <a:endParaRPr lang="en-US" sz="1550" dirty="0"/>
+          </a:p>
+        </p:txBody>
+      </p:sp>
+      <p:sp>
+        <p:nvSpPr>
+          <p:cNvPr id="15" name="Shape 13"/>
           <p:cNvSpPr/>
           <p:nvPr/>
         </p:nvSpPr>
@@ -4651,14 +4765,14 @@
       </p:sp>
       <p:sp>
         <p:nvSpPr>
-          <p:cNvPr id="15" name="Text 13"/>
+          <p:cNvPr id="16" name="Text 14"/>
           <p:cNvSpPr/>
           <p:nvPr/>
         </p:nvSpPr>
         <p:spPr>
           <a:xfrm>
             <a:off x="8074152" y="3666744"/>
-            <a:ext cx="2825496" cy="201168"/>
+            <a:ext cx="2825496" cy="256032"/>
           </a:xfrm>
           <a:prstGeom prst="rect">
             <a:avLst/>
@@ -4674,7 +4788,7 @@
               <a:buNone/>
             </a:pPr>
             <a:r>
-              <a:rPr lang="en-US" sz="950" b="1" dirty="0">
+              <a:rPr lang="en-US" sz="1300" b="1" dirty="0">
                 <a:solidFill>
                   <a:srgbClr val="0068B7"/>
                 </a:solidFill>
@@ -4684,20 +4798,20 @@
               </a:rPr>
               <a:t>Use this for</a:t>
             </a:r>
-            <a:endParaRPr lang="en-US" sz="950" dirty="0"/>
-          </a:p>
-        </p:txBody>
-      </p:sp>
-      <p:sp>
-        <p:nvSpPr>
-          <p:cNvPr id="16" name="Text 14"/>
-          <p:cNvSpPr/>
-          <p:nvPr/>
-        </p:nvSpPr>
-        <p:spPr>
-          <a:xfrm>
-            <a:off x="8074152" y="3959352"/>
-            <a:ext cx="2825496" cy="1170432"/>
+            <a:endParaRPr lang="en-US" sz="1300" dirty="0"/>
+          </a:p>
+        </p:txBody>
+      </p:sp>
+      <p:sp>
+        <p:nvSpPr>
+          <p:cNvPr id="17" name="Text 15"/>
+          <p:cNvSpPr/>
+          <p:nvPr/>
+        </p:nvSpPr>
+        <p:spPr>
+          <a:xfrm>
+            <a:off x="8074152" y="4023360"/>
+            <a:ext cx="2825496" cy="1097280"/>
           </a:xfrm>
           <a:prstGeom prst="rect">
             <a:avLst/>
@@ -4715,7 +4829,7 @@
               <a:buNone/>
             </a:pPr>
             <a:r>
-              <a:rPr lang="en-US" sz="1250" dirty="0">
+              <a:rPr lang="en-US" sz="1550" dirty="0">
                 <a:solidFill>
                   <a:srgbClr val="17364A"/>
                 </a:solidFill>
@@ -4725,7 +4839,7 @@
               </a:rPr>
               <a:t>Connect the concept to public health decisions, safeguards, documentation, or implementation work.</a:t>
             </a:r>
-            <a:endParaRPr lang="en-US" sz="1250" dirty="0"/>
+            <a:endParaRPr lang="en-US" sz="1550" dirty="0"/>
           </a:p>
         </p:txBody>
       </p:sp>
@@ -4922,7 +5036,7 @@
                 <a:ea typeface="Aptos" pitchFamily="34" charset="-122"/>
                 <a:cs typeface="Aptos" pitchFamily="34" charset="-120"/>
               </a:rPr>
-              <a:t>© Paula Soper</a:t>
+              <a:t>Â© Paula Soper</a:t>
             </a:r>
             <a:endParaRPr lang="en-US" sz="800" dirty="0"/>
           </a:p>
@@ -4936,8 +5050,47 @@
         </p:nvSpPr>
         <p:spPr>
           <a:xfrm>
+            <a:off x="11137392" y="6510528"/>
+            <a:ext cx="411480" cy="201168"/>
+          </a:xfrm>
+          <a:prstGeom prst="rect">
+            <a:avLst/>
+          </a:prstGeom>
+          <a:noFill/>
+          <a:ln/>
+        </p:spPr>
+        <p:txBody>
+          <a:bodyPr wrap="square" lIns="0" tIns="0" rIns="0" bIns="0" rtlCol="0" anchor="ctr"/>
+          <a:lstStyle/>
+          <a:p>
+            <a:pPr algn="r" indent="0" marL="0">
+              <a:buNone/>
+            </a:pPr>
+            <a:r>
+              <a:rPr lang="en-US" sz="900" dirty="0">
+                <a:solidFill>
+                  <a:srgbClr val="5F7181"/>
+                </a:solidFill>
+                <a:latin typeface="Aptos" pitchFamily="34" charset="0"/>
+                <a:ea typeface="Aptos" pitchFamily="34" charset="-122"/>
+                <a:cs typeface="Aptos" pitchFamily="34" charset="-120"/>
+              </a:rPr>
+              <a:t>13</a:t>
+            </a:r>
+            <a:endParaRPr lang="en-US" sz="900" dirty="0"/>
+          </a:p>
+        </p:txBody>
+      </p:sp>
+      <p:sp>
+        <p:nvSpPr>
+          <p:cNvPr id="8" name="Text 6"/>
+          <p:cNvSpPr/>
+          <p:nvPr/>
+        </p:nvSpPr>
+        <p:spPr>
+          <a:xfrm>
             <a:off x="640080" y="658368"/>
-            <a:ext cx="10881360" cy="566928"/>
+            <a:ext cx="10881360" cy="713232"/>
           </a:xfrm>
           <a:prstGeom prst="rect">
             <a:avLst/>
@@ -4955,7 +5108,7 @@
               <a:buNone/>
             </a:pPr>
             <a:r>
-              <a:rPr lang="en-US" sz="2700" b="1" dirty="0">
+              <a:rPr lang="en-US" sz="3400" b="1" dirty="0">
                 <a:solidFill>
                   <a:srgbClr val="003A63"/>
                 </a:solidFill>
@@ -4965,20 +5118,20 @@
               </a:rPr>
               <a:t>Risks, Failure Modes, and Guardrails Continued</a:t>
             </a:r>
-            <a:endParaRPr lang="en-US" sz="2700" dirty="0"/>
-          </a:p>
-        </p:txBody>
-      </p:sp>
-      <p:sp>
-        <p:nvSpPr>
-          <p:cNvPr id="8" name="Text 6"/>
-          <p:cNvSpPr/>
-          <p:nvPr/>
-        </p:nvSpPr>
-        <p:spPr>
-          <a:xfrm>
-            <a:off x="868680" y="1417320"/>
-            <a:ext cx="6675120" cy="4434840"/>
+            <a:endParaRPr lang="en-US" sz="3400" dirty="0"/>
+          </a:p>
+        </p:txBody>
+      </p:sp>
+      <p:sp>
+        <p:nvSpPr>
+          <p:cNvPr id="9" name="Text 7"/>
+          <p:cNvSpPr/>
+          <p:nvPr/>
+        </p:nvSpPr>
+        <p:spPr>
+          <a:xfrm>
+            <a:off x="868680" y="1508760"/>
+            <a:ext cx="6537960" cy="4160520"/>
           </a:xfrm>
           <a:prstGeom prst="rect">
             <a:avLst/>
@@ -4993,7 +5146,7 @@
           <a:lstStyle/>
           <a:p>
             <a:r>
-              <a:rPr lang="en-US" sz="1700" dirty="0">
+              <a:rPr lang="en-US" sz="2100" dirty="0">
                 <a:solidFill>
                   <a:srgbClr val="17364A"/>
                 </a:solidFill>
@@ -5003,11 +5156,11 @@
               </a:rPr>
               <a:t>Privacy exposure.</a:t>
             </a:r>
-            <a:endParaRPr lang="en-US" sz="1700" dirty="0"/>
-          </a:p>
-          <a:p>
-            <a:r>
-              <a:rPr lang="en-US" sz="1700" dirty="0">
+            <a:endParaRPr lang="en-US" sz="2100" dirty="0"/>
+          </a:p>
+          <a:p>
+            <a:r>
+              <a:rPr lang="en-US" sz="2100" dirty="0">
                 <a:solidFill>
                   <a:srgbClr val="17364A"/>
                 </a:solidFill>
@@ -5017,11 +5170,11 @@
               </a:rPr>
               <a:t>Prompts or outputs may include sensitive data.</a:t>
             </a:r>
-            <a:endParaRPr lang="en-US" sz="1700" dirty="0"/>
-          </a:p>
-          <a:p>
-            <a:r>
-              <a:rPr lang="en-US" sz="1700" dirty="0">
+            <a:endParaRPr lang="en-US" sz="2100" dirty="0"/>
+          </a:p>
+          <a:p>
+            <a:r>
+              <a:rPr lang="en-US" sz="2100" dirty="0">
                 <a:solidFill>
                   <a:srgbClr val="17364A"/>
                 </a:solidFill>
@@ -5031,13 +5184,13 @@
               </a:rPr>
               <a:t>Guardrails include approved tools, data-use tiers, redaction, access controls, and records guidance.</a:t>
             </a:r>
-            <a:endParaRPr lang="en-US" sz="1700" dirty="0"/>
-          </a:p>
-        </p:txBody>
-      </p:sp>
-      <p:sp>
-        <p:nvSpPr>
-          <p:cNvPr id="9" name="Shape 7"/>
+            <a:endParaRPr lang="en-US" sz="2100" dirty="0"/>
+          </a:p>
+        </p:txBody>
+      </p:sp>
+      <p:sp>
+        <p:nvSpPr>
+          <p:cNvPr id="10" name="Shape 8"/>
           <p:cNvSpPr/>
           <p:nvPr/>
         </p:nvSpPr>
@@ -5064,14 +5217,14 @@
       </p:sp>
       <p:sp>
         <p:nvSpPr>
-          <p:cNvPr id="10" name="Text 8"/>
+          <p:cNvPr id="11" name="Text 9"/>
           <p:cNvSpPr/>
           <p:nvPr/>
         </p:nvSpPr>
         <p:spPr>
           <a:xfrm>
             <a:off x="8074152" y="1563624"/>
-            <a:ext cx="2825496" cy="201168"/>
+            <a:ext cx="2825496" cy="256032"/>
           </a:xfrm>
           <a:prstGeom prst="rect">
             <a:avLst/>
@@ -5087,7 +5240,7 @@
               <a:buNone/>
             </a:pPr>
             <a:r>
-              <a:rPr lang="en-US" sz="950" b="1" dirty="0">
+              <a:rPr lang="en-US" sz="1300" b="1" dirty="0">
                 <a:solidFill>
                   <a:srgbClr val="0068B7"/>
                 </a:solidFill>
@@ -5097,20 +5250,20 @@
               </a:rPr>
               <a:t>Key idea</a:t>
             </a:r>
-            <a:endParaRPr lang="en-US" sz="950" dirty="0"/>
-          </a:p>
-        </p:txBody>
-      </p:sp>
-      <p:sp>
-        <p:nvSpPr>
-          <p:cNvPr id="11" name="Text 9"/>
-          <p:cNvSpPr/>
-          <p:nvPr/>
-        </p:nvSpPr>
-        <p:spPr>
-          <a:xfrm>
-            <a:off x="8074152" y="1856232"/>
-            <a:ext cx="2825496" cy="1261872"/>
+            <a:endParaRPr lang="en-US" sz="1300" dirty="0"/>
+          </a:p>
+        </p:txBody>
+      </p:sp>
+      <p:sp>
+        <p:nvSpPr>
+          <p:cNvPr id="12" name="Text 10"/>
+          <p:cNvSpPr/>
+          <p:nvPr/>
+        </p:nvSpPr>
+        <p:spPr>
+          <a:xfrm>
+            <a:off x="8074152" y="1920240"/>
+            <a:ext cx="2825496" cy="1188720"/>
           </a:xfrm>
           <a:prstGeom prst="rect">
             <a:avLst/>
@@ -5128,7 +5281,7 @@
               <a:buNone/>
             </a:pPr>
             <a:r>
-              <a:rPr lang="en-US" sz="1250" dirty="0">
+              <a:rPr lang="en-US" sz="1550" dirty="0">
                 <a:solidFill>
                   <a:srgbClr val="17364A"/>
                 </a:solidFill>
@@ -5138,13 +5291,13 @@
               </a:rPr>
               <a:t>Privacy exposure.</a:t>
             </a:r>
-            <a:endParaRPr lang="en-US" sz="1250" dirty="0"/>
-          </a:p>
-        </p:txBody>
-      </p:sp>
-      <p:sp>
-        <p:nvSpPr>
-          <p:cNvPr id="12" name="Shape 10"/>
+            <a:endParaRPr lang="en-US" sz="1550" dirty="0"/>
+          </a:p>
+        </p:txBody>
+      </p:sp>
+      <p:sp>
+        <p:nvSpPr>
+          <p:cNvPr id="13" name="Shape 11"/>
           <p:cNvSpPr/>
           <p:nvPr/>
         </p:nvSpPr>
@@ -5171,14 +5324,14 @@
       </p:sp>
       <p:sp>
         <p:nvSpPr>
-          <p:cNvPr id="13" name="Text 11"/>
+          <p:cNvPr id="14" name="Text 12"/>
           <p:cNvSpPr/>
           <p:nvPr/>
         </p:nvSpPr>
         <p:spPr>
           <a:xfrm>
             <a:off x="8074152" y="3666744"/>
-            <a:ext cx="2825496" cy="201168"/>
+            <a:ext cx="2825496" cy="256032"/>
           </a:xfrm>
           <a:prstGeom prst="rect">
             <a:avLst/>
@@ -5194,7 +5347,7 @@
               <a:buNone/>
             </a:pPr>
             <a:r>
-              <a:rPr lang="en-US" sz="950" b="1" dirty="0">
+              <a:rPr lang="en-US" sz="1300" b="1" dirty="0">
                 <a:solidFill>
                   <a:srgbClr val="0068B7"/>
                 </a:solidFill>
@@ -5204,20 +5357,20 @@
               </a:rPr>
               <a:t>Use this for</a:t>
             </a:r>
-            <a:endParaRPr lang="en-US" sz="950" dirty="0"/>
-          </a:p>
-        </p:txBody>
-      </p:sp>
-      <p:sp>
-        <p:nvSpPr>
-          <p:cNvPr id="14" name="Text 12"/>
-          <p:cNvSpPr/>
-          <p:nvPr/>
-        </p:nvSpPr>
-        <p:spPr>
-          <a:xfrm>
-            <a:off x="8074152" y="3959352"/>
-            <a:ext cx="2825496" cy="1170432"/>
+            <a:endParaRPr lang="en-US" sz="1300" dirty="0"/>
+          </a:p>
+        </p:txBody>
+      </p:sp>
+      <p:sp>
+        <p:nvSpPr>
+          <p:cNvPr id="15" name="Text 13"/>
+          <p:cNvSpPr/>
+          <p:nvPr/>
+        </p:nvSpPr>
+        <p:spPr>
+          <a:xfrm>
+            <a:off x="8074152" y="4023360"/>
+            <a:ext cx="2825496" cy="1097280"/>
           </a:xfrm>
           <a:prstGeom prst="rect">
             <a:avLst/>
@@ -5235,7 +5388,7 @@
               <a:buNone/>
             </a:pPr>
             <a:r>
-              <a:rPr lang="en-US" sz="1250" dirty="0">
+              <a:rPr lang="en-US" sz="1550" dirty="0">
                 <a:solidFill>
                   <a:srgbClr val="17364A"/>
                 </a:solidFill>
@@ -5245,7 +5398,7 @@
               </a:rPr>
               <a:t>Connect the concept to public health decisions, safeguards, documentation, or implementation work.</a:t>
             </a:r>
-            <a:endParaRPr lang="en-US" sz="1250" dirty="0"/>
+            <a:endParaRPr lang="en-US" sz="1550" dirty="0"/>
           </a:p>
         </p:txBody>
       </p:sp>
@@ -5442,7 +5595,7 @@
                 <a:ea typeface="Aptos" pitchFamily="34" charset="-122"/>
                 <a:cs typeface="Aptos" pitchFamily="34" charset="-120"/>
               </a:rPr>
-              <a:t>© Paula Soper</a:t>
+              <a:t>Â© Paula Soper</a:t>
             </a:r>
             <a:endParaRPr lang="en-US" sz="800" dirty="0"/>
           </a:p>
@@ -5450,7 +5603,46 @@
       </p:sp>
       <p:sp>
         <p:nvSpPr>
-          <p:cNvPr id="7" name="Shape 5"/>
+          <p:cNvPr id="7" name="Text 5"/>
+          <p:cNvSpPr/>
+          <p:nvPr/>
+        </p:nvSpPr>
+        <p:spPr>
+          <a:xfrm>
+            <a:off x="11137392" y="6510528"/>
+            <a:ext cx="411480" cy="201168"/>
+          </a:xfrm>
+          <a:prstGeom prst="rect">
+            <a:avLst/>
+          </a:prstGeom>
+          <a:noFill/>
+          <a:ln/>
+        </p:spPr>
+        <p:txBody>
+          <a:bodyPr wrap="square" lIns="0" tIns="0" rIns="0" bIns="0" rtlCol="0" anchor="ctr"/>
+          <a:lstStyle/>
+          <a:p>
+            <a:pPr algn="r" indent="0" marL="0">
+              <a:buNone/>
+            </a:pPr>
+            <a:r>
+              <a:rPr lang="en-US" sz="900" dirty="0">
+                <a:solidFill>
+                  <a:srgbClr val="5F7181"/>
+                </a:solidFill>
+                <a:latin typeface="Aptos" pitchFamily="34" charset="0"/>
+                <a:ea typeface="Aptos" pitchFamily="34" charset="-122"/>
+                <a:cs typeface="Aptos" pitchFamily="34" charset="-120"/>
+              </a:rPr>
+              <a:t>14</a:t>
+            </a:r>
+            <a:endParaRPr lang="en-US" sz="900" dirty="0"/>
+          </a:p>
+        </p:txBody>
+      </p:sp>
+      <p:sp>
+        <p:nvSpPr>
+          <p:cNvPr id="8" name="Shape 6"/>
           <p:cNvSpPr/>
           <p:nvPr/>
         </p:nvSpPr>
@@ -5475,7 +5667,7 @@
       </p:sp>
       <p:sp>
         <p:nvSpPr>
-          <p:cNvPr id="8" name="Text 6"/>
+          <p:cNvPr id="9" name="Text 7"/>
           <p:cNvSpPr/>
           <p:nvPr/>
         </p:nvSpPr>
@@ -5514,14 +5706,14 @@
       </p:sp>
       <p:sp>
         <p:nvSpPr>
-          <p:cNvPr id="9" name="Text 7"/>
+          <p:cNvPr id="10" name="Text 8"/>
           <p:cNvSpPr/>
           <p:nvPr/>
         </p:nvSpPr>
         <p:spPr>
           <a:xfrm>
             <a:off x="640080" y="621792"/>
-            <a:ext cx="10881360" cy="566928"/>
+            <a:ext cx="10881360" cy="713232"/>
           </a:xfrm>
           <a:prstGeom prst="rect">
             <a:avLst/>
@@ -5539,7 +5731,7 @@
               <a:buNone/>
             </a:pPr>
             <a:r>
-              <a:rPr lang="en-US" sz="2700" b="1" dirty="0">
+              <a:rPr lang="en-US" sz="3400" b="1" dirty="0">
                 <a:solidFill>
                   <a:srgbClr val="003A63"/>
                 </a:solidFill>
@@ -5549,20 +5741,20 @@
               </a:rPr>
               <a:t>Application to AI-Supported Workflows</a:t>
             </a:r>
-            <a:endParaRPr lang="en-US" sz="2700" dirty="0"/>
-          </a:p>
-        </p:txBody>
-      </p:sp>
-      <p:sp>
-        <p:nvSpPr>
-          <p:cNvPr id="10" name="Text 8"/>
-          <p:cNvSpPr/>
-          <p:nvPr/>
-        </p:nvSpPr>
-        <p:spPr>
-          <a:xfrm>
-            <a:off x="868680" y="1417320"/>
-            <a:ext cx="6675120" cy="4434840"/>
+            <a:endParaRPr lang="en-US" sz="3400" dirty="0"/>
+          </a:p>
+        </p:txBody>
+      </p:sp>
+      <p:sp>
+        <p:nvSpPr>
+          <p:cNvPr id="11" name="Text 9"/>
+          <p:cNvSpPr/>
+          <p:nvPr/>
+        </p:nvSpPr>
+        <p:spPr>
+          <a:xfrm>
+            <a:off x="868680" y="1508760"/>
+            <a:ext cx="6537960" cy="4160520"/>
           </a:xfrm>
           <a:prstGeom prst="rect">
             <a:avLst/>
@@ -5577,7 +5769,7 @@
           <a:lstStyle/>
           <a:p>
             <a:r>
-              <a:rPr lang="en-US" sz="1700" dirty="0">
+              <a:rPr lang="en-US" sz="2100" dirty="0">
                 <a:solidFill>
                   <a:srgbClr val="17364A"/>
                 </a:solidFill>
@@ -5585,13 +5777,13 @@
                 <a:ea typeface="Aptos" pitchFamily="34" charset="-122"/>
                 <a:cs typeface="Aptos" pitchFamily="34" charset="-120"/>
               </a:rPr>
-              <a:t>Generative AI output evaluation applies to drafting, summarization, classification, translation, code generation, and.</a:t>
-            </a:r>
-            <a:endParaRPr lang="en-US" sz="1700" dirty="0"/>
-          </a:p>
-          <a:p>
-            <a:r>
-              <a:rPr lang="en-US" sz="1700" dirty="0">
+              <a:t>Generative AI output evaluation applies to drafting, summarization, classification, translation, code.</a:t>
+            </a:r>
+            <a:endParaRPr lang="en-US" sz="2100" dirty="0"/>
+          </a:p>
+          <a:p>
+            <a:r>
+              <a:rPr lang="en-US" sz="2100" dirty="0">
                 <a:solidFill>
                   <a:srgbClr val="17364A"/>
                 </a:solidFill>
@@ -5599,13 +5791,13 @@
                 <a:ea typeface="Aptos" pitchFamily="34" charset="-122"/>
                 <a:cs typeface="Aptos" pitchFamily="34" charset="-120"/>
               </a:rPr>
-              <a:t>It is also relevant to RAG and agentic workflows because generated text may summarize retrieved sources or explain.</a:t>
-            </a:r>
-            <a:endParaRPr lang="en-US" sz="1700" dirty="0"/>
-          </a:p>
-          <a:p>
-            <a:r>
-              <a:rPr lang="en-US" sz="1700" dirty="0">
+              <a:t>It is also relevant to RAG and agentic workflows because generated text may summarize retrieved sources.</a:t>
+            </a:r>
+            <a:endParaRPr lang="en-US" sz="2100" dirty="0"/>
+          </a:p>
+          <a:p>
+            <a:r>
+              <a:rPr lang="en-US" sz="2100" dirty="0">
                 <a:solidFill>
                   <a:srgbClr val="17364A"/>
                 </a:solidFill>
@@ -5615,27 +5807,13 @@
               </a:rPr>
               <a:t>Evaluation should be built into workflow design, not added after deployment.</a:t>
             </a:r>
-            <a:endParaRPr lang="en-US" sz="1700" dirty="0"/>
-          </a:p>
-          <a:p>
-            <a:r>
-              <a:rPr lang="en-US" sz="1700" dirty="0">
-                <a:solidFill>
-                  <a:srgbClr val="17364A"/>
-                </a:solidFill>
-                <a:latin typeface="Aptos" pitchFamily="34" charset="0"/>
-                <a:ea typeface="Aptos" pitchFamily="34" charset="-122"/>
-                <a:cs typeface="Aptos" pitchFamily="34" charset="-120"/>
-              </a:rPr>
-              <a:t>The strongest approach is to create rubrics for specific output types.</a:t>
-            </a:r>
-            <a:endParaRPr lang="en-US" sz="1700" dirty="0"/>
-          </a:p>
-        </p:txBody>
-      </p:sp>
-      <p:sp>
-        <p:nvSpPr>
-          <p:cNvPr id="11" name="Shape 9"/>
+            <a:endParaRPr lang="en-US" sz="2100" dirty="0"/>
+          </a:p>
+        </p:txBody>
+      </p:sp>
+      <p:sp>
+        <p:nvSpPr>
+          <p:cNvPr id="12" name="Shape 10"/>
           <p:cNvSpPr/>
           <p:nvPr/>
         </p:nvSpPr>
@@ -5662,14 +5840,14 @@
       </p:sp>
       <p:sp>
         <p:nvSpPr>
-          <p:cNvPr id="12" name="Text 10"/>
+          <p:cNvPr id="13" name="Text 11"/>
           <p:cNvSpPr/>
           <p:nvPr/>
         </p:nvSpPr>
         <p:spPr>
           <a:xfrm>
             <a:off x="8074152" y="1563624"/>
-            <a:ext cx="2825496" cy="201168"/>
+            <a:ext cx="2825496" cy="256032"/>
           </a:xfrm>
           <a:prstGeom prst="rect">
             <a:avLst/>
@@ -5685,7 +5863,7 @@
               <a:buNone/>
             </a:pPr>
             <a:r>
-              <a:rPr lang="en-US" sz="950" b="1" dirty="0">
+              <a:rPr lang="en-US" sz="1300" b="1" dirty="0">
                 <a:solidFill>
                   <a:srgbClr val="0068B7"/>
                 </a:solidFill>
@@ -5695,20 +5873,20 @@
               </a:rPr>
               <a:t>Key idea</a:t>
             </a:r>
-            <a:endParaRPr lang="en-US" sz="950" dirty="0"/>
-          </a:p>
-        </p:txBody>
-      </p:sp>
-      <p:sp>
-        <p:nvSpPr>
-          <p:cNvPr id="13" name="Text 11"/>
-          <p:cNvSpPr/>
-          <p:nvPr/>
-        </p:nvSpPr>
-        <p:spPr>
-          <a:xfrm>
-            <a:off x="8074152" y="1856232"/>
-            <a:ext cx="2825496" cy="1261872"/>
+            <a:endParaRPr lang="en-US" sz="1300" dirty="0"/>
+          </a:p>
+        </p:txBody>
+      </p:sp>
+      <p:sp>
+        <p:nvSpPr>
+          <p:cNvPr id="14" name="Text 12"/>
+          <p:cNvSpPr/>
+          <p:nvPr/>
+        </p:nvSpPr>
+        <p:spPr>
+          <a:xfrm>
+            <a:off x="8074152" y="1920240"/>
+            <a:ext cx="2825496" cy="1188720"/>
           </a:xfrm>
           <a:prstGeom prst="rect">
             <a:avLst/>
@@ -5726,7 +5904,7 @@
               <a:buNone/>
             </a:pPr>
             <a:r>
-              <a:rPr lang="en-US" sz="1250" dirty="0">
+              <a:rPr lang="en-US" sz="1550" dirty="0">
                 <a:solidFill>
                   <a:srgbClr val="17364A"/>
                 </a:solidFill>
@@ -5734,15 +5912,15 @@
                 <a:ea typeface="Aptos" pitchFamily="34" charset="-122"/>
                 <a:cs typeface="Aptos" pitchFamily="34" charset="-120"/>
               </a:rPr>
-              <a:t>Generative AI output evaluation applies to drafting, summarization, classification, translation, code generation, and.</a:t>
-            </a:r>
-            <a:endParaRPr lang="en-US" sz="1250" dirty="0"/>
-          </a:p>
-        </p:txBody>
-      </p:sp>
-      <p:sp>
-        <p:nvSpPr>
-          <p:cNvPr id="14" name="Shape 12"/>
+              <a:t>Generative AI output evaluation applies to drafting, summarization, classification, translation, code.</a:t>
+            </a:r>
+            <a:endParaRPr lang="en-US" sz="1550" dirty="0"/>
+          </a:p>
+        </p:txBody>
+      </p:sp>
+      <p:sp>
+        <p:nvSpPr>
+          <p:cNvPr id="15" name="Shape 13"/>
           <p:cNvSpPr/>
           <p:nvPr/>
         </p:nvSpPr>
@@ -5769,14 +5947,14 @@
       </p:sp>
       <p:sp>
         <p:nvSpPr>
-          <p:cNvPr id="15" name="Text 13"/>
+          <p:cNvPr id="16" name="Text 14"/>
           <p:cNvSpPr/>
           <p:nvPr/>
         </p:nvSpPr>
         <p:spPr>
           <a:xfrm>
             <a:off x="8074152" y="3666744"/>
-            <a:ext cx="2825496" cy="201168"/>
+            <a:ext cx="2825496" cy="256032"/>
           </a:xfrm>
           <a:prstGeom prst="rect">
             <a:avLst/>
@@ -5792,7 +5970,7 @@
               <a:buNone/>
             </a:pPr>
             <a:r>
-              <a:rPr lang="en-US" sz="950" b="1" dirty="0">
+              <a:rPr lang="en-US" sz="1300" b="1" dirty="0">
                 <a:solidFill>
                   <a:srgbClr val="0068B7"/>
                 </a:solidFill>
@@ -5802,20 +5980,20 @@
               </a:rPr>
               <a:t>Use this for</a:t>
             </a:r>
-            <a:endParaRPr lang="en-US" sz="950" dirty="0"/>
-          </a:p>
-        </p:txBody>
-      </p:sp>
-      <p:sp>
-        <p:nvSpPr>
-          <p:cNvPr id="16" name="Text 14"/>
-          <p:cNvSpPr/>
-          <p:nvPr/>
-        </p:nvSpPr>
-        <p:spPr>
-          <a:xfrm>
-            <a:off x="8074152" y="3959352"/>
-            <a:ext cx="2825496" cy="1170432"/>
+            <a:endParaRPr lang="en-US" sz="1300" dirty="0"/>
+          </a:p>
+        </p:txBody>
+      </p:sp>
+      <p:sp>
+        <p:nvSpPr>
+          <p:cNvPr id="17" name="Text 15"/>
+          <p:cNvSpPr/>
+          <p:nvPr/>
+        </p:nvSpPr>
+        <p:spPr>
+          <a:xfrm>
+            <a:off x="8074152" y="4023360"/>
+            <a:ext cx="2825496" cy="1097280"/>
           </a:xfrm>
           <a:prstGeom prst="rect">
             <a:avLst/>
@@ -5833,7 +6011,7 @@
               <a:buNone/>
             </a:pPr>
             <a:r>
-              <a:rPr lang="en-US" sz="1250" dirty="0">
+              <a:rPr lang="en-US" sz="1550" dirty="0">
                 <a:solidFill>
                   <a:srgbClr val="17364A"/>
                 </a:solidFill>
@@ -5843,7 +6021,7 @@
               </a:rPr>
               <a:t>Connect the concept to public health decisions, safeguards, documentation, or implementation work.</a:t>
             </a:r>
-            <a:endParaRPr lang="en-US" sz="1250" dirty="0"/>
+            <a:endParaRPr lang="en-US" sz="1550" dirty="0"/>
           </a:p>
         </p:txBody>
       </p:sp>
@@ -6040,7 +6218,7 @@
                 <a:ea typeface="Aptos" pitchFamily="34" charset="-122"/>
                 <a:cs typeface="Aptos" pitchFamily="34" charset="-120"/>
               </a:rPr>
-              <a:t>© Paula Soper</a:t>
+              <a:t>Â© Paula Soper</a:t>
             </a:r>
             <a:endParaRPr lang="en-US" sz="800" dirty="0"/>
           </a:p>
@@ -6048,7 +6226,46 @@
       </p:sp>
       <p:sp>
         <p:nvSpPr>
-          <p:cNvPr id="7" name="Shape 5"/>
+          <p:cNvPr id="7" name="Text 5"/>
+          <p:cNvSpPr/>
+          <p:nvPr/>
+        </p:nvSpPr>
+        <p:spPr>
+          <a:xfrm>
+            <a:off x="11137392" y="6510528"/>
+            <a:ext cx="411480" cy="201168"/>
+          </a:xfrm>
+          <a:prstGeom prst="rect">
+            <a:avLst/>
+          </a:prstGeom>
+          <a:noFill/>
+          <a:ln/>
+        </p:spPr>
+        <p:txBody>
+          <a:bodyPr wrap="square" lIns="0" tIns="0" rIns="0" bIns="0" rtlCol="0" anchor="ctr"/>
+          <a:lstStyle/>
+          <a:p>
+            <a:pPr algn="r" indent="0" marL="0">
+              <a:buNone/>
+            </a:pPr>
+            <a:r>
+              <a:rPr lang="en-US" sz="900" dirty="0">
+                <a:solidFill>
+                  <a:srgbClr val="5F7181"/>
+                </a:solidFill>
+                <a:latin typeface="Aptos" pitchFamily="34" charset="0"/>
+                <a:ea typeface="Aptos" pitchFamily="34" charset="-122"/>
+                <a:cs typeface="Aptos" pitchFamily="34" charset="-120"/>
+              </a:rPr>
+              <a:t>15</a:t>
+            </a:r>
+            <a:endParaRPr lang="en-US" sz="900" dirty="0"/>
+          </a:p>
+        </p:txBody>
+      </p:sp>
+      <p:sp>
+        <p:nvSpPr>
+          <p:cNvPr id="8" name="Shape 6"/>
           <p:cNvSpPr/>
           <p:nvPr/>
         </p:nvSpPr>
@@ -6073,7 +6290,7 @@
       </p:sp>
       <p:sp>
         <p:nvSpPr>
-          <p:cNvPr id="8" name="Text 6"/>
+          <p:cNvPr id="9" name="Text 7"/>
           <p:cNvSpPr/>
           <p:nvPr/>
         </p:nvSpPr>
@@ -6112,14 +6329,14 @@
       </p:sp>
       <p:sp>
         <p:nvSpPr>
-          <p:cNvPr id="9" name="Text 7"/>
+          <p:cNvPr id="10" name="Text 8"/>
           <p:cNvSpPr/>
           <p:nvPr/>
         </p:nvSpPr>
         <p:spPr>
           <a:xfrm>
             <a:off x="640080" y="621792"/>
-            <a:ext cx="10881360" cy="566928"/>
+            <a:ext cx="10881360" cy="713232"/>
           </a:xfrm>
           <a:prstGeom prst="rect">
             <a:avLst/>
@@ -6137,7 +6354,7 @@
               <a:buNone/>
             </a:pPr>
             <a:r>
-              <a:rPr lang="en-US" sz="2700" b="1" dirty="0">
+              <a:rPr lang="en-US" sz="3400" b="1" dirty="0">
                 <a:solidFill>
                   <a:srgbClr val="003A63"/>
                 </a:solidFill>
@@ -6147,20 +6364,20 @@
               </a:rPr>
               <a:t>Reflection Questions</a:t>
             </a:r>
-            <a:endParaRPr lang="en-US" sz="2700" dirty="0"/>
-          </a:p>
-        </p:txBody>
-      </p:sp>
-      <p:sp>
-        <p:nvSpPr>
-          <p:cNvPr id="10" name="Text 8"/>
-          <p:cNvSpPr/>
-          <p:nvPr/>
-        </p:nvSpPr>
-        <p:spPr>
-          <a:xfrm>
-            <a:off x="868680" y="1417320"/>
-            <a:ext cx="6675120" cy="4434840"/>
+            <a:endParaRPr lang="en-US" sz="3400" dirty="0"/>
+          </a:p>
+        </p:txBody>
+      </p:sp>
+      <p:sp>
+        <p:nvSpPr>
+          <p:cNvPr id="11" name="Text 9"/>
+          <p:cNvSpPr/>
+          <p:nvPr/>
+        </p:nvSpPr>
+        <p:spPr>
+          <a:xfrm>
+            <a:off x="868680" y="1508760"/>
+            <a:ext cx="6537960" cy="4160520"/>
           </a:xfrm>
           <a:prstGeom prst="rect">
             <a:avLst/>
@@ -6175,7 +6392,7 @@
           <a:lstStyle/>
           <a:p>
             <a:r>
-              <a:rPr lang="en-US" sz="1700" dirty="0">
+              <a:rPr lang="en-US" sz="2100" dirty="0">
                 <a:solidFill>
                   <a:srgbClr val="17364A"/>
                 </a:solidFill>
@@ -6185,11 +6402,11 @@
               </a:rPr>
               <a:t>What type of generative AI output is being evaluated?</a:t>
             </a:r>
-            <a:endParaRPr lang="en-US" sz="1700" dirty="0"/>
-          </a:p>
-          <a:p>
-            <a:r>
-              <a:rPr lang="en-US" sz="1700" dirty="0">
+            <a:endParaRPr lang="en-US" sz="2100" dirty="0"/>
+          </a:p>
+          <a:p>
+            <a:r>
+              <a:rPr lang="en-US" sz="2100" dirty="0">
                 <a:solidFill>
                   <a:srgbClr val="17364A"/>
                 </a:solidFill>
@@ -6199,11 +6416,11 @@
               </a:rPr>
               <a:t>What source material should be used to verify the output?</a:t>
             </a:r>
-            <a:endParaRPr lang="en-US" sz="1700" dirty="0"/>
-          </a:p>
-          <a:p>
-            <a:r>
-              <a:rPr lang="en-US" sz="1700" dirty="0">
+            <a:endParaRPr lang="en-US" sz="2100" dirty="0"/>
+          </a:p>
+          <a:p>
+            <a:r>
+              <a:rPr lang="en-US" sz="2100" dirty="0">
                 <a:solidFill>
                   <a:srgbClr val="17364A"/>
                 </a:solidFill>
@@ -6213,13 +6430,13 @@
               </a:rPr>
               <a:t>What errors or omissions would be most harmful?</a:t>
             </a:r>
-            <a:endParaRPr lang="en-US" sz="1700" dirty="0"/>
-          </a:p>
-        </p:txBody>
-      </p:sp>
-      <p:sp>
-        <p:nvSpPr>
-          <p:cNvPr id="11" name="Shape 9"/>
+            <a:endParaRPr lang="en-US" sz="2100" dirty="0"/>
+          </a:p>
+        </p:txBody>
+      </p:sp>
+      <p:sp>
+        <p:nvSpPr>
+          <p:cNvPr id="12" name="Shape 10"/>
           <p:cNvSpPr/>
           <p:nvPr/>
         </p:nvSpPr>
@@ -6246,14 +6463,14 @@
       </p:sp>
       <p:sp>
         <p:nvSpPr>
-          <p:cNvPr id="12" name="Text 10"/>
+          <p:cNvPr id="13" name="Text 11"/>
           <p:cNvSpPr/>
           <p:nvPr/>
         </p:nvSpPr>
         <p:spPr>
           <a:xfrm>
             <a:off x="8074152" y="1563624"/>
-            <a:ext cx="2825496" cy="201168"/>
+            <a:ext cx="2825496" cy="256032"/>
           </a:xfrm>
           <a:prstGeom prst="rect">
             <a:avLst/>
@@ -6269,7 +6486,7 @@
               <a:buNone/>
             </a:pPr>
             <a:r>
-              <a:rPr lang="en-US" sz="950" b="1" dirty="0">
+              <a:rPr lang="en-US" sz="1300" b="1" dirty="0">
                 <a:solidFill>
                   <a:srgbClr val="0068B7"/>
                 </a:solidFill>
@@ -6279,20 +6496,20 @@
               </a:rPr>
               <a:t>Key idea</a:t>
             </a:r>
-            <a:endParaRPr lang="en-US" sz="950" dirty="0"/>
-          </a:p>
-        </p:txBody>
-      </p:sp>
-      <p:sp>
-        <p:nvSpPr>
-          <p:cNvPr id="13" name="Text 11"/>
-          <p:cNvSpPr/>
-          <p:nvPr/>
-        </p:nvSpPr>
-        <p:spPr>
-          <a:xfrm>
-            <a:off x="8074152" y="1856232"/>
-            <a:ext cx="2825496" cy="1261872"/>
+            <a:endParaRPr lang="en-US" sz="1300" dirty="0"/>
+          </a:p>
+        </p:txBody>
+      </p:sp>
+      <p:sp>
+        <p:nvSpPr>
+          <p:cNvPr id="14" name="Text 12"/>
+          <p:cNvSpPr/>
+          <p:nvPr/>
+        </p:nvSpPr>
+        <p:spPr>
+          <a:xfrm>
+            <a:off x="8074152" y="1920240"/>
+            <a:ext cx="2825496" cy="1188720"/>
           </a:xfrm>
           <a:prstGeom prst="rect">
             <a:avLst/>
@@ -6310,7 +6527,7 @@
               <a:buNone/>
             </a:pPr>
             <a:r>
-              <a:rPr lang="en-US" sz="1250" dirty="0">
+              <a:rPr lang="en-US" sz="1550" dirty="0">
                 <a:solidFill>
                   <a:srgbClr val="17364A"/>
                 </a:solidFill>
@@ -6320,13 +6537,13 @@
               </a:rPr>
               <a:t>What type of generative AI output is being evaluated?</a:t>
             </a:r>
-            <a:endParaRPr lang="en-US" sz="1250" dirty="0"/>
-          </a:p>
-        </p:txBody>
-      </p:sp>
-      <p:sp>
-        <p:nvSpPr>
-          <p:cNvPr id="14" name="Shape 12"/>
+            <a:endParaRPr lang="en-US" sz="1550" dirty="0"/>
+          </a:p>
+        </p:txBody>
+      </p:sp>
+      <p:sp>
+        <p:nvSpPr>
+          <p:cNvPr id="15" name="Shape 13"/>
           <p:cNvSpPr/>
           <p:nvPr/>
         </p:nvSpPr>
@@ -6353,14 +6570,14 @@
       </p:sp>
       <p:sp>
         <p:nvSpPr>
-          <p:cNvPr id="15" name="Text 13"/>
+          <p:cNvPr id="16" name="Text 14"/>
           <p:cNvSpPr/>
           <p:nvPr/>
         </p:nvSpPr>
         <p:spPr>
           <a:xfrm>
             <a:off x="8074152" y="3666744"/>
-            <a:ext cx="2825496" cy="201168"/>
+            <a:ext cx="2825496" cy="256032"/>
           </a:xfrm>
           <a:prstGeom prst="rect">
             <a:avLst/>
@@ -6376,7 +6593,7 @@
               <a:buNone/>
             </a:pPr>
             <a:r>
-              <a:rPr lang="en-US" sz="950" b="1" dirty="0">
+              <a:rPr lang="en-US" sz="1300" b="1" dirty="0">
                 <a:solidFill>
                   <a:srgbClr val="0068B7"/>
                 </a:solidFill>
@@ -6386,20 +6603,20 @@
               </a:rPr>
               <a:t>Use this for</a:t>
             </a:r>
-            <a:endParaRPr lang="en-US" sz="950" dirty="0"/>
-          </a:p>
-        </p:txBody>
-      </p:sp>
-      <p:sp>
-        <p:nvSpPr>
-          <p:cNvPr id="16" name="Text 14"/>
-          <p:cNvSpPr/>
-          <p:nvPr/>
-        </p:nvSpPr>
-        <p:spPr>
-          <a:xfrm>
-            <a:off x="8074152" y="3959352"/>
-            <a:ext cx="2825496" cy="1170432"/>
+            <a:endParaRPr lang="en-US" sz="1300" dirty="0"/>
+          </a:p>
+        </p:txBody>
+      </p:sp>
+      <p:sp>
+        <p:nvSpPr>
+          <p:cNvPr id="17" name="Text 15"/>
+          <p:cNvSpPr/>
+          <p:nvPr/>
+        </p:nvSpPr>
+        <p:spPr>
+          <a:xfrm>
+            <a:off x="8074152" y="4023360"/>
+            <a:ext cx="2825496" cy="1097280"/>
           </a:xfrm>
           <a:prstGeom prst="rect">
             <a:avLst/>
@@ -6417,7 +6634,7 @@
               <a:buNone/>
             </a:pPr>
             <a:r>
-              <a:rPr lang="en-US" sz="1250" dirty="0">
+              <a:rPr lang="en-US" sz="1550" dirty="0">
                 <a:solidFill>
                   <a:srgbClr val="17364A"/>
                 </a:solidFill>
@@ -6427,7 +6644,7 @@
               </a:rPr>
               <a:t>Connect the concept to public health decisions, safeguards, documentation, or implementation work.</a:t>
             </a:r>
-            <a:endParaRPr lang="en-US" sz="1250" dirty="0"/>
+            <a:endParaRPr lang="en-US" sz="1550" dirty="0"/>
           </a:p>
         </p:txBody>
       </p:sp>
@@ -6624,7 +6841,7 @@
                 <a:ea typeface="Aptos" pitchFamily="34" charset="-122"/>
                 <a:cs typeface="Aptos" pitchFamily="34" charset="-120"/>
               </a:rPr>
-              <a:t>© Paula Soper</a:t>
+              <a:t>Â© Paula Soper</a:t>
             </a:r>
             <a:endParaRPr lang="en-US" sz="800" dirty="0"/>
           </a:p>
@@ -6638,8 +6855,47 @@
         </p:nvSpPr>
         <p:spPr>
           <a:xfrm>
+            <a:off x="11137392" y="6510528"/>
+            <a:ext cx="411480" cy="201168"/>
+          </a:xfrm>
+          <a:prstGeom prst="rect">
+            <a:avLst/>
+          </a:prstGeom>
+          <a:noFill/>
+          <a:ln/>
+        </p:spPr>
+        <p:txBody>
+          <a:bodyPr wrap="square" lIns="0" tIns="0" rIns="0" bIns="0" rtlCol="0" anchor="ctr"/>
+          <a:lstStyle/>
+          <a:p>
+            <a:pPr algn="r" indent="0" marL="0">
+              <a:buNone/>
+            </a:pPr>
+            <a:r>
+              <a:rPr lang="en-US" sz="900" dirty="0">
+                <a:solidFill>
+                  <a:srgbClr val="5F7181"/>
+                </a:solidFill>
+                <a:latin typeface="Aptos" pitchFamily="34" charset="0"/>
+                <a:ea typeface="Aptos" pitchFamily="34" charset="-122"/>
+                <a:cs typeface="Aptos" pitchFamily="34" charset="-120"/>
+              </a:rPr>
+              <a:t>16</a:t>
+            </a:r>
+            <a:endParaRPr lang="en-US" sz="900" dirty="0"/>
+          </a:p>
+        </p:txBody>
+      </p:sp>
+      <p:sp>
+        <p:nvSpPr>
+          <p:cNvPr id="8" name="Text 6"/>
+          <p:cNvSpPr/>
+          <p:nvPr/>
+        </p:nvSpPr>
+        <p:spPr>
+          <a:xfrm>
             <a:off x="640080" y="658368"/>
-            <a:ext cx="10881360" cy="566928"/>
+            <a:ext cx="10881360" cy="713232"/>
           </a:xfrm>
           <a:prstGeom prst="rect">
             <a:avLst/>
@@ -6657,7 +6913,7 @@
               <a:buNone/>
             </a:pPr>
             <a:r>
-              <a:rPr lang="en-US" sz="2700" b="1" dirty="0">
+              <a:rPr lang="en-US" sz="3400" b="1" dirty="0">
                 <a:solidFill>
                   <a:srgbClr val="003A63"/>
                 </a:solidFill>
@@ -6667,20 +6923,20 @@
               </a:rPr>
               <a:t>Reflection Questions Continued</a:t>
             </a:r>
-            <a:endParaRPr lang="en-US" sz="2700" dirty="0"/>
-          </a:p>
-        </p:txBody>
-      </p:sp>
-      <p:sp>
-        <p:nvSpPr>
-          <p:cNvPr id="8" name="Text 6"/>
-          <p:cNvSpPr/>
-          <p:nvPr/>
-        </p:nvSpPr>
-        <p:spPr>
-          <a:xfrm>
-            <a:off x="868680" y="1417320"/>
-            <a:ext cx="6675120" cy="4434840"/>
+            <a:endParaRPr lang="en-US" sz="3400" dirty="0"/>
+          </a:p>
+        </p:txBody>
+      </p:sp>
+      <p:sp>
+        <p:nvSpPr>
+          <p:cNvPr id="9" name="Text 7"/>
+          <p:cNvSpPr/>
+          <p:nvPr/>
+        </p:nvSpPr>
+        <p:spPr>
+          <a:xfrm>
+            <a:off x="868680" y="1508760"/>
+            <a:ext cx="6537960" cy="4160520"/>
           </a:xfrm>
           <a:prstGeom prst="rect">
             <a:avLst/>
@@ -6695,7 +6951,7 @@
           <a:lstStyle/>
           <a:p>
             <a:r>
-              <a:rPr lang="en-US" sz="1700" dirty="0">
+              <a:rPr lang="en-US" sz="2100" dirty="0">
                 <a:solidFill>
                   <a:srgbClr val="17364A"/>
                 </a:solidFill>
@@ -6705,11 +6961,11 @@
               </a:rPr>
               <a:t>What review criteria are needed for equity, accessibility, language, and tone?</a:t>
             </a:r>
-            <a:endParaRPr lang="en-US" sz="1700" dirty="0"/>
-          </a:p>
-          <a:p>
-            <a:r>
-              <a:rPr lang="en-US" sz="1700" dirty="0">
+            <a:endParaRPr lang="en-US" sz="2100" dirty="0"/>
+          </a:p>
+          <a:p>
+            <a:r>
+              <a:rPr lang="en-US" sz="2100" dirty="0">
                 <a:solidFill>
                   <a:srgbClr val="17364A"/>
                 </a:solidFill>
@@ -6719,13 +6975,13 @@
               </a:rPr>
               <a:t>What documentation is required before the output can be used?</a:t>
             </a:r>
-            <a:endParaRPr lang="en-US" sz="1700" dirty="0"/>
-          </a:p>
-        </p:txBody>
-      </p:sp>
-      <p:sp>
-        <p:nvSpPr>
-          <p:cNvPr id="9" name="Shape 7"/>
+            <a:endParaRPr lang="en-US" sz="2100" dirty="0"/>
+          </a:p>
+        </p:txBody>
+      </p:sp>
+      <p:sp>
+        <p:nvSpPr>
+          <p:cNvPr id="10" name="Shape 8"/>
           <p:cNvSpPr/>
           <p:nvPr/>
         </p:nvSpPr>
@@ -6752,14 +7008,14 @@
       </p:sp>
       <p:sp>
         <p:nvSpPr>
-          <p:cNvPr id="10" name="Text 8"/>
+          <p:cNvPr id="11" name="Text 9"/>
           <p:cNvSpPr/>
           <p:nvPr/>
         </p:nvSpPr>
         <p:spPr>
           <a:xfrm>
             <a:off x="8074152" y="1563624"/>
-            <a:ext cx="2825496" cy="201168"/>
+            <a:ext cx="2825496" cy="256032"/>
           </a:xfrm>
           <a:prstGeom prst="rect">
             <a:avLst/>
@@ -6775,7 +7031,7 @@
               <a:buNone/>
             </a:pPr>
             <a:r>
-              <a:rPr lang="en-US" sz="950" b="1" dirty="0">
+              <a:rPr lang="en-US" sz="1300" b="1" dirty="0">
                 <a:solidFill>
                   <a:srgbClr val="0068B7"/>
                 </a:solidFill>
@@ -6785,20 +7041,20 @@
               </a:rPr>
               <a:t>Key idea</a:t>
             </a:r>
-            <a:endParaRPr lang="en-US" sz="950" dirty="0"/>
-          </a:p>
-        </p:txBody>
-      </p:sp>
-      <p:sp>
-        <p:nvSpPr>
-          <p:cNvPr id="11" name="Text 9"/>
-          <p:cNvSpPr/>
-          <p:nvPr/>
-        </p:nvSpPr>
-        <p:spPr>
-          <a:xfrm>
-            <a:off x="8074152" y="1856232"/>
-            <a:ext cx="2825496" cy="1261872"/>
+            <a:endParaRPr lang="en-US" sz="1300" dirty="0"/>
+          </a:p>
+        </p:txBody>
+      </p:sp>
+      <p:sp>
+        <p:nvSpPr>
+          <p:cNvPr id="12" name="Text 10"/>
+          <p:cNvSpPr/>
+          <p:nvPr/>
+        </p:nvSpPr>
+        <p:spPr>
+          <a:xfrm>
+            <a:off x="8074152" y="1920240"/>
+            <a:ext cx="2825496" cy="1188720"/>
           </a:xfrm>
           <a:prstGeom prst="rect">
             <a:avLst/>
@@ -6816,7 +7072,7 @@
               <a:buNone/>
             </a:pPr>
             <a:r>
-              <a:rPr lang="en-US" sz="1250" dirty="0">
+              <a:rPr lang="en-US" sz="1550" dirty="0">
                 <a:solidFill>
                   <a:srgbClr val="17364A"/>
                 </a:solidFill>
@@ -6826,13 +7082,13 @@
               </a:rPr>
               <a:t>What review criteria are needed for equity, accessibility, language, and tone?</a:t>
             </a:r>
-            <a:endParaRPr lang="en-US" sz="1250" dirty="0"/>
-          </a:p>
-        </p:txBody>
-      </p:sp>
-      <p:sp>
-        <p:nvSpPr>
-          <p:cNvPr id="12" name="Shape 10"/>
+            <a:endParaRPr lang="en-US" sz="1550" dirty="0"/>
+          </a:p>
+        </p:txBody>
+      </p:sp>
+      <p:sp>
+        <p:nvSpPr>
+          <p:cNvPr id="13" name="Shape 11"/>
           <p:cNvSpPr/>
           <p:nvPr/>
         </p:nvSpPr>
@@ -6859,14 +7115,14 @@
       </p:sp>
       <p:sp>
         <p:nvSpPr>
-          <p:cNvPr id="13" name="Text 11"/>
+          <p:cNvPr id="14" name="Text 12"/>
           <p:cNvSpPr/>
           <p:nvPr/>
         </p:nvSpPr>
         <p:spPr>
           <a:xfrm>
             <a:off x="8074152" y="3666744"/>
-            <a:ext cx="2825496" cy="201168"/>
+            <a:ext cx="2825496" cy="256032"/>
           </a:xfrm>
           <a:prstGeom prst="rect">
             <a:avLst/>
@@ -6882,7 +7138,7 @@
               <a:buNone/>
             </a:pPr>
             <a:r>
-              <a:rPr lang="en-US" sz="950" b="1" dirty="0">
+              <a:rPr lang="en-US" sz="1300" b="1" dirty="0">
                 <a:solidFill>
                   <a:srgbClr val="0068B7"/>
                 </a:solidFill>
@@ -6892,20 +7148,20 @@
               </a:rPr>
               <a:t>Use this for</a:t>
             </a:r>
-            <a:endParaRPr lang="en-US" sz="950" dirty="0"/>
-          </a:p>
-        </p:txBody>
-      </p:sp>
-      <p:sp>
-        <p:nvSpPr>
-          <p:cNvPr id="14" name="Text 12"/>
-          <p:cNvSpPr/>
-          <p:nvPr/>
-        </p:nvSpPr>
-        <p:spPr>
-          <a:xfrm>
-            <a:off x="8074152" y="3959352"/>
-            <a:ext cx="2825496" cy="1170432"/>
+            <a:endParaRPr lang="en-US" sz="1300" dirty="0"/>
+          </a:p>
+        </p:txBody>
+      </p:sp>
+      <p:sp>
+        <p:nvSpPr>
+          <p:cNvPr id="15" name="Text 13"/>
+          <p:cNvSpPr/>
+          <p:nvPr/>
+        </p:nvSpPr>
+        <p:spPr>
+          <a:xfrm>
+            <a:off x="8074152" y="4023360"/>
+            <a:ext cx="2825496" cy="1097280"/>
           </a:xfrm>
           <a:prstGeom prst="rect">
             <a:avLst/>
@@ -6923,7 +7179,7 @@
               <a:buNone/>
             </a:pPr>
             <a:r>
-              <a:rPr lang="en-US" sz="1250" dirty="0">
+              <a:rPr lang="en-US" sz="1550" dirty="0">
                 <a:solidFill>
                   <a:srgbClr val="17364A"/>
                 </a:solidFill>
@@ -6933,7 +7189,7 @@
               </a:rPr>
               <a:t>Connect the concept to public health decisions, safeguards, documentation, or implementation work.</a:t>
             </a:r>
-            <a:endParaRPr lang="en-US" sz="1250" dirty="0"/>
+            <a:endParaRPr lang="en-US" sz="1550" dirty="0"/>
           </a:p>
         </p:txBody>
       </p:sp>
@@ -7130,7 +7386,7 @@
                 <a:ea typeface="Aptos" pitchFamily="34" charset="-122"/>
                 <a:cs typeface="Aptos" pitchFamily="34" charset="-120"/>
               </a:rPr>
-              <a:t>© Paula Soper</a:t>
+              <a:t>Â© Paula Soper</a:t>
             </a:r>
             <a:endParaRPr lang="en-US" sz="800" dirty="0"/>
           </a:p>
@@ -7138,7 +7394,46 @@
       </p:sp>
       <p:sp>
         <p:nvSpPr>
-          <p:cNvPr id="7" name="Shape 5"/>
+          <p:cNvPr id="7" name="Text 5"/>
+          <p:cNvSpPr/>
+          <p:nvPr/>
+        </p:nvSpPr>
+        <p:spPr>
+          <a:xfrm>
+            <a:off x="11137392" y="6510528"/>
+            <a:ext cx="411480" cy="201168"/>
+          </a:xfrm>
+          <a:prstGeom prst="rect">
+            <a:avLst/>
+          </a:prstGeom>
+          <a:noFill/>
+          <a:ln/>
+        </p:spPr>
+        <p:txBody>
+          <a:bodyPr wrap="square" lIns="0" tIns="0" rIns="0" bIns="0" rtlCol="0" anchor="ctr"/>
+          <a:lstStyle/>
+          <a:p>
+            <a:pPr algn="r" indent="0" marL="0">
+              <a:buNone/>
+            </a:pPr>
+            <a:r>
+              <a:rPr lang="en-US" sz="900" dirty="0">
+                <a:solidFill>
+                  <a:srgbClr val="5F7181"/>
+                </a:solidFill>
+                <a:latin typeface="Aptos" pitchFamily="34" charset="0"/>
+                <a:ea typeface="Aptos" pitchFamily="34" charset="-122"/>
+                <a:cs typeface="Aptos" pitchFamily="34" charset="-120"/>
+              </a:rPr>
+              <a:t>17</a:t>
+            </a:r>
+            <a:endParaRPr lang="en-US" sz="900" dirty="0"/>
+          </a:p>
+        </p:txBody>
+      </p:sp>
+      <p:sp>
+        <p:nvSpPr>
+          <p:cNvPr id="8" name="Shape 6"/>
           <p:cNvSpPr/>
           <p:nvPr/>
         </p:nvSpPr>
@@ -7163,7 +7458,7 @@
       </p:sp>
       <p:sp>
         <p:nvSpPr>
-          <p:cNvPr id="8" name="Text 6"/>
+          <p:cNvPr id="9" name="Text 7"/>
           <p:cNvSpPr/>
           <p:nvPr/>
         </p:nvSpPr>
@@ -7202,14 +7497,14 @@
       </p:sp>
       <p:sp>
         <p:nvSpPr>
-          <p:cNvPr id="9" name="Text 7"/>
+          <p:cNvPr id="10" name="Text 8"/>
           <p:cNvSpPr/>
           <p:nvPr/>
         </p:nvSpPr>
         <p:spPr>
           <a:xfrm>
             <a:off x="640080" y="621792"/>
-            <a:ext cx="10881360" cy="566928"/>
+            <a:ext cx="10881360" cy="713232"/>
           </a:xfrm>
           <a:prstGeom prst="rect">
             <a:avLst/>
@@ -7227,7 +7522,7 @@
               <a:buNone/>
             </a:pPr>
             <a:r>
-              <a:rPr lang="en-US" sz="2700" b="1" dirty="0">
+              <a:rPr lang="en-US" sz="3400" b="1" dirty="0">
                 <a:solidFill>
                   <a:srgbClr val="003A63"/>
                 </a:solidFill>
@@ -7237,20 +7532,20 @@
               </a:rPr>
               <a:t>Practical Exercise</a:t>
             </a:r>
-            <a:endParaRPr lang="en-US" sz="2700" dirty="0"/>
-          </a:p>
-        </p:txBody>
-      </p:sp>
-      <p:sp>
-        <p:nvSpPr>
-          <p:cNvPr id="10" name="Text 8"/>
-          <p:cNvSpPr/>
-          <p:nvPr/>
-        </p:nvSpPr>
-        <p:spPr>
-          <a:xfrm>
-            <a:off x="868680" y="1417320"/>
-            <a:ext cx="6675120" cy="4434840"/>
+            <a:endParaRPr lang="en-US" sz="3400" dirty="0"/>
+          </a:p>
+        </p:txBody>
+      </p:sp>
+      <p:sp>
+        <p:nvSpPr>
+          <p:cNvPr id="11" name="Text 9"/>
+          <p:cNvSpPr/>
+          <p:nvPr/>
+        </p:nvSpPr>
+        <p:spPr>
+          <a:xfrm>
+            <a:off x="868680" y="1508760"/>
+            <a:ext cx="6537960" cy="4160520"/>
           </a:xfrm>
           <a:prstGeom prst="rect">
             <a:avLst/>
@@ -7265,7 +7560,7 @@
           <a:lstStyle/>
           <a:p>
             <a:r>
-              <a:rPr lang="en-US" sz="1700" dirty="0">
+              <a:rPr lang="en-US" sz="2100" dirty="0">
                 <a:solidFill>
                   <a:srgbClr val="17364A"/>
                 </a:solidFill>
@@ -7275,11 +7570,11 @@
               </a:rPr>
               <a:t>Create a generative AI output evaluation rubric for one public health use case.</a:t>
             </a:r>
-            <a:endParaRPr lang="en-US" sz="1700" dirty="0"/>
-          </a:p>
-          <a:p>
-            <a:r>
-              <a:rPr lang="en-US" sz="1700" dirty="0">
+            <a:endParaRPr lang="en-US" sz="2100" dirty="0"/>
+          </a:p>
+          <a:p>
+            <a:r>
+              <a:rPr lang="en-US" sz="2100" dirty="0">
                 <a:solidFill>
                   <a:srgbClr val="17364A"/>
                 </a:solidFill>
@@ -7287,13 +7582,13 @@
                 <a:ea typeface="Aptos" pitchFamily="34" charset="-122"/>
                 <a:cs typeface="Aptos" pitchFamily="34" charset="-120"/>
               </a:rPr>
-              <a:t>Include intended use, source verification, factuality, completeness, unsupported claims, omissions, bias, tone,.</a:t>
-            </a:r>
-            <a:endParaRPr lang="en-US" sz="1700" dirty="0"/>
-          </a:p>
-          <a:p>
-            <a:r>
-              <a:rPr lang="en-US" sz="1700" dirty="0">
+              <a:t>Include intended use, source verification, factuality, completeness, unsupported claims, omissions,.</a:t>
+            </a:r>
+            <a:endParaRPr lang="en-US" sz="2100" dirty="0"/>
+          </a:p>
+          <a:p>
+            <a:r>
+              <a:rPr lang="en-US" sz="2100" dirty="0">
                 <a:solidFill>
                   <a:srgbClr val="17364A"/>
                 </a:solidFill>
@@ -7301,15 +7596,15 @@
                 <a:ea typeface="Aptos" pitchFamily="34" charset="-122"/>
                 <a:cs typeface="Aptos" pitchFamily="34" charset="-120"/>
               </a:rPr>
-              <a:t>Then apply the rubric to a sample AI-generated output and document whether the output should be accepted, edited, rejected,.</a:t>
-            </a:r>
-            <a:endParaRPr lang="en-US" sz="1700" dirty="0"/>
-          </a:p>
-        </p:txBody>
-      </p:sp>
-      <p:sp>
-        <p:nvSpPr>
-          <p:cNvPr id="11" name="Shape 9"/>
+              <a:t>Then apply the rubric to a sample AI-generated output and document whether the output should be.</a:t>
+            </a:r>
+            <a:endParaRPr lang="en-US" sz="2100" dirty="0"/>
+          </a:p>
+        </p:txBody>
+      </p:sp>
+      <p:sp>
+        <p:nvSpPr>
+          <p:cNvPr id="12" name="Shape 10"/>
           <p:cNvSpPr/>
           <p:nvPr/>
         </p:nvSpPr>
@@ -7336,14 +7631,14 @@
       </p:sp>
       <p:sp>
         <p:nvSpPr>
-          <p:cNvPr id="12" name="Text 10"/>
+          <p:cNvPr id="13" name="Text 11"/>
           <p:cNvSpPr/>
           <p:nvPr/>
         </p:nvSpPr>
         <p:spPr>
           <a:xfrm>
             <a:off x="8074152" y="1563624"/>
-            <a:ext cx="2825496" cy="201168"/>
+            <a:ext cx="2825496" cy="256032"/>
           </a:xfrm>
           <a:prstGeom prst="rect">
             <a:avLst/>
@@ -7359,7 +7654,7 @@
               <a:buNone/>
             </a:pPr>
             <a:r>
-              <a:rPr lang="en-US" sz="950" b="1" dirty="0">
+              <a:rPr lang="en-US" sz="1300" b="1" dirty="0">
                 <a:solidFill>
                   <a:srgbClr val="0068B7"/>
                 </a:solidFill>
@@ -7369,20 +7664,20 @@
               </a:rPr>
               <a:t>Key idea</a:t>
             </a:r>
-            <a:endParaRPr lang="en-US" sz="950" dirty="0"/>
-          </a:p>
-        </p:txBody>
-      </p:sp>
-      <p:sp>
-        <p:nvSpPr>
-          <p:cNvPr id="13" name="Text 11"/>
-          <p:cNvSpPr/>
-          <p:nvPr/>
-        </p:nvSpPr>
-        <p:spPr>
-          <a:xfrm>
-            <a:off x="8074152" y="1856232"/>
-            <a:ext cx="2825496" cy="1261872"/>
+            <a:endParaRPr lang="en-US" sz="1300" dirty="0"/>
+          </a:p>
+        </p:txBody>
+      </p:sp>
+      <p:sp>
+        <p:nvSpPr>
+          <p:cNvPr id="14" name="Text 12"/>
+          <p:cNvSpPr/>
+          <p:nvPr/>
+        </p:nvSpPr>
+        <p:spPr>
+          <a:xfrm>
+            <a:off x="8074152" y="1920240"/>
+            <a:ext cx="2825496" cy="1188720"/>
           </a:xfrm>
           <a:prstGeom prst="rect">
             <a:avLst/>
@@ -7400,7 +7695,7 @@
               <a:buNone/>
             </a:pPr>
             <a:r>
-              <a:rPr lang="en-US" sz="1250" dirty="0">
+              <a:rPr lang="en-US" sz="1550" dirty="0">
                 <a:solidFill>
                   <a:srgbClr val="17364A"/>
                 </a:solidFill>
@@ -7410,13 +7705,13 @@
               </a:rPr>
               <a:t>Create a generative AI output evaluation rubric for one public health use case.</a:t>
             </a:r>
-            <a:endParaRPr lang="en-US" sz="1250" dirty="0"/>
-          </a:p>
-        </p:txBody>
-      </p:sp>
-      <p:sp>
-        <p:nvSpPr>
-          <p:cNvPr id="14" name="Shape 12"/>
+            <a:endParaRPr lang="en-US" sz="1550" dirty="0"/>
+          </a:p>
+        </p:txBody>
+      </p:sp>
+      <p:sp>
+        <p:nvSpPr>
+          <p:cNvPr id="15" name="Shape 13"/>
           <p:cNvSpPr/>
           <p:nvPr/>
         </p:nvSpPr>
@@ -7443,14 +7738,14 @@
       </p:sp>
       <p:sp>
         <p:nvSpPr>
-          <p:cNvPr id="15" name="Text 13"/>
+          <p:cNvPr id="16" name="Text 14"/>
           <p:cNvSpPr/>
           <p:nvPr/>
         </p:nvSpPr>
         <p:spPr>
           <a:xfrm>
             <a:off x="8074152" y="3666744"/>
-            <a:ext cx="2825496" cy="201168"/>
+            <a:ext cx="2825496" cy="256032"/>
           </a:xfrm>
           <a:prstGeom prst="rect">
             <a:avLst/>
@@ -7466,7 +7761,7 @@
               <a:buNone/>
             </a:pPr>
             <a:r>
-              <a:rPr lang="en-US" sz="950" b="1" dirty="0">
+              <a:rPr lang="en-US" sz="1300" b="1" dirty="0">
                 <a:solidFill>
                   <a:srgbClr val="0068B7"/>
                 </a:solidFill>
@@ -7476,20 +7771,20 @@
               </a:rPr>
               <a:t>Use this for</a:t>
             </a:r>
-            <a:endParaRPr lang="en-US" sz="950" dirty="0"/>
-          </a:p>
-        </p:txBody>
-      </p:sp>
-      <p:sp>
-        <p:nvSpPr>
-          <p:cNvPr id="16" name="Text 14"/>
-          <p:cNvSpPr/>
-          <p:nvPr/>
-        </p:nvSpPr>
-        <p:spPr>
-          <a:xfrm>
-            <a:off x="8074152" y="3959352"/>
-            <a:ext cx="2825496" cy="1170432"/>
+            <a:endParaRPr lang="en-US" sz="1300" dirty="0"/>
+          </a:p>
+        </p:txBody>
+      </p:sp>
+      <p:sp>
+        <p:nvSpPr>
+          <p:cNvPr id="17" name="Text 15"/>
+          <p:cNvSpPr/>
+          <p:nvPr/>
+        </p:nvSpPr>
+        <p:spPr>
+          <a:xfrm>
+            <a:off x="8074152" y="4023360"/>
+            <a:ext cx="2825496" cy="1097280"/>
           </a:xfrm>
           <a:prstGeom prst="rect">
             <a:avLst/>
@@ -7507,7 +7802,7 @@
               <a:buNone/>
             </a:pPr>
             <a:r>
-              <a:rPr lang="en-US" sz="1250" dirty="0">
+              <a:rPr lang="en-US" sz="1550" dirty="0">
                 <a:solidFill>
                   <a:srgbClr val="17364A"/>
                 </a:solidFill>
@@ -7517,7 +7812,7 @@
               </a:rPr>
               <a:t>Connect the concept to public health decisions, safeguards, documentation, or implementation work.</a:t>
             </a:r>
-            <a:endParaRPr lang="en-US" sz="1250" dirty="0"/>
+            <a:endParaRPr lang="en-US" sz="1550" dirty="0"/>
           </a:p>
         </p:txBody>
       </p:sp>
@@ -7714,7 +8009,7 @@
                 <a:ea typeface="Aptos" pitchFamily="34" charset="-122"/>
                 <a:cs typeface="Aptos" pitchFamily="34" charset="-120"/>
               </a:rPr>
-              <a:t>© Paula Soper</a:t>
+              <a:t>Â© Paula Soper</a:t>
             </a:r>
             <a:endParaRPr lang="en-US" sz="800" dirty="0"/>
           </a:p>
@@ -7722,7 +8017,46 @@
       </p:sp>
       <p:sp>
         <p:nvSpPr>
-          <p:cNvPr id="7" name="Shape 5"/>
+          <p:cNvPr id="7" name="Text 5"/>
+          <p:cNvSpPr/>
+          <p:nvPr/>
+        </p:nvSpPr>
+        <p:spPr>
+          <a:xfrm>
+            <a:off x="11137392" y="6510528"/>
+            <a:ext cx="411480" cy="201168"/>
+          </a:xfrm>
+          <a:prstGeom prst="rect">
+            <a:avLst/>
+          </a:prstGeom>
+          <a:noFill/>
+          <a:ln/>
+        </p:spPr>
+        <p:txBody>
+          <a:bodyPr wrap="square" lIns="0" tIns="0" rIns="0" bIns="0" rtlCol="0" anchor="ctr"/>
+          <a:lstStyle/>
+          <a:p>
+            <a:pPr algn="r" indent="0" marL="0">
+              <a:buNone/>
+            </a:pPr>
+            <a:r>
+              <a:rPr lang="en-US" sz="900" dirty="0">
+                <a:solidFill>
+                  <a:srgbClr val="5F7181"/>
+                </a:solidFill>
+                <a:latin typeface="Aptos" pitchFamily="34" charset="0"/>
+                <a:ea typeface="Aptos" pitchFamily="34" charset="-122"/>
+                <a:cs typeface="Aptos" pitchFamily="34" charset="-120"/>
+              </a:rPr>
+              <a:t>18</a:t>
+            </a:r>
+            <a:endParaRPr lang="en-US" sz="900" dirty="0"/>
+          </a:p>
+        </p:txBody>
+      </p:sp>
+      <p:sp>
+        <p:nvSpPr>
+          <p:cNvPr id="8" name="Shape 6"/>
           <p:cNvSpPr/>
           <p:nvPr/>
         </p:nvSpPr>
@@ -7747,7 +8081,7 @@
       </p:sp>
       <p:sp>
         <p:nvSpPr>
-          <p:cNvPr id="8" name="Text 6"/>
+          <p:cNvPr id="9" name="Text 7"/>
           <p:cNvSpPr/>
           <p:nvPr/>
         </p:nvSpPr>
@@ -7786,14 +8120,14 @@
       </p:sp>
       <p:sp>
         <p:nvSpPr>
-          <p:cNvPr id="9" name="Text 7"/>
+          <p:cNvPr id="10" name="Text 8"/>
           <p:cNvSpPr/>
           <p:nvPr/>
         </p:nvSpPr>
         <p:spPr>
           <a:xfrm>
             <a:off x="640080" y="621792"/>
-            <a:ext cx="10881360" cy="566928"/>
+            <a:ext cx="10881360" cy="713232"/>
           </a:xfrm>
           <a:prstGeom prst="rect">
             <a:avLst/>
@@ -7811,7 +8145,7 @@
               <a:buNone/>
             </a:pPr>
             <a:r>
-              <a:rPr lang="en-US" sz="2700" b="1" dirty="0">
+              <a:rPr lang="en-US" sz="3400" b="1" dirty="0">
                 <a:solidFill>
                   <a:srgbClr val="003A63"/>
                 </a:solidFill>
@@ -7821,20 +8155,20 @@
               </a:rPr>
               <a:t>Expected Artifact or Evidence</a:t>
             </a:r>
-            <a:endParaRPr lang="en-US" sz="2700" dirty="0"/>
-          </a:p>
-        </p:txBody>
-      </p:sp>
-      <p:sp>
-        <p:nvSpPr>
-          <p:cNvPr id="10" name="Text 8"/>
-          <p:cNvSpPr/>
-          <p:nvPr/>
-        </p:nvSpPr>
-        <p:spPr>
-          <a:xfrm>
-            <a:off x="868680" y="1417320"/>
-            <a:ext cx="6675120" cy="4434840"/>
+            <a:endParaRPr lang="en-US" sz="3400" dirty="0"/>
+          </a:p>
+        </p:txBody>
+      </p:sp>
+      <p:sp>
+        <p:nvSpPr>
+          <p:cNvPr id="11" name="Text 9"/>
+          <p:cNvSpPr/>
+          <p:nvPr/>
+        </p:nvSpPr>
+        <p:spPr>
+          <a:xfrm>
+            <a:off x="868680" y="1508760"/>
+            <a:ext cx="6537960" cy="4160520"/>
           </a:xfrm>
           <a:prstGeom prst="rect">
             <a:avLst/>
@@ -7849,7 +8183,7 @@
           <a:lstStyle/>
           <a:p>
             <a:r>
-              <a:rPr lang="en-US" sz="1700" dirty="0">
+              <a:rPr lang="en-US" sz="2100" dirty="0">
                 <a:solidFill>
                   <a:srgbClr val="17364A"/>
                 </a:solidFill>
@@ -7859,11 +8193,11 @@
               </a:rPr>
               <a:t>Generative AI output evaluation rubric</a:t>
             </a:r>
-            <a:endParaRPr lang="en-US" sz="1700" dirty="0"/>
-          </a:p>
-          <a:p>
-            <a:r>
-              <a:rPr lang="en-US" sz="1700" dirty="0">
+            <a:endParaRPr lang="en-US" sz="2100" dirty="0"/>
+          </a:p>
+          <a:p>
+            <a:r>
+              <a:rPr lang="en-US" sz="2100" dirty="0">
                 <a:solidFill>
                   <a:srgbClr val="17364A"/>
                 </a:solidFill>
@@ -7873,11 +8207,11 @@
               </a:rPr>
               <a:t>Completed sample review</a:t>
             </a:r>
-            <a:endParaRPr lang="en-US" sz="1700" dirty="0"/>
-          </a:p>
-          <a:p>
-            <a:r>
-              <a:rPr lang="en-US" sz="1700" dirty="0">
+            <a:endParaRPr lang="en-US" sz="2100" dirty="0"/>
+          </a:p>
+          <a:p>
+            <a:r>
+              <a:rPr lang="en-US" sz="2100" dirty="0">
                 <a:solidFill>
                   <a:srgbClr val="17364A"/>
                 </a:solidFill>
@@ -7887,13 +8221,13 @@
               </a:rPr>
               <a:t>Source verification notes</a:t>
             </a:r>
-            <a:endParaRPr lang="en-US" sz="1700" dirty="0"/>
-          </a:p>
-        </p:txBody>
-      </p:sp>
-      <p:sp>
-        <p:nvSpPr>
-          <p:cNvPr id="11" name="Shape 9"/>
+            <a:endParaRPr lang="en-US" sz="2100" dirty="0"/>
+          </a:p>
+        </p:txBody>
+      </p:sp>
+      <p:sp>
+        <p:nvSpPr>
+          <p:cNvPr id="12" name="Shape 10"/>
           <p:cNvSpPr/>
           <p:nvPr/>
         </p:nvSpPr>
@@ -7920,14 +8254,14 @@
       </p:sp>
       <p:sp>
         <p:nvSpPr>
-          <p:cNvPr id="12" name="Text 10"/>
+          <p:cNvPr id="13" name="Text 11"/>
           <p:cNvSpPr/>
           <p:nvPr/>
         </p:nvSpPr>
         <p:spPr>
           <a:xfrm>
             <a:off x="8074152" y="1563624"/>
-            <a:ext cx="2825496" cy="201168"/>
+            <a:ext cx="2825496" cy="256032"/>
           </a:xfrm>
           <a:prstGeom prst="rect">
             <a:avLst/>
@@ -7943,7 +8277,7 @@
               <a:buNone/>
             </a:pPr>
             <a:r>
-              <a:rPr lang="en-US" sz="950" b="1" dirty="0">
+              <a:rPr lang="en-US" sz="1300" b="1" dirty="0">
                 <a:solidFill>
                   <a:srgbClr val="0068B7"/>
                 </a:solidFill>
@@ -7953,20 +8287,20 @@
               </a:rPr>
               <a:t>Key idea</a:t>
             </a:r>
-            <a:endParaRPr lang="en-US" sz="950" dirty="0"/>
-          </a:p>
-        </p:txBody>
-      </p:sp>
-      <p:sp>
-        <p:nvSpPr>
-          <p:cNvPr id="13" name="Text 11"/>
-          <p:cNvSpPr/>
-          <p:nvPr/>
-        </p:nvSpPr>
-        <p:spPr>
-          <a:xfrm>
-            <a:off x="8074152" y="1856232"/>
-            <a:ext cx="2825496" cy="1261872"/>
+            <a:endParaRPr lang="en-US" sz="1300" dirty="0"/>
+          </a:p>
+        </p:txBody>
+      </p:sp>
+      <p:sp>
+        <p:nvSpPr>
+          <p:cNvPr id="14" name="Text 12"/>
+          <p:cNvSpPr/>
+          <p:nvPr/>
+        </p:nvSpPr>
+        <p:spPr>
+          <a:xfrm>
+            <a:off x="8074152" y="1920240"/>
+            <a:ext cx="2825496" cy="1188720"/>
           </a:xfrm>
           <a:prstGeom prst="rect">
             <a:avLst/>
@@ -7984,7 +8318,7 @@
               <a:buNone/>
             </a:pPr>
             <a:r>
-              <a:rPr lang="en-US" sz="1250" dirty="0">
+              <a:rPr lang="en-US" sz="1550" dirty="0">
                 <a:solidFill>
                   <a:srgbClr val="17364A"/>
                 </a:solidFill>
@@ -7994,13 +8328,13 @@
               </a:rPr>
               <a:t>Generative AI output evaluation rubric</a:t>
             </a:r>
-            <a:endParaRPr lang="en-US" sz="1250" dirty="0"/>
-          </a:p>
-        </p:txBody>
-      </p:sp>
-      <p:sp>
-        <p:nvSpPr>
-          <p:cNvPr id="14" name="Shape 12"/>
+            <a:endParaRPr lang="en-US" sz="1550" dirty="0"/>
+          </a:p>
+        </p:txBody>
+      </p:sp>
+      <p:sp>
+        <p:nvSpPr>
+          <p:cNvPr id="15" name="Shape 13"/>
           <p:cNvSpPr/>
           <p:nvPr/>
         </p:nvSpPr>
@@ -8027,14 +8361,14 @@
       </p:sp>
       <p:sp>
         <p:nvSpPr>
-          <p:cNvPr id="15" name="Text 13"/>
+          <p:cNvPr id="16" name="Text 14"/>
           <p:cNvSpPr/>
           <p:nvPr/>
         </p:nvSpPr>
         <p:spPr>
           <a:xfrm>
             <a:off x="8074152" y="3666744"/>
-            <a:ext cx="2825496" cy="201168"/>
+            <a:ext cx="2825496" cy="256032"/>
           </a:xfrm>
           <a:prstGeom prst="rect">
             <a:avLst/>
@@ -8050,7 +8384,7 @@
               <a:buNone/>
             </a:pPr>
             <a:r>
-              <a:rPr lang="en-US" sz="950" b="1" dirty="0">
+              <a:rPr lang="en-US" sz="1300" b="1" dirty="0">
                 <a:solidFill>
                   <a:srgbClr val="0068B7"/>
                 </a:solidFill>
@@ -8060,20 +8394,20 @@
               </a:rPr>
               <a:t>Use this for</a:t>
             </a:r>
-            <a:endParaRPr lang="en-US" sz="950" dirty="0"/>
-          </a:p>
-        </p:txBody>
-      </p:sp>
-      <p:sp>
-        <p:nvSpPr>
-          <p:cNvPr id="16" name="Text 14"/>
-          <p:cNvSpPr/>
-          <p:nvPr/>
-        </p:nvSpPr>
-        <p:spPr>
-          <a:xfrm>
-            <a:off x="8074152" y="3959352"/>
-            <a:ext cx="2825496" cy="1170432"/>
+            <a:endParaRPr lang="en-US" sz="1300" dirty="0"/>
+          </a:p>
+        </p:txBody>
+      </p:sp>
+      <p:sp>
+        <p:nvSpPr>
+          <p:cNvPr id="17" name="Text 15"/>
+          <p:cNvSpPr/>
+          <p:nvPr/>
+        </p:nvSpPr>
+        <p:spPr>
+          <a:xfrm>
+            <a:off x="8074152" y="4023360"/>
+            <a:ext cx="2825496" cy="1097280"/>
           </a:xfrm>
           <a:prstGeom prst="rect">
             <a:avLst/>
@@ -8091,7 +8425,7 @@
               <a:buNone/>
             </a:pPr>
             <a:r>
-              <a:rPr lang="en-US" sz="1250" dirty="0">
+              <a:rPr lang="en-US" sz="1550" dirty="0">
                 <a:solidFill>
                   <a:srgbClr val="17364A"/>
                 </a:solidFill>
@@ -8101,7 +8435,7 @@
               </a:rPr>
               <a:t>Connect the concept to public health decisions, safeguards, documentation, or implementation work.</a:t>
             </a:r>
-            <a:endParaRPr lang="en-US" sz="1250" dirty="0"/>
+            <a:endParaRPr lang="en-US" sz="1550" dirty="0"/>
           </a:p>
         </p:txBody>
       </p:sp>
@@ -8298,7 +8632,7 @@
                 <a:ea typeface="Aptos" pitchFamily="34" charset="-122"/>
                 <a:cs typeface="Aptos" pitchFamily="34" charset="-120"/>
               </a:rPr>
-              <a:t>© Paula Soper</a:t>
+              <a:t>Â© Paula Soper</a:t>
             </a:r>
             <a:endParaRPr lang="en-US" sz="800" dirty="0"/>
           </a:p>
@@ -8312,8 +8646,47 @@
         </p:nvSpPr>
         <p:spPr>
           <a:xfrm>
+            <a:off x="11137392" y="6510528"/>
+            <a:ext cx="411480" cy="201168"/>
+          </a:xfrm>
+          <a:prstGeom prst="rect">
+            <a:avLst/>
+          </a:prstGeom>
+          <a:noFill/>
+          <a:ln/>
+        </p:spPr>
+        <p:txBody>
+          <a:bodyPr wrap="square" lIns="0" tIns="0" rIns="0" bIns="0" rtlCol="0" anchor="ctr"/>
+          <a:lstStyle/>
+          <a:p>
+            <a:pPr algn="r" indent="0" marL="0">
+              <a:buNone/>
+            </a:pPr>
+            <a:r>
+              <a:rPr lang="en-US" sz="900" dirty="0">
+                <a:solidFill>
+                  <a:srgbClr val="5F7181"/>
+                </a:solidFill>
+                <a:latin typeface="Aptos" pitchFamily="34" charset="0"/>
+                <a:ea typeface="Aptos" pitchFamily="34" charset="-122"/>
+                <a:cs typeface="Aptos" pitchFamily="34" charset="-120"/>
+              </a:rPr>
+              <a:t>19</a:t>
+            </a:r>
+            <a:endParaRPr lang="en-US" sz="900" dirty="0"/>
+          </a:p>
+        </p:txBody>
+      </p:sp>
+      <p:sp>
+        <p:nvSpPr>
+          <p:cNvPr id="8" name="Text 6"/>
+          <p:cNvSpPr/>
+          <p:nvPr/>
+        </p:nvSpPr>
+        <p:spPr>
+          <a:xfrm>
             <a:off x="640080" y="658368"/>
-            <a:ext cx="10881360" cy="566928"/>
+            <a:ext cx="10881360" cy="713232"/>
           </a:xfrm>
           <a:prstGeom prst="rect">
             <a:avLst/>
@@ -8331,7 +8704,7 @@
               <a:buNone/>
             </a:pPr>
             <a:r>
-              <a:rPr lang="en-US" sz="2700" b="1" dirty="0">
+              <a:rPr lang="en-US" sz="3400" b="1" dirty="0">
                 <a:solidFill>
                   <a:srgbClr val="003A63"/>
                 </a:solidFill>
@@ -8341,20 +8714,20 @@
               </a:rPr>
               <a:t>Expected Artifact or Evidence Continued</a:t>
             </a:r>
-            <a:endParaRPr lang="en-US" sz="2700" dirty="0"/>
-          </a:p>
-        </p:txBody>
-      </p:sp>
-      <p:sp>
-        <p:nvSpPr>
-          <p:cNvPr id="8" name="Text 6"/>
-          <p:cNvSpPr/>
-          <p:nvPr/>
-        </p:nvSpPr>
-        <p:spPr>
-          <a:xfrm>
-            <a:off x="868680" y="1417320"/>
-            <a:ext cx="6675120" cy="4434840"/>
+            <a:endParaRPr lang="en-US" sz="3400" dirty="0"/>
+          </a:p>
+        </p:txBody>
+      </p:sp>
+      <p:sp>
+        <p:nvSpPr>
+          <p:cNvPr id="9" name="Text 7"/>
+          <p:cNvSpPr/>
+          <p:nvPr/>
+        </p:nvSpPr>
+        <p:spPr>
+          <a:xfrm>
+            <a:off x="868680" y="1508760"/>
+            <a:ext cx="6537960" cy="4160520"/>
           </a:xfrm>
           <a:prstGeom prst="rect">
             <a:avLst/>
@@ -8369,7 +8742,7 @@
           <a:lstStyle/>
           <a:p>
             <a:r>
-              <a:rPr lang="en-US" sz="1700" dirty="0">
+              <a:rPr lang="en-US" sz="2100" dirty="0">
                 <a:solidFill>
                   <a:srgbClr val="17364A"/>
                 </a:solidFill>
@@ -8379,13 +8752,13 @@
               </a:rPr>
               <a:t>Approval or escalation documentation</a:t>
             </a:r>
-            <a:endParaRPr lang="en-US" sz="1700" dirty="0"/>
-          </a:p>
-        </p:txBody>
-      </p:sp>
-      <p:sp>
-        <p:nvSpPr>
-          <p:cNvPr id="9" name="Shape 7"/>
+            <a:endParaRPr lang="en-US" sz="2100" dirty="0"/>
+          </a:p>
+        </p:txBody>
+      </p:sp>
+      <p:sp>
+        <p:nvSpPr>
+          <p:cNvPr id="10" name="Shape 8"/>
           <p:cNvSpPr/>
           <p:nvPr/>
         </p:nvSpPr>
@@ -8412,14 +8785,14 @@
       </p:sp>
       <p:sp>
         <p:nvSpPr>
-          <p:cNvPr id="10" name="Text 8"/>
+          <p:cNvPr id="11" name="Text 9"/>
           <p:cNvSpPr/>
           <p:nvPr/>
         </p:nvSpPr>
         <p:spPr>
           <a:xfrm>
             <a:off x="8074152" y="1563624"/>
-            <a:ext cx="2825496" cy="201168"/>
+            <a:ext cx="2825496" cy="256032"/>
           </a:xfrm>
           <a:prstGeom prst="rect">
             <a:avLst/>
@@ -8435,7 +8808,7 @@
               <a:buNone/>
             </a:pPr>
             <a:r>
-              <a:rPr lang="en-US" sz="950" b="1" dirty="0">
+              <a:rPr lang="en-US" sz="1300" b="1" dirty="0">
                 <a:solidFill>
                   <a:srgbClr val="0068B7"/>
                 </a:solidFill>
@@ -8445,20 +8818,20 @@
               </a:rPr>
               <a:t>Key idea</a:t>
             </a:r>
-            <a:endParaRPr lang="en-US" sz="950" dirty="0"/>
-          </a:p>
-        </p:txBody>
-      </p:sp>
-      <p:sp>
-        <p:nvSpPr>
-          <p:cNvPr id="11" name="Text 9"/>
-          <p:cNvSpPr/>
-          <p:nvPr/>
-        </p:nvSpPr>
-        <p:spPr>
-          <a:xfrm>
-            <a:off x="8074152" y="1856232"/>
-            <a:ext cx="2825496" cy="1261872"/>
+            <a:endParaRPr lang="en-US" sz="1300" dirty="0"/>
+          </a:p>
+        </p:txBody>
+      </p:sp>
+      <p:sp>
+        <p:nvSpPr>
+          <p:cNvPr id="12" name="Text 10"/>
+          <p:cNvSpPr/>
+          <p:nvPr/>
+        </p:nvSpPr>
+        <p:spPr>
+          <a:xfrm>
+            <a:off x="8074152" y="1920240"/>
+            <a:ext cx="2825496" cy="1188720"/>
           </a:xfrm>
           <a:prstGeom prst="rect">
             <a:avLst/>
@@ -8476,7 +8849,7 @@
               <a:buNone/>
             </a:pPr>
             <a:r>
-              <a:rPr lang="en-US" sz="1250" dirty="0">
+              <a:rPr lang="en-US" sz="1550" dirty="0">
                 <a:solidFill>
                   <a:srgbClr val="17364A"/>
                 </a:solidFill>
@@ -8486,13 +8859,13 @@
               </a:rPr>
               <a:t>Approval or escalation documentation</a:t>
             </a:r>
-            <a:endParaRPr lang="en-US" sz="1250" dirty="0"/>
-          </a:p>
-        </p:txBody>
-      </p:sp>
-      <p:sp>
-        <p:nvSpPr>
-          <p:cNvPr id="12" name="Shape 10"/>
+            <a:endParaRPr lang="en-US" sz="1550" dirty="0"/>
+          </a:p>
+        </p:txBody>
+      </p:sp>
+      <p:sp>
+        <p:nvSpPr>
+          <p:cNvPr id="13" name="Shape 11"/>
           <p:cNvSpPr/>
           <p:nvPr/>
         </p:nvSpPr>
@@ -8519,14 +8892,14 @@
       </p:sp>
       <p:sp>
         <p:nvSpPr>
-          <p:cNvPr id="13" name="Text 11"/>
+          <p:cNvPr id="14" name="Text 12"/>
           <p:cNvSpPr/>
           <p:nvPr/>
         </p:nvSpPr>
         <p:spPr>
           <a:xfrm>
             <a:off x="8074152" y="3666744"/>
-            <a:ext cx="2825496" cy="201168"/>
+            <a:ext cx="2825496" cy="256032"/>
           </a:xfrm>
           <a:prstGeom prst="rect">
             <a:avLst/>
@@ -8542,7 +8915,7 @@
               <a:buNone/>
             </a:pPr>
             <a:r>
-              <a:rPr lang="en-US" sz="950" b="1" dirty="0">
+              <a:rPr lang="en-US" sz="1300" b="1" dirty="0">
                 <a:solidFill>
                   <a:srgbClr val="0068B7"/>
                 </a:solidFill>
@@ -8552,20 +8925,20 @@
               </a:rPr>
               <a:t>Use this for</a:t>
             </a:r>
-            <a:endParaRPr lang="en-US" sz="950" dirty="0"/>
-          </a:p>
-        </p:txBody>
-      </p:sp>
-      <p:sp>
-        <p:nvSpPr>
-          <p:cNvPr id="14" name="Text 12"/>
-          <p:cNvSpPr/>
-          <p:nvPr/>
-        </p:nvSpPr>
-        <p:spPr>
-          <a:xfrm>
-            <a:off x="8074152" y="3959352"/>
-            <a:ext cx="2825496" cy="1170432"/>
+            <a:endParaRPr lang="en-US" sz="1300" dirty="0"/>
+          </a:p>
+        </p:txBody>
+      </p:sp>
+      <p:sp>
+        <p:nvSpPr>
+          <p:cNvPr id="15" name="Text 13"/>
+          <p:cNvSpPr/>
+          <p:nvPr/>
+        </p:nvSpPr>
+        <p:spPr>
+          <a:xfrm>
+            <a:off x="8074152" y="4023360"/>
+            <a:ext cx="2825496" cy="1097280"/>
           </a:xfrm>
           <a:prstGeom prst="rect">
             <a:avLst/>
@@ -8583,7 +8956,7 @@
               <a:buNone/>
             </a:pPr>
             <a:r>
-              <a:rPr lang="en-US" sz="1250" dirty="0">
+              <a:rPr lang="en-US" sz="1550" dirty="0">
                 <a:solidFill>
                   <a:srgbClr val="17364A"/>
                 </a:solidFill>
@@ -8593,7 +8966,7 @@
               </a:rPr>
               <a:t>Connect the concept to public health decisions, safeguards, documentation, or implementation work.</a:t>
             </a:r>
-            <a:endParaRPr lang="en-US" sz="1250" dirty="0"/>
+            <a:endParaRPr lang="en-US" sz="1550" dirty="0"/>
           </a:p>
         </p:txBody>
       </p:sp>
@@ -8790,7 +9163,7 @@
                 <a:ea typeface="Aptos" pitchFamily="34" charset="-122"/>
                 <a:cs typeface="Aptos" pitchFamily="34" charset="-120"/>
               </a:rPr>
-              <a:t>© Paula Soper</a:t>
+              <a:t>Â© Paula Soper</a:t>
             </a:r>
             <a:endParaRPr lang="en-US" sz="800" dirty="0"/>
           </a:p>
@@ -8804,8 +9177,47 @@
         </p:nvSpPr>
         <p:spPr>
           <a:xfrm>
+            <a:off x="11137392" y="6510528"/>
+            <a:ext cx="411480" cy="201168"/>
+          </a:xfrm>
+          <a:prstGeom prst="rect">
+            <a:avLst/>
+          </a:prstGeom>
+          <a:noFill/>
+          <a:ln/>
+        </p:spPr>
+        <p:txBody>
+          <a:bodyPr wrap="square" lIns="0" tIns="0" rIns="0" bIns="0" rtlCol="0" anchor="ctr"/>
+          <a:lstStyle/>
+          <a:p>
+            <a:pPr algn="r" indent="0" marL="0">
+              <a:buNone/>
+            </a:pPr>
+            <a:r>
+              <a:rPr lang="en-US" sz="900" dirty="0">
+                <a:solidFill>
+                  <a:srgbClr val="5F7181"/>
+                </a:solidFill>
+                <a:latin typeface="Aptos" pitchFamily="34" charset="0"/>
+                <a:ea typeface="Aptos" pitchFamily="34" charset="-122"/>
+                <a:cs typeface="Aptos" pitchFamily="34" charset="-120"/>
+              </a:rPr>
+              <a:t>2</a:t>
+            </a:r>
+            <a:endParaRPr lang="en-US" sz="900" dirty="0"/>
+          </a:p>
+        </p:txBody>
+      </p:sp>
+      <p:sp>
+        <p:nvSpPr>
+          <p:cNvPr id="8" name="Text 6"/>
+          <p:cNvSpPr/>
+          <p:nvPr/>
+        </p:nvSpPr>
+        <p:spPr>
+          <a:xfrm>
             <a:off x="640080" y="658368"/>
-            <a:ext cx="10881360" cy="566928"/>
+            <a:ext cx="10881360" cy="713232"/>
           </a:xfrm>
           <a:prstGeom prst="rect">
             <a:avLst/>
@@ -8823,7 +9235,7 @@
               <a:buNone/>
             </a:pPr>
             <a:r>
-              <a:rPr lang="en-US" sz="2700" b="1" dirty="0">
+              <a:rPr lang="en-US" sz="3400" b="1" dirty="0">
                 <a:solidFill>
                   <a:srgbClr val="003A63"/>
                 </a:solidFill>
@@ -8833,20 +9245,20 @@
               </a:rPr>
               <a:t>What this module helps you do</a:t>
             </a:r>
-            <a:endParaRPr lang="en-US" sz="2700" dirty="0"/>
-          </a:p>
-        </p:txBody>
-      </p:sp>
-      <p:sp>
-        <p:nvSpPr>
-          <p:cNvPr id="8" name="Text 6"/>
-          <p:cNvSpPr/>
-          <p:nvPr/>
-        </p:nvSpPr>
-        <p:spPr>
-          <a:xfrm>
-            <a:off x="868680" y="1417320"/>
-            <a:ext cx="6675120" cy="3291840"/>
+            <a:endParaRPr lang="en-US" sz="3400" dirty="0"/>
+          </a:p>
+        </p:txBody>
+      </p:sp>
+      <p:sp>
+        <p:nvSpPr>
+          <p:cNvPr id="9" name="Text 7"/>
+          <p:cNvSpPr/>
+          <p:nvPr/>
+        </p:nvSpPr>
+        <p:spPr>
+          <a:xfrm>
+            <a:off x="868680" y="1508760"/>
+            <a:ext cx="6446520" cy="2926080"/>
           </a:xfrm>
           <a:prstGeom prst="rect">
             <a:avLst/>
@@ -8861,7 +9273,7 @@
           <a:lstStyle/>
           <a:p>
             <a:r>
-              <a:rPr lang="en-US" sz="1700" dirty="0">
+              <a:rPr lang="en-US" sz="2100" dirty="0">
                 <a:solidFill>
                   <a:srgbClr val="17364A"/>
                 </a:solidFill>
@@ -8869,13 +9281,13 @@
                 <a:ea typeface="Aptos" pitchFamily="34" charset="-122"/>
                 <a:cs typeface="Aptos" pitchFamily="34" charset="-120"/>
               </a:rPr>
-              <a:t>Generative AI can draft, summarize, translate, classify, explain, and synthesize information, but its outputs require careful evaluation.</a:t>
-            </a:r>
-            <a:endParaRPr lang="en-US" sz="1700" dirty="0"/>
-          </a:p>
-          <a:p>
-            <a:r>
-              <a:rPr lang="en-US" sz="1700" dirty="0">
+              <a:t>Generative AI can draft, summarize, translate, classify, explain, and synthesize information, but its outputs.</a:t>
+            </a:r>
+            <a:endParaRPr lang="en-US" sz="2100" dirty="0"/>
+          </a:p>
+          <a:p>
+            <a:r>
+              <a:rPr lang="en-US" sz="2100" dirty="0">
                 <a:solidFill>
                   <a:srgbClr val="17364A"/>
                 </a:solidFill>
@@ -8883,13 +9295,13 @@
                 <a:ea typeface="Aptos" pitchFamily="34" charset="-122"/>
                 <a:cs typeface="Aptos" pitchFamily="34" charset="-120"/>
               </a:rPr>
-              <a:t>In public health, generated content may affect case review, public communication, policy interpretation, community trust, staff training, or.</a:t>
-            </a:r>
-            <a:endParaRPr lang="en-US" sz="1700" dirty="0"/>
-          </a:p>
-          <a:p>
-            <a:r>
-              <a:rPr lang="en-US" sz="1700" dirty="0">
+              <a:t>In public health, generated content may affect case review, public communication, policy interpretation,.</a:t>
+            </a:r>
+            <a:endParaRPr lang="en-US" sz="2100" dirty="0"/>
+          </a:p>
+          <a:p>
+            <a:r>
+              <a:rPr lang="en-US" sz="2100" dirty="0">
                 <a:solidFill>
                   <a:srgbClr val="17364A"/>
                 </a:solidFill>
@@ -8899,27 +9311,13 @@
               </a:rPr>
               <a:t>Fluent writing does not guarantee accuracy, completeness, appropriateness, or safety.</a:t>
             </a:r>
-            <a:endParaRPr lang="en-US" sz="1700" dirty="0"/>
-          </a:p>
-          <a:p>
-            <a:r>
-              <a:rPr lang="en-US" sz="1700" dirty="0">
-                <a:solidFill>
-                  <a:srgbClr val="17364A"/>
-                </a:solidFill>
-                <a:latin typeface="Aptos" pitchFamily="34" charset="0"/>
-                <a:ea typeface="Aptos" pitchFamily="34" charset="-122"/>
-                <a:cs typeface="Aptos" pitchFamily="34" charset="-120"/>
-              </a:rPr>
-              <a:t>This module teaches learners how to evaluate generative AI outputs using structured review criteria.</a:t>
-            </a:r>
-            <a:endParaRPr lang="en-US" sz="1700" dirty="0"/>
-          </a:p>
-        </p:txBody>
-      </p:sp>
-      <p:sp>
-        <p:nvSpPr>
-          <p:cNvPr id="9" name="Shape 7"/>
+            <a:endParaRPr lang="en-US" sz="2100" dirty="0"/>
+          </a:p>
+        </p:txBody>
+      </p:sp>
+      <p:sp>
+        <p:nvSpPr>
+          <p:cNvPr id="10" name="Shape 8"/>
           <p:cNvSpPr/>
           <p:nvPr/>
         </p:nvSpPr>
@@ -8946,14 +9344,14 @@
       </p:sp>
       <p:sp>
         <p:nvSpPr>
-          <p:cNvPr id="10" name="Text 8"/>
+          <p:cNvPr id="11" name="Text 9"/>
           <p:cNvSpPr/>
           <p:nvPr/>
         </p:nvSpPr>
         <p:spPr>
           <a:xfrm>
             <a:off x="8074152" y="1563624"/>
-            <a:ext cx="2825496" cy="201168"/>
+            <a:ext cx="2825496" cy="256032"/>
           </a:xfrm>
           <a:prstGeom prst="rect">
             <a:avLst/>
@@ -8969,7 +9367,7 @@
               <a:buNone/>
             </a:pPr>
             <a:r>
-              <a:rPr lang="en-US" sz="950" b="1" dirty="0">
+              <a:rPr lang="en-US" sz="1300" b="1" dirty="0">
                 <a:solidFill>
                   <a:srgbClr val="0068B7"/>
                 </a:solidFill>
@@ -8979,20 +9377,20 @@
               </a:rPr>
               <a:t>Module details</a:t>
             </a:r>
-            <a:endParaRPr lang="en-US" sz="950" dirty="0"/>
-          </a:p>
-        </p:txBody>
-      </p:sp>
-      <p:sp>
-        <p:nvSpPr>
-          <p:cNvPr id="11" name="Text 9"/>
-          <p:cNvSpPr/>
-          <p:nvPr/>
-        </p:nvSpPr>
-        <p:spPr>
-          <a:xfrm>
-            <a:off x="8074152" y="1856232"/>
-            <a:ext cx="2825496" cy="1353312"/>
+            <a:endParaRPr lang="en-US" sz="1300" dirty="0"/>
+          </a:p>
+        </p:txBody>
+      </p:sp>
+      <p:sp>
+        <p:nvSpPr>
+          <p:cNvPr id="12" name="Text 10"/>
+          <p:cNvSpPr/>
+          <p:nvPr/>
+        </p:nvSpPr>
+        <p:spPr>
+          <a:xfrm>
+            <a:off x="8074152" y="1920240"/>
+            <a:ext cx="2825496" cy="1280160"/>
           </a:xfrm>
           <a:prstGeom prst="rect">
             <a:avLst/>
@@ -9010,7 +9408,7 @@
               <a:buNone/>
             </a:pPr>
             <a:r>
-              <a:rPr lang="en-US" sz="1250" dirty="0">
+              <a:rPr lang="en-US" sz="1550" dirty="0">
                 <a:solidFill>
                   <a:srgbClr val="17364A"/>
                 </a:solidFill>
@@ -9020,14 +9418,14 @@
               </a:rPr>
               <a:t>Level: intermediate/practitioner</a:t>
             </a:r>
-            <a:endParaRPr lang="en-US" sz="1250" dirty="0"/>
+            <a:endParaRPr lang="en-US" sz="1550" dirty="0"/>
           </a:p>
           <a:p>
             <a:pPr indent="0" marL="0">
               <a:buNone/>
             </a:pPr>
             <a:r>
-              <a:rPr lang="en-US" sz="1250" dirty="0">
+              <a:rPr lang="en-US" sz="1550" dirty="0">
                 <a:solidFill>
                   <a:srgbClr val="17364A"/>
                 </a:solidFill>
@@ -9037,14 +9435,14 @@
               </a:rPr>
               <a:t>Primary track: Analytics and Modeling Track</a:t>
             </a:r>
-            <a:endParaRPr lang="en-US" sz="1250" dirty="0"/>
+            <a:endParaRPr lang="en-US" sz="1550" dirty="0"/>
           </a:p>
           <a:p>
             <a:pPr indent="0" marL="0">
               <a:buNone/>
             </a:pPr>
             <a:r>
-              <a:rPr lang="en-US" sz="1250" dirty="0">
+              <a:rPr lang="en-US" sz="1550" dirty="0">
                 <a:solidFill>
                   <a:srgbClr val="17364A"/>
                 </a:solidFill>
@@ -9054,32 +9452,32 @@
               </a:rPr>
               <a:t>Appears in tracks: analytics-modeling</a:t>
             </a:r>
-            <a:endParaRPr lang="en-US" sz="1250" dirty="0"/>
-          </a:p>
-        </p:txBody>
-      </p:sp>
-      <p:sp>
-        <p:nvSpPr>
-          <p:cNvPr id="12" name="Shape 10"/>
-          <p:cNvSpPr/>
-          <p:nvPr/>
-        </p:nvSpPr>
-        <p:spPr>
-          <a:xfrm>
-            <a:off x="7909560" y="3611880"/>
-            <a:ext cx="3154680" cy="1783080"/>
+            <a:endParaRPr lang="en-US" sz="1550" dirty="0"/>
+          </a:p>
+        </p:txBody>
+      </p:sp>
+      <p:sp>
+        <p:nvSpPr>
+          <p:cNvPr id="13" name="Shape 11"/>
+          <p:cNvSpPr/>
+          <p:nvPr/>
+        </p:nvSpPr>
+        <p:spPr>
+          <a:xfrm>
+            <a:off x="7635240" y="3730752"/>
+            <a:ext cx="1033272" cy="749808"/>
           </a:xfrm>
           <a:prstGeom prst="roundRect">
             <a:avLst>
-              <a:gd name="adj" fmla="val 6154"/>
+              <a:gd name="adj" fmla="val 14634"/>
             </a:avLst>
           </a:prstGeom>
           <a:solidFill>
-            <a:srgbClr val="EEF8ED"/>
+            <a:srgbClr val="0068B7"/>
           </a:solidFill>
           <a:ln w="12700">
             <a:solidFill>
-              <a:srgbClr val="B9D7E6"/>
+              <a:srgbClr val="0068B7"/>
             </a:solidFill>
             <a:prstDash val="solid"/>
           </a:ln>
@@ -9087,81 +9485,256 @@
       </p:sp>
       <p:sp>
         <p:nvSpPr>
-          <p:cNvPr id="13" name="Text 11"/>
-          <p:cNvSpPr/>
-          <p:nvPr/>
-        </p:nvSpPr>
-        <p:spPr>
-          <a:xfrm>
-            <a:off x="8074152" y="3758184"/>
-            <a:ext cx="2825496" cy="201168"/>
-          </a:xfrm>
-          <a:prstGeom prst="rect">
-            <a:avLst/>
-          </a:prstGeom>
-          <a:noFill/>
-          <a:ln/>
-        </p:spPr>
-        <p:txBody>
-          <a:bodyPr wrap="square" lIns="0" tIns="0" rIns="0" bIns="0" rtlCol="0" anchor="ctr"/>
-          <a:lstStyle/>
-          <a:p>
-            <a:pPr indent="0" marL="0">
-              <a:buNone/>
-            </a:pPr>
-            <a:r>
-              <a:rPr lang="en-US" sz="950" b="1" dirty="0">
-                <a:solidFill>
-                  <a:srgbClr val="0068B7"/>
-                </a:solidFill>
-                <a:latin typeface="Aptos" pitchFamily="34" charset="0"/>
-                <a:ea typeface="Aptos" pitchFamily="34" charset="-122"/>
-                <a:cs typeface="Aptos" pitchFamily="34" charset="-120"/>
-              </a:rPr>
-              <a:t>Learning approach</a:t>
-            </a:r>
-            <a:endParaRPr lang="en-US" sz="950" dirty="0"/>
-          </a:p>
-        </p:txBody>
-      </p:sp>
-      <p:sp>
-        <p:nvSpPr>
           <p:cNvPr id="14" name="Text 12"/>
           <p:cNvSpPr/>
           <p:nvPr/>
         </p:nvSpPr>
         <p:spPr>
           <a:xfrm>
-            <a:off x="8074152" y="4050792"/>
-            <a:ext cx="2825496" cy="1216152"/>
-          </a:xfrm>
-          <a:prstGeom prst="rect">
-            <a:avLst/>
-          </a:prstGeom>
-          <a:noFill/>
-          <a:ln/>
-        </p:spPr>
-        <p:txBody>
-          <a:bodyPr wrap="square" lIns="0" tIns="0" rIns="0" bIns="0" rtlCol="0" anchor="t">
+            <a:off x="7708392" y="3922776"/>
+            <a:ext cx="886968" cy="310896"/>
+          </a:xfrm>
+          <a:prstGeom prst="rect">
+            <a:avLst/>
+          </a:prstGeom>
+          <a:noFill/>
+          <a:ln/>
+        </p:spPr>
+        <p:txBody>
+          <a:bodyPr wrap="square" lIns="0" tIns="0" rIns="0" bIns="0" rtlCol="0" anchor="ctr">
             <a:normAutofit/>
           </a:bodyPr>
           <a:lstStyle/>
           <a:p>
-            <a:pPr indent="0" marL="0">
-              <a:buNone/>
-            </a:pPr>
-            <a:r>
-              <a:rPr lang="en-US" sz="1250" dirty="0">
-                <a:solidFill>
-                  <a:srgbClr val="17364A"/>
-                </a:solidFill>
-                <a:latin typeface="Aptos" pitchFamily="34" charset="0"/>
-                <a:ea typeface="Aptos" pitchFamily="34" charset="-122"/>
-                <a:cs typeface="Aptos" pitchFamily="34" charset="-120"/>
-              </a:rPr>
-              <a:t>Review the core ideas, complete the practical exercise, check your understanding, and use the related plays and tools to apply the lesson.</a:t>
-            </a:r>
-            <a:endParaRPr lang="en-US" sz="1250" dirty="0"/>
+            <a:pPr algn="ctr" indent="0" marL="0">
+              <a:buNone/>
+            </a:pPr>
+            <a:r>
+              <a:rPr lang="en-US" sz="1500" b="1" dirty="0">
+                <a:solidFill>
+                  <a:srgbClr val="FFFFFF"/>
+                </a:solidFill>
+                <a:latin typeface="Aptos" pitchFamily="34" charset="0"/>
+                <a:ea typeface="Aptos" pitchFamily="34" charset="-122"/>
+                <a:cs typeface="Aptos" pitchFamily="34" charset="-120"/>
+              </a:rPr>
+              <a:t>Learn</a:t>
+            </a:r>
+            <a:endParaRPr lang="en-US" sz="1500" dirty="0"/>
+          </a:p>
+        </p:txBody>
+      </p:sp>
+      <p:sp>
+        <p:nvSpPr>
+          <p:cNvPr id="15" name="Text 13"/>
+          <p:cNvSpPr/>
+          <p:nvPr/>
+        </p:nvSpPr>
+        <p:spPr>
+          <a:xfrm>
+            <a:off x="8695944" y="3941064"/>
+            <a:ext cx="201168" cy="256032"/>
+          </a:xfrm>
+          <a:prstGeom prst="rect">
+            <a:avLst/>
+          </a:prstGeom>
+          <a:noFill/>
+          <a:ln/>
+        </p:spPr>
+        <p:txBody>
+          <a:bodyPr wrap="square" lIns="0" tIns="0" rIns="0" bIns="0" rtlCol="0" anchor="ctr"/>
+          <a:lstStyle/>
+          <a:p>
+            <a:pPr algn="ctr" indent="0" marL="0">
+              <a:buNone/>
+            </a:pPr>
+            <a:r>
+              <a:rPr lang="en-US" sz="1800" b="1" dirty="0">
+                <a:solidFill>
+                  <a:srgbClr val="0068B7"/>
+                </a:solidFill>
+                <a:latin typeface="Aptos" pitchFamily="34" charset="0"/>
+                <a:ea typeface="Aptos" pitchFamily="34" charset="-122"/>
+                <a:cs typeface="Aptos" pitchFamily="34" charset="-120"/>
+              </a:rPr>
+              <a:t>â†’</a:t>
+            </a:r>
+            <a:endParaRPr lang="en-US" sz="1800" dirty="0"/>
+          </a:p>
+        </p:txBody>
+      </p:sp>
+      <p:sp>
+        <p:nvSpPr>
+          <p:cNvPr id="16" name="Shape 14"/>
+          <p:cNvSpPr/>
+          <p:nvPr/>
+        </p:nvSpPr>
+        <p:spPr>
+          <a:xfrm>
+            <a:off x="8924544" y="3730752"/>
+            <a:ext cx="1033272" cy="749808"/>
+          </a:xfrm>
+          <a:prstGeom prst="roundRect">
+            <a:avLst>
+              <a:gd name="adj" fmla="val 14634"/>
+            </a:avLst>
+          </a:prstGeom>
+          <a:solidFill>
+            <a:srgbClr val="2F8A28"/>
+          </a:solidFill>
+          <a:ln w="12700">
+            <a:solidFill>
+              <a:srgbClr val="2F8A28"/>
+            </a:solidFill>
+            <a:prstDash val="solid"/>
+          </a:ln>
+        </p:spPr>
+      </p:sp>
+      <p:sp>
+        <p:nvSpPr>
+          <p:cNvPr id="17" name="Text 15"/>
+          <p:cNvSpPr/>
+          <p:nvPr/>
+        </p:nvSpPr>
+        <p:spPr>
+          <a:xfrm>
+            <a:off x="8997696" y="3922776"/>
+            <a:ext cx="886968" cy="310896"/>
+          </a:xfrm>
+          <a:prstGeom prst="rect">
+            <a:avLst/>
+          </a:prstGeom>
+          <a:noFill/>
+          <a:ln/>
+        </p:spPr>
+        <p:txBody>
+          <a:bodyPr wrap="square" lIns="0" tIns="0" rIns="0" bIns="0" rtlCol="0" anchor="ctr">
+            <a:normAutofit/>
+          </a:bodyPr>
+          <a:lstStyle/>
+          <a:p>
+            <a:pPr algn="ctr" indent="0" marL="0">
+              <a:buNone/>
+            </a:pPr>
+            <a:r>
+              <a:rPr lang="en-US" sz="1500" b="1" dirty="0">
+                <a:solidFill>
+                  <a:srgbClr val="FFFFFF"/>
+                </a:solidFill>
+                <a:latin typeface="Aptos" pitchFamily="34" charset="0"/>
+                <a:ea typeface="Aptos" pitchFamily="34" charset="-122"/>
+                <a:cs typeface="Aptos" pitchFamily="34" charset="-120"/>
+              </a:rPr>
+              <a:t>Apply</a:t>
+            </a:r>
+            <a:endParaRPr lang="en-US" sz="1500" dirty="0"/>
+          </a:p>
+        </p:txBody>
+      </p:sp>
+      <p:sp>
+        <p:nvSpPr>
+          <p:cNvPr id="18" name="Text 16"/>
+          <p:cNvSpPr/>
+          <p:nvPr/>
+        </p:nvSpPr>
+        <p:spPr>
+          <a:xfrm>
+            <a:off x="9985248" y="3941064"/>
+            <a:ext cx="201168" cy="256032"/>
+          </a:xfrm>
+          <a:prstGeom prst="rect">
+            <a:avLst/>
+          </a:prstGeom>
+          <a:noFill/>
+          <a:ln/>
+        </p:spPr>
+        <p:txBody>
+          <a:bodyPr wrap="square" lIns="0" tIns="0" rIns="0" bIns="0" rtlCol="0" anchor="ctr"/>
+          <a:lstStyle/>
+          <a:p>
+            <a:pPr algn="ctr" indent="0" marL="0">
+              <a:buNone/>
+            </a:pPr>
+            <a:r>
+              <a:rPr lang="en-US" sz="1800" b="1" dirty="0">
+                <a:solidFill>
+                  <a:srgbClr val="0068B7"/>
+                </a:solidFill>
+                <a:latin typeface="Aptos" pitchFamily="34" charset="0"/>
+                <a:ea typeface="Aptos" pitchFamily="34" charset="-122"/>
+                <a:cs typeface="Aptos" pitchFamily="34" charset="-120"/>
+              </a:rPr>
+              <a:t>â†’</a:t>
+            </a:r>
+            <a:endParaRPr lang="en-US" sz="1800" dirty="0"/>
+          </a:p>
+        </p:txBody>
+      </p:sp>
+      <p:sp>
+        <p:nvSpPr>
+          <p:cNvPr id="19" name="Shape 17"/>
+          <p:cNvSpPr/>
+          <p:nvPr/>
+        </p:nvSpPr>
+        <p:spPr>
+          <a:xfrm>
+            <a:off x="10213848" y="3730752"/>
+            <a:ext cx="1033272" cy="749808"/>
+          </a:xfrm>
+          <a:prstGeom prst="roundRect">
+            <a:avLst>
+              <a:gd name="adj" fmla="val 14634"/>
+            </a:avLst>
+          </a:prstGeom>
+          <a:solidFill>
+            <a:srgbClr val="6A4CA3"/>
+          </a:solidFill>
+          <a:ln w="12700">
+            <a:solidFill>
+              <a:srgbClr val="6A4CA3"/>
+            </a:solidFill>
+            <a:prstDash val="solid"/>
+          </a:ln>
+        </p:spPr>
+      </p:sp>
+      <p:sp>
+        <p:nvSpPr>
+          <p:cNvPr id="20" name="Text 18"/>
+          <p:cNvSpPr/>
+          <p:nvPr/>
+        </p:nvSpPr>
+        <p:spPr>
+          <a:xfrm>
+            <a:off x="10287000" y="3922776"/>
+            <a:ext cx="886968" cy="310896"/>
+          </a:xfrm>
+          <a:prstGeom prst="rect">
+            <a:avLst/>
+          </a:prstGeom>
+          <a:noFill/>
+          <a:ln/>
+        </p:spPr>
+        <p:txBody>
+          <a:bodyPr wrap="square" lIns="0" tIns="0" rIns="0" bIns="0" rtlCol="0" anchor="ctr">
+            <a:normAutofit/>
+          </a:bodyPr>
+          <a:lstStyle/>
+          <a:p>
+            <a:pPr algn="ctr" indent="0" marL="0">
+              <a:buNone/>
+            </a:pPr>
+            <a:r>
+              <a:rPr lang="en-US" sz="1500" b="1" dirty="0">
+                <a:solidFill>
+                  <a:srgbClr val="FFFFFF"/>
+                </a:solidFill>
+                <a:latin typeface="Aptos" pitchFamily="34" charset="0"/>
+                <a:ea typeface="Aptos" pitchFamily="34" charset="-122"/>
+                <a:cs typeface="Aptos" pitchFamily="34" charset="-120"/>
+              </a:rPr>
+              <a:t>Document</a:t>
+            </a:r>
+            <a:endParaRPr lang="en-US" sz="1500" dirty="0"/>
           </a:p>
         </p:txBody>
       </p:sp>
@@ -9358,7 +9931,7 @@
                 <a:ea typeface="Aptos" pitchFamily="34" charset="-122"/>
                 <a:cs typeface="Aptos" pitchFamily="34" charset="-120"/>
               </a:rPr>
-              <a:t>© Paula Soper</a:t>
+              <a:t>Â© Paula Soper</a:t>
             </a:r>
             <a:endParaRPr lang="en-US" sz="800" dirty="0"/>
           </a:p>
@@ -9366,7 +9939,46 @@
       </p:sp>
       <p:sp>
         <p:nvSpPr>
-          <p:cNvPr id="7" name="Shape 5"/>
+          <p:cNvPr id="7" name="Text 5"/>
+          <p:cNvSpPr/>
+          <p:nvPr/>
+        </p:nvSpPr>
+        <p:spPr>
+          <a:xfrm>
+            <a:off x="11137392" y="6510528"/>
+            <a:ext cx="411480" cy="201168"/>
+          </a:xfrm>
+          <a:prstGeom prst="rect">
+            <a:avLst/>
+          </a:prstGeom>
+          <a:noFill/>
+          <a:ln/>
+        </p:spPr>
+        <p:txBody>
+          <a:bodyPr wrap="square" lIns="0" tIns="0" rIns="0" bIns="0" rtlCol="0" anchor="ctr"/>
+          <a:lstStyle/>
+          <a:p>
+            <a:pPr algn="r" indent="0" marL="0">
+              <a:buNone/>
+            </a:pPr>
+            <a:r>
+              <a:rPr lang="en-US" sz="900" dirty="0">
+                <a:solidFill>
+                  <a:srgbClr val="5F7181"/>
+                </a:solidFill>
+                <a:latin typeface="Aptos" pitchFamily="34" charset="0"/>
+                <a:ea typeface="Aptos" pitchFamily="34" charset="-122"/>
+                <a:cs typeface="Aptos" pitchFamily="34" charset="-120"/>
+              </a:rPr>
+              <a:t>20</a:t>
+            </a:r>
+            <a:endParaRPr lang="en-US" sz="900" dirty="0"/>
+          </a:p>
+        </p:txBody>
+      </p:sp>
+      <p:sp>
+        <p:nvSpPr>
+          <p:cNvPr id="8" name="Shape 6"/>
           <p:cNvSpPr/>
           <p:nvPr/>
         </p:nvSpPr>
@@ -9391,7 +10003,7 @@
       </p:sp>
       <p:sp>
         <p:nvSpPr>
-          <p:cNvPr id="8" name="Text 6"/>
+          <p:cNvPr id="9" name="Text 7"/>
           <p:cNvSpPr/>
           <p:nvPr/>
         </p:nvSpPr>
@@ -9430,14 +10042,14 @@
       </p:sp>
       <p:sp>
         <p:nvSpPr>
-          <p:cNvPr id="9" name="Text 7"/>
+          <p:cNvPr id="10" name="Text 8"/>
           <p:cNvSpPr/>
           <p:nvPr/>
         </p:nvSpPr>
         <p:spPr>
           <a:xfrm>
             <a:off x="640080" y="621792"/>
-            <a:ext cx="10881360" cy="566928"/>
+            <a:ext cx="10881360" cy="713232"/>
           </a:xfrm>
           <a:prstGeom prst="rect">
             <a:avLst/>
@@ -9455,7 +10067,7 @@
               <a:buNone/>
             </a:pPr>
             <a:r>
-              <a:rPr lang="en-US" sz="2700" b="1" dirty="0">
+              <a:rPr lang="en-US" sz="3400" b="1" dirty="0">
                 <a:solidFill>
                   <a:srgbClr val="003A63"/>
                 </a:solidFill>
@@ -9465,20 +10077,20 @@
               </a:rPr>
               <a:t>Expected Assignment</a:t>
             </a:r>
-            <a:endParaRPr lang="en-US" sz="2700" dirty="0"/>
-          </a:p>
-        </p:txBody>
-      </p:sp>
-      <p:sp>
-        <p:nvSpPr>
-          <p:cNvPr id="10" name="Text 8"/>
-          <p:cNvSpPr/>
-          <p:nvPr/>
-        </p:nvSpPr>
-        <p:spPr>
-          <a:xfrm>
-            <a:off x="868680" y="1417320"/>
-            <a:ext cx="6675120" cy="4434840"/>
+            <a:endParaRPr lang="en-US" sz="3400" dirty="0"/>
+          </a:p>
+        </p:txBody>
+      </p:sp>
+      <p:sp>
+        <p:nvSpPr>
+          <p:cNvPr id="11" name="Text 9"/>
+          <p:cNvSpPr/>
+          <p:nvPr/>
+        </p:nvSpPr>
+        <p:spPr>
+          <a:xfrm>
+            <a:off x="868680" y="1508760"/>
+            <a:ext cx="6537960" cy="4160520"/>
           </a:xfrm>
           <a:prstGeom prst="rect">
             <a:avLst/>
@@ -9493,7 +10105,7 @@
           <a:lstStyle/>
           <a:p>
             <a:r>
-              <a:rPr lang="en-US" sz="1700" dirty="0">
+              <a:rPr lang="en-US" sz="2100" dirty="0">
                 <a:solidFill>
                   <a:srgbClr val="17364A"/>
                 </a:solidFill>
@@ -9503,11 +10115,11 @@
               </a:rPr>
               <a:t>Generative AI output evaluation rubric</a:t>
             </a:r>
-            <a:endParaRPr lang="en-US" sz="1700" dirty="0"/>
-          </a:p>
-          <a:p>
-            <a:r>
-              <a:rPr lang="en-US" sz="1700" dirty="0">
+            <a:endParaRPr lang="en-US" sz="2100" dirty="0"/>
+          </a:p>
+          <a:p>
+            <a:r>
+              <a:rPr lang="en-US" sz="2100" dirty="0">
                 <a:solidFill>
                   <a:srgbClr val="17364A"/>
                 </a:solidFill>
@@ -9517,11 +10129,11 @@
               </a:rPr>
               <a:t>Completed sample review</a:t>
             </a:r>
-            <a:endParaRPr lang="en-US" sz="1700" dirty="0"/>
-          </a:p>
-          <a:p>
-            <a:r>
-              <a:rPr lang="en-US" sz="1700" dirty="0">
+            <a:endParaRPr lang="en-US" sz="2100" dirty="0"/>
+          </a:p>
+          <a:p>
+            <a:r>
+              <a:rPr lang="en-US" sz="2100" dirty="0">
                 <a:solidFill>
                   <a:srgbClr val="17364A"/>
                 </a:solidFill>
@@ -9531,27 +10143,13 @@
               </a:rPr>
               <a:t>Source verification notes</a:t>
             </a:r>
-            <a:endParaRPr lang="en-US" sz="1700" dirty="0"/>
-          </a:p>
-          <a:p>
-            <a:r>
-              <a:rPr lang="en-US" sz="1700" dirty="0">
-                <a:solidFill>
-                  <a:srgbClr val="17364A"/>
-                </a:solidFill>
-                <a:latin typeface="Aptos" pitchFamily="34" charset="0"/>
-                <a:ea typeface="Aptos" pitchFamily="34" charset="-122"/>
-                <a:cs typeface="Aptos" pitchFamily="34" charset="-120"/>
-              </a:rPr>
-              <a:t>Approval or escalation documentation</a:t>
-            </a:r>
-            <a:endParaRPr lang="en-US" sz="1700" dirty="0"/>
-          </a:p>
-        </p:txBody>
-      </p:sp>
-      <p:sp>
-        <p:nvSpPr>
-          <p:cNvPr id="11" name="Shape 9"/>
+            <a:endParaRPr lang="en-US" sz="2100" dirty="0"/>
+          </a:p>
+        </p:txBody>
+      </p:sp>
+      <p:sp>
+        <p:nvSpPr>
+          <p:cNvPr id="12" name="Shape 10"/>
           <p:cNvSpPr/>
           <p:nvPr/>
         </p:nvSpPr>
@@ -9578,14 +10176,14 @@
       </p:sp>
       <p:sp>
         <p:nvSpPr>
-          <p:cNvPr id="12" name="Text 10"/>
+          <p:cNvPr id="13" name="Text 11"/>
           <p:cNvSpPr/>
           <p:nvPr/>
         </p:nvSpPr>
         <p:spPr>
           <a:xfrm>
             <a:off x="8074152" y="1563624"/>
-            <a:ext cx="2825496" cy="201168"/>
+            <a:ext cx="2825496" cy="256032"/>
           </a:xfrm>
           <a:prstGeom prst="rect">
             <a:avLst/>
@@ -9601,7 +10199,7 @@
               <a:buNone/>
             </a:pPr>
             <a:r>
-              <a:rPr lang="en-US" sz="950" b="1" dirty="0">
+              <a:rPr lang="en-US" sz="1300" b="1" dirty="0">
                 <a:solidFill>
                   <a:srgbClr val="0068B7"/>
                 </a:solidFill>
@@ -9611,20 +10209,20 @@
               </a:rPr>
               <a:t>Key idea</a:t>
             </a:r>
-            <a:endParaRPr lang="en-US" sz="950" dirty="0"/>
-          </a:p>
-        </p:txBody>
-      </p:sp>
-      <p:sp>
-        <p:nvSpPr>
-          <p:cNvPr id="13" name="Text 11"/>
-          <p:cNvSpPr/>
-          <p:nvPr/>
-        </p:nvSpPr>
-        <p:spPr>
-          <a:xfrm>
-            <a:off x="8074152" y="1856232"/>
-            <a:ext cx="2825496" cy="1261872"/>
+            <a:endParaRPr lang="en-US" sz="1300" dirty="0"/>
+          </a:p>
+        </p:txBody>
+      </p:sp>
+      <p:sp>
+        <p:nvSpPr>
+          <p:cNvPr id="14" name="Text 12"/>
+          <p:cNvSpPr/>
+          <p:nvPr/>
+        </p:nvSpPr>
+        <p:spPr>
+          <a:xfrm>
+            <a:off x="8074152" y="1920240"/>
+            <a:ext cx="2825496" cy="1188720"/>
           </a:xfrm>
           <a:prstGeom prst="rect">
             <a:avLst/>
@@ -9642,7 +10240,7 @@
               <a:buNone/>
             </a:pPr>
             <a:r>
-              <a:rPr lang="en-US" sz="1250" dirty="0">
+              <a:rPr lang="en-US" sz="1550" dirty="0">
                 <a:solidFill>
                   <a:srgbClr val="17364A"/>
                 </a:solidFill>
@@ -9652,13 +10250,13 @@
               </a:rPr>
               <a:t>Generative AI output evaluation rubric</a:t>
             </a:r>
-            <a:endParaRPr lang="en-US" sz="1250" dirty="0"/>
-          </a:p>
-        </p:txBody>
-      </p:sp>
-      <p:sp>
-        <p:nvSpPr>
-          <p:cNvPr id="14" name="Shape 12"/>
+            <a:endParaRPr lang="en-US" sz="1550" dirty="0"/>
+          </a:p>
+        </p:txBody>
+      </p:sp>
+      <p:sp>
+        <p:nvSpPr>
+          <p:cNvPr id="15" name="Shape 13"/>
           <p:cNvSpPr/>
           <p:nvPr/>
         </p:nvSpPr>
@@ -9685,14 +10283,14 @@
       </p:sp>
       <p:sp>
         <p:nvSpPr>
-          <p:cNvPr id="15" name="Text 13"/>
+          <p:cNvPr id="16" name="Text 14"/>
           <p:cNvSpPr/>
           <p:nvPr/>
         </p:nvSpPr>
         <p:spPr>
           <a:xfrm>
             <a:off x="8074152" y="3666744"/>
-            <a:ext cx="2825496" cy="201168"/>
+            <a:ext cx="2825496" cy="256032"/>
           </a:xfrm>
           <a:prstGeom prst="rect">
             <a:avLst/>
@@ -9708,7 +10306,7 @@
               <a:buNone/>
             </a:pPr>
             <a:r>
-              <a:rPr lang="en-US" sz="950" b="1" dirty="0">
+              <a:rPr lang="en-US" sz="1300" b="1" dirty="0">
                 <a:solidFill>
                   <a:srgbClr val="0068B7"/>
                 </a:solidFill>
@@ -9718,20 +10316,20 @@
               </a:rPr>
               <a:t>Use this for</a:t>
             </a:r>
-            <a:endParaRPr lang="en-US" sz="950" dirty="0"/>
-          </a:p>
-        </p:txBody>
-      </p:sp>
-      <p:sp>
-        <p:nvSpPr>
-          <p:cNvPr id="16" name="Text 14"/>
-          <p:cNvSpPr/>
-          <p:nvPr/>
-        </p:nvSpPr>
-        <p:spPr>
-          <a:xfrm>
-            <a:off x="8074152" y="3959352"/>
-            <a:ext cx="2825496" cy="1170432"/>
+            <a:endParaRPr lang="en-US" sz="1300" dirty="0"/>
+          </a:p>
+        </p:txBody>
+      </p:sp>
+      <p:sp>
+        <p:nvSpPr>
+          <p:cNvPr id="17" name="Text 15"/>
+          <p:cNvSpPr/>
+          <p:nvPr/>
+        </p:nvSpPr>
+        <p:spPr>
+          <a:xfrm>
+            <a:off x="8074152" y="4023360"/>
+            <a:ext cx="2825496" cy="1097280"/>
           </a:xfrm>
           <a:prstGeom prst="rect">
             <a:avLst/>
@@ -9749,7 +10347,7 @@
               <a:buNone/>
             </a:pPr>
             <a:r>
-              <a:rPr lang="en-US" sz="1250" dirty="0">
+              <a:rPr lang="en-US" sz="1550" dirty="0">
                 <a:solidFill>
                   <a:srgbClr val="17364A"/>
                 </a:solidFill>
@@ -9759,7 +10357,7 @@
               </a:rPr>
               <a:t>Connect the concept to public health decisions, safeguards, documentation, or implementation work.</a:t>
             </a:r>
-            <a:endParaRPr lang="en-US" sz="1250" dirty="0"/>
+            <a:endParaRPr lang="en-US" sz="1550" dirty="0"/>
           </a:p>
         </p:txBody>
       </p:sp>
@@ -9956,7 +10554,7 @@
                 <a:ea typeface="Aptos" pitchFamily="34" charset="-122"/>
                 <a:cs typeface="Aptos" pitchFamily="34" charset="-120"/>
               </a:rPr>
-              <a:t>© Paula Soper</a:t>
+              <a:t>Â© Paula Soper</a:t>
             </a:r>
             <a:endParaRPr lang="en-US" sz="800" dirty="0"/>
           </a:p>
@@ -9964,7 +10562,46 @@
       </p:sp>
       <p:sp>
         <p:nvSpPr>
-          <p:cNvPr id="7" name="Shape 5"/>
+          <p:cNvPr id="7" name="Text 5"/>
+          <p:cNvSpPr/>
+          <p:nvPr/>
+        </p:nvSpPr>
+        <p:spPr>
+          <a:xfrm>
+            <a:off x="11137392" y="6510528"/>
+            <a:ext cx="411480" cy="201168"/>
+          </a:xfrm>
+          <a:prstGeom prst="rect">
+            <a:avLst/>
+          </a:prstGeom>
+          <a:noFill/>
+          <a:ln/>
+        </p:spPr>
+        <p:txBody>
+          <a:bodyPr wrap="square" lIns="0" tIns="0" rIns="0" bIns="0" rtlCol="0" anchor="ctr"/>
+          <a:lstStyle/>
+          <a:p>
+            <a:pPr algn="r" indent="0" marL="0">
+              <a:buNone/>
+            </a:pPr>
+            <a:r>
+              <a:rPr lang="en-US" sz="900" dirty="0">
+                <a:solidFill>
+                  <a:srgbClr val="5F7181"/>
+                </a:solidFill>
+                <a:latin typeface="Aptos" pitchFamily="34" charset="0"/>
+                <a:ea typeface="Aptos" pitchFamily="34" charset="-122"/>
+                <a:cs typeface="Aptos" pitchFamily="34" charset="-120"/>
+              </a:rPr>
+              <a:t>21</a:t>
+            </a:r>
+            <a:endParaRPr lang="en-US" sz="900" dirty="0"/>
+          </a:p>
+        </p:txBody>
+      </p:sp>
+      <p:sp>
+        <p:nvSpPr>
+          <p:cNvPr id="8" name="Shape 6"/>
           <p:cNvSpPr/>
           <p:nvPr/>
         </p:nvSpPr>
@@ -9989,7 +10626,7 @@
       </p:sp>
       <p:sp>
         <p:nvSpPr>
-          <p:cNvPr id="8" name="Text 6"/>
+          <p:cNvPr id="9" name="Text 7"/>
           <p:cNvSpPr/>
           <p:nvPr/>
         </p:nvSpPr>
@@ -10028,14 +10665,14 @@
       </p:sp>
       <p:sp>
         <p:nvSpPr>
-          <p:cNvPr id="9" name="Text 7"/>
+          <p:cNvPr id="10" name="Text 8"/>
           <p:cNvSpPr/>
           <p:nvPr/>
         </p:nvSpPr>
         <p:spPr>
           <a:xfrm>
             <a:off x="640080" y="621792"/>
-            <a:ext cx="10881360" cy="566928"/>
+            <a:ext cx="10881360" cy="713232"/>
           </a:xfrm>
           <a:prstGeom prst="rect">
             <a:avLst/>
@@ -10053,7 +10690,7 @@
               <a:buNone/>
             </a:pPr>
             <a:r>
-              <a:rPr lang="en-US" sz="2700" b="1" dirty="0">
+              <a:rPr lang="en-US" sz="3400" b="1" dirty="0">
                 <a:solidFill>
                   <a:srgbClr val="003A63"/>
                 </a:solidFill>
@@ -10063,20 +10700,20 @@
               </a:rPr>
               <a:t>Knowledge Check</a:t>
             </a:r>
-            <a:endParaRPr lang="en-US" sz="2700" dirty="0"/>
-          </a:p>
-        </p:txBody>
-      </p:sp>
-      <p:sp>
-        <p:nvSpPr>
-          <p:cNvPr id="10" name="Text 8"/>
-          <p:cNvSpPr/>
-          <p:nvPr/>
-        </p:nvSpPr>
-        <p:spPr>
-          <a:xfrm>
-            <a:off x="868680" y="1417320"/>
-            <a:ext cx="6675120" cy="4434840"/>
+            <a:endParaRPr lang="en-US" sz="3400" dirty="0"/>
+          </a:p>
+        </p:txBody>
+      </p:sp>
+      <p:sp>
+        <p:nvSpPr>
+          <p:cNvPr id="11" name="Text 9"/>
+          <p:cNvSpPr/>
+          <p:nvPr/>
+        </p:nvSpPr>
+        <p:spPr>
+          <a:xfrm>
+            <a:off x="868680" y="1508760"/>
+            <a:ext cx="6537960" cy="4160520"/>
           </a:xfrm>
           <a:prstGeom prst="rect">
             <a:avLst/>
@@ -10091,7 +10728,7 @@
           <a:lstStyle/>
           <a:p>
             <a:r>
-              <a:rPr lang="en-US" sz="1700" dirty="0">
+              <a:rPr lang="en-US" sz="2100" dirty="0">
                 <a:solidFill>
                   <a:srgbClr val="17364A"/>
                 </a:solidFill>
@@ -10101,11 +10738,11 @@
               </a:rPr>
               <a:t>1. Why is fluency not enough to trust a generative AI output?</a:t>
             </a:r>
-            <a:endParaRPr lang="en-US" sz="1700" dirty="0"/>
-          </a:p>
-          <a:p>
-            <a:r>
-              <a:rPr lang="en-US" sz="1700" dirty="0">
+            <a:endParaRPr lang="en-US" sz="2100" dirty="0"/>
+          </a:p>
+          <a:p>
+            <a:r>
+              <a:rPr lang="en-US" sz="2100" dirty="0">
                 <a:solidFill>
                   <a:srgbClr val="17364A"/>
                 </a:solidFill>
@@ -10115,11 +10752,11 @@
               </a:rPr>
               <a:t>2. What does grounding mean?</a:t>
             </a:r>
-            <a:endParaRPr lang="en-US" sz="1700" dirty="0"/>
-          </a:p>
-          <a:p>
-            <a:r>
-              <a:rPr lang="en-US" sz="1700" dirty="0">
+            <a:endParaRPr lang="en-US" sz="2100" dirty="0"/>
+          </a:p>
+          <a:p>
+            <a:r>
+              <a:rPr lang="en-US" sz="2100" dirty="0">
                 <a:solidFill>
                   <a:srgbClr val="17364A"/>
                 </a:solidFill>
@@ -10129,27 +10766,13 @@
               </a:rPr>
               <a:t>3. Which issue can be as harmful as an incorrect statement?</a:t>
             </a:r>
-            <a:endParaRPr lang="en-US" sz="1700" dirty="0"/>
-          </a:p>
-          <a:p>
-            <a:r>
-              <a:rPr lang="en-US" sz="1700" dirty="0">
-                <a:solidFill>
-                  <a:srgbClr val="17364A"/>
-                </a:solidFill>
-                <a:latin typeface="Aptos" pitchFamily="34" charset="0"/>
-                <a:ea typeface="Aptos" pitchFamily="34" charset="-122"/>
-                <a:cs typeface="Aptos" pitchFamily="34" charset="-120"/>
-              </a:rPr>
-              <a:t>4. What should a rubric define?</a:t>
-            </a:r>
-            <a:endParaRPr lang="en-US" sz="1700" dirty="0"/>
-          </a:p>
-        </p:txBody>
-      </p:sp>
-      <p:sp>
-        <p:nvSpPr>
-          <p:cNvPr id="11" name="Shape 9"/>
+            <a:endParaRPr lang="en-US" sz="2100" dirty="0"/>
+          </a:p>
+        </p:txBody>
+      </p:sp>
+      <p:sp>
+        <p:nvSpPr>
+          <p:cNvPr id="12" name="Shape 10"/>
           <p:cNvSpPr/>
           <p:nvPr/>
         </p:nvSpPr>
@@ -10176,14 +10799,14 @@
       </p:sp>
       <p:sp>
         <p:nvSpPr>
-          <p:cNvPr id="12" name="Text 10"/>
+          <p:cNvPr id="13" name="Text 11"/>
           <p:cNvSpPr/>
           <p:nvPr/>
         </p:nvSpPr>
         <p:spPr>
           <a:xfrm>
             <a:off x="8074152" y="1563624"/>
-            <a:ext cx="2825496" cy="201168"/>
+            <a:ext cx="2825496" cy="256032"/>
           </a:xfrm>
           <a:prstGeom prst="rect">
             <a:avLst/>
@@ -10199,7 +10822,7 @@
               <a:buNone/>
             </a:pPr>
             <a:r>
-              <a:rPr lang="en-US" sz="950" b="1" dirty="0">
+              <a:rPr lang="en-US" sz="1300" b="1" dirty="0">
                 <a:solidFill>
                   <a:srgbClr val="0068B7"/>
                 </a:solidFill>
@@ -10209,20 +10832,20 @@
               </a:rPr>
               <a:t>Key idea</a:t>
             </a:r>
-            <a:endParaRPr lang="en-US" sz="950" dirty="0"/>
-          </a:p>
-        </p:txBody>
-      </p:sp>
-      <p:sp>
-        <p:nvSpPr>
-          <p:cNvPr id="13" name="Text 11"/>
-          <p:cNvSpPr/>
-          <p:nvPr/>
-        </p:nvSpPr>
-        <p:spPr>
-          <a:xfrm>
-            <a:off x="8074152" y="1856232"/>
-            <a:ext cx="2825496" cy="1261872"/>
+            <a:endParaRPr lang="en-US" sz="1300" dirty="0"/>
+          </a:p>
+        </p:txBody>
+      </p:sp>
+      <p:sp>
+        <p:nvSpPr>
+          <p:cNvPr id="14" name="Text 12"/>
+          <p:cNvSpPr/>
+          <p:nvPr/>
+        </p:nvSpPr>
+        <p:spPr>
+          <a:xfrm>
+            <a:off x="8074152" y="1920240"/>
+            <a:ext cx="2825496" cy="1188720"/>
           </a:xfrm>
           <a:prstGeom prst="rect">
             <a:avLst/>
@@ -10240,7 +10863,7 @@
               <a:buNone/>
             </a:pPr>
             <a:r>
-              <a:rPr lang="en-US" sz="1250" dirty="0">
+              <a:rPr lang="en-US" sz="1550" dirty="0">
                 <a:solidFill>
                   <a:srgbClr val="17364A"/>
                 </a:solidFill>
@@ -10250,13 +10873,13 @@
               </a:rPr>
               <a:t>1. Why is fluency not enough to trust a generative AI output?</a:t>
             </a:r>
-            <a:endParaRPr lang="en-US" sz="1250" dirty="0"/>
-          </a:p>
-        </p:txBody>
-      </p:sp>
-      <p:sp>
-        <p:nvSpPr>
-          <p:cNvPr id="14" name="Shape 12"/>
+            <a:endParaRPr lang="en-US" sz="1550" dirty="0"/>
+          </a:p>
+        </p:txBody>
+      </p:sp>
+      <p:sp>
+        <p:nvSpPr>
+          <p:cNvPr id="15" name="Shape 13"/>
           <p:cNvSpPr/>
           <p:nvPr/>
         </p:nvSpPr>
@@ -10283,14 +10906,14 @@
       </p:sp>
       <p:sp>
         <p:nvSpPr>
-          <p:cNvPr id="15" name="Text 13"/>
+          <p:cNvPr id="16" name="Text 14"/>
           <p:cNvSpPr/>
           <p:nvPr/>
         </p:nvSpPr>
         <p:spPr>
           <a:xfrm>
             <a:off x="8074152" y="3666744"/>
-            <a:ext cx="2825496" cy="201168"/>
+            <a:ext cx="2825496" cy="256032"/>
           </a:xfrm>
           <a:prstGeom prst="rect">
             <a:avLst/>
@@ -10306,7 +10929,7 @@
               <a:buNone/>
             </a:pPr>
             <a:r>
-              <a:rPr lang="en-US" sz="950" b="1" dirty="0">
+              <a:rPr lang="en-US" sz="1300" b="1" dirty="0">
                 <a:solidFill>
                   <a:srgbClr val="0068B7"/>
                 </a:solidFill>
@@ -10316,20 +10939,20 @@
               </a:rPr>
               <a:t>Use this for</a:t>
             </a:r>
-            <a:endParaRPr lang="en-US" sz="950" dirty="0"/>
-          </a:p>
-        </p:txBody>
-      </p:sp>
-      <p:sp>
-        <p:nvSpPr>
-          <p:cNvPr id="16" name="Text 14"/>
-          <p:cNvSpPr/>
-          <p:nvPr/>
-        </p:nvSpPr>
-        <p:spPr>
-          <a:xfrm>
-            <a:off x="8074152" y="3959352"/>
-            <a:ext cx="2825496" cy="1170432"/>
+            <a:endParaRPr lang="en-US" sz="1300" dirty="0"/>
+          </a:p>
+        </p:txBody>
+      </p:sp>
+      <p:sp>
+        <p:nvSpPr>
+          <p:cNvPr id="17" name="Text 15"/>
+          <p:cNvSpPr/>
+          <p:nvPr/>
+        </p:nvSpPr>
+        <p:spPr>
+          <a:xfrm>
+            <a:off x="8074152" y="4023360"/>
+            <a:ext cx="2825496" cy="1097280"/>
           </a:xfrm>
           <a:prstGeom prst="rect">
             <a:avLst/>
@@ -10347,7 +10970,7 @@
               <a:buNone/>
             </a:pPr>
             <a:r>
-              <a:rPr lang="en-US" sz="1250" dirty="0">
+              <a:rPr lang="en-US" sz="1550" dirty="0">
                 <a:solidFill>
                   <a:srgbClr val="17364A"/>
                 </a:solidFill>
@@ -10357,7 +10980,7 @@
               </a:rPr>
               <a:t>Connect the concept to public health decisions, safeguards, documentation, or implementation work.</a:t>
             </a:r>
-            <a:endParaRPr lang="en-US" sz="1250" dirty="0"/>
+            <a:endParaRPr lang="en-US" sz="1550" dirty="0"/>
           </a:p>
         </p:txBody>
       </p:sp>
@@ -10554,7 +11177,7 @@
                 <a:ea typeface="Aptos" pitchFamily="34" charset="-122"/>
                 <a:cs typeface="Aptos" pitchFamily="34" charset="-120"/>
               </a:rPr>
-              <a:t>© Paula Soper</a:t>
+              <a:t>Â© Paula Soper</a:t>
             </a:r>
             <a:endParaRPr lang="en-US" sz="800" dirty="0"/>
           </a:p>
@@ -10562,7 +11185,46 @@
       </p:sp>
       <p:sp>
         <p:nvSpPr>
-          <p:cNvPr id="7" name="Shape 5"/>
+          <p:cNvPr id="7" name="Text 5"/>
+          <p:cNvSpPr/>
+          <p:nvPr/>
+        </p:nvSpPr>
+        <p:spPr>
+          <a:xfrm>
+            <a:off x="11137392" y="6510528"/>
+            <a:ext cx="411480" cy="201168"/>
+          </a:xfrm>
+          <a:prstGeom prst="rect">
+            <a:avLst/>
+          </a:prstGeom>
+          <a:noFill/>
+          <a:ln/>
+        </p:spPr>
+        <p:txBody>
+          <a:bodyPr wrap="square" lIns="0" tIns="0" rIns="0" bIns="0" rtlCol="0" anchor="ctr"/>
+          <a:lstStyle/>
+          <a:p>
+            <a:pPr algn="r" indent="0" marL="0">
+              <a:buNone/>
+            </a:pPr>
+            <a:r>
+              <a:rPr lang="en-US" sz="900" dirty="0">
+                <a:solidFill>
+                  <a:srgbClr val="5F7181"/>
+                </a:solidFill>
+                <a:latin typeface="Aptos" pitchFamily="34" charset="0"/>
+                <a:ea typeface="Aptos" pitchFamily="34" charset="-122"/>
+                <a:cs typeface="Aptos" pitchFamily="34" charset="-120"/>
+              </a:rPr>
+              <a:t>22</a:t>
+            </a:r>
+            <a:endParaRPr lang="en-US" sz="900" dirty="0"/>
+          </a:p>
+        </p:txBody>
+      </p:sp>
+      <p:sp>
+        <p:nvSpPr>
+          <p:cNvPr id="8" name="Shape 6"/>
           <p:cNvSpPr/>
           <p:nvPr/>
         </p:nvSpPr>
@@ -10587,7 +11249,7 @@
       </p:sp>
       <p:sp>
         <p:nvSpPr>
-          <p:cNvPr id="8" name="Text 6"/>
+          <p:cNvPr id="9" name="Text 7"/>
           <p:cNvSpPr/>
           <p:nvPr/>
         </p:nvSpPr>
@@ -10626,14 +11288,14 @@
       </p:sp>
       <p:sp>
         <p:nvSpPr>
-          <p:cNvPr id="9" name="Text 7"/>
+          <p:cNvPr id="10" name="Text 8"/>
           <p:cNvSpPr/>
           <p:nvPr/>
         </p:nvSpPr>
         <p:spPr>
           <a:xfrm>
             <a:off x="640080" y="621792"/>
-            <a:ext cx="10881360" cy="566928"/>
+            <a:ext cx="10881360" cy="713232"/>
           </a:xfrm>
           <a:prstGeom prst="rect">
             <a:avLst/>
@@ -10651,7 +11313,7 @@
               <a:buNone/>
             </a:pPr>
             <a:r>
-              <a:rPr lang="en-US" sz="2700" b="1" dirty="0">
+              <a:rPr lang="en-US" sz="3400" b="1" dirty="0">
                 <a:solidFill>
                   <a:srgbClr val="003A63"/>
                 </a:solidFill>
@@ -10661,20 +11323,20 @@
               </a:rPr>
               <a:t>References and Resources</a:t>
             </a:r>
-            <a:endParaRPr lang="en-US" sz="2700" dirty="0"/>
-          </a:p>
-        </p:txBody>
-      </p:sp>
-      <p:sp>
-        <p:nvSpPr>
-          <p:cNvPr id="10" name="Text 8"/>
-          <p:cNvSpPr/>
-          <p:nvPr/>
-        </p:nvSpPr>
-        <p:spPr>
-          <a:xfrm>
-            <a:off x="868680" y="1417320"/>
-            <a:ext cx="6675120" cy="4434840"/>
+            <a:endParaRPr lang="en-US" sz="3400" dirty="0"/>
+          </a:p>
+        </p:txBody>
+      </p:sp>
+      <p:sp>
+        <p:nvSpPr>
+          <p:cNvPr id="11" name="Text 9"/>
+          <p:cNvSpPr/>
+          <p:nvPr/>
+        </p:nvSpPr>
+        <p:spPr>
+          <a:xfrm>
+            <a:off x="868680" y="1508760"/>
+            <a:ext cx="6537960" cy="4160520"/>
           </a:xfrm>
           <a:prstGeom prst="rect">
             <a:avLst/>
@@ -10689,7 +11351,7 @@
           <a:lstStyle/>
           <a:p>
             <a:r>
-              <a:rPr lang="en-US" sz="1700" dirty="0">
+              <a:rPr lang="en-US" sz="2100" dirty="0">
                 <a:solidFill>
                   <a:srgbClr val="17364A"/>
                 </a:solidFill>
@@ -10699,11 +11361,11 @@
               </a:rPr>
               <a:t>NIST AI RMF Generative AI Profile:.</a:t>
             </a:r>
-            <a:endParaRPr lang="en-US" sz="1700" dirty="0"/>
-          </a:p>
-          <a:p>
-            <a:r>
-              <a:rPr lang="en-US" sz="1700" dirty="0">
+            <a:endParaRPr lang="en-US" sz="2100" dirty="0"/>
+          </a:p>
+          <a:p>
+            <a:r>
+              <a:rPr lang="en-US" sz="2100" dirty="0">
                 <a:solidFill>
                   <a:srgbClr val="17364A"/>
                 </a:solidFill>
@@ -10711,13 +11373,13 @@
                 <a:ea typeface="Aptos" pitchFamily="34" charset="-122"/>
                 <a:cs typeface="Aptos" pitchFamily="34" charset="-120"/>
               </a:rPr>
-              <a:t>NIST Artificial Intelligence Risk Management Framework: https://www.nist.gov/itl/ai-risk-management-framework</a:t>
-            </a:r>
-            <a:endParaRPr lang="en-US" sz="1700" dirty="0"/>
-          </a:p>
-          <a:p>
-            <a:r>
-              <a:rPr lang="en-US" sz="1700" dirty="0">
+              <a:t>NIST Artificial Intelligence Risk Management Framework:.</a:t>
+            </a:r>
+            <a:endParaRPr lang="en-US" sz="2100" dirty="0"/>
+          </a:p>
+          <a:p>
+            <a:r>
+              <a:rPr lang="en-US" sz="2100" dirty="0">
                 <a:solidFill>
                   <a:srgbClr val="17364A"/>
                 </a:solidFill>
@@ -10725,29 +11387,15 @@
                 <a:ea typeface="Aptos" pitchFamily="34" charset="-122"/>
                 <a:cs typeface="Aptos" pitchFamily="34" charset="-120"/>
               </a:rPr>
-              <a:t>OWASP Top 10 for Large Language Model Applications: https://owasp.org/www-project-top-10-for-large-language-model-applications/</a:t>
-            </a:r>
-            <a:endParaRPr lang="en-US" sz="1700" dirty="0"/>
-          </a:p>
-          <a:p>
-            <a:r>
-              <a:rPr lang="en-US" sz="1700" dirty="0">
-                <a:solidFill>
-                  <a:srgbClr val="17364A"/>
-                </a:solidFill>
-                <a:latin typeface="Aptos" pitchFamily="34" charset="0"/>
-                <a:ea typeface="Aptos" pitchFamily="34" charset="-122"/>
-                <a:cs typeface="Aptos" pitchFamily="34" charset="-120"/>
-              </a:rPr>
-              <a:t>WHO Guidance on Large Multi-Modal Models: https://www.who.int/publications/i/item/9789240084759</a:t>
-            </a:r>
-            <a:endParaRPr lang="en-US" sz="1700" dirty="0"/>
-          </a:p>
-        </p:txBody>
-      </p:sp>
-      <p:sp>
-        <p:nvSpPr>
-          <p:cNvPr id="11" name="Shape 9"/>
+              <a:t>OWASP Top 10 for Large Language Model Applications:.</a:t>
+            </a:r>
+            <a:endParaRPr lang="en-US" sz="2100" dirty="0"/>
+          </a:p>
+        </p:txBody>
+      </p:sp>
+      <p:sp>
+        <p:nvSpPr>
+          <p:cNvPr id="12" name="Shape 10"/>
           <p:cNvSpPr/>
           <p:nvPr/>
         </p:nvSpPr>
@@ -10774,14 +11422,14 @@
       </p:sp>
       <p:sp>
         <p:nvSpPr>
-          <p:cNvPr id="12" name="Text 10"/>
+          <p:cNvPr id="13" name="Text 11"/>
           <p:cNvSpPr/>
           <p:nvPr/>
         </p:nvSpPr>
         <p:spPr>
           <a:xfrm>
             <a:off x="8074152" y="1563624"/>
-            <a:ext cx="2825496" cy="201168"/>
+            <a:ext cx="2825496" cy="256032"/>
           </a:xfrm>
           <a:prstGeom prst="rect">
             <a:avLst/>
@@ -10797,7 +11445,7 @@
               <a:buNone/>
             </a:pPr>
             <a:r>
-              <a:rPr lang="en-US" sz="950" b="1" dirty="0">
+              <a:rPr lang="en-US" sz="1300" b="1" dirty="0">
                 <a:solidFill>
                   <a:srgbClr val="0068B7"/>
                 </a:solidFill>
@@ -10807,20 +11455,20 @@
               </a:rPr>
               <a:t>Key idea</a:t>
             </a:r>
-            <a:endParaRPr lang="en-US" sz="950" dirty="0"/>
-          </a:p>
-        </p:txBody>
-      </p:sp>
-      <p:sp>
-        <p:nvSpPr>
-          <p:cNvPr id="13" name="Text 11"/>
-          <p:cNvSpPr/>
-          <p:nvPr/>
-        </p:nvSpPr>
-        <p:spPr>
-          <a:xfrm>
-            <a:off x="8074152" y="1856232"/>
-            <a:ext cx="2825496" cy="1261872"/>
+            <a:endParaRPr lang="en-US" sz="1300" dirty="0"/>
+          </a:p>
+        </p:txBody>
+      </p:sp>
+      <p:sp>
+        <p:nvSpPr>
+          <p:cNvPr id="14" name="Text 12"/>
+          <p:cNvSpPr/>
+          <p:nvPr/>
+        </p:nvSpPr>
+        <p:spPr>
+          <a:xfrm>
+            <a:off x="8074152" y="1920240"/>
+            <a:ext cx="2825496" cy="1188720"/>
           </a:xfrm>
           <a:prstGeom prst="rect">
             <a:avLst/>
@@ -10838,7 +11486,7 @@
               <a:buNone/>
             </a:pPr>
             <a:r>
-              <a:rPr lang="en-US" sz="1250" dirty="0">
+              <a:rPr lang="en-US" sz="1550" dirty="0">
                 <a:solidFill>
                   <a:srgbClr val="17364A"/>
                 </a:solidFill>
@@ -10848,13 +11496,13 @@
               </a:rPr>
               <a:t>NIST AI RMF Generative AI Profile:.</a:t>
             </a:r>
-            <a:endParaRPr lang="en-US" sz="1250" dirty="0"/>
-          </a:p>
-        </p:txBody>
-      </p:sp>
-      <p:sp>
-        <p:nvSpPr>
-          <p:cNvPr id="14" name="Shape 12"/>
+            <a:endParaRPr lang="en-US" sz="1550" dirty="0"/>
+          </a:p>
+        </p:txBody>
+      </p:sp>
+      <p:sp>
+        <p:nvSpPr>
+          <p:cNvPr id="15" name="Shape 13"/>
           <p:cNvSpPr/>
           <p:nvPr/>
         </p:nvSpPr>
@@ -10881,14 +11529,14 @@
       </p:sp>
       <p:sp>
         <p:nvSpPr>
-          <p:cNvPr id="15" name="Text 13"/>
+          <p:cNvPr id="16" name="Text 14"/>
           <p:cNvSpPr/>
           <p:nvPr/>
         </p:nvSpPr>
         <p:spPr>
           <a:xfrm>
             <a:off x="8074152" y="3666744"/>
-            <a:ext cx="2825496" cy="201168"/>
+            <a:ext cx="2825496" cy="256032"/>
           </a:xfrm>
           <a:prstGeom prst="rect">
             <a:avLst/>
@@ -10904,7 +11552,7 @@
               <a:buNone/>
             </a:pPr>
             <a:r>
-              <a:rPr lang="en-US" sz="950" b="1" dirty="0">
+              <a:rPr lang="en-US" sz="1300" b="1" dirty="0">
                 <a:solidFill>
                   <a:srgbClr val="0068B7"/>
                 </a:solidFill>
@@ -10914,20 +11562,20 @@
               </a:rPr>
               <a:t>Use this for</a:t>
             </a:r>
-            <a:endParaRPr lang="en-US" sz="950" dirty="0"/>
-          </a:p>
-        </p:txBody>
-      </p:sp>
-      <p:sp>
-        <p:nvSpPr>
-          <p:cNvPr id="16" name="Text 14"/>
-          <p:cNvSpPr/>
-          <p:nvPr/>
-        </p:nvSpPr>
-        <p:spPr>
-          <a:xfrm>
-            <a:off x="8074152" y="3959352"/>
-            <a:ext cx="2825496" cy="1170432"/>
+            <a:endParaRPr lang="en-US" sz="1300" dirty="0"/>
+          </a:p>
+        </p:txBody>
+      </p:sp>
+      <p:sp>
+        <p:nvSpPr>
+          <p:cNvPr id="17" name="Text 15"/>
+          <p:cNvSpPr/>
+          <p:nvPr/>
+        </p:nvSpPr>
+        <p:spPr>
+          <a:xfrm>
+            <a:off x="8074152" y="4023360"/>
+            <a:ext cx="2825496" cy="1097280"/>
           </a:xfrm>
           <a:prstGeom prst="rect">
             <a:avLst/>
@@ -10945,7 +11593,7 @@
               <a:buNone/>
             </a:pPr>
             <a:r>
-              <a:rPr lang="en-US" sz="1250" dirty="0">
+              <a:rPr lang="en-US" sz="1550" dirty="0">
                 <a:solidFill>
                   <a:srgbClr val="17364A"/>
                 </a:solidFill>
@@ -10955,7 +11603,7 @@
               </a:rPr>
               <a:t>Connect the concept to public health decisions, safeguards, documentation, or implementation work.</a:t>
             </a:r>
-            <a:endParaRPr lang="en-US" sz="1250" dirty="0"/>
+            <a:endParaRPr lang="en-US" sz="1550" dirty="0"/>
           </a:p>
         </p:txBody>
       </p:sp>
@@ -11152,7 +11800,7 @@
                 <a:ea typeface="Aptos" pitchFamily="34" charset="-122"/>
                 <a:cs typeface="Aptos" pitchFamily="34" charset="-120"/>
               </a:rPr>
-              <a:t>© Paula Soper</a:t>
+              <a:t>Â© Paula Soper</a:t>
             </a:r>
             <a:endParaRPr lang="en-US" sz="800" dirty="0"/>
           </a:p>
@@ -11166,8 +11814,47 @@
         </p:nvSpPr>
         <p:spPr>
           <a:xfrm>
+            <a:off x="11137392" y="6510528"/>
+            <a:ext cx="411480" cy="201168"/>
+          </a:xfrm>
+          <a:prstGeom prst="rect">
+            <a:avLst/>
+          </a:prstGeom>
+          <a:noFill/>
+          <a:ln/>
+        </p:spPr>
+        <p:txBody>
+          <a:bodyPr wrap="square" lIns="0" tIns="0" rIns="0" bIns="0" rtlCol="0" anchor="ctr"/>
+          <a:lstStyle/>
+          <a:p>
+            <a:pPr algn="r" indent="0" marL="0">
+              <a:buNone/>
+            </a:pPr>
+            <a:r>
+              <a:rPr lang="en-US" sz="900" dirty="0">
+                <a:solidFill>
+                  <a:srgbClr val="5F7181"/>
+                </a:solidFill>
+                <a:latin typeface="Aptos" pitchFamily="34" charset="0"/>
+                <a:ea typeface="Aptos" pitchFamily="34" charset="-122"/>
+                <a:cs typeface="Aptos" pitchFamily="34" charset="-120"/>
+              </a:rPr>
+              <a:t>3</a:t>
+            </a:r>
+            <a:endParaRPr lang="en-US" sz="900" dirty="0"/>
+          </a:p>
+        </p:txBody>
+      </p:sp>
+      <p:sp>
+        <p:nvSpPr>
+          <p:cNvPr id="8" name="Text 6"/>
+          <p:cNvSpPr/>
+          <p:nvPr/>
+        </p:nvSpPr>
+        <p:spPr>
+          <a:xfrm>
             <a:off x="640080" y="658368"/>
-            <a:ext cx="10881360" cy="566928"/>
+            <a:ext cx="10881360" cy="713232"/>
           </a:xfrm>
           <a:prstGeom prst="rect">
             <a:avLst/>
@@ -11185,7 +11872,7 @@
               <a:buNone/>
             </a:pPr>
             <a:r>
-              <a:rPr lang="en-US" sz="2700" b="1" dirty="0">
+              <a:rPr lang="en-US" sz="3400" b="1" dirty="0">
                 <a:solidFill>
                   <a:srgbClr val="003A63"/>
                 </a:solidFill>
@@ -11195,20 +11882,20 @@
               </a:rPr>
               <a:t>How this module connects to the playbook</a:t>
             </a:r>
-            <a:endParaRPr lang="en-US" sz="2700" dirty="0"/>
-          </a:p>
-        </p:txBody>
-      </p:sp>
-      <p:sp>
-        <p:nvSpPr>
-          <p:cNvPr id="8" name="Text 6"/>
-          <p:cNvSpPr/>
-          <p:nvPr/>
-        </p:nvSpPr>
-        <p:spPr>
-          <a:xfrm>
-            <a:off x="868680" y="1417320"/>
-            <a:ext cx="6903720" cy="4480560"/>
+            <a:endParaRPr lang="en-US" sz="3400" dirty="0"/>
+          </a:p>
+        </p:txBody>
+      </p:sp>
+      <p:sp>
+        <p:nvSpPr>
+          <p:cNvPr id="9" name="Text 7"/>
+          <p:cNvSpPr/>
+          <p:nvPr/>
+        </p:nvSpPr>
+        <p:spPr>
+          <a:xfrm>
+            <a:off x="868680" y="1508760"/>
+            <a:ext cx="6812280" cy="3977640"/>
           </a:xfrm>
           <a:prstGeom prst="rect">
             <a:avLst/>
@@ -11223,7 +11910,7 @@
           <a:lstStyle/>
           <a:p>
             <a:r>
-              <a:rPr lang="en-US" sz="1540" dirty="0">
+              <a:rPr lang="en-US" sz="1900" dirty="0">
                 <a:solidFill>
                   <a:srgbClr val="17364A"/>
                 </a:solidFill>
@@ -11231,13 +11918,13 @@
                 <a:ea typeface="Aptos" pitchFamily="34" charset="-122"/>
                 <a:cs typeface="Aptos" pitchFamily="34" charset="-120"/>
               </a:rPr>
-              <a:t>Play 4: Engage Stakeholders - This lesson informs Play 4 by helping learners connect the lesson topic to engage stakeholders work in.</a:t>
-            </a:r>
-            <a:endParaRPr lang="en-US" sz="1540" dirty="0"/>
-          </a:p>
-          <a:p>
-            <a:r>
-              <a:rPr lang="en-US" sz="1540" dirty="0">
+              <a:t>Play 4: Engage Stakeholders - This lesson informs Play 4 by helping learners connect the lesson topic to.</a:t>
+            </a:r>
+            <a:endParaRPr lang="en-US" sz="1900" dirty="0"/>
+          </a:p>
+          <a:p>
+            <a:r>
+              <a:rPr lang="en-US" sz="1900" dirty="0">
                 <a:solidFill>
                   <a:srgbClr val="17364A"/>
                 </a:solidFill>
@@ -11245,13 +11932,13 @@
                 <a:ea typeface="Aptos" pitchFamily="34" charset="-122"/>
                 <a:cs typeface="Aptos" pitchFamily="34" charset="-120"/>
               </a:rPr>
-              <a:t>Play 7: Prioritize Use Cases - This lesson informs Play 7 by helping learners connect the lesson topic to prioritize use cases work.</a:t>
-            </a:r>
-            <a:endParaRPr lang="en-US" sz="1540" dirty="0"/>
-          </a:p>
-          <a:p>
-            <a:r>
-              <a:rPr lang="en-US" sz="1540" dirty="0">
+              <a:t>Play 7: Prioritize Use Cases - This lesson informs Play 7 by helping learners connect the lesson topic to.</a:t>
+            </a:r>
+            <a:endParaRPr lang="en-US" sz="1900" dirty="0"/>
+          </a:p>
+          <a:p>
+            <a:r>
+              <a:rPr lang="en-US" sz="1900" dirty="0">
                 <a:solidFill>
                   <a:srgbClr val="17364A"/>
                 </a:solidFill>
@@ -11259,13 +11946,13 @@
                 <a:ea typeface="Aptos" pitchFamily="34" charset="-122"/>
                 <a:cs typeface="Aptos" pitchFamily="34" charset="-120"/>
               </a:rPr>
-              <a:t>Play 1: Vision &amp; Guardrails - This lesson informs Play 1 by helping learners connect the lesson topic to vision &amp; guardrails work in.</a:t>
-            </a:r>
-            <a:endParaRPr lang="en-US" sz="1540" dirty="0"/>
-          </a:p>
-          <a:p>
-            <a:r>
-              <a:rPr lang="en-US" sz="1540" dirty="0">
+              <a:t>Play 1: Vision &amp; Guardrails - This lesson informs Play 1 by helping learners connect the lesson topic to.</a:t>
+            </a:r>
+            <a:endParaRPr lang="en-US" sz="1900" dirty="0"/>
+          </a:p>
+          <a:p>
+            <a:r>
+              <a:rPr lang="en-US" sz="1900" dirty="0">
                 <a:solidFill>
                   <a:srgbClr val="17364A"/>
                 </a:solidFill>
@@ -11273,15 +11960,15 @@
                 <a:ea typeface="Aptos" pitchFamily="34" charset="-122"/>
                 <a:cs typeface="Aptos" pitchFamily="34" charset="-120"/>
               </a:rPr>
-              <a:t>Play 13: Monitor and Evaluate AI Systems - This lesson informs Play 13 by helping learners connect the lesson topic to monitor and.</a:t>
-            </a:r>
-            <a:endParaRPr lang="en-US" sz="1540" dirty="0"/>
-          </a:p>
-        </p:txBody>
-      </p:sp>
-      <p:sp>
-        <p:nvSpPr>
-          <p:cNvPr id="9" name="Shape 7"/>
+              <a:t>Play 13: Monitor and Evaluate AI Systems - This lesson informs Play 13 by helping learners connect the.</a:t>
+            </a:r>
+            <a:endParaRPr lang="en-US" sz="1900" dirty="0"/>
+          </a:p>
+        </p:txBody>
+      </p:sp>
+      <p:sp>
+        <p:nvSpPr>
+          <p:cNvPr id="10" name="Shape 8"/>
           <p:cNvSpPr/>
           <p:nvPr/>
         </p:nvSpPr>
@@ -11308,14 +11995,14 @@
       </p:sp>
       <p:sp>
         <p:nvSpPr>
-          <p:cNvPr id="10" name="Text 8"/>
+          <p:cNvPr id="11" name="Text 9"/>
           <p:cNvSpPr/>
           <p:nvPr/>
         </p:nvSpPr>
         <p:spPr>
           <a:xfrm>
             <a:off x="8211312" y="1563624"/>
-            <a:ext cx="2734056" cy="201168"/>
+            <a:ext cx="2734056" cy="256032"/>
           </a:xfrm>
           <a:prstGeom prst="rect">
             <a:avLst/>
@@ -11331,7 +12018,7 @@
               <a:buNone/>
             </a:pPr>
             <a:r>
-              <a:rPr lang="en-US" sz="950" b="1" dirty="0">
+              <a:rPr lang="en-US" sz="1300" b="1" dirty="0">
                 <a:solidFill>
                   <a:srgbClr val="0068B7"/>
                 </a:solidFill>
@@ -11341,20 +12028,20 @@
               </a:rPr>
               <a:t>Apply the lesson</a:t>
             </a:r>
-            <a:endParaRPr lang="en-US" sz="950" dirty="0"/>
-          </a:p>
-        </p:txBody>
-      </p:sp>
-      <p:sp>
-        <p:nvSpPr>
-          <p:cNvPr id="11" name="Text 9"/>
-          <p:cNvSpPr/>
-          <p:nvPr/>
-        </p:nvSpPr>
-        <p:spPr>
-          <a:xfrm>
-            <a:off x="8211312" y="1856232"/>
-            <a:ext cx="2734056" cy="1536192"/>
+            <a:endParaRPr lang="en-US" sz="1300" dirty="0"/>
+          </a:p>
+        </p:txBody>
+      </p:sp>
+      <p:sp>
+        <p:nvSpPr>
+          <p:cNvPr id="12" name="Text 10"/>
+          <p:cNvSpPr/>
+          <p:nvPr/>
+        </p:nvSpPr>
+        <p:spPr>
+          <a:xfrm>
+            <a:off x="8211312" y="1920240"/>
+            <a:ext cx="2734056" cy="1463040"/>
           </a:xfrm>
           <a:prstGeom prst="rect">
             <a:avLst/>
@@ -11372,7 +12059,7 @@
               <a:buNone/>
             </a:pPr>
             <a:r>
-              <a:rPr lang="en-US" sz="1250" dirty="0">
+              <a:rPr lang="en-US" sz="1550" dirty="0">
                 <a:solidFill>
                   <a:srgbClr val="17364A"/>
                 </a:solidFill>
@@ -11382,32 +12069,32 @@
               </a:rPr>
               <a:t>Use the related plays to identify decisions, participants, timing, approvals, and documentation needed for responsible implementation.</a:t>
             </a:r>
-            <a:endParaRPr lang="en-US" sz="1250" dirty="0"/>
-          </a:p>
-        </p:txBody>
-      </p:sp>
-      <p:sp>
-        <p:nvSpPr>
-          <p:cNvPr id="12" name="Shape 10"/>
-          <p:cNvSpPr/>
-          <p:nvPr/>
-        </p:nvSpPr>
-        <p:spPr>
-          <a:xfrm>
-            <a:off x="8046720" y="3794760"/>
-            <a:ext cx="3063240" cy="1508760"/>
+            <a:endParaRPr lang="en-US" sz="1550" dirty="0"/>
+          </a:p>
+        </p:txBody>
+      </p:sp>
+      <p:sp>
+        <p:nvSpPr>
+          <p:cNvPr id="13" name="Shape 11"/>
+          <p:cNvSpPr/>
+          <p:nvPr/>
+        </p:nvSpPr>
+        <p:spPr>
+          <a:xfrm>
+            <a:off x="7818120" y="3977640"/>
+            <a:ext cx="972312" cy="749808"/>
           </a:xfrm>
           <a:prstGeom prst="roundRect">
             <a:avLst>
-              <a:gd name="adj" fmla="val 7273"/>
+              <a:gd name="adj" fmla="val 14634"/>
             </a:avLst>
           </a:prstGeom>
           <a:solidFill>
-            <a:srgbClr val="FFF4D9"/>
+            <a:srgbClr val="0068B7"/>
           </a:solidFill>
           <a:ln w="12700">
             <a:solidFill>
-              <a:srgbClr val="B9D7E6"/>
+              <a:srgbClr val="0068B7"/>
             </a:solidFill>
             <a:prstDash val="solid"/>
           </a:ln>
@@ -11415,81 +12102,256 @@
       </p:sp>
       <p:sp>
         <p:nvSpPr>
-          <p:cNvPr id="13" name="Text 11"/>
-          <p:cNvSpPr/>
-          <p:nvPr/>
-        </p:nvSpPr>
-        <p:spPr>
-          <a:xfrm>
-            <a:off x="8211312" y="3941064"/>
-            <a:ext cx="2734056" cy="201168"/>
-          </a:xfrm>
-          <a:prstGeom prst="rect">
-            <a:avLst/>
-          </a:prstGeom>
-          <a:noFill/>
-          <a:ln/>
-        </p:spPr>
-        <p:txBody>
-          <a:bodyPr wrap="square" lIns="0" tIns="0" rIns="0" bIns="0" rtlCol="0" anchor="ctr"/>
-          <a:lstStyle/>
-          <a:p>
-            <a:pPr indent="0" marL="0">
-              <a:buNone/>
-            </a:pPr>
-            <a:r>
-              <a:rPr lang="en-US" sz="950" b="1" dirty="0">
-                <a:solidFill>
-                  <a:srgbClr val="0068B7"/>
-                </a:solidFill>
-                <a:latin typeface="Aptos" pitchFamily="34" charset="0"/>
-                <a:ea typeface="Aptos" pitchFamily="34" charset="-122"/>
-                <a:cs typeface="Aptos" pitchFamily="34" charset="-120"/>
-              </a:rPr>
-              <a:t>Keep in mind</a:t>
-            </a:r>
-            <a:endParaRPr lang="en-US" sz="950" dirty="0"/>
-          </a:p>
-        </p:txBody>
-      </p:sp>
-      <p:sp>
-        <p:nvSpPr>
           <p:cNvPr id="14" name="Text 12"/>
           <p:cNvSpPr/>
           <p:nvPr/>
         </p:nvSpPr>
         <p:spPr>
           <a:xfrm>
-            <a:off x="8211312" y="4233672"/>
-            <a:ext cx="2734056" cy="941832"/>
-          </a:xfrm>
-          <a:prstGeom prst="rect">
-            <a:avLst/>
-          </a:prstGeom>
-          <a:noFill/>
-          <a:ln/>
-        </p:spPr>
-        <p:txBody>
-          <a:bodyPr wrap="square" lIns="0" tIns="0" rIns="0" bIns="0" rtlCol="0" anchor="t">
+            <a:off x="7891272" y="4169664"/>
+            <a:ext cx="826008" cy="310896"/>
+          </a:xfrm>
+          <a:prstGeom prst="rect">
+            <a:avLst/>
+          </a:prstGeom>
+          <a:noFill/>
+          <a:ln/>
+        </p:spPr>
+        <p:txBody>
+          <a:bodyPr wrap="square" lIns="0" tIns="0" rIns="0" bIns="0" rtlCol="0" anchor="ctr">
             <a:normAutofit/>
           </a:bodyPr>
           <a:lstStyle/>
           <a:p>
-            <a:pPr indent="0" marL="0">
-              <a:buNone/>
-            </a:pPr>
-            <a:r>
-              <a:rPr lang="en-US" sz="1250" dirty="0">
-                <a:solidFill>
-                  <a:srgbClr val="17364A"/>
-                </a:solidFill>
-                <a:latin typeface="Aptos" pitchFamily="34" charset="0"/>
-                <a:ea typeface="Aptos" pitchFamily="34" charset="-122"/>
-                <a:cs typeface="Aptos" pitchFamily="34" charset="-120"/>
-              </a:rPr>
-              <a:t>The playbook connection helps turn training into agency work, not just individual knowledge.</a:t>
-            </a:r>
-            <a:endParaRPr lang="en-US" sz="1250" dirty="0"/>
+            <a:pPr algn="ctr" indent="0" marL="0">
+              <a:buNone/>
+            </a:pPr>
+            <a:r>
+              <a:rPr lang="en-US" sz="1500" b="1" dirty="0">
+                <a:solidFill>
+                  <a:srgbClr val="FFFFFF"/>
+                </a:solidFill>
+                <a:latin typeface="Aptos" pitchFamily="34" charset="0"/>
+                <a:ea typeface="Aptos" pitchFamily="34" charset="-122"/>
+                <a:cs typeface="Aptos" pitchFamily="34" charset="-120"/>
+              </a:rPr>
+              <a:t>Lesson</a:t>
+            </a:r>
+            <a:endParaRPr lang="en-US" sz="1500" dirty="0"/>
+          </a:p>
+        </p:txBody>
+      </p:sp>
+      <p:sp>
+        <p:nvSpPr>
+          <p:cNvPr id="15" name="Text 13"/>
+          <p:cNvSpPr/>
+          <p:nvPr/>
+        </p:nvSpPr>
+        <p:spPr>
+          <a:xfrm>
+            <a:off x="8817864" y="4187952"/>
+            <a:ext cx="201168" cy="256032"/>
+          </a:xfrm>
+          <a:prstGeom prst="rect">
+            <a:avLst/>
+          </a:prstGeom>
+          <a:noFill/>
+          <a:ln/>
+        </p:spPr>
+        <p:txBody>
+          <a:bodyPr wrap="square" lIns="0" tIns="0" rIns="0" bIns="0" rtlCol="0" anchor="ctr"/>
+          <a:lstStyle/>
+          <a:p>
+            <a:pPr algn="ctr" indent="0" marL="0">
+              <a:buNone/>
+            </a:pPr>
+            <a:r>
+              <a:rPr lang="en-US" sz="1800" b="1" dirty="0">
+                <a:solidFill>
+                  <a:srgbClr val="0068B7"/>
+                </a:solidFill>
+                <a:latin typeface="Aptos" pitchFamily="34" charset="0"/>
+                <a:ea typeface="Aptos" pitchFamily="34" charset="-122"/>
+                <a:cs typeface="Aptos" pitchFamily="34" charset="-120"/>
+              </a:rPr>
+              <a:t>â†’</a:t>
+            </a:r>
+            <a:endParaRPr lang="en-US" sz="1800" dirty="0"/>
+          </a:p>
+        </p:txBody>
+      </p:sp>
+      <p:sp>
+        <p:nvSpPr>
+          <p:cNvPr id="16" name="Shape 14"/>
+          <p:cNvSpPr/>
+          <p:nvPr/>
+        </p:nvSpPr>
+        <p:spPr>
+          <a:xfrm>
+            <a:off x="9046464" y="3977640"/>
+            <a:ext cx="972312" cy="749808"/>
+          </a:xfrm>
+          <a:prstGeom prst="roundRect">
+            <a:avLst>
+              <a:gd name="adj" fmla="val 14634"/>
+            </a:avLst>
+          </a:prstGeom>
+          <a:solidFill>
+            <a:srgbClr val="2F8A28"/>
+          </a:solidFill>
+          <a:ln w="12700">
+            <a:solidFill>
+              <a:srgbClr val="2F8A28"/>
+            </a:solidFill>
+            <a:prstDash val="solid"/>
+          </a:ln>
+        </p:spPr>
+      </p:sp>
+      <p:sp>
+        <p:nvSpPr>
+          <p:cNvPr id="17" name="Text 15"/>
+          <p:cNvSpPr/>
+          <p:nvPr/>
+        </p:nvSpPr>
+        <p:spPr>
+          <a:xfrm>
+            <a:off x="9119616" y="4169664"/>
+            <a:ext cx="826008" cy="310896"/>
+          </a:xfrm>
+          <a:prstGeom prst="rect">
+            <a:avLst/>
+          </a:prstGeom>
+          <a:noFill/>
+          <a:ln/>
+        </p:spPr>
+        <p:txBody>
+          <a:bodyPr wrap="square" lIns="0" tIns="0" rIns="0" bIns="0" rtlCol="0" anchor="ctr">
+            <a:normAutofit/>
+          </a:bodyPr>
+          <a:lstStyle/>
+          <a:p>
+            <a:pPr algn="ctr" indent="0" marL="0">
+              <a:buNone/>
+            </a:pPr>
+            <a:r>
+              <a:rPr lang="en-US" sz="1500" b="1" dirty="0">
+                <a:solidFill>
+                  <a:srgbClr val="FFFFFF"/>
+                </a:solidFill>
+                <a:latin typeface="Aptos" pitchFamily="34" charset="0"/>
+                <a:ea typeface="Aptos" pitchFamily="34" charset="-122"/>
+                <a:cs typeface="Aptos" pitchFamily="34" charset="-120"/>
+              </a:rPr>
+              <a:t>Plays</a:t>
+            </a:r>
+            <a:endParaRPr lang="en-US" sz="1500" dirty="0"/>
+          </a:p>
+        </p:txBody>
+      </p:sp>
+      <p:sp>
+        <p:nvSpPr>
+          <p:cNvPr id="18" name="Text 16"/>
+          <p:cNvSpPr/>
+          <p:nvPr/>
+        </p:nvSpPr>
+        <p:spPr>
+          <a:xfrm>
+            <a:off x="10046208" y="4187952"/>
+            <a:ext cx="201168" cy="256032"/>
+          </a:xfrm>
+          <a:prstGeom prst="rect">
+            <a:avLst/>
+          </a:prstGeom>
+          <a:noFill/>
+          <a:ln/>
+        </p:spPr>
+        <p:txBody>
+          <a:bodyPr wrap="square" lIns="0" tIns="0" rIns="0" bIns="0" rtlCol="0" anchor="ctr"/>
+          <a:lstStyle/>
+          <a:p>
+            <a:pPr algn="ctr" indent="0" marL="0">
+              <a:buNone/>
+            </a:pPr>
+            <a:r>
+              <a:rPr lang="en-US" sz="1800" b="1" dirty="0">
+                <a:solidFill>
+                  <a:srgbClr val="0068B7"/>
+                </a:solidFill>
+                <a:latin typeface="Aptos" pitchFamily="34" charset="0"/>
+                <a:ea typeface="Aptos" pitchFamily="34" charset="-122"/>
+                <a:cs typeface="Aptos" pitchFamily="34" charset="-120"/>
+              </a:rPr>
+              <a:t>â†’</a:t>
+            </a:r>
+            <a:endParaRPr lang="en-US" sz="1800" dirty="0"/>
+          </a:p>
+        </p:txBody>
+      </p:sp>
+      <p:sp>
+        <p:nvSpPr>
+          <p:cNvPr id="19" name="Shape 17"/>
+          <p:cNvSpPr/>
+          <p:nvPr/>
+        </p:nvSpPr>
+        <p:spPr>
+          <a:xfrm>
+            <a:off x="10274808" y="3977640"/>
+            <a:ext cx="972312" cy="749808"/>
+          </a:xfrm>
+          <a:prstGeom prst="roundRect">
+            <a:avLst>
+              <a:gd name="adj" fmla="val 14634"/>
+            </a:avLst>
+          </a:prstGeom>
+          <a:solidFill>
+            <a:srgbClr val="6A4CA3"/>
+          </a:solidFill>
+          <a:ln w="12700">
+            <a:solidFill>
+              <a:srgbClr val="6A4CA3"/>
+            </a:solidFill>
+            <a:prstDash val="solid"/>
+          </a:ln>
+        </p:spPr>
+      </p:sp>
+      <p:sp>
+        <p:nvSpPr>
+          <p:cNvPr id="20" name="Text 18"/>
+          <p:cNvSpPr/>
+          <p:nvPr/>
+        </p:nvSpPr>
+        <p:spPr>
+          <a:xfrm>
+            <a:off x="10347960" y="4169664"/>
+            <a:ext cx="826008" cy="310896"/>
+          </a:xfrm>
+          <a:prstGeom prst="rect">
+            <a:avLst/>
+          </a:prstGeom>
+          <a:noFill/>
+          <a:ln/>
+        </p:spPr>
+        <p:txBody>
+          <a:bodyPr wrap="square" lIns="0" tIns="0" rIns="0" bIns="0" rtlCol="0" anchor="ctr">
+            <a:normAutofit/>
+          </a:bodyPr>
+          <a:lstStyle/>
+          <a:p>
+            <a:pPr algn="ctr" indent="0" marL="0">
+              <a:buNone/>
+            </a:pPr>
+            <a:r>
+              <a:rPr lang="en-US" sz="1500" b="1" dirty="0">
+                <a:solidFill>
+                  <a:srgbClr val="FFFFFF"/>
+                </a:solidFill>
+                <a:latin typeface="Aptos" pitchFamily="34" charset="0"/>
+                <a:ea typeface="Aptos" pitchFamily="34" charset="-122"/>
+                <a:cs typeface="Aptos" pitchFamily="34" charset="-120"/>
+              </a:rPr>
+              <a:t>Action</a:t>
+            </a:r>
+            <a:endParaRPr lang="en-US" sz="1500" dirty="0"/>
           </a:p>
         </p:txBody>
       </p:sp>
@@ -11686,7 +12548,7 @@
                 <a:ea typeface="Aptos" pitchFamily="34" charset="-122"/>
                 <a:cs typeface="Aptos" pitchFamily="34" charset="-120"/>
               </a:rPr>
-              <a:t>© Paula Soper</a:t>
+              <a:t>Â© Paula Soper</a:t>
             </a:r>
             <a:endParaRPr lang="en-US" sz="800" dirty="0"/>
           </a:p>
@@ -11700,8 +12562,47 @@
         </p:nvSpPr>
         <p:spPr>
           <a:xfrm>
+            <a:off x="11137392" y="6510528"/>
+            <a:ext cx="411480" cy="201168"/>
+          </a:xfrm>
+          <a:prstGeom prst="rect">
+            <a:avLst/>
+          </a:prstGeom>
+          <a:noFill/>
+          <a:ln/>
+        </p:spPr>
+        <p:txBody>
+          <a:bodyPr wrap="square" lIns="0" tIns="0" rIns="0" bIns="0" rtlCol="0" anchor="ctr"/>
+          <a:lstStyle/>
+          <a:p>
+            <a:pPr algn="r" indent="0" marL="0">
+              <a:buNone/>
+            </a:pPr>
+            <a:r>
+              <a:rPr lang="en-US" sz="900" dirty="0">
+                <a:solidFill>
+                  <a:srgbClr val="5F7181"/>
+                </a:solidFill>
+                <a:latin typeface="Aptos" pitchFamily="34" charset="0"/>
+                <a:ea typeface="Aptos" pitchFamily="34" charset="-122"/>
+                <a:cs typeface="Aptos" pitchFamily="34" charset="-120"/>
+              </a:rPr>
+              <a:t>4</a:t>
+            </a:r>
+            <a:endParaRPr lang="en-US" sz="900" dirty="0"/>
+          </a:p>
+        </p:txBody>
+      </p:sp>
+      <p:sp>
+        <p:nvSpPr>
+          <p:cNvPr id="8" name="Text 6"/>
+          <p:cNvSpPr/>
+          <p:nvPr/>
+        </p:nvSpPr>
+        <p:spPr>
+          <a:xfrm>
             <a:off x="640080" y="658368"/>
-            <a:ext cx="10881360" cy="566928"/>
+            <a:ext cx="10881360" cy="713232"/>
           </a:xfrm>
           <a:prstGeom prst="rect">
             <a:avLst/>
@@ -11719,7 +12620,7 @@
               <a:buNone/>
             </a:pPr>
             <a:r>
-              <a:rPr lang="en-US" sz="2700" b="1" dirty="0">
+              <a:rPr lang="en-US" sz="3400" b="1" dirty="0">
                 <a:solidFill>
                   <a:srgbClr val="003A63"/>
                 </a:solidFill>
@@ -11729,20 +12630,20 @@
               </a:rPr>
               <a:t>Related toolkit resources</a:t>
             </a:r>
-            <a:endParaRPr lang="en-US" sz="2700" dirty="0"/>
-          </a:p>
-        </p:txBody>
-      </p:sp>
-      <p:sp>
-        <p:nvSpPr>
-          <p:cNvPr id="8" name="Text 6"/>
-          <p:cNvSpPr/>
-          <p:nvPr/>
-        </p:nvSpPr>
-        <p:spPr>
-          <a:xfrm>
-            <a:off x="868680" y="1417320"/>
-            <a:ext cx="6903720" cy="4480560"/>
+            <a:endParaRPr lang="en-US" sz="3400" dirty="0"/>
+          </a:p>
+        </p:txBody>
+      </p:sp>
+      <p:sp>
+        <p:nvSpPr>
+          <p:cNvPr id="9" name="Text 7"/>
+          <p:cNvSpPr/>
+          <p:nvPr/>
+        </p:nvSpPr>
+        <p:spPr>
+          <a:xfrm>
+            <a:off x="868680" y="1508760"/>
+            <a:ext cx="6812280" cy="3977640"/>
           </a:xfrm>
           <a:prstGeom prst="rect">
             <a:avLst/>
@@ -11757,7 +12658,7 @@
           <a:lstStyle/>
           <a:p>
             <a:r>
-              <a:rPr lang="en-US" sz="1460" dirty="0">
+              <a:rPr lang="en-US" sz="1850" dirty="0">
                 <a:solidFill>
                   <a:srgbClr val="17364A"/>
                 </a:solidFill>
@@ -11765,13 +12666,13 @@
                 <a:ea typeface="Aptos" pitchFamily="34" charset="-122"/>
                 <a:cs typeface="Aptos" pitchFamily="34" charset="-120"/>
               </a:rPr>
-              <a:t>Tool 1: AI Vision &amp; Principles Workshop (Workshop) - Use this tool to complete or strengthen the practical exercise for the module.</a:t>
-            </a:r>
-            <a:endParaRPr lang="en-US" sz="1460" dirty="0"/>
-          </a:p>
-          <a:p>
-            <a:r>
-              <a:rPr lang="en-US" sz="1460" dirty="0">
+              <a:t>Tool 1: AI Vision &amp; Principles Workshop (Workshop) - Use this tool to complete or strengthen the practical.</a:t>
+            </a:r>
+            <a:endParaRPr lang="en-US" sz="1850" dirty="0"/>
+          </a:p>
+          <a:p>
+            <a:r>
+              <a:rPr lang="en-US" sz="1850" dirty="0">
                 <a:solidFill>
                   <a:srgbClr val="17364A"/>
                 </a:solidFill>
@@ -11779,13 +12680,13 @@
                 <a:ea typeface="Aptos" pitchFamily="34" charset="-122"/>
                 <a:cs typeface="Aptos" pitchFamily="34" charset="-120"/>
               </a:rPr>
-              <a:t>Tool 3: Equity Impact Assessment Checklist (Checklist) - Use this tool to complete or strengthen the practical exercise for the.</a:t>
-            </a:r>
-            <a:endParaRPr lang="en-US" sz="1460" dirty="0"/>
-          </a:p>
-          <a:p>
-            <a:r>
-              <a:rPr lang="en-US" sz="1460" dirty="0">
+              <a:t>Tool 3: Equity Impact Assessment Checklist (Checklist) - Use this tool to complete or strengthen the.</a:t>
+            </a:r>
+            <a:endParaRPr lang="en-US" sz="1850" dirty="0"/>
+          </a:p>
+          <a:p>
+            <a:r>
+              <a:rPr lang="en-US" sz="1850" dirty="0">
                 <a:solidFill>
                   <a:srgbClr val="17364A"/>
                 </a:solidFill>
@@ -11793,13 +12694,13 @@
                 <a:ea typeface="Aptos" pitchFamily="34" charset="-122"/>
                 <a:cs typeface="Aptos" pitchFamily="34" charset="-120"/>
               </a:rPr>
-              <a:t>Tool 20: Community Engagement Planning (Planning) - Use Community Engagement Planning to translate this lesson into a documented.</a:t>
-            </a:r>
-            <a:endParaRPr lang="en-US" sz="1460" dirty="0"/>
-          </a:p>
-          <a:p>
-            <a:r>
-              <a:rPr lang="en-US" sz="1460" dirty="0">
+              <a:t>Tool 20: Community Engagement Planning (Planning) - Use Community Engagement Planning to translate this.</a:t>
+            </a:r>
+            <a:endParaRPr lang="en-US" sz="1850" dirty="0"/>
+          </a:p>
+          <a:p>
+            <a:r>
+              <a:rPr lang="en-US" sz="1850" dirty="0">
                 <a:solidFill>
                   <a:srgbClr val="17364A"/>
                 </a:solidFill>
@@ -11807,29 +12708,15 @@
                 <a:ea typeface="Aptos" pitchFamily="34" charset="-122"/>
                 <a:cs typeface="Aptos" pitchFamily="34" charset="-120"/>
               </a:rPr>
-              <a:t>Tool 21: Stakeholder Mapping &amp; RACI (Template) - Use Stakeholder Mapping &amp; RACI to translate this lesson into a documented public.</a:t>
-            </a:r>
-            <a:endParaRPr lang="en-US" sz="1460" dirty="0"/>
-          </a:p>
-          <a:p>
-            <a:r>
-              <a:rPr lang="en-US" sz="1460" dirty="0">
-                <a:solidFill>
-                  <a:srgbClr val="17364A"/>
-                </a:solidFill>
-                <a:latin typeface="Aptos" pitchFamily="34" charset="0"/>
-                <a:ea typeface="Aptos" pitchFamily="34" charset="-122"/>
-                <a:cs typeface="Aptos" pitchFamily="34" charset="-120"/>
-              </a:rPr>
-              <a:t>Tool 22: Missing Voices Analysis (Checklist) - Use this tool to complete or strengthen the practical exercise for the module using.</a:t>
-            </a:r>
-            <a:endParaRPr lang="en-US" sz="1460" dirty="0"/>
-          </a:p>
-        </p:txBody>
-      </p:sp>
-      <p:sp>
-        <p:nvSpPr>
-          <p:cNvPr id="9" name="Shape 7"/>
+              <a:t>Tool 21: Stakeholder Mapping &amp; RACI (Template) - Use Stakeholder Mapping &amp; RACI to translate this lesson.</a:t>
+            </a:r>
+            <a:endParaRPr lang="en-US" sz="1850" dirty="0"/>
+          </a:p>
+        </p:txBody>
+      </p:sp>
+      <p:sp>
+        <p:nvSpPr>
+          <p:cNvPr id="10" name="Shape 8"/>
           <p:cNvSpPr/>
           <p:nvPr/>
         </p:nvSpPr>
@@ -11856,14 +12743,14 @@
       </p:sp>
       <p:sp>
         <p:nvSpPr>
-          <p:cNvPr id="10" name="Text 8"/>
+          <p:cNvPr id="11" name="Text 9"/>
           <p:cNvSpPr/>
           <p:nvPr/>
         </p:nvSpPr>
         <p:spPr>
           <a:xfrm>
             <a:off x="8211312" y="1563624"/>
-            <a:ext cx="2734056" cy="201168"/>
+            <a:ext cx="2734056" cy="256032"/>
           </a:xfrm>
           <a:prstGeom prst="rect">
             <a:avLst/>
@@ -11879,7 +12766,7 @@
               <a:buNone/>
             </a:pPr>
             <a:r>
-              <a:rPr lang="en-US" sz="950" b="1" dirty="0">
+              <a:rPr lang="en-US" sz="1300" b="1" dirty="0">
                 <a:solidFill>
                   <a:srgbClr val="0068B7"/>
                 </a:solidFill>
@@ -11889,20 +12776,20 @@
               </a:rPr>
               <a:t>Use the tools</a:t>
             </a:r>
-            <a:endParaRPr lang="en-US" sz="950" dirty="0"/>
-          </a:p>
-        </p:txBody>
-      </p:sp>
-      <p:sp>
-        <p:nvSpPr>
-          <p:cNvPr id="11" name="Text 9"/>
-          <p:cNvSpPr/>
-          <p:nvPr/>
-        </p:nvSpPr>
-        <p:spPr>
-          <a:xfrm>
-            <a:off x="8211312" y="1856232"/>
-            <a:ext cx="2734056" cy="1536192"/>
+            <a:endParaRPr lang="en-US" sz="1300" dirty="0"/>
+          </a:p>
+        </p:txBody>
+      </p:sp>
+      <p:sp>
+        <p:nvSpPr>
+          <p:cNvPr id="12" name="Text 10"/>
+          <p:cNvSpPr/>
+          <p:nvPr/>
+        </p:nvSpPr>
+        <p:spPr>
+          <a:xfrm>
+            <a:off x="8211312" y="1920240"/>
+            <a:ext cx="2734056" cy="1463040"/>
           </a:xfrm>
           <a:prstGeom prst="rect">
             <a:avLst/>
@@ -11920,7 +12807,7 @@
               <a:buNone/>
             </a:pPr>
             <a:r>
-              <a:rPr lang="en-US" sz="1250" dirty="0">
+              <a:rPr lang="en-US" sz="1550" dirty="0">
                 <a:solidFill>
                   <a:srgbClr val="17364A"/>
                 </a:solidFill>
@@ -11930,32 +12817,32 @@
               </a:rPr>
               <a:t>Use linked tools when your department needs a structured worksheet, template, checklist, review process, or documentation artifact.</a:t>
             </a:r>
-            <a:endParaRPr lang="en-US" sz="1250" dirty="0"/>
-          </a:p>
-        </p:txBody>
-      </p:sp>
-      <p:sp>
-        <p:nvSpPr>
-          <p:cNvPr id="12" name="Shape 10"/>
-          <p:cNvSpPr/>
-          <p:nvPr/>
-        </p:nvSpPr>
-        <p:spPr>
-          <a:xfrm>
-            <a:off x="8046720" y="3794760"/>
-            <a:ext cx="3063240" cy="1508760"/>
+            <a:endParaRPr lang="en-US" sz="1550" dirty="0"/>
+          </a:p>
+        </p:txBody>
+      </p:sp>
+      <p:sp>
+        <p:nvSpPr>
+          <p:cNvPr id="13" name="Shape 11"/>
+          <p:cNvSpPr/>
+          <p:nvPr/>
+        </p:nvSpPr>
+        <p:spPr>
+          <a:xfrm>
+            <a:off x="7818120" y="3977640"/>
+            <a:ext cx="972312" cy="749808"/>
           </a:xfrm>
           <a:prstGeom prst="roundRect">
             <a:avLst>
-              <a:gd name="adj" fmla="val 7273"/>
+              <a:gd name="adj" fmla="val 14634"/>
             </a:avLst>
           </a:prstGeom>
           <a:solidFill>
-            <a:srgbClr val="EEF8ED"/>
+            <a:srgbClr val="0068B7"/>
           </a:solidFill>
           <a:ln w="12700">
             <a:solidFill>
-              <a:srgbClr val="B9D7E6"/>
+              <a:srgbClr val="0068B7"/>
             </a:solidFill>
             <a:prstDash val="solid"/>
           </a:ln>
@@ -11963,81 +12850,256 @@
       </p:sp>
       <p:sp>
         <p:nvSpPr>
-          <p:cNvPr id="13" name="Text 11"/>
-          <p:cNvSpPr/>
-          <p:nvPr/>
-        </p:nvSpPr>
-        <p:spPr>
-          <a:xfrm>
-            <a:off x="8211312" y="3941064"/>
-            <a:ext cx="2734056" cy="201168"/>
-          </a:xfrm>
-          <a:prstGeom prst="rect">
-            <a:avLst/>
-          </a:prstGeom>
-          <a:noFill/>
-          <a:ln/>
-        </p:spPr>
-        <p:txBody>
-          <a:bodyPr wrap="square" lIns="0" tIns="0" rIns="0" bIns="0" rtlCol="0" anchor="ctr"/>
-          <a:lstStyle/>
-          <a:p>
-            <a:pPr indent="0" marL="0">
-              <a:buNone/>
-            </a:pPr>
-            <a:r>
-              <a:rPr lang="en-US" sz="950" b="1" dirty="0">
-                <a:solidFill>
-                  <a:srgbClr val="0068B7"/>
-                </a:solidFill>
-                <a:latin typeface="Aptos" pitchFamily="34" charset="0"/>
-                <a:ea typeface="Aptos" pitchFamily="34" charset="-122"/>
-                <a:cs typeface="Aptos" pitchFamily="34" charset="-120"/>
-              </a:rPr>
-              <a:t>Avoid duplication</a:t>
-            </a:r>
-            <a:endParaRPr lang="en-US" sz="950" dirty="0"/>
-          </a:p>
-        </p:txBody>
-      </p:sp>
-      <p:sp>
-        <p:nvSpPr>
           <p:cNvPr id="14" name="Text 12"/>
           <p:cNvSpPr/>
           <p:nvPr/>
         </p:nvSpPr>
         <p:spPr>
           <a:xfrm>
-            <a:off x="8211312" y="4233672"/>
-            <a:ext cx="2734056" cy="941832"/>
-          </a:xfrm>
-          <a:prstGeom prst="rect">
-            <a:avLst/>
-          </a:prstGeom>
-          <a:noFill/>
-          <a:ln/>
-        </p:spPr>
-        <p:txBody>
-          <a:bodyPr wrap="square" lIns="0" tIns="0" rIns="0" bIns="0" rtlCol="0" anchor="t">
+            <a:off x="7891272" y="4169664"/>
+            <a:ext cx="826008" cy="310896"/>
+          </a:xfrm>
+          <a:prstGeom prst="rect">
+            <a:avLst/>
+          </a:prstGeom>
+          <a:noFill/>
+          <a:ln/>
+        </p:spPr>
+        <p:txBody>
+          <a:bodyPr wrap="square" lIns="0" tIns="0" rIns="0" bIns="0" rtlCol="0" anchor="ctr">
             <a:normAutofit/>
           </a:bodyPr>
           <a:lstStyle/>
           <a:p>
-            <a:pPr indent="0" marL="0">
-              <a:buNone/>
-            </a:pPr>
-            <a:r>
-              <a:rPr lang="en-US" sz="1250" dirty="0">
-                <a:solidFill>
-                  <a:srgbClr val="17364A"/>
-                </a:solidFill>
-                <a:latin typeface="Aptos" pitchFamily="34" charset="0"/>
-                <a:ea typeface="Aptos" pitchFamily="34" charset="-122"/>
-                <a:cs typeface="Aptos" pitchFamily="34" charset="-120"/>
-              </a:rPr>
-              <a:t>If your department already has a strong equivalent tool, adapt or use the existing process instead of recreating it.</a:t>
-            </a:r>
-            <a:endParaRPr lang="en-US" sz="1250" dirty="0"/>
+            <a:pPr algn="ctr" indent="0" marL="0">
+              <a:buNone/>
+            </a:pPr>
+            <a:r>
+              <a:rPr lang="en-US" sz="1500" b="1" dirty="0">
+                <a:solidFill>
+                  <a:srgbClr val="FFFFFF"/>
+                </a:solidFill>
+                <a:latin typeface="Aptos" pitchFamily="34" charset="0"/>
+                <a:ea typeface="Aptos" pitchFamily="34" charset="-122"/>
+                <a:cs typeface="Aptos" pitchFamily="34" charset="-120"/>
+              </a:rPr>
+              <a:t>Concept</a:t>
+            </a:r>
+            <a:endParaRPr lang="en-US" sz="1500" dirty="0"/>
+          </a:p>
+        </p:txBody>
+      </p:sp>
+      <p:sp>
+        <p:nvSpPr>
+          <p:cNvPr id="15" name="Text 13"/>
+          <p:cNvSpPr/>
+          <p:nvPr/>
+        </p:nvSpPr>
+        <p:spPr>
+          <a:xfrm>
+            <a:off x="8817864" y="4187952"/>
+            <a:ext cx="201168" cy="256032"/>
+          </a:xfrm>
+          <a:prstGeom prst="rect">
+            <a:avLst/>
+          </a:prstGeom>
+          <a:noFill/>
+          <a:ln/>
+        </p:spPr>
+        <p:txBody>
+          <a:bodyPr wrap="square" lIns="0" tIns="0" rIns="0" bIns="0" rtlCol="0" anchor="ctr"/>
+          <a:lstStyle/>
+          <a:p>
+            <a:pPr algn="ctr" indent="0" marL="0">
+              <a:buNone/>
+            </a:pPr>
+            <a:r>
+              <a:rPr lang="en-US" sz="1800" b="1" dirty="0">
+                <a:solidFill>
+                  <a:srgbClr val="0068B7"/>
+                </a:solidFill>
+                <a:latin typeface="Aptos" pitchFamily="34" charset="0"/>
+                <a:ea typeface="Aptos" pitchFamily="34" charset="-122"/>
+                <a:cs typeface="Aptos" pitchFamily="34" charset="-120"/>
+              </a:rPr>
+              <a:t>â†’</a:t>
+            </a:r>
+            <a:endParaRPr lang="en-US" sz="1800" dirty="0"/>
+          </a:p>
+        </p:txBody>
+      </p:sp>
+      <p:sp>
+        <p:nvSpPr>
+          <p:cNvPr id="16" name="Shape 14"/>
+          <p:cNvSpPr/>
+          <p:nvPr/>
+        </p:nvSpPr>
+        <p:spPr>
+          <a:xfrm>
+            <a:off x="9046464" y="3977640"/>
+            <a:ext cx="972312" cy="749808"/>
+          </a:xfrm>
+          <a:prstGeom prst="roundRect">
+            <a:avLst>
+              <a:gd name="adj" fmla="val 14634"/>
+            </a:avLst>
+          </a:prstGeom>
+          <a:solidFill>
+            <a:srgbClr val="2F8A28"/>
+          </a:solidFill>
+          <a:ln w="12700">
+            <a:solidFill>
+              <a:srgbClr val="2F8A28"/>
+            </a:solidFill>
+            <a:prstDash val="solid"/>
+          </a:ln>
+        </p:spPr>
+      </p:sp>
+      <p:sp>
+        <p:nvSpPr>
+          <p:cNvPr id="17" name="Text 15"/>
+          <p:cNvSpPr/>
+          <p:nvPr/>
+        </p:nvSpPr>
+        <p:spPr>
+          <a:xfrm>
+            <a:off x="9119616" y="4169664"/>
+            <a:ext cx="826008" cy="310896"/>
+          </a:xfrm>
+          <a:prstGeom prst="rect">
+            <a:avLst/>
+          </a:prstGeom>
+          <a:noFill/>
+          <a:ln/>
+        </p:spPr>
+        <p:txBody>
+          <a:bodyPr wrap="square" lIns="0" tIns="0" rIns="0" bIns="0" rtlCol="0" anchor="ctr">
+            <a:normAutofit/>
+          </a:bodyPr>
+          <a:lstStyle/>
+          <a:p>
+            <a:pPr algn="ctr" indent="0" marL="0">
+              <a:buNone/>
+            </a:pPr>
+            <a:r>
+              <a:rPr lang="en-US" sz="1500" b="1" dirty="0">
+                <a:solidFill>
+                  <a:srgbClr val="FFFFFF"/>
+                </a:solidFill>
+                <a:latin typeface="Aptos" pitchFamily="34" charset="0"/>
+                <a:ea typeface="Aptos" pitchFamily="34" charset="-122"/>
+                <a:cs typeface="Aptos" pitchFamily="34" charset="-120"/>
+              </a:rPr>
+              <a:t>Tool</a:t>
+            </a:r>
+            <a:endParaRPr lang="en-US" sz="1500" dirty="0"/>
+          </a:p>
+        </p:txBody>
+      </p:sp>
+      <p:sp>
+        <p:nvSpPr>
+          <p:cNvPr id="18" name="Text 16"/>
+          <p:cNvSpPr/>
+          <p:nvPr/>
+        </p:nvSpPr>
+        <p:spPr>
+          <a:xfrm>
+            <a:off x="10046208" y="4187952"/>
+            <a:ext cx="201168" cy="256032"/>
+          </a:xfrm>
+          <a:prstGeom prst="rect">
+            <a:avLst/>
+          </a:prstGeom>
+          <a:noFill/>
+          <a:ln/>
+        </p:spPr>
+        <p:txBody>
+          <a:bodyPr wrap="square" lIns="0" tIns="0" rIns="0" bIns="0" rtlCol="0" anchor="ctr"/>
+          <a:lstStyle/>
+          <a:p>
+            <a:pPr algn="ctr" indent="0" marL="0">
+              <a:buNone/>
+            </a:pPr>
+            <a:r>
+              <a:rPr lang="en-US" sz="1800" b="1" dirty="0">
+                <a:solidFill>
+                  <a:srgbClr val="0068B7"/>
+                </a:solidFill>
+                <a:latin typeface="Aptos" pitchFamily="34" charset="0"/>
+                <a:ea typeface="Aptos" pitchFamily="34" charset="-122"/>
+                <a:cs typeface="Aptos" pitchFamily="34" charset="-120"/>
+              </a:rPr>
+              <a:t>â†’</a:t>
+            </a:r>
+            <a:endParaRPr lang="en-US" sz="1800" dirty="0"/>
+          </a:p>
+        </p:txBody>
+      </p:sp>
+      <p:sp>
+        <p:nvSpPr>
+          <p:cNvPr id="19" name="Shape 17"/>
+          <p:cNvSpPr/>
+          <p:nvPr/>
+        </p:nvSpPr>
+        <p:spPr>
+          <a:xfrm>
+            <a:off x="10274808" y="3977640"/>
+            <a:ext cx="972312" cy="749808"/>
+          </a:xfrm>
+          <a:prstGeom prst="roundRect">
+            <a:avLst>
+              <a:gd name="adj" fmla="val 14634"/>
+            </a:avLst>
+          </a:prstGeom>
+          <a:solidFill>
+            <a:srgbClr val="D69A2D"/>
+          </a:solidFill>
+          <a:ln w="12700">
+            <a:solidFill>
+              <a:srgbClr val="D69A2D"/>
+            </a:solidFill>
+            <a:prstDash val="solid"/>
+          </a:ln>
+        </p:spPr>
+      </p:sp>
+      <p:sp>
+        <p:nvSpPr>
+          <p:cNvPr id="20" name="Text 18"/>
+          <p:cNvSpPr/>
+          <p:nvPr/>
+        </p:nvSpPr>
+        <p:spPr>
+          <a:xfrm>
+            <a:off x="10347960" y="4169664"/>
+            <a:ext cx="826008" cy="310896"/>
+          </a:xfrm>
+          <a:prstGeom prst="rect">
+            <a:avLst/>
+          </a:prstGeom>
+          <a:noFill/>
+          <a:ln/>
+        </p:spPr>
+        <p:txBody>
+          <a:bodyPr wrap="square" lIns="0" tIns="0" rIns="0" bIns="0" rtlCol="0" anchor="ctr">
+            <a:normAutofit/>
+          </a:bodyPr>
+          <a:lstStyle/>
+          <a:p>
+            <a:pPr algn="ctr" indent="0" marL="0">
+              <a:buNone/>
+            </a:pPr>
+            <a:r>
+              <a:rPr lang="en-US" sz="1500" b="1" dirty="0">
+                <a:solidFill>
+                  <a:srgbClr val="FFFFFF"/>
+                </a:solidFill>
+                <a:latin typeface="Aptos" pitchFamily="34" charset="0"/>
+                <a:ea typeface="Aptos" pitchFamily="34" charset="-122"/>
+                <a:cs typeface="Aptos" pitchFamily="34" charset="-120"/>
+              </a:rPr>
+              <a:t>Artifact</a:t>
+            </a:r>
+            <a:endParaRPr lang="en-US" sz="1500" dirty="0"/>
           </a:p>
         </p:txBody>
       </p:sp>
@@ -12234,7 +13296,7 @@
                 <a:ea typeface="Aptos" pitchFamily="34" charset="-122"/>
                 <a:cs typeface="Aptos" pitchFamily="34" charset="-120"/>
               </a:rPr>
-              <a:t>© Paula Soper</a:t>
+              <a:t>Â© Paula Soper</a:t>
             </a:r>
             <a:endParaRPr lang="en-US" sz="800" dirty="0"/>
           </a:p>
@@ -12242,7 +13304,46 @@
       </p:sp>
       <p:sp>
         <p:nvSpPr>
-          <p:cNvPr id="7" name="Shape 5"/>
+          <p:cNvPr id="7" name="Text 5"/>
+          <p:cNvSpPr/>
+          <p:nvPr/>
+        </p:nvSpPr>
+        <p:spPr>
+          <a:xfrm>
+            <a:off x="11137392" y="6510528"/>
+            <a:ext cx="411480" cy="201168"/>
+          </a:xfrm>
+          <a:prstGeom prst="rect">
+            <a:avLst/>
+          </a:prstGeom>
+          <a:noFill/>
+          <a:ln/>
+        </p:spPr>
+        <p:txBody>
+          <a:bodyPr wrap="square" lIns="0" tIns="0" rIns="0" bIns="0" rtlCol="0" anchor="ctr"/>
+          <a:lstStyle/>
+          <a:p>
+            <a:pPr algn="r" indent="0" marL="0">
+              <a:buNone/>
+            </a:pPr>
+            <a:r>
+              <a:rPr lang="en-US" sz="900" dirty="0">
+                <a:solidFill>
+                  <a:srgbClr val="5F7181"/>
+                </a:solidFill>
+                <a:latin typeface="Aptos" pitchFamily="34" charset="0"/>
+                <a:ea typeface="Aptos" pitchFamily="34" charset="-122"/>
+                <a:cs typeface="Aptos" pitchFamily="34" charset="-120"/>
+              </a:rPr>
+              <a:t>5</a:t>
+            </a:r>
+            <a:endParaRPr lang="en-US" sz="900" dirty="0"/>
+          </a:p>
+        </p:txBody>
+      </p:sp>
+      <p:sp>
+        <p:nvSpPr>
+          <p:cNvPr id="8" name="Shape 6"/>
           <p:cNvSpPr/>
           <p:nvPr/>
         </p:nvSpPr>
@@ -12267,7 +13368,7 @@
       </p:sp>
       <p:sp>
         <p:nvSpPr>
-          <p:cNvPr id="8" name="Text 6"/>
+          <p:cNvPr id="9" name="Text 7"/>
           <p:cNvSpPr/>
           <p:nvPr/>
         </p:nvSpPr>
@@ -12306,14 +13407,14 @@
       </p:sp>
       <p:sp>
         <p:nvSpPr>
-          <p:cNvPr id="9" name="Text 7"/>
+          <p:cNvPr id="10" name="Text 8"/>
           <p:cNvSpPr/>
           <p:nvPr/>
         </p:nvSpPr>
         <p:spPr>
           <a:xfrm>
             <a:off x="640080" y="621792"/>
-            <a:ext cx="10881360" cy="566928"/>
+            <a:ext cx="10881360" cy="713232"/>
           </a:xfrm>
           <a:prstGeom prst="rect">
             <a:avLst/>
@@ -12331,7 +13432,7 @@
               <a:buNone/>
             </a:pPr>
             <a:r>
-              <a:rPr lang="en-US" sz="2700" b="1" dirty="0">
+              <a:rPr lang="en-US" sz="3400" b="1" dirty="0">
                 <a:solidFill>
                   <a:srgbClr val="003A63"/>
                 </a:solidFill>
@@ -12341,20 +13442,20 @@
               </a:rPr>
               <a:t>Learning Objectives</a:t>
             </a:r>
-            <a:endParaRPr lang="en-US" sz="2700" dirty="0"/>
-          </a:p>
-        </p:txBody>
-      </p:sp>
-      <p:sp>
-        <p:nvSpPr>
-          <p:cNvPr id="10" name="Text 8"/>
-          <p:cNvSpPr/>
-          <p:nvPr/>
-        </p:nvSpPr>
-        <p:spPr>
-          <a:xfrm>
-            <a:off x="868680" y="1417320"/>
-            <a:ext cx="6675120" cy="4434840"/>
+            <a:endParaRPr lang="en-US" sz="3400" dirty="0"/>
+          </a:p>
+        </p:txBody>
+      </p:sp>
+      <p:sp>
+        <p:nvSpPr>
+          <p:cNvPr id="11" name="Text 9"/>
+          <p:cNvSpPr/>
+          <p:nvPr/>
+        </p:nvSpPr>
+        <p:spPr>
+          <a:xfrm>
+            <a:off x="868680" y="1508760"/>
+            <a:ext cx="6537960" cy="4160520"/>
           </a:xfrm>
           <a:prstGeom prst="rect">
             <a:avLst/>
@@ -12369,7 +13470,7 @@
           <a:lstStyle/>
           <a:p>
             <a:r>
-              <a:rPr lang="en-US" sz="1700" dirty="0">
+              <a:rPr lang="en-US" sz="2100" dirty="0">
                 <a:solidFill>
                   <a:srgbClr val="17364A"/>
                 </a:solidFill>
@@ -12379,11 +13480,11 @@
               </a:rPr>
               <a:t>Explain why generative AI outputs require structured review before public health use.</a:t>
             </a:r>
-            <a:endParaRPr lang="en-US" sz="1700" dirty="0"/>
-          </a:p>
-          <a:p>
-            <a:r>
-              <a:rPr lang="en-US" sz="1700" dirty="0">
+            <a:endParaRPr lang="en-US" sz="2100" dirty="0"/>
+          </a:p>
+          <a:p>
+            <a:r>
+              <a:rPr lang="en-US" sz="2100" dirty="0">
                 <a:solidFill>
                   <a:srgbClr val="17364A"/>
                 </a:solidFill>
@@ -12393,11 +13494,11 @@
               </a:rPr>
               <a:t>Distinguish factuality, source grounding, completeness, relevance, tone, and accessibility.</a:t>
             </a:r>
-            <a:endParaRPr lang="en-US" sz="1700" dirty="0"/>
-          </a:p>
-          <a:p>
-            <a:r>
-              <a:rPr lang="en-US" sz="1700" dirty="0">
+            <a:endParaRPr lang="en-US" sz="2100" dirty="0"/>
+          </a:p>
+          <a:p>
+            <a:r>
+              <a:rPr lang="en-US" sz="2100" dirty="0">
                 <a:solidFill>
                   <a:srgbClr val="17364A"/>
                 </a:solidFill>
@@ -12407,27 +13508,13 @@
               </a:rPr>
               <a:t>Identify hallucinations, omissions, unsupported claims, and misleading certainty.</a:t>
             </a:r>
-            <a:endParaRPr lang="en-US" sz="1700" dirty="0"/>
-          </a:p>
-          <a:p>
-            <a:r>
-              <a:rPr lang="en-US" sz="1700" dirty="0">
-                <a:solidFill>
-                  <a:srgbClr val="17364A"/>
-                </a:solidFill>
-                <a:latin typeface="Aptos" pitchFamily="34" charset="0"/>
-                <a:ea typeface="Aptos" pitchFamily="34" charset="-122"/>
-                <a:cs typeface="Aptos" pitchFamily="34" charset="-120"/>
-              </a:rPr>
-              <a:t>Design review criteria for different output types, including summaries, drafts, classifications, and recommendations.</a:t>
-            </a:r>
-            <a:endParaRPr lang="en-US" sz="1700" dirty="0"/>
-          </a:p>
-        </p:txBody>
-      </p:sp>
-      <p:sp>
-        <p:nvSpPr>
-          <p:cNvPr id="11" name="Shape 9"/>
+            <a:endParaRPr lang="en-US" sz="2100" dirty="0"/>
+          </a:p>
+        </p:txBody>
+      </p:sp>
+      <p:sp>
+        <p:nvSpPr>
+          <p:cNvPr id="12" name="Shape 10"/>
           <p:cNvSpPr/>
           <p:nvPr/>
         </p:nvSpPr>
@@ -12454,14 +13541,14 @@
       </p:sp>
       <p:sp>
         <p:nvSpPr>
-          <p:cNvPr id="12" name="Text 10"/>
+          <p:cNvPr id="13" name="Text 11"/>
           <p:cNvSpPr/>
           <p:nvPr/>
         </p:nvSpPr>
         <p:spPr>
           <a:xfrm>
             <a:off x="8074152" y="1563624"/>
-            <a:ext cx="2825496" cy="201168"/>
+            <a:ext cx="2825496" cy="256032"/>
           </a:xfrm>
           <a:prstGeom prst="rect">
             <a:avLst/>
@@ -12477,7 +13564,7 @@
               <a:buNone/>
             </a:pPr>
             <a:r>
-              <a:rPr lang="en-US" sz="950" b="1" dirty="0">
+              <a:rPr lang="en-US" sz="1300" b="1" dirty="0">
                 <a:solidFill>
                   <a:srgbClr val="0068B7"/>
                 </a:solidFill>
@@ -12487,20 +13574,20 @@
               </a:rPr>
               <a:t>Key idea</a:t>
             </a:r>
-            <a:endParaRPr lang="en-US" sz="950" dirty="0"/>
-          </a:p>
-        </p:txBody>
-      </p:sp>
-      <p:sp>
-        <p:nvSpPr>
-          <p:cNvPr id="13" name="Text 11"/>
-          <p:cNvSpPr/>
-          <p:nvPr/>
-        </p:nvSpPr>
-        <p:spPr>
-          <a:xfrm>
-            <a:off x="8074152" y="1856232"/>
-            <a:ext cx="2825496" cy="1261872"/>
+            <a:endParaRPr lang="en-US" sz="1300" dirty="0"/>
+          </a:p>
+        </p:txBody>
+      </p:sp>
+      <p:sp>
+        <p:nvSpPr>
+          <p:cNvPr id="14" name="Text 12"/>
+          <p:cNvSpPr/>
+          <p:nvPr/>
+        </p:nvSpPr>
+        <p:spPr>
+          <a:xfrm>
+            <a:off x="8074152" y="1920240"/>
+            <a:ext cx="2825496" cy="1188720"/>
           </a:xfrm>
           <a:prstGeom prst="rect">
             <a:avLst/>
@@ -12518,7 +13605,7 @@
               <a:buNone/>
             </a:pPr>
             <a:r>
-              <a:rPr lang="en-US" sz="1250" dirty="0">
+              <a:rPr lang="en-US" sz="1550" dirty="0">
                 <a:solidFill>
                   <a:srgbClr val="17364A"/>
                 </a:solidFill>
@@ -12528,13 +13615,13 @@
               </a:rPr>
               <a:t>Explain why generative AI outputs require structured review before public health use.</a:t>
             </a:r>
-            <a:endParaRPr lang="en-US" sz="1250" dirty="0"/>
-          </a:p>
-        </p:txBody>
-      </p:sp>
-      <p:sp>
-        <p:nvSpPr>
-          <p:cNvPr id="14" name="Shape 12"/>
+            <a:endParaRPr lang="en-US" sz="1550" dirty="0"/>
+          </a:p>
+        </p:txBody>
+      </p:sp>
+      <p:sp>
+        <p:nvSpPr>
+          <p:cNvPr id="15" name="Shape 13"/>
           <p:cNvSpPr/>
           <p:nvPr/>
         </p:nvSpPr>
@@ -12561,14 +13648,14 @@
       </p:sp>
       <p:sp>
         <p:nvSpPr>
-          <p:cNvPr id="15" name="Text 13"/>
+          <p:cNvPr id="16" name="Text 14"/>
           <p:cNvSpPr/>
           <p:nvPr/>
         </p:nvSpPr>
         <p:spPr>
           <a:xfrm>
             <a:off x="8074152" y="3666744"/>
-            <a:ext cx="2825496" cy="201168"/>
+            <a:ext cx="2825496" cy="256032"/>
           </a:xfrm>
           <a:prstGeom prst="rect">
             <a:avLst/>
@@ -12584,7 +13671,7 @@
               <a:buNone/>
             </a:pPr>
             <a:r>
-              <a:rPr lang="en-US" sz="950" b="1" dirty="0">
+              <a:rPr lang="en-US" sz="1300" b="1" dirty="0">
                 <a:solidFill>
                   <a:srgbClr val="0068B7"/>
                 </a:solidFill>
@@ -12594,20 +13681,20 @@
               </a:rPr>
               <a:t>Use this for</a:t>
             </a:r>
-            <a:endParaRPr lang="en-US" sz="950" dirty="0"/>
-          </a:p>
-        </p:txBody>
-      </p:sp>
-      <p:sp>
-        <p:nvSpPr>
-          <p:cNvPr id="16" name="Text 14"/>
-          <p:cNvSpPr/>
-          <p:nvPr/>
-        </p:nvSpPr>
-        <p:spPr>
-          <a:xfrm>
-            <a:off x="8074152" y="3959352"/>
-            <a:ext cx="2825496" cy="1170432"/>
+            <a:endParaRPr lang="en-US" sz="1300" dirty="0"/>
+          </a:p>
+        </p:txBody>
+      </p:sp>
+      <p:sp>
+        <p:nvSpPr>
+          <p:cNvPr id="17" name="Text 15"/>
+          <p:cNvSpPr/>
+          <p:nvPr/>
+        </p:nvSpPr>
+        <p:spPr>
+          <a:xfrm>
+            <a:off x="8074152" y="4023360"/>
+            <a:ext cx="2825496" cy="1097280"/>
           </a:xfrm>
           <a:prstGeom prst="rect">
             <a:avLst/>
@@ -12625,7 +13712,7 @@
               <a:buNone/>
             </a:pPr>
             <a:r>
-              <a:rPr lang="en-US" sz="1250" dirty="0">
+              <a:rPr lang="en-US" sz="1550" dirty="0">
                 <a:solidFill>
                   <a:srgbClr val="17364A"/>
                 </a:solidFill>
@@ -12635,7 +13722,7 @@
               </a:rPr>
               <a:t>Connect the concept to public health decisions, safeguards, documentation, or implementation work.</a:t>
             </a:r>
-            <a:endParaRPr lang="en-US" sz="1250" dirty="0"/>
+            <a:endParaRPr lang="en-US" sz="1550" dirty="0"/>
           </a:p>
         </p:txBody>
       </p:sp>
@@ -12832,7 +13919,7 @@
                 <a:ea typeface="Aptos" pitchFamily="34" charset="-122"/>
                 <a:cs typeface="Aptos" pitchFamily="34" charset="-120"/>
               </a:rPr>
-              <a:t>© Paula Soper</a:t>
+              <a:t>Â© Paula Soper</a:t>
             </a:r>
             <a:endParaRPr lang="en-US" sz="800" dirty="0"/>
           </a:p>
@@ -12846,8 +13933,47 @@
         </p:nvSpPr>
         <p:spPr>
           <a:xfrm>
+            <a:off x="11137392" y="6510528"/>
+            <a:ext cx="411480" cy="201168"/>
+          </a:xfrm>
+          <a:prstGeom prst="rect">
+            <a:avLst/>
+          </a:prstGeom>
+          <a:noFill/>
+          <a:ln/>
+        </p:spPr>
+        <p:txBody>
+          <a:bodyPr wrap="square" lIns="0" tIns="0" rIns="0" bIns="0" rtlCol="0" anchor="ctr"/>
+          <a:lstStyle/>
+          <a:p>
+            <a:pPr algn="r" indent="0" marL="0">
+              <a:buNone/>
+            </a:pPr>
+            <a:r>
+              <a:rPr lang="en-US" sz="900" dirty="0">
+                <a:solidFill>
+                  <a:srgbClr val="5F7181"/>
+                </a:solidFill>
+                <a:latin typeface="Aptos" pitchFamily="34" charset="0"/>
+                <a:ea typeface="Aptos" pitchFamily="34" charset="-122"/>
+                <a:cs typeface="Aptos" pitchFamily="34" charset="-120"/>
+              </a:rPr>
+              <a:t>6</a:t>
+            </a:r>
+            <a:endParaRPr lang="en-US" sz="900" dirty="0"/>
+          </a:p>
+        </p:txBody>
+      </p:sp>
+      <p:sp>
+        <p:nvSpPr>
+          <p:cNvPr id="8" name="Text 6"/>
+          <p:cNvSpPr/>
+          <p:nvPr/>
+        </p:nvSpPr>
+        <p:spPr>
+          <a:xfrm>
             <a:off x="640080" y="658368"/>
-            <a:ext cx="10881360" cy="566928"/>
+            <a:ext cx="10881360" cy="713232"/>
           </a:xfrm>
           <a:prstGeom prst="rect">
             <a:avLst/>
@@ -12865,7 +13991,7 @@
               <a:buNone/>
             </a:pPr>
             <a:r>
-              <a:rPr lang="en-US" sz="2700" b="1" dirty="0">
+              <a:rPr lang="en-US" sz="3400" b="1" dirty="0">
                 <a:solidFill>
                   <a:srgbClr val="003A63"/>
                 </a:solidFill>
@@ -12875,20 +14001,20 @@
               </a:rPr>
               <a:t>Learning Objectives Continued</a:t>
             </a:r>
-            <a:endParaRPr lang="en-US" sz="2700" dirty="0"/>
-          </a:p>
-        </p:txBody>
-      </p:sp>
-      <p:sp>
-        <p:nvSpPr>
-          <p:cNvPr id="8" name="Text 6"/>
-          <p:cNvSpPr/>
-          <p:nvPr/>
-        </p:nvSpPr>
-        <p:spPr>
-          <a:xfrm>
-            <a:off x="868680" y="1417320"/>
-            <a:ext cx="6675120" cy="4434840"/>
+            <a:endParaRPr lang="en-US" sz="3400" dirty="0"/>
+          </a:p>
+        </p:txBody>
+      </p:sp>
+      <p:sp>
+        <p:nvSpPr>
+          <p:cNvPr id="9" name="Text 7"/>
+          <p:cNvSpPr/>
+          <p:nvPr/>
+        </p:nvSpPr>
+        <p:spPr>
+          <a:xfrm>
+            <a:off x="868680" y="1508760"/>
+            <a:ext cx="6537960" cy="4160520"/>
           </a:xfrm>
           <a:prstGeom prst="rect">
             <a:avLst/>
@@ -12903,7 +14029,7 @@
           <a:lstStyle/>
           <a:p>
             <a:r>
-              <a:rPr lang="en-US" sz="1700" dirty="0">
+              <a:rPr lang="en-US" sz="2100" dirty="0">
                 <a:solidFill>
                   <a:srgbClr val="17364A"/>
                 </a:solidFill>
@@ -12913,13 +14039,13 @@
               </a:rPr>
               <a:t>Produce a generative AI output evaluation rubric.</a:t>
             </a:r>
-            <a:endParaRPr lang="en-US" sz="1700" dirty="0"/>
-          </a:p>
-        </p:txBody>
-      </p:sp>
-      <p:sp>
-        <p:nvSpPr>
-          <p:cNvPr id="9" name="Shape 7"/>
+            <a:endParaRPr lang="en-US" sz="2100" dirty="0"/>
+          </a:p>
+        </p:txBody>
+      </p:sp>
+      <p:sp>
+        <p:nvSpPr>
+          <p:cNvPr id="10" name="Shape 8"/>
           <p:cNvSpPr/>
           <p:nvPr/>
         </p:nvSpPr>
@@ -12946,14 +14072,14 @@
       </p:sp>
       <p:sp>
         <p:nvSpPr>
-          <p:cNvPr id="10" name="Text 8"/>
+          <p:cNvPr id="11" name="Text 9"/>
           <p:cNvSpPr/>
           <p:nvPr/>
         </p:nvSpPr>
         <p:spPr>
           <a:xfrm>
             <a:off x="8074152" y="1563624"/>
-            <a:ext cx="2825496" cy="201168"/>
+            <a:ext cx="2825496" cy="256032"/>
           </a:xfrm>
           <a:prstGeom prst="rect">
             <a:avLst/>
@@ -12969,7 +14095,7 @@
               <a:buNone/>
             </a:pPr>
             <a:r>
-              <a:rPr lang="en-US" sz="950" b="1" dirty="0">
+              <a:rPr lang="en-US" sz="1300" b="1" dirty="0">
                 <a:solidFill>
                   <a:srgbClr val="0068B7"/>
                 </a:solidFill>
@@ -12979,20 +14105,20 @@
               </a:rPr>
               <a:t>Key idea</a:t>
             </a:r>
-            <a:endParaRPr lang="en-US" sz="950" dirty="0"/>
-          </a:p>
-        </p:txBody>
-      </p:sp>
-      <p:sp>
-        <p:nvSpPr>
-          <p:cNvPr id="11" name="Text 9"/>
-          <p:cNvSpPr/>
-          <p:nvPr/>
-        </p:nvSpPr>
-        <p:spPr>
-          <a:xfrm>
-            <a:off x="8074152" y="1856232"/>
-            <a:ext cx="2825496" cy="1261872"/>
+            <a:endParaRPr lang="en-US" sz="1300" dirty="0"/>
+          </a:p>
+        </p:txBody>
+      </p:sp>
+      <p:sp>
+        <p:nvSpPr>
+          <p:cNvPr id="12" name="Text 10"/>
+          <p:cNvSpPr/>
+          <p:nvPr/>
+        </p:nvSpPr>
+        <p:spPr>
+          <a:xfrm>
+            <a:off x="8074152" y="1920240"/>
+            <a:ext cx="2825496" cy="1188720"/>
           </a:xfrm>
           <a:prstGeom prst="rect">
             <a:avLst/>
@@ -13010,7 +14136,7 @@
               <a:buNone/>
             </a:pPr>
             <a:r>
-              <a:rPr lang="en-US" sz="1250" dirty="0">
+              <a:rPr lang="en-US" sz="1550" dirty="0">
                 <a:solidFill>
                   <a:srgbClr val="17364A"/>
                 </a:solidFill>
@@ -13020,13 +14146,13 @@
               </a:rPr>
               <a:t>Produce a generative AI output evaluation rubric.</a:t>
             </a:r>
-            <a:endParaRPr lang="en-US" sz="1250" dirty="0"/>
-          </a:p>
-        </p:txBody>
-      </p:sp>
-      <p:sp>
-        <p:nvSpPr>
-          <p:cNvPr id="12" name="Shape 10"/>
+            <a:endParaRPr lang="en-US" sz="1550" dirty="0"/>
+          </a:p>
+        </p:txBody>
+      </p:sp>
+      <p:sp>
+        <p:nvSpPr>
+          <p:cNvPr id="13" name="Shape 11"/>
           <p:cNvSpPr/>
           <p:nvPr/>
         </p:nvSpPr>
@@ -13053,14 +14179,14 @@
       </p:sp>
       <p:sp>
         <p:nvSpPr>
-          <p:cNvPr id="13" name="Text 11"/>
+          <p:cNvPr id="14" name="Text 12"/>
           <p:cNvSpPr/>
           <p:nvPr/>
         </p:nvSpPr>
         <p:spPr>
           <a:xfrm>
             <a:off x="8074152" y="3666744"/>
-            <a:ext cx="2825496" cy="201168"/>
+            <a:ext cx="2825496" cy="256032"/>
           </a:xfrm>
           <a:prstGeom prst="rect">
             <a:avLst/>
@@ -13076,7 +14202,7 @@
               <a:buNone/>
             </a:pPr>
             <a:r>
-              <a:rPr lang="en-US" sz="950" b="1" dirty="0">
+              <a:rPr lang="en-US" sz="1300" b="1" dirty="0">
                 <a:solidFill>
                   <a:srgbClr val="0068B7"/>
                 </a:solidFill>
@@ -13086,20 +14212,20 @@
               </a:rPr>
               <a:t>Use this for</a:t>
             </a:r>
-            <a:endParaRPr lang="en-US" sz="950" dirty="0"/>
-          </a:p>
-        </p:txBody>
-      </p:sp>
-      <p:sp>
-        <p:nvSpPr>
-          <p:cNvPr id="14" name="Text 12"/>
-          <p:cNvSpPr/>
-          <p:nvPr/>
-        </p:nvSpPr>
-        <p:spPr>
-          <a:xfrm>
-            <a:off x="8074152" y="3959352"/>
-            <a:ext cx="2825496" cy="1170432"/>
+            <a:endParaRPr lang="en-US" sz="1300" dirty="0"/>
+          </a:p>
+        </p:txBody>
+      </p:sp>
+      <p:sp>
+        <p:nvSpPr>
+          <p:cNvPr id="15" name="Text 13"/>
+          <p:cNvSpPr/>
+          <p:nvPr/>
+        </p:nvSpPr>
+        <p:spPr>
+          <a:xfrm>
+            <a:off x="8074152" y="4023360"/>
+            <a:ext cx="2825496" cy="1097280"/>
           </a:xfrm>
           <a:prstGeom prst="rect">
             <a:avLst/>
@@ -13117,7 +14243,7 @@
               <a:buNone/>
             </a:pPr>
             <a:r>
-              <a:rPr lang="en-US" sz="1250" dirty="0">
+              <a:rPr lang="en-US" sz="1550" dirty="0">
                 <a:solidFill>
                   <a:srgbClr val="17364A"/>
                 </a:solidFill>
@@ -13127,7 +14253,7 @@
               </a:rPr>
               <a:t>Connect the concept to public health decisions, safeguards, documentation, or implementation work.</a:t>
             </a:r>
-            <a:endParaRPr lang="en-US" sz="1250" dirty="0"/>
+            <a:endParaRPr lang="en-US" sz="1550" dirty="0"/>
           </a:p>
         </p:txBody>
       </p:sp>
@@ -13324,7 +14450,7 @@
                 <a:ea typeface="Aptos" pitchFamily="34" charset="-122"/>
                 <a:cs typeface="Aptos" pitchFamily="34" charset="-120"/>
               </a:rPr>
-              <a:t>© Paula Soper</a:t>
+              <a:t>Â© Paula Soper</a:t>
             </a:r>
             <a:endParaRPr lang="en-US" sz="800" dirty="0"/>
           </a:p>
@@ -13332,7 +14458,46 @@
       </p:sp>
       <p:sp>
         <p:nvSpPr>
-          <p:cNvPr id="7" name="Shape 5"/>
+          <p:cNvPr id="7" name="Text 5"/>
+          <p:cNvSpPr/>
+          <p:nvPr/>
+        </p:nvSpPr>
+        <p:spPr>
+          <a:xfrm>
+            <a:off x="11137392" y="6510528"/>
+            <a:ext cx="411480" cy="201168"/>
+          </a:xfrm>
+          <a:prstGeom prst="rect">
+            <a:avLst/>
+          </a:prstGeom>
+          <a:noFill/>
+          <a:ln/>
+        </p:spPr>
+        <p:txBody>
+          <a:bodyPr wrap="square" lIns="0" tIns="0" rIns="0" bIns="0" rtlCol="0" anchor="ctr"/>
+          <a:lstStyle/>
+          <a:p>
+            <a:pPr algn="r" indent="0" marL="0">
+              <a:buNone/>
+            </a:pPr>
+            <a:r>
+              <a:rPr lang="en-US" sz="900" dirty="0">
+                <a:solidFill>
+                  <a:srgbClr val="5F7181"/>
+                </a:solidFill>
+                <a:latin typeface="Aptos" pitchFamily="34" charset="0"/>
+                <a:ea typeface="Aptos" pitchFamily="34" charset="-122"/>
+                <a:cs typeface="Aptos" pitchFamily="34" charset="-120"/>
+              </a:rPr>
+              <a:t>7</a:t>
+            </a:r>
+            <a:endParaRPr lang="en-US" sz="900" dirty="0"/>
+          </a:p>
+        </p:txBody>
+      </p:sp>
+      <p:sp>
+        <p:nvSpPr>
+          <p:cNvPr id="8" name="Shape 6"/>
           <p:cNvSpPr/>
           <p:nvPr/>
         </p:nvSpPr>
@@ -13357,7 +14522,7 @@
       </p:sp>
       <p:sp>
         <p:nvSpPr>
-          <p:cNvPr id="8" name="Text 6"/>
+          <p:cNvPr id="9" name="Text 7"/>
           <p:cNvSpPr/>
           <p:nvPr/>
         </p:nvSpPr>
@@ -13396,14 +14561,14 @@
       </p:sp>
       <p:sp>
         <p:nvSpPr>
-          <p:cNvPr id="9" name="Text 7"/>
+          <p:cNvPr id="10" name="Text 8"/>
           <p:cNvSpPr/>
           <p:nvPr/>
         </p:nvSpPr>
         <p:spPr>
           <a:xfrm>
             <a:off x="640080" y="621792"/>
-            <a:ext cx="10881360" cy="566928"/>
+            <a:ext cx="10881360" cy="713232"/>
           </a:xfrm>
           <a:prstGeom prst="rect">
             <a:avLst/>
@@ -13421,7 +14586,7 @@
               <a:buNone/>
             </a:pPr>
             <a:r>
-              <a:rPr lang="en-US" sz="2700" b="1" dirty="0">
+              <a:rPr lang="en-US" sz="3400" b="1" dirty="0">
                 <a:solidFill>
                   <a:srgbClr val="003A63"/>
                 </a:solidFill>
@@ -13431,20 +14596,20 @@
               </a:rPr>
               <a:t>Module Overview</a:t>
             </a:r>
-            <a:endParaRPr lang="en-US" sz="2700" dirty="0"/>
-          </a:p>
-        </p:txBody>
-      </p:sp>
-      <p:sp>
-        <p:nvSpPr>
-          <p:cNvPr id="10" name="Text 8"/>
-          <p:cNvSpPr/>
-          <p:nvPr/>
-        </p:nvSpPr>
-        <p:spPr>
-          <a:xfrm>
-            <a:off x="868680" y="1417320"/>
-            <a:ext cx="6675120" cy="4434840"/>
+            <a:endParaRPr lang="en-US" sz="3400" dirty="0"/>
+          </a:p>
+        </p:txBody>
+      </p:sp>
+      <p:sp>
+        <p:nvSpPr>
+          <p:cNvPr id="11" name="Text 9"/>
+          <p:cNvSpPr/>
+          <p:nvPr/>
+        </p:nvSpPr>
+        <p:spPr>
+          <a:xfrm>
+            <a:off x="868680" y="1508760"/>
+            <a:ext cx="6537960" cy="4160520"/>
           </a:xfrm>
           <a:prstGeom prst="rect">
             <a:avLst/>
@@ -13459,7 +14624,7 @@
           <a:lstStyle/>
           <a:p>
             <a:r>
-              <a:rPr lang="en-US" sz="1700" dirty="0">
+              <a:rPr lang="en-US" sz="2100" dirty="0">
                 <a:solidFill>
                   <a:srgbClr val="17364A"/>
                 </a:solidFill>
@@ -13467,13 +14632,13 @@
                 <a:ea typeface="Aptos" pitchFamily="34" charset="-122"/>
                 <a:cs typeface="Aptos" pitchFamily="34" charset="-120"/>
               </a:rPr>
-              <a:t>Generative AI can draft, summarize, translate, classify, explain, and synthesize information, but its outputs require.</a:t>
-            </a:r>
-            <a:endParaRPr lang="en-US" sz="1700" dirty="0"/>
-          </a:p>
-          <a:p>
-            <a:r>
-              <a:rPr lang="en-US" sz="1700" dirty="0">
+              <a:t>Generative AI can draft, summarize, translate, classify, explain, and synthesize information, but its.</a:t>
+            </a:r>
+            <a:endParaRPr lang="en-US" sz="2100" dirty="0"/>
+          </a:p>
+          <a:p>
+            <a:r>
+              <a:rPr lang="en-US" sz="2100" dirty="0">
                 <a:solidFill>
                   <a:srgbClr val="17364A"/>
                 </a:solidFill>
@@ -13481,13 +14646,13 @@
                 <a:ea typeface="Aptos" pitchFamily="34" charset="-122"/>
                 <a:cs typeface="Aptos" pitchFamily="34" charset="-120"/>
               </a:rPr>
-              <a:t>In public health, generated content may affect case review, public communication, policy interpretation, community trust,.</a:t>
-            </a:r>
-            <a:endParaRPr lang="en-US" sz="1700" dirty="0"/>
-          </a:p>
-          <a:p>
-            <a:r>
-              <a:rPr lang="en-US" sz="1700" dirty="0">
+              <a:t>In public health, generated content may affect case review, public communication, policy.</a:t>
+            </a:r>
+            <a:endParaRPr lang="en-US" sz="2100" dirty="0"/>
+          </a:p>
+          <a:p>
+            <a:r>
+              <a:rPr lang="en-US" sz="2100" dirty="0">
                 <a:solidFill>
                   <a:srgbClr val="17364A"/>
                 </a:solidFill>
@@ -13497,27 +14662,13 @@
               </a:rPr>
               <a:t>Fluent writing does not guarantee accuracy, completeness, appropriateness, or safety.</a:t>
             </a:r>
-            <a:endParaRPr lang="en-US" sz="1700" dirty="0"/>
-          </a:p>
-          <a:p>
-            <a:r>
-              <a:rPr lang="en-US" sz="1700" dirty="0">
-                <a:solidFill>
-                  <a:srgbClr val="17364A"/>
-                </a:solidFill>
-                <a:latin typeface="Aptos" pitchFamily="34" charset="0"/>
-                <a:ea typeface="Aptos" pitchFamily="34" charset="-122"/>
-                <a:cs typeface="Aptos" pitchFamily="34" charset="-120"/>
-              </a:rPr>
-              <a:t>This module teaches learners how to evaluate generative AI outputs using structured review criteria.</a:t>
-            </a:r>
-            <a:endParaRPr lang="en-US" sz="1700" dirty="0"/>
-          </a:p>
-        </p:txBody>
-      </p:sp>
-      <p:sp>
-        <p:nvSpPr>
-          <p:cNvPr id="11" name="Shape 9"/>
+            <a:endParaRPr lang="en-US" sz="2100" dirty="0"/>
+          </a:p>
+        </p:txBody>
+      </p:sp>
+      <p:sp>
+        <p:nvSpPr>
+          <p:cNvPr id="12" name="Shape 10"/>
           <p:cNvSpPr/>
           <p:nvPr/>
         </p:nvSpPr>
@@ -13544,14 +14695,14 @@
       </p:sp>
       <p:sp>
         <p:nvSpPr>
-          <p:cNvPr id="12" name="Text 10"/>
+          <p:cNvPr id="13" name="Text 11"/>
           <p:cNvSpPr/>
           <p:nvPr/>
         </p:nvSpPr>
         <p:spPr>
           <a:xfrm>
             <a:off x="8074152" y="1563624"/>
-            <a:ext cx="2825496" cy="201168"/>
+            <a:ext cx="2825496" cy="256032"/>
           </a:xfrm>
           <a:prstGeom prst="rect">
             <a:avLst/>
@@ -13567,7 +14718,7 @@
               <a:buNone/>
             </a:pPr>
             <a:r>
-              <a:rPr lang="en-US" sz="950" b="1" dirty="0">
+              <a:rPr lang="en-US" sz="1300" b="1" dirty="0">
                 <a:solidFill>
                   <a:srgbClr val="0068B7"/>
                 </a:solidFill>
@@ -13577,20 +14728,20 @@
               </a:rPr>
               <a:t>Key idea</a:t>
             </a:r>
-            <a:endParaRPr lang="en-US" sz="950" dirty="0"/>
-          </a:p>
-        </p:txBody>
-      </p:sp>
-      <p:sp>
-        <p:nvSpPr>
-          <p:cNvPr id="13" name="Text 11"/>
-          <p:cNvSpPr/>
-          <p:nvPr/>
-        </p:nvSpPr>
-        <p:spPr>
-          <a:xfrm>
-            <a:off x="8074152" y="1856232"/>
-            <a:ext cx="2825496" cy="1261872"/>
+            <a:endParaRPr lang="en-US" sz="1300" dirty="0"/>
+          </a:p>
+        </p:txBody>
+      </p:sp>
+      <p:sp>
+        <p:nvSpPr>
+          <p:cNvPr id="14" name="Text 12"/>
+          <p:cNvSpPr/>
+          <p:nvPr/>
+        </p:nvSpPr>
+        <p:spPr>
+          <a:xfrm>
+            <a:off x="8074152" y="1920240"/>
+            <a:ext cx="2825496" cy="1188720"/>
           </a:xfrm>
           <a:prstGeom prst="rect">
             <a:avLst/>
@@ -13608,7 +14759,7 @@
               <a:buNone/>
             </a:pPr>
             <a:r>
-              <a:rPr lang="en-US" sz="1250" dirty="0">
+              <a:rPr lang="en-US" sz="1550" dirty="0">
                 <a:solidFill>
                   <a:srgbClr val="17364A"/>
                 </a:solidFill>
@@ -13616,15 +14767,15 @@
                 <a:ea typeface="Aptos" pitchFamily="34" charset="-122"/>
                 <a:cs typeface="Aptos" pitchFamily="34" charset="-120"/>
               </a:rPr>
-              <a:t>Generative AI can draft, summarize, translate, classify, explain, and synthesize information, but its outputs require.</a:t>
-            </a:r>
-            <a:endParaRPr lang="en-US" sz="1250" dirty="0"/>
-          </a:p>
-        </p:txBody>
-      </p:sp>
-      <p:sp>
-        <p:nvSpPr>
-          <p:cNvPr id="14" name="Shape 12"/>
+              <a:t>Generative AI can draft, summarize, translate, classify, explain, and synthesize information, but its.</a:t>
+            </a:r>
+            <a:endParaRPr lang="en-US" sz="1550" dirty="0"/>
+          </a:p>
+        </p:txBody>
+      </p:sp>
+      <p:sp>
+        <p:nvSpPr>
+          <p:cNvPr id="15" name="Shape 13"/>
           <p:cNvSpPr/>
           <p:nvPr/>
         </p:nvSpPr>
@@ -13651,14 +14802,14 @@
       </p:sp>
       <p:sp>
         <p:nvSpPr>
-          <p:cNvPr id="15" name="Text 13"/>
+          <p:cNvPr id="16" name="Text 14"/>
           <p:cNvSpPr/>
           <p:nvPr/>
         </p:nvSpPr>
         <p:spPr>
           <a:xfrm>
             <a:off x="8074152" y="3666744"/>
-            <a:ext cx="2825496" cy="201168"/>
+            <a:ext cx="2825496" cy="256032"/>
           </a:xfrm>
           <a:prstGeom prst="rect">
             <a:avLst/>
@@ -13674,7 +14825,7 @@
               <a:buNone/>
             </a:pPr>
             <a:r>
-              <a:rPr lang="en-US" sz="950" b="1" dirty="0">
+              <a:rPr lang="en-US" sz="1300" b="1" dirty="0">
                 <a:solidFill>
                   <a:srgbClr val="0068B7"/>
                 </a:solidFill>
@@ -13684,20 +14835,20 @@
               </a:rPr>
               <a:t>Use this for</a:t>
             </a:r>
-            <a:endParaRPr lang="en-US" sz="950" dirty="0"/>
-          </a:p>
-        </p:txBody>
-      </p:sp>
-      <p:sp>
-        <p:nvSpPr>
-          <p:cNvPr id="16" name="Text 14"/>
-          <p:cNvSpPr/>
-          <p:nvPr/>
-        </p:nvSpPr>
-        <p:spPr>
-          <a:xfrm>
-            <a:off x="8074152" y="3959352"/>
-            <a:ext cx="2825496" cy="1170432"/>
+            <a:endParaRPr lang="en-US" sz="1300" dirty="0"/>
+          </a:p>
+        </p:txBody>
+      </p:sp>
+      <p:sp>
+        <p:nvSpPr>
+          <p:cNvPr id="17" name="Text 15"/>
+          <p:cNvSpPr/>
+          <p:nvPr/>
+        </p:nvSpPr>
+        <p:spPr>
+          <a:xfrm>
+            <a:off x="8074152" y="4023360"/>
+            <a:ext cx="2825496" cy="1097280"/>
           </a:xfrm>
           <a:prstGeom prst="rect">
             <a:avLst/>
@@ -13715,7 +14866,7 @@
               <a:buNone/>
             </a:pPr>
             <a:r>
-              <a:rPr lang="en-US" sz="1250" dirty="0">
+              <a:rPr lang="en-US" sz="1550" dirty="0">
                 <a:solidFill>
                   <a:srgbClr val="17364A"/>
                 </a:solidFill>
@@ -13725,7 +14876,7 @@
               </a:rPr>
               <a:t>Connect the concept to public health decisions, safeguards, documentation, or implementation work.</a:t>
             </a:r>
-            <a:endParaRPr lang="en-US" sz="1250" dirty="0"/>
+            <a:endParaRPr lang="en-US" sz="1550" dirty="0"/>
           </a:p>
         </p:txBody>
       </p:sp>
@@ -13922,7 +15073,7 @@
                 <a:ea typeface="Aptos" pitchFamily="34" charset="-122"/>
                 <a:cs typeface="Aptos" pitchFamily="34" charset="-120"/>
               </a:rPr>
-              <a:t>© Paula Soper</a:t>
+              <a:t>Â© Paula Soper</a:t>
             </a:r>
             <a:endParaRPr lang="en-US" sz="800" dirty="0"/>
           </a:p>
@@ -13930,7 +15081,46 @@
       </p:sp>
       <p:sp>
         <p:nvSpPr>
-          <p:cNvPr id="7" name="Shape 5"/>
+          <p:cNvPr id="7" name="Text 5"/>
+          <p:cNvSpPr/>
+          <p:nvPr/>
+        </p:nvSpPr>
+        <p:spPr>
+          <a:xfrm>
+            <a:off x="11137392" y="6510528"/>
+            <a:ext cx="411480" cy="201168"/>
+          </a:xfrm>
+          <a:prstGeom prst="rect">
+            <a:avLst/>
+          </a:prstGeom>
+          <a:noFill/>
+          <a:ln/>
+        </p:spPr>
+        <p:txBody>
+          <a:bodyPr wrap="square" lIns="0" tIns="0" rIns="0" bIns="0" rtlCol="0" anchor="ctr"/>
+          <a:lstStyle/>
+          <a:p>
+            <a:pPr algn="r" indent="0" marL="0">
+              <a:buNone/>
+            </a:pPr>
+            <a:r>
+              <a:rPr lang="en-US" sz="900" dirty="0">
+                <a:solidFill>
+                  <a:srgbClr val="5F7181"/>
+                </a:solidFill>
+                <a:latin typeface="Aptos" pitchFamily="34" charset="0"/>
+                <a:ea typeface="Aptos" pitchFamily="34" charset="-122"/>
+                <a:cs typeface="Aptos" pitchFamily="34" charset="-120"/>
+              </a:rPr>
+              <a:t>8</a:t>
+            </a:r>
+            <a:endParaRPr lang="en-US" sz="900" dirty="0"/>
+          </a:p>
+        </p:txBody>
+      </p:sp>
+      <p:sp>
+        <p:nvSpPr>
+          <p:cNvPr id="8" name="Shape 6"/>
           <p:cNvSpPr/>
           <p:nvPr/>
         </p:nvSpPr>
@@ -13955,7 +15145,7 @@
       </p:sp>
       <p:sp>
         <p:nvSpPr>
-          <p:cNvPr id="8" name="Text 6"/>
+          <p:cNvPr id="9" name="Text 7"/>
           <p:cNvSpPr/>
           <p:nvPr/>
         </p:nvSpPr>
@@ -13994,14 +15184,14 @@
       </p:sp>
       <p:sp>
         <p:nvSpPr>
-          <p:cNvPr id="9" name="Text 7"/>
+          <p:cNvPr id="10" name="Text 8"/>
           <p:cNvSpPr/>
           <p:nvPr/>
         </p:nvSpPr>
         <p:spPr>
           <a:xfrm>
             <a:off x="640080" y="621792"/>
-            <a:ext cx="10881360" cy="566928"/>
+            <a:ext cx="10881360" cy="713232"/>
           </a:xfrm>
           <a:prstGeom prst="rect">
             <a:avLst/>
@@ -14019,7 +15209,7 @@
               <a:buNone/>
             </a:pPr>
             <a:r>
-              <a:rPr lang="en-US" sz="2700" b="1" dirty="0">
+              <a:rPr lang="en-US" sz="3400" b="1" dirty="0">
                 <a:solidFill>
                   <a:srgbClr val="003A63"/>
                 </a:solidFill>
@@ -14029,20 +15219,20 @@
               </a:rPr>
               <a:t>Why This Topic Matters for Public Health AI</a:t>
             </a:r>
-            <a:endParaRPr lang="en-US" sz="2700" dirty="0"/>
-          </a:p>
-        </p:txBody>
-      </p:sp>
-      <p:sp>
-        <p:nvSpPr>
-          <p:cNvPr id="10" name="Text 8"/>
-          <p:cNvSpPr/>
-          <p:nvPr/>
-        </p:nvSpPr>
-        <p:spPr>
-          <a:xfrm>
-            <a:off x="868680" y="1417320"/>
-            <a:ext cx="6675120" cy="4434840"/>
+            <a:endParaRPr lang="en-US" sz="3400" dirty="0"/>
+          </a:p>
+        </p:txBody>
+      </p:sp>
+      <p:sp>
+        <p:nvSpPr>
+          <p:cNvPr id="11" name="Text 9"/>
+          <p:cNvSpPr/>
+          <p:nvPr/>
+        </p:nvSpPr>
+        <p:spPr>
+          <a:xfrm>
+            <a:off x="868680" y="1508760"/>
+            <a:ext cx="6537960" cy="4160520"/>
           </a:xfrm>
           <a:prstGeom prst="rect">
             <a:avLst/>
@@ -14057,7 +15247,7 @@
           <a:lstStyle/>
           <a:p>
             <a:r>
-              <a:rPr lang="en-US" sz="1700" dirty="0">
+              <a:rPr lang="en-US" sz="2100" dirty="0">
                 <a:solidFill>
                   <a:srgbClr val="17364A"/>
                 </a:solidFill>
@@ -14067,11 +15257,11 @@
               </a:rPr>
               <a:t>Generative AI matters for public health because it can reduce burden in text-heavy workflows.</a:t>
             </a:r>
-            <a:endParaRPr lang="en-US" sz="1700" dirty="0"/>
-          </a:p>
-          <a:p>
-            <a:r>
-              <a:rPr lang="en-US" sz="1700" dirty="0">
+            <a:endParaRPr lang="en-US" sz="2100" dirty="0"/>
+          </a:p>
+          <a:p>
+            <a:r>
+              <a:rPr lang="en-US" sz="2100" dirty="0">
                 <a:solidFill>
                   <a:srgbClr val="17364A"/>
                 </a:solidFill>
@@ -14079,13 +15269,13 @@
                 <a:ea typeface="Aptos" pitchFamily="34" charset="-122"/>
                 <a:cs typeface="Aptos" pitchFamily="34" charset="-120"/>
               </a:rPr>
-              <a:t>Staff may use it to summarize guidance, draft meeting notes, simplify technical language, translate or adapt messages,.</a:t>
-            </a:r>
-            <a:endParaRPr lang="en-US" sz="1700" dirty="0"/>
-          </a:p>
-          <a:p>
-            <a:r>
-              <a:rPr lang="en-US" sz="1700" dirty="0">
+              <a:t>Staff may use it to summarize guidance, draft meeting notes, simplify technical language, translate or.</a:t>
+            </a:r>
+            <a:endParaRPr lang="en-US" sz="2100" dirty="0"/>
+          </a:p>
+          <a:p>
+            <a:r>
+              <a:rPr lang="en-US" sz="2100" dirty="0">
                 <a:solidFill>
                   <a:srgbClr val="17364A"/>
                 </a:solidFill>
@@ -14095,27 +15285,13 @@
               </a:rPr>
               <a:t>These uses can be valuable when they save time and improve clarity.</a:t>
             </a:r>
-            <a:endParaRPr lang="en-US" sz="1700" dirty="0"/>
-          </a:p>
-          <a:p>
-            <a:r>
-              <a:rPr lang="en-US" sz="1700" dirty="0">
-                <a:solidFill>
-                  <a:srgbClr val="17364A"/>
-                </a:solidFill>
-                <a:latin typeface="Aptos" pitchFamily="34" charset="0"/>
-                <a:ea typeface="Aptos" pitchFamily="34" charset="-122"/>
-                <a:cs typeface="Aptos" pitchFamily="34" charset="-120"/>
-              </a:rPr>
-              <a:t>The same capabilities create risk.</a:t>
-            </a:r>
-            <a:endParaRPr lang="en-US" sz="1700" dirty="0"/>
-          </a:p>
-        </p:txBody>
-      </p:sp>
-      <p:sp>
-        <p:nvSpPr>
-          <p:cNvPr id="11" name="Shape 9"/>
+            <a:endParaRPr lang="en-US" sz="2100" dirty="0"/>
+          </a:p>
+        </p:txBody>
+      </p:sp>
+      <p:sp>
+        <p:nvSpPr>
+          <p:cNvPr id="12" name="Shape 10"/>
           <p:cNvSpPr/>
           <p:nvPr/>
         </p:nvSpPr>
@@ -14142,14 +15318,14 @@
       </p:sp>
       <p:sp>
         <p:nvSpPr>
-          <p:cNvPr id="12" name="Text 10"/>
+          <p:cNvPr id="13" name="Text 11"/>
           <p:cNvSpPr/>
           <p:nvPr/>
         </p:nvSpPr>
         <p:spPr>
           <a:xfrm>
             <a:off x="8074152" y="1563624"/>
-            <a:ext cx="2825496" cy="201168"/>
+            <a:ext cx="2825496" cy="256032"/>
           </a:xfrm>
           <a:prstGeom prst="rect">
             <a:avLst/>
@@ -14165,7 +15341,7 @@
               <a:buNone/>
             </a:pPr>
             <a:r>
-              <a:rPr lang="en-US" sz="950" b="1" dirty="0">
+              <a:rPr lang="en-US" sz="1300" b="1" dirty="0">
                 <a:solidFill>
                   <a:srgbClr val="0068B7"/>
                 </a:solidFill>
@@ -14175,20 +15351,20 @@
               </a:rPr>
               <a:t>Key idea</a:t>
             </a:r>
-            <a:endParaRPr lang="en-US" sz="950" dirty="0"/>
-          </a:p>
-        </p:txBody>
-      </p:sp>
-      <p:sp>
-        <p:nvSpPr>
-          <p:cNvPr id="13" name="Text 11"/>
-          <p:cNvSpPr/>
-          <p:nvPr/>
-        </p:nvSpPr>
-        <p:spPr>
-          <a:xfrm>
-            <a:off x="8074152" y="1856232"/>
-            <a:ext cx="2825496" cy="1261872"/>
+            <a:endParaRPr lang="en-US" sz="1300" dirty="0"/>
+          </a:p>
+        </p:txBody>
+      </p:sp>
+      <p:sp>
+        <p:nvSpPr>
+          <p:cNvPr id="14" name="Text 12"/>
+          <p:cNvSpPr/>
+          <p:nvPr/>
+        </p:nvSpPr>
+        <p:spPr>
+          <a:xfrm>
+            <a:off x="8074152" y="1920240"/>
+            <a:ext cx="2825496" cy="1188720"/>
           </a:xfrm>
           <a:prstGeom prst="rect">
             <a:avLst/>
@@ -14206,7 +15382,7 @@
               <a:buNone/>
             </a:pPr>
             <a:r>
-              <a:rPr lang="en-US" sz="1250" dirty="0">
+              <a:rPr lang="en-US" sz="1550" dirty="0">
                 <a:solidFill>
                   <a:srgbClr val="17364A"/>
                 </a:solidFill>
@@ -14216,13 +15392,13 @@
               </a:rPr>
               <a:t>Generative AI matters for public health because it can reduce burden in text-heavy workflows.</a:t>
             </a:r>
-            <a:endParaRPr lang="en-US" sz="1250" dirty="0"/>
-          </a:p>
-        </p:txBody>
-      </p:sp>
-      <p:sp>
-        <p:nvSpPr>
-          <p:cNvPr id="14" name="Shape 12"/>
+            <a:endParaRPr lang="en-US" sz="1550" dirty="0"/>
+          </a:p>
+        </p:txBody>
+      </p:sp>
+      <p:sp>
+        <p:nvSpPr>
+          <p:cNvPr id="15" name="Shape 13"/>
           <p:cNvSpPr/>
           <p:nvPr/>
         </p:nvSpPr>
@@ -14249,14 +15425,14 @@
       </p:sp>
       <p:sp>
         <p:nvSpPr>
-          <p:cNvPr id="15" name="Text 13"/>
+          <p:cNvPr id="16" name="Text 14"/>
           <p:cNvSpPr/>
           <p:nvPr/>
         </p:nvSpPr>
         <p:spPr>
           <a:xfrm>
             <a:off x="8074152" y="3666744"/>
-            <a:ext cx="2825496" cy="201168"/>
+            <a:ext cx="2825496" cy="256032"/>
           </a:xfrm>
           <a:prstGeom prst="rect">
             <a:avLst/>
@@ -14272,7 +15448,7 @@
               <a:buNone/>
             </a:pPr>
             <a:r>
-              <a:rPr lang="en-US" sz="950" b="1" dirty="0">
+              <a:rPr lang="en-US" sz="1300" b="1" dirty="0">
                 <a:solidFill>
                   <a:srgbClr val="0068B7"/>
                 </a:solidFill>
@@ -14282,20 +15458,20 @@
               </a:rPr>
               <a:t>Use this for</a:t>
             </a:r>
-            <a:endParaRPr lang="en-US" sz="950" dirty="0"/>
-          </a:p>
-        </p:txBody>
-      </p:sp>
-      <p:sp>
-        <p:nvSpPr>
-          <p:cNvPr id="16" name="Text 14"/>
-          <p:cNvSpPr/>
-          <p:nvPr/>
-        </p:nvSpPr>
-        <p:spPr>
-          <a:xfrm>
-            <a:off x="8074152" y="3959352"/>
-            <a:ext cx="2825496" cy="1170432"/>
+            <a:endParaRPr lang="en-US" sz="1300" dirty="0"/>
+          </a:p>
+        </p:txBody>
+      </p:sp>
+      <p:sp>
+        <p:nvSpPr>
+          <p:cNvPr id="17" name="Text 15"/>
+          <p:cNvSpPr/>
+          <p:nvPr/>
+        </p:nvSpPr>
+        <p:spPr>
+          <a:xfrm>
+            <a:off x="8074152" y="4023360"/>
+            <a:ext cx="2825496" cy="1097280"/>
           </a:xfrm>
           <a:prstGeom prst="rect">
             <a:avLst/>
@@ -14313,7 +15489,7 @@
               <a:buNone/>
             </a:pPr>
             <a:r>
-              <a:rPr lang="en-US" sz="1250" dirty="0">
+              <a:rPr lang="en-US" sz="1550" dirty="0">
                 <a:solidFill>
                   <a:srgbClr val="17364A"/>
                 </a:solidFill>
@@ -14323,7 +15499,7 @@
               </a:rPr>
               <a:t>Connect the concept to public health decisions, safeguards, documentation, or implementation work.</a:t>
             </a:r>
-            <a:endParaRPr lang="en-US" sz="1250" dirty="0"/>
+            <a:endParaRPr lang="en-US" sz="1550" dirty="0"/>
           </a:p>
         </p:txBody>
       </p:sp>
@@ -14520,7 +15696,7 @@
                 <a:ea typeface="Aptos" pitchFamily="34" charset="-122"/>
                 <a:cs typeface="Aptos" pitchFamily="34" charset="-120"/>
               </a:rPr>
-              <a:t>© Paula Soper</a:t>
+              <a:t>Â© Paula Soper</a:t>
             </a:r>
             <a:endParaRPr lang="en-US" sz="800" dirty="0"/>
           </a:p>
@@ -14528,7 +15704,46 @@
       </p:sp>
       <p:sp>
         <p:nvSpPr>
-          <p:cNvPr id="7" name="Shape 5"/>
+          <p:cNvPr id="7" name="Text 5"/>
+          <p:cNvSpPr/>
+          <p:nvPr/>
+        </p:nvSpPr>
+        <p:spPr>
+          <a:xfrm>
+            <a:off x="11137392" y="6510528"/>
+            <a:ext cx="411480" cy="201168"/>
+          </a:xfrm>
+          <a:prstGeom prst="rect">
+            <a:avLst/>
+          </a:prstGeom>
+          <a:noFill/>
+          <a:ln/>
+        </p:spPr>
+        <p:txBody>
+          <a:bodyPr wrap="square" lIns="0" tIns="0" rIns="0" bIns="0" rtlCol="0" anchor="ctr"/>
+          <a:lstStyle/>
+          <a:p>
+            <a:pPr algn="r" indent="0" marL="0">
+              <a:buNone/>
+            </a:pPr>
+            <a:r>
+              <a:rPr lang="en-US" sz="900" dirty="0">
+                <a:solidFill>
+                  <a:srgbClr val="5F7181"/>
+                </a:solidFill>
+                <a:latin typeface="Aptos" pitchFamily="34" charset="0"/>
+                <a:ea typeface="Aptos" pitchFamily="34" charset="-122"/>
+                <a:cs typeface="Aptos" pitchFamily="34" charset="-120"/>
+              </a:rPr>
+              <a:t>9</a:t>
+            </a:r>
+            <a:endParaRPr lang="en-US" sz="900" dirty="0"/>
+          </a:p>
+        </p:txBody>
+      </p:sp>
+      <p:sp>
+        <p:nvSpPr>
+          <p:cNvPr id="8" name="Shape 6"/>
           <p:cNvSpPr/>
           <p:nvPr/>
         </p:nvSpPr>
@@ -14553,7 +15768,7 @@
       </p:sp>
       <p:sp>
         <p:nvSpPr>
-          <p:cNvPr id="8" name="Text 6"/>
+          <p:cNvPr id="9" name="Text 7"/>
           <p:cNvSpPr/>
           <p:nvPr/>
         </p:nvSpPr>
@@ -14592,14 +15807,14 @@
       </p:sp>
       <p:sp>
         <p:nvSpPr>
-          <p:cNvPr id="9" name="Text 7"/>
+          <p:cNvPr id="10" name="Text 8"/>
           <p:cNvSpPr/>
           <p:nvPr/>
         </p:nvSpPr>
         <p:spPr>
           <a:xfrm>
             <a:off x="640080" y="621792"/>
-            <a:ext cx="10881360" cy="566928"/>
+            <a:ext cx="10881360" cy="713232"/>
           </a:xfrm>
           <a:prstGeom prst="rect">
             <a:avLst/>
@@ -14617,7 +15832,7 @@
               <a:buNone/>
             </a:pPr>
             <a:r>
-              <a:rPr lang="en-US" sz="2700" b="1" dirty="0">
+              <a:rPr lang="en-US" sz="3400" b="1" dirty="0">
                 <a:solidFill>
                   <a:srgbClr val="003A63"/>
                 </a:solidFill>
@@ -14627,20 +15842,20 @@
               </a:rPr>
               <a:t>Public Health Example</a:t>
             </a:r>
-            <a:endParaRPr lang="en-US" sz="2700" dirty="0"/>
-          </a:p>
-        </p:txBody>
-      </p:sp>
-      <p:sp>
-        <p:nvSpPr>
-          <p:cNvPr id="10" name="Text 8"/>
-          <p:cNvSpPr/>
-          <p:nvPr/>
-        </p:nvSpPr>
-        <p:spPr>
-          <a:xfrm>
-            <a:off x="868680" y="1417320"/>
-            <a:ext cx="6675120" cy="4434840"/>
+            <a:endParaRPr lang="en-US" sz="3400" dirty="0"/>
+          </a:p>
+        </p:txBody>
+      </p:sp>
+      <p:sp>
+        <p:nvSpPr>
+          <p:cNvPr id="11" name="Text 9"/>
+          <p:cNvSpPr/>
+          <p:nvPr/>
+        </p:nvSpPr>
+        <p:spPr>
+          <a:xfrm>
+            <a:off x="868680" y="1508760"/>
+            <a:ext cx="6537960" cy="4160520"/>
           </a:xfrm>
           <a:prstGeom prst="rect">
             <a:avLst/>
@@ -14655,7 +15870,7 @@
           <a:lstStyle/>
           <a:p>
             <a:r>
-              <a:rPr lang="en-US" sz="1700" dirty="0">
+              <a:rPr lang="en-US" sz="2100" dirty="0">
                 <a:solidFill>
                   <a:srgbClr val="17364A"/>
                 </a:solidFill>
@@ -14663,13 +15878,13 @@
                 <a:ea typeface="Aptos" pitchFamily="34" charset="-122"/>
                 <a:cs typeface="Aptos" pitchFamily="34" charset="-120"/>
               </a:rPr>
-              <a:t>A communications team may use generative AI to draft a plain-language public message about a local respiratory illness.</a:t>
-            </a:r>
-            <a:endParaRPr lang="en-US" sz="1700" dirty="0"/>
-          </a:p>
-          <a:p>
-            <a:r>
-              <a:rPr lang="en-US" sz="1700" dirty="0">
+              <a:t>A communications team may use generative AI to draft a plain-language public message about a local.</a:t>
+            </a:r>
+            <a:endParaRPr lang="en-US" sz="2100" dirty="0"/>
+          </a:p>
+          <a:p>
+            <a:r>
+              <a:rPr lang="en-US" sz="2100" dirty="0">
                 <a:solidFill>
                   <a:srgbClr val="17364A"/>
                 </a:solidFill>
@@ -14677,13 +15892,13 @@
                 <a:ea typeface="Aptos" pitchFamily="34" charset="-122"/>
                 <a:cs typeface="Aptos" pitchFamily="34" charset="-120"/>
               </a:rPr>
-              <a:t>The draft may be clear and readable, but reviewers must check whether the numbers are correct, whether the recommendations.</a:t>
-            </a:r>
-            <a:endParaRPr lang="en-US" sz="1700" dirty="0"/>
-          </a:p>
-          <a:p>
-            <a:r>
-              <a:rPr lang="en-US" sz="1700" dirty="0">
+              <a:t>The draft may be clear and readable, but reviewers must check whether the numbers are correct, whether.</a:t>
+            </a:r>
+            <a:endParaRPr lang="en-US" sz="2100" dirty="0"/>
+          </a:p>
+          <a:p>
+            <a:r>
+              <a:rPr lang="en-US" sz="2100" dirty="0">
                 <a:solidFill>
                   <a:srgbClr val="17364A"/>
                 </a:solidFill>
@@ -14693,27 +15908,13 @@
               </a:rPr>
               <a:t>An epidemiology team may use generative AI to summarize case investigation notes for internal review.</a:t>
             </a:r>
-            <a:endParaRPr lang="en-US" sz="1700" dirty="0"/>
-          </a:p>
-          <a:p>
-            <a:r>
-              <a:rPr lang="en-US" sz="1700" dirty="0">
-                <a:solidFill>
-                  <a:srgbClr val="17364A"/>
-                </a:solidFill>
-                <a:latin typeface="Aptos" pitchFamily="34" charset="0"/>
-                <a:ea typeface="Aptos" pitchFamily="34" charset="-122"/>
-                <a:cs typeface="Aptos" pitchFamily="34" charset="-120"/>
-              </a:rPr>
-              <a:t>The summary must be checked against source notes because a missed exposure, incorrect date, or invented symptom could.</a:t>
-            </a:r>
-            <a:endParaRPr lang="en-US" sz="1700" dirty="0"/>
-          </a:p>
-        </p:txBody>
-      </p:sp>
-      <p:sp>
-        <p:nvSpPr>
-          <p:cNvPr id="11" name="Shape 9"/>
+            <a:endParaRPr lang="en-US" sz="2100" dirty="0"/>
+          </a:p>
+        </p:txBody>
+      </p:sp>
+      <p:sp>
+        <p:nvSpPr>
+          <p:cNvPr id="12" name="Shape 10"/>
           <p:cNvSpPr/>
           <p:nvPr/>
         </p:nvSpPr>
@@ -14740,14 +15941,14 @@
       </p:sp>
       <p:sp>
         <p:nvSpPr>
-          <p:cNvPr id="12" name="Text 10"/>
+          <p:cNvPr id="13" name="Text 11"/>
           <p:cNvSpPr/>
           <p:nvPr/>
         </p:nvSpPr>
         <p:spPr>
           <a:xfrm>
             <a:off x="8074152" y="1563624"/>
-            <a:ext cx="2825496" cy="201168"/>
+            <a:ext cx="2825496" cy="256032"/>
           </a:xfrm>
           <a:prstGeom prst="rect">
             <a:avLst/>
@@ -14763,7 +15964,7 @@
               <a:buNone/>
             </a:pPr>
             <a:r>
-              <a:rPr lang="en-US" sz="950" b="1" dirty="0">
+              <a:rPr lang="en-US" sz="1300" b="1" dirty="0">
                 <a:solidFill>
                   <a:srgbClr val="0068B7"/>
                 </a:solidFill>
@@ -14773,20 +15974,20 @@
               </a:rPr>
               <a:t>Key idea</a:t>
             </a:r>
-            <a:endParaRPr lang="en-US" sz="950" dirty="0"/>
-          </a:p>
-        </p:txBody>
-      </p:sp>
-      <p:sp>
-        <p:nvSpPr>
-          <p:cNvPr id="13" name="Text 11"/>
-          <p:cNvSpPr/>
-          <p:nvPr/>
-        </p:nvSpPr>
-        <p:spPr>
-          <a:xfrm>
-            <a:off x="8074152" y="1856232"/>
-            <a:ext cx="2825496" cy="1261872"/>
+            <a:endParaRPr lang="en-US" sz="1300" dirty="0"/>
+          </a:p>
+        </p:txBody>
+      </p:sp>
+      <p:sp>
+        <p:nvSpPr>
+          <p:cNvPr id="14" name="Text 12"/>
+          <p:cNvSpPr/>
+          <p:nvPr/>
+        </p:nvSpPr>
+        <p:spPr>
+          <a:xfrm>
+            <a:off x="8074152" y="1920240"/>
+            <a:ext cx="2825496" cy="1188720"/>
           </a:xfrm>
           <a:prstGeom prst="rect">
             <a:avLst/>
@@ -14804,7 +16005,7 @@
               <a:buNone/>
             </a:pPr>
             <a:r>
-              <a:rPr lang="en-US" sz="1250" dirty="0">
+              <a:rPr lang="en-US" sz="1550" dirty="0">
                 <a:solidFill>
                   <a:srgbClr val="17364A"/>
                 </a:solidFill>
@@ -14812,15 +16013,15 @@
                 <a:ea typeface="Aptos" pitchFamily="34" charset="-122"/>
                 <a:cs typeface="Aptos" pitchFamily="34" charset="-120"/>
               </a:rPr>
-              <a:t>A communications team may use generative AI to draft a plain-language public message about a local respiratory illness.</a:t>
-            </a:r>
-            <a:endParaRPr lang="en-US" sz="1250" dirty="0"/>
-          </a:p>
-        </p:txBody>
-      </p:sp>
-      <p:sp>
-        <p:nvSpPr>
-          <p:cNvPr id="14" name="Shape 12"/>
+              <a:t>A communications team may use generative AI to draft a plain-language public message about a local.</a:t>
+            </a:r>
+            <a:endParaRPr lang="en-US" sz="1550" dirty="0"/>
+          </a:p>
+        </p:txBody>
+      </p:sp>
+      <p:sp>
+        <p:nvSpPr>
+          <p:cNvPr id="15" name="Shape 13"/>
           <p:cNvSpPr/>
           <p:nvPr/>
         </p:nvSpPr>
@@ -14847,14 +16048,14 @@
       </p:sp>
       <p:sp>
         <p:nvSpPr>
-          <p:cNvPr id="15" name="Text 13"/>
+          <p:cNvPr id="16" name="Text 14"/>
           <p:cNvSpPr/>
           <p:nvPr/>
         </p:nvSpPr>
         <p:spPr>
           <a:xfrm>
             <a:off x="8074152" y="3666744"/>
-            <a:ext cx="2825496" cy="201168"/>
+            <a:ext cx="2825496" cy="256032"/>
           </a:xfrm>
           <a:prstGeom prst="rect">
             <a:avLst/>
@@ -14870,7 +16071,7 @@
               <a:buNone/>
             </a:pPr>
             <a:r>
-              <a:rPr lang="en-US" sz="950" b="1" dirty="0">
+              <a:rPr lang="en-US" sz="1300" b="1" dirty="0">
                 <a:solidFill>
                   <a:srgbClr val="0068B7"/>
                 </a:solidFill>
@@ -14880,20 +16081,20 @@
               </a:rPr>
               <a:t>Use this for</a:t>
             </a:r>
-            <a:endParaRPr lang="en-US" sz="950" dirty="0"/>
-          </a:p>
-        </p:txBody>
-      </p:sp>
-      <p:sp>
-        <p:nvSpPr>
-          <p:cNvPr id="16" name="Text 14"/>
-          <p:cNvSpPr/>
-          <p:nvPr/>
-        </p:nvSpPr>
-        <p:spPr>
-          <a:xfrm>
-            <a:off x="8074152" y="3959352"/>
-            <a:ext cx="2825496" cy="1170432"/>
+            <a:endParaRPr lang="en-US" sz="1300" dirty="0"/>
+          </a:p>
+        </p:txBody>
+      </p:sp>
+      <p:sp>
+        <p:nvSpPr>
+          <p:cNvPr id="17" name="Text 15"/>
+          <p:cNvSpPr/>
+          <p:nvPr/>
+        </p:nvSpPr>
+        <p:spPr>
+          <a:xfrm>
+            <a:off x="8074152" y="4023360"/>
+            <a:ext cx="2825496" cy="1097280"/>
           </a:xfrm>
           <a:prstGeom prst="rect">
             <a:avLst/>
@@ -14911,7 +16112,7 @@
               <a:buNone/>
             </a:pPr>
             <a:r>
-              <a:rPr lang="en-US" sz="1250" dirty="0">
+              <a:rPr lang="en-US" sz="1550" dirty="0">
                 <a:solidFill>
                   <a:srgbClr val="17364A"/>
                 </a:solidFill>
@@ -14921,7 +16122,7 @@
               </a:rPr>
               <a:t>Connect the concept to public health decisions, safeguards, documentation, or implementation work.</a:t>
             </a:r>
-            <a:endParaRPr lang="en-US" sz="1250" dirty="0"/>
+            <a:endParaRPr lang="en-US" sz="1550" dirty="0"/>
           </a:p>
         </p:txBody>
       </p:sp>
